--- a/lecture_3/Lecture_3.pptx
+++ b/lecture_3/Lecture_3.pptx
@@ -134,34 +134,327 @@
 <file path=ppt/changesInfos/changesInfo1.xml><?xml version="1.0" encoding="utf-8"?>
 <pc:chgInfo xmlns:a="http://schemas.openxmlformats.org/drawingml/2006/main" xmlns:r="http://schemas.openxmlformats.org/officeDocument/2006/relationships" xmlns:ac="http://schemas.microsoft.com/office/drawing/2013/main/command" xmlns:pc="http://schemas.microsoft.com/office/powerpoint/2013/main/command">
   <pc:docChgLst>
-    <pc:chgData name="William Estes" userId="a88fcdbc31b6f594" providerId="Windows Live" clId="Web-{031C1E02-F537-4B69-F31C-E9378A6E06AC}"/>
-    <pc:docChg chg="addSld delSld modSld sldOrd">
-      <pc:chgData name="William Estes" userId="a88fcdbc31b6f594" providerId="Windows Live" clId="Web-{031C1E02-F537-4B69-F31C-E9378A6E06AC}" dt="2020-09-07T22:31:27.349" v="1780" actId="20577"/>
+    <pc:chgData name="William Estes" userId="a88fcdbc31b6f594" providerId="Windows Live" clId="Web-{012D8266-D906-4638-51F0-D3051500BA92}"/>
+    <pc:docChg chg="modSld">
+      <pc:chgData name="William Estes" userId="a88fcdbc31b6f594" providerId="Windows Live" clId="Web-{012D8266-D906-4638-51F0-D3051500BA92}" dt="2020-09-11T14:49:11.120" v="13" actId="20577"/>
       <pc:docMkLst>
         <pc:docMk/>
       </pc:docMkLst>
-      <pc:sldChg chg="del">
-        <pc:chgData name="William Estes" userId="a88fcdbc31b6f594" providerId="Windows Live" clId="Web-{031C1E02-F537-4B69-F31C-E9378A6E06AC}" dt="2020-09-07T21:37:53.086" v="1371"/>
+      <pc:sldChg chg="modSp">
+        <pc:chgData name="William Estes" userId="a88fcdbc31b6f594" providerId="Windows Live" clId="Web-{012D8266-D906-4638-51F0-D3051500BA92}" dt="2020-09-11T14:49:01.464" v="6" actId="20577"/>
+        <pc:sldMkLst>
+          <pc:docMk/>
+          <pc:sldMk cId="746972265" sldId="307"/>
+        </pc:sldMkLst>
+        <pc:spChg chg="mod">
+          <ac:chgData name="William Estes" userId="a88fcdbc31b6f594" providerId="Windows Live" clId="Web-{012D8266-D906-4638-51F0-D3051500BA92}" dt="2020-09-11T14:49:01.464" v="6" actId="20577"/>
+          <ac:spMkLst>
+            <pc:docMk/>
+            <pc:sldMk cId="746972265" sldId="307"/>
+            <ac:spMk id="4" creationId="{5C0E649D-E3FD-41FB-BA87-37C62725C740}"/>
+          </ac:spMkLst>
+        </pc:spChg>
+      </pc:sldChg>
+      <pc:sldChg chg="modSp">
+        <pc:chgData name="William Estes" userId="a88fcdbc31b6f594" providerId="Windows Live" clId="Web-{012D8266-D906-4638-51F0-D3051500BA92}" dt="2020-09-11T14:49:06.151" v="10" actId="20577"/>
+        <pc:sldMkLst>
+          <pc:docMk/>
+          <pc:sldMk cId="104406143" sldId="315"/>
+        </pc:sldMkLst>
+        <pc:spChg chg="mod">
+          <ac:chgData name="William Estes" userId="a88fcdbc31b6f594" providerId="Windows Live" clId="Web-{012D8266-D906-4638-51F0-D3051500BA92}" dt="2020-09-11T14:49:06.151" v="10" actId="20577"/>
+          <ac:spMkLst>
+            <pc:docMk/>
+            <pc:sldMk cId="104406143" sldId="315"/>
+            <ac:spMk id="4" creationId="{5C0E649D-E3FD-41FB-BA87-37C62725C740}"/>
+          </ac:spMkLst>
+        </pc:spChg>
+      </pc:sldChg>
+    </pc:docChg>
+  </pc:docChgLst>
+  <pc:docChgLst>
+    <pc:chgData name="William Estes" userId="a88fcdbc31b6f594" providerId="Windows Live" clId="Web-{4F3B90B2-B3CE-4814-9FD2-338761465FCC}"/>
+    <pc:docChg chg="modSld">
+      <pc:chgData name="William Estes" userId="a88fcdbc31b6f594" providerId="Windows Live" clId="Web-{4F3B90B2-B3CE-4814-9FD2-338761465FCC}" dt="2020-09-15T00:25:07.854" v="41" actId="1076"/>
+      <pc:docMkLst>
+        <pc:docMk/>
+      </pc:docMkLst>
+      <pc:sldChg chg="modSp">
+        <pc:chgData name="William Estes" userId="a88fcdbc31b6f594" providerId="Windows Live" clId="Web-{4F3B90B2-B3CE-4814-9FD2-338761465FCC}" dt="2020-09-15T00:17:05.111" v="24" actId="1076"/>
+        <pc:sldMkLst>
+          <pc:docMk/>
+          <pc:sldMk cId="3007801671" sldId="291"/>
+        </pc:sldMkLst>
+        <pc:spChg chg="mod">
+          <ac:chgData name="William Estes" userId="a88fcdbc31b6f594" providerId="Windows Live" clId="Web-{4F3B90B2-B3CE-4814-9FD2-338761465FCC}" dt="2020-09-15T00:17:05.111" v="24" actId="1076"/>
+          <ac:spMkLst>
+            <pc:docMk/>
+            <pc:sldMk cId="3007801671" sldId="291"/>
+            <ac:spMk id="12" creationId="{CF97C5AB-99C6-437C-B2DB-5A3F7C1729C7}"/>
+          </ac:spMkLst>
+        </pc:spChg>
+      </pc:sldChg>
+      <pc:sldChg chg="modSp">
+        <pc:chgData name="William Estes" userId="a88fcdbc31b6f594" providerId="Windows Live" clId="Web-{4F3B90B2-B3CE-4814-9FD2-338761465FCC}" dt="2020-09-15T00:18:07.048" v="36" actId="1076"/>
+        <pc:sldMkLst>
+          <pc:docMk/>
+          <pc:sldMk cId="1031257587" sldId="292"/>
+        </pc:sldMkLst>
+        <pc:spChg chg="mod">
+          <ac:chgData name="William Estes" userId="a88fcdbc31b6f594" providerId="Windows Live" clId="Web-{4F3B90B2-B3CE-4814-9FD2-338761465FCC}" dt="2020-09-15T00:18:07.016" v="31" actId="1076"/>
+          <ac:spMkLst>
+            <pc:docMk/>
+            <pc:sldMk cId="1031257587" sldId="292"/>
+            <ac:spMk id="7" creationId="{81FEAAF1-55EF-429A-832F-657DD1B08A00}"/>
+          </ac:spMkLst>
+        </pc:spChg>
+        <pc:spChg chg="mod">
+          <ac:chgData name="William Estes" userId="a88fcdbc31b6f594" providerId="Windows Live" clId="Web-{4F3B90B2-B3CE-4814-9FD2-338761465FCC}" dt="2020-09-15T00:18:07.016" v="32" actId="1076"/>
+          <ac:spMkLst>
+            <pc:docMk/>
+            <pc:sldMk cId="1031257587" sldId="292"/>
+            <ac:spMk id="10" creationId="{A6C69913-6E66-4EF9-912E-4787D37F112A}"/>
+          </ac:spMkLst>
+        </pc:spChg>
+        <pc:spChg chg="mod">
+          <ac:chgData name="William Estes" userId="a88fcdbc31b6f594" providerId="Windows Live" clId="Web-{4F3B90B2-B3CE-4814-9FD2-338761465FCC}" dt="2020-09-15T00:18:07.032" v="33" actId="1076"/>
+          <ac:spMkLst>
+            <pc:docMk/>
+            <pc:sldMk cId="1031257587" sldId="292"/>
+            <ac:spMk id="13" creationId="{FA79162F-1F9C-4BB6-9C39-96C8B58E86C3}"/>
+          </ac:spMkLst>
+        </pc:spChg>
+        <pc:spChg chg="mod">
+          <ac:chgData name="William Estes" userId="a88fcdbc31b6f594" providerId="Windows Live" clId="Web-{4F3B90B2-B3CE-4814-9FD2-338761465FCC}" dt="2020-09-15T00:18:07.032" v="34" actId="1076"/>
+          <ac:spMkLst>
+            <pc:docMk/>
+            <pc:sldMk cId="1031257587" sldId="292"/>
+            <ac:spMk id="14" creationId="{BC68A978-56D8-4B49-B046-44ACD0A585A4}"/>
+          </ac:spMkLst>
+        </pc:spChg>
+        <pc:spChg chg="mod">
+          <ac:chgData name="William Estes" userId="a88fcdbc31b6f594" providerId="Windows Live" clId="Web-{4F3B90B2-B3CE-4814-9FD2-338761465FCC}" dt="2020-09-15T00:18:07.032" v="35" actId="1076"/>
+          <ac:spMkLst>
+            <pc:docMk/>
+            <pc:sldMk cId="1031257587" sldId="292"/>
+            <ac:spMk id="15" creationId="{7F19F82B-0D64-4D93-8D94-101BBFB46765}"/>
+          </ac:spMkLst>
+        </pc:spChg>
+        <pc:spChg chg="mod">
+          <ac:chgData name="William Estes" userId="a88fcdbc31b6f594" providerId="Windows Live" clId="Web-{4F3B90B2-B3CE-4814-9FD2-338761465FCC}" dt="2020-09-15T00:18:07.048" v="36" actId="1076"/>
+          <ac:spMkLst>
+            <pc:docMk/>
+            <pc:sldMk cId="1031257587" sldId="292"/>
+            <ac:spMk id="16" creationId="{2CD967FC-6B82-4F09-938B-F9E74AB74DB5}"/>
+          </ac:spMkLst>
+        </pc:spChg>
+      </pc:sldChg>
+      <pc:sldChg chg="modSp">
+        <pc:chgData name="William Estes" userId="a88fcdbc31b6f594" providerId="Windows Live" clId="Web-{4F3B90B2-B3CE-4814-9FD2-338761465FCC}" dt="2020-09-15T00:19:36.140" v="37" actId="1076"/>
+        <pc:sldMkLst>
+          <pc:docMk/>
+          <pc:sldMk cId="2184220433" sldId="295"/>
+        </pc:sldMkLst>
+        <pc:spChg chg="mod">
+          <ac:chgData name="William Estes" userId="a88fcdbc31b6f594" providerId="Windows Live" clId="Web-{4F3B90B2-B3CE-4814-9FD2-338761465FCC}" dt="2020-09-15T00:19:36.140" v="37" actId="1076"/>
+          <ac:spMkLst>
+            <pc:docMk/>
+            <pc:sldMk cId="2184220433" sldId="295"/>
+            <ac:spMk id="5" creationId="{7B16B923-1F9B-4609-AF2C-FA03D25659EE}"/>
+          </ac:spMkLst>
+        </pc:spChg>
+      </pc:sldChg>
+      <pc:sldChg chg="modSp">
+        <pc:chgData name="William Estes" userId="a88fcdbc31b6f594" providerId="Windows Live" clId="Web-{4F3B90B2-B3CE-4814-9FD2-338761465FCC}" dt="2020-09-15T00:25:07.854" v="41" actId="1076"/>
+        <pc:sldMkLst>
+          <pc:docMk/>
+          <pc:sldMk cId="1522982694" sldId="296"/>
+        </pc:sldMkLst>
+        <pc:spChg chg="mod">
+          <ac:chgData name="William Estes" userId="a88fcdbc31b6f594" providerId="Windows Live" clId="Web-{4F3B90B2-B3CE-4814-9FD2-338761465FCC}" dt="2020-09-15T00:24:33.432" v="39" actId="1076"/>
+          <ac:spMkLst>
+            <pc:docMk/>
+            <pc:sldMk cId="1522982694" sldId="296"/>
+            <ac:spMk id="6" creationId="{8D3881AF-2AF0-4DF1-977D-DEFDD2FCFF0A}"/>
+          </ac:spMkLst>
+        </pc:spChg>
+        <pc:spChg chg="mod">
+          <ac:chgData name="William Estes" userId="a88fcdbc31b6f594" providerId="Windows Live" clId="Web-{4F3B90B2-B3CE-4814-9FD2-338761465FCC}" dt="2020-09-15T00:25:07.854" v="41" actId="1076"/>
+          <ac:spMkLst>
+            <pc:docMk/>
+            <pc:sldMk cId="1522982694" sldId="296"/>
+            <ac:spMk id="7" creationId="{F5D9FE73-3240-4541-BA18-9018D3F5BAA8}"/>
+          </ac:spMkLst>
+        </pc:spChg>
+      </pc:sldChg>
+      <pc:sldChg chg="modSp">
+        <pc:chgData name="William Estes" userId="a88fcdbc31b6f594" providerId="Windows Live" clId="Web-{4F3B90B2-B3CE-4814-9FD2-338761465FCC}" dt="2020-09-14T23:59:53.080" v="20" actId="20577"/>
+        <pc:sldMkLst>
+          <pc:docMk/>
+          <pc:sldMk cId="2469544991" sldId="305"/>
+        </pc:sldMkLst>
+        <pc:spChg chg="mod">
+          <ac:chgData name="William Estes" userId="a88fcdbc31b6f594" providerId="Windows Live" clId="Web-{4F3B90B2-B3CE-4814-9FD2-338761465FCC}" dt="2020-09-14T23:59:53.080" v="20" actId="20577"/>
+          <ac:spMkLst>
+            <pc:docMk/>
+            <pc:sldMk cId="2469544991" sldId="305"/>
+            <ac:spMk id="4" creationId="{5C0E649D-E3FD-41FB-BA87-37C62725C740}"/>
+          </ac:spMkLst>
+        </pc:spChg>
+      </pc:sldChg>
+    </pc:docChg>
+  </pc:docChgLst>
+  <pc:docChgLst>
+    <pc:chgData name="William Estes" userId="a88fcdbc31b6f594" providerId="Windows Live" clId="Web-{463BAE71-8BB1-49F2-A6BB-F745AFA0A883}"/>
+    <pc:docChg chg="modSld">
+      <pc:chgData name="William Estes" userId="a88fcdbc31b6f594" providerId="Windows Live" clId="Web-{463BAE71-8BB1-49F2-A6BB-F745AFA0A883}" dt="2020-09-07T02:50:13.484" v="79" actId="20577"/>
+      <pc:docMkLst>
+        <pc:docMk/>
+      </pc:docMkLst>
+      <pc:sldChg chg="modSp">
+        <pc:chgData name="William Estes" userId="a88fcdbc31b6f594" providerId="Windows Live" clId="Web-{463BAE71-8BB1-49F2-A6BB-F745AFA0A883}" dt="2020-09-07T02:50:01.844" v="58" actId="20577"/>
+        <pc:sldMkLst>
+          <pc:docMk/>
+          <pc:sldMk cId="871545074" sldId="302"/>
+        </pc:sldMkLst>
+        <pc:spChg chg="mod">
+          <ac:chgData name="William Estes" userId="a88fcdbc31b6f594" providerId="Windows Live" clId="Web-{463BAE71-8BB1-49F2-A6BB-F745AFA0A883}" dt="2020-09-07T02:50:01.844" v="58" actId="20577"/>
+          <ac:spMkLst>
+            <pc:docMk/>
+            <pc:sldMk cId="871545074" sldId="302"/>
+            <ac:spMk id="3" creationId="{1095E837-F77E-AE4D-944C-919B5D780AAA}"/>
+          </ac:spMkLst>
+        </pc:spChg>
+        <pc:picChg chg="mod">
+          <ac:chgData name="William Estes" userId="a88fcdbc31b6f594" providerId="Windows Live" clId="Web-{463BAE71-8BB1-49F2-A6BB-F745AFA0A883}" dt="2020-09-07T02:49:44.719" v="0" actId="1076"/>
+          <ac:picMkLst>
+            <pc:docMk/>
+            <pc:sldMk cId="871545074" sldId="302"/>
+            <ac:picMk id="4" creationId="{D5B4F8F0-E1EC-45B9-8407-773939B2E634}"/>
+          </ac:picMkLst>
+        </pc:picChg>
+      </pc:sldChg>
+      <pc:sldChg chg="modSp">
+        <pc:chgData name="William Estes" userId="a88fcdbc31b6f594" providerId="Windows Live" clId="Web-{463BAE71-8BB1-49F2-A6BB-F745AFA0A883}" dt="2020-09-07T02:50:12.172" v="77" actId="20577"/>
+        <pc:sldMkLst>
+          <pc:docMk/>
+          <pc:sldMk cId="284483567" sldId="303"/>
+        </pc:sldMkLst>
+        <pc:spChg chg="mod">
+          <ac:chgData name="William Estes" userId="a88fcdbc31b6f594" providerId="Windows Live" clId="Web-{463BAE71-8BB1-49F2-A6BB-F745AFA0A883}" dt="2020-09-07T02:50:12.172" v="77" actId="20577"/>
+          <ac:spMkLst>
+            <pc:docMk/>
+            <pc:sldMk cId="284483567" sldId="303"/>
+            <ac:spMk id="3" creationId="{1095E837-F77E-AE4D-944C-919B5D780AAA}"/>
+          </ac:spMkLst>
+        </pc:spChg>
+      </pc:sldChg>
+    </pc:docChg>
+  </pc:docChgLst>
+  <pc:docChgLst>
+    <pc:chgData name="William Estes" userId="a88fcdbc31b6f594" providerId="Windows Live" clId="Web-{10FD8D96-9E5A-4BEB-31AC-11A1018D4BCE}"/>
+    <pc:docChg chg="addSld delSld modSld sldOrd">
+      <pc:chgData name="William Estes" userId="a88fcdbc31b6f594" providerId="Windows Live" clId="Web-{10FD8D96-9E5A-4BEB-31AC-11A1018D4BCE}" dt="2020-08-30T22:08:08.246" v="1941" actId="1076"/>
+      <pc:docMkLst>
+        <pc:docMk/>
+      </pc:docMkLst>
+      <pc:sldChg chg="modSp">
+        <pc:chgData name="William Estes" userId="a88fcdbc31b6f594" providerId="Windows Live" clId="Web-{10FD8D96-9E5A-4BEB-31AC-11A1018D4BCE}" dt="2020-08-30T20:13:45.867" v="0" actId="20577"/>
+        <pc:sldMkLst>
+          <pc:docMk/>
+          <pc:sldMk cId="1945136841" sldId="256"/>
+        </pc:sldMkLst>
+        <pc:spChg chg="mod">
+          <ac:chgData name="William Estes" userId="a88fcdbc31b6f594" providerId="Windows Live" clId="Web-{10FD8D96-9E5A-4BEB-31AC-11A1018D4BCE}" dt="2020-08-30T20:13:45.867" v="0" actId="20577"/>
+          <ac:spMkLst>
+            <pc:docMk/>
+            <pc:sldMk cId="1945136841" sldId="256"/>
+            <ac:spMk id="2" creationId="{073FCCB2-5FFC-AF47-90CA-9CC12D113DDD}"/>
+          </ac:spMkLst>
+        </pc:spChg>
+      </pc:sldChg>
+      <pc:sldChg chg="delSp modSp">
+        <pc:chgData name="William Estes" userId="a88fcdbc31b6f594" providerId="Windows Live" clId="Web-{10FD8D96-9E5A-4BEB-31AC-11A1018D4BCE}" dt="2020-08-30T20:15:16.211" v="93"/>
         <pc:sldMkLst>
           <pc:docMk/>
           <pc:sldMk cId="1056604679" sldId="260"/>
         </pc:sldMkLst>
+        <pc:spChg chg="mod">
+          <ac:chgData name="William Estes" userId="a88fcdbc31b6f594" providerId="Windows Live" clId="Web-{10FD8D96-9E5A-4BEB-31AC-11A1018D4BCE}" dt="2020-08-30T20:15:14.961" v="90" actId="20577"/>
+          <ac:spMkLst>
+            <pc:docMk/>
+            <pc:sldMk cId="1056604679" sldId="260"/>
+            <ac:spMk id="3" creationId="{3713A5A2-1019-0143-BC00-1B8B12D7C198}"/>
+          </ac:spMkLst>
+        </pc:spChg>
+        <pc:picChg chg="del">
+          <ac:chgData name="William Estes" userId="a88fcdbc31b6f594" providerId="Windows Live" clId="Web-{10FD8D96-9E5A-4BEB-31AC-11A1018D4BCE}" dt="2020-08-30T20:15:16.211" v="93"/>
+          <ac:picMkLst>
+            <pc:docMk/>
+            <pc:sldMk cId="1056604679" sldId="260"/>
+            <ac:picMk id="7" creationId="{7D0999C3-1D3F-4622-9A1B-8DC734094F20}"/>
+          </ac:picMkLst>
+        </pc:picChg>
       </pc:sldChg>
       <pc:sldChg chg="del">
-        <pc:chgData name="William Estes" userId="a88fcdbc31b6f594" providerId="Windows Live" clId="Web-{031C1E02-F537-4B69-F31C-E9378A6E06AC}" dt="2020-09-07T21:36:26.618" v="1355"/>
+        <pc:chgData name="William Estes" userId="a88fcdbc31b6f594" providerId="Windows Live" clId="Web-{10FD8D96-9E5A-4BEB-31AC-11A1018D4BCE}" dt="2020-08-30T20:15:31.117" v="109"/>
+        <pc:sldMkLst>
+          <pc:docMk/>
+          <pc:sldMk cId="2840496418" sldId="261"/>
+        </pc:sldMkLst>
+      </pc:sldChg>
+      <pc:sldChg chg="modSp">
+        <pc:chgData name="William Estes" userId="a88fcdbc31b6f594" providerId="Windows Live" clId="Web-{10FD8D96-9E5A-4BEB-31AC-11A1018D4BCE}" dt="2020-08-30T20:14:13.117" v="72" actId="20577"/>
+        <pc:sldMkLst>
+          <pc:docMk/>
+          <pc:sldMk cId="830997286" sldId="264"/>
+        </pc:sldMkLst>
+        <pc:spChg chg="mod">
+          <ac:chgData name="William Estes" userId="a88fcdbc31b6f594" providerId="Windows Live" clId="Web-{10FD8D96-9E5A-4BEB-31AC-11A1018D4BCE}" dt="2020-08-30T20:14:13.117" v="72" actId="20577"/>
+          <ac:spMkLst>
+            <pc:docMk/>
+            <pc:sldMk cId="830997286" sldId="264"/>
+            <ac:spMk id="3" creationId="{1095E837-F77E-AE4D-944C-919B5D780AAA}"/>
+          </ac:spMkLst>
+        </pc:spChg>
+      </pc:sldChg>
+      <pc:sldChg chg="del">
+        <pc:chgData name="William Estes" userId="a88fcdbc31b6f594" providerId="Windows Live" clId="Web-{10FD8D96-9E5A-4BEB-31AC-11A1018D4BCE}" dt="2020-08-30T20:15:31.117" v="107"/>
+        <pc:sldMkLst>
+          <pc:docMk/>
+          <pc:sldMk cId="2341259573" sldId="265"/>
+        </pc:sldMkLst>
+      </pc:sldChg>
+      <pc:sldChg chg="del">
+        <pc:chgData name="William Estes" userId="a88fcdbc31b6f594" providerId="Windows Live" clId="Web-{10FD8D96-9E5A-4BEB-31AC-11A1018D4BCE}" dt="2020-08-30T20:15:31.117" v="105"/>
+        <pc:sldMkLst>
+          <pc:docMk/>
+          <pc:sldMk cId="1244393583" sldId="266"/>
+        </pc:sldMkLst>
+      </pc:sldChg>
+      <pc:sldChg chg="modSp">
+        <pc:chgData name="William Estes" userId="a88fcdbc31b6f594" providerId="Windows Live" clId="Web-{10FD8D96-9E5A-4BEB-31AC-11A1018D4BCE}" dt="2020-08-30T20:15:08.289" v="87" actId="20577"/>
         <pc:sldMkLst>
           <pc:docMk/>
           <pc:sldMk cId="3421889743" sldId="277"/>
         </pc:sldMkLst>
+        <pc:spChg chg="mod">
+          <ac:chgData name="William Estes" userId="a88fcdbc31b6f594" providerId="Windows Live" clId="Web-{10FD8D96-9E5A-4BEB-31AC-11A1018D4BCE}" dt="2020-08-30T20:15:08.289" v="87" actId="20577"/>
+          <ac:spMkLst>
+            <pc:docMk/>
+            <pc:sldMk cId="3421889743" sldId="277"/>
+            <ac:spMk id="4" creationId="{5C0E649D-E3FD-41FB-BA87-37C62725C740}"/>
+          </ac:spMkLst>
+        </pc:spChg>
       </pc:sldChg>
       <pc:sldChg chg="modSp">
-        <pc:chgData name="William Estes" userId="a88fcdbc31b6f594" providerId="Windows Live" clId="Web-{031C1E02-F537-4B69-F31C-E9378A6E06AC}" dt="2020-09-07T22:31:27.349" v="1779" actId="20577"/>
+        <pc:chgData name="William Estes" userId="a88fcdbc31b6f594" providerId="Windows Live" clId="Web-{10FD8D96-9E5A-4BEB-31AC-11A1018D4BCE}" dt="2020-08-30T20:17:06.883" v="130" actId="20577"/>
         <pc:sldMkLst>
           <pc:docMk/>
           <pc:sldMk cId="496210837" sldId="280"/>
         </pc:sldMkLst>
         <pc:spChg chg="mod">
-          <ac:chgData name="William Estes" userId="a88fcdbc31b6f594" providerId="Windows Live" clId="Web-{031C1E02-F537-4B69-F31C-E9378A6E06AC}" dt="2020-09-07T22:31:27.349" v="1779" actId="20577"/>
+          <ac:chgData name="William Estes" userId="a88fcdbc31b6f594" providerId="Windows Live" clId="Web-{10FD8D96-9E5A-4BEB-31AC-11A1018D4BCE}" dt="2020-08-30T20:17:06.883" v="130" actId="20577"/>
           <ac:spMkLst>
             <pc:docMk/>
             <pc:sldMk cId="496210837" sldId="280"/>
@@ -170,27 +463,349 @@
         </pc:spChg>
       </pc:sldChg>
       <pc:sldChg chg="del">
-        <pc:chgData name="William Estes" userId="a88fcdbc31b6f594" providerId="Windows Live" clId="Web-{031C1E02-F537-4B69-F31C-E9378A6E06AC}" dt="2020-09-07T21:37:31.508" v="1369"/>
+        <pc:chgData name="William Estes" userId="a88fcdbc31b6f594" providerId="Windows Live" clId="Web-{10FD8D96-9E5A-4BEB-31AC-11A1018D4BCE}" dt="2020-08-30T20:15:31.117" v="108"/>
+        <pc:sldMkLst>
+          <pc:docMk/>
+          <pc:sldMk cId="1784549319" sldId="281"/>
+        </pc:sldMkLst>
+      </pc:sldChg>
+      <pc:sldChg chg="del">
+        <pc:chgData name="William Estes" userId="a88fcdbc31b6f594" providerId="Windows Live" clId="Web-{10FD8D96-9E5A-4BEB-31AC-11A1018D4BCE}" dt="2020-08-30T20:15:31.117" v="106"/>
+        <pc:sldMkLst>
+          <pc:docMk/>
+          <pc:sldMk cId="2362235639" sldId="282"/>
+        </pc:sldMkLst>
+      </pc:sldChg>
+      <pc:sldChg chg="del">
+        <pc:chgData name="William Estes" userId="a88fcdbc31b6f594" providerId="Windows Live" clId="Web-{10FD8D96-9E5A-4BEB-31AC-11A1018D4BCE}" dt="2020-08-30T20:15:31.117" v="104"/>
+        <pc:sldMkLst>
+          <pc:docMk/>
+          <pc:sldMk cId="3068982192" sldId="283"/>
+        </pc:sldMkLst>
+      </pc:sldChg>
+      <pc:sldChg chg="del">
+        <pc:chgData name="William Estes" userId="a88fcdbc31b6f594" providerId="Windows Live" clId="Web-{10FD8D96-9E5A-4BEB-31AC-11A1018D4BCE}" dt="2020-08-30T20:15:31.117" v="103"/>
+        <pc:sldMkLst>
+          <pc:docMk/>
+          <pc:sldMk cId="1761172003" sldId="284"/>
+        </pc:sldMkLst>
+      </pc:sldChg>
+      <pc:sldChg chg="del">
+        <pc:chgData name="William Estes" userId="a88fcdbc31b6f594" providerId="Windows Live" clId="Web-{10FD8D96-9E5A-4BEB-31AC-11A1018D4BCE}" dt="2020-08-30T20:15:01.805" v="86"/>
+        <pc:sldMkLst>
+          <pc:docMk/>
+          <pc:sldMk cId="1733125250" sldId="286"/>
+        </pc:sldMkLst>
+      </pc:sldChg>
+      <pc:sldChg chg="del">
+        <pc:chgData name="William Estes" userId="a88fcdbc31b6f594" providerId="Windows Live" clId="Web-{10FD8D96-9E5A-4BEB-31AC-11A1018D4BCE}" dt="2020-08-30T20:15:31.102" v="97"/>
+        <pc:sldMkLst>
+          <pc:docMk/>
+          <pc:sldMk cId="3016926997" sldId="287"/>
+        </pc:sldMkLst>
+      </pc:sldChg>
+      <pc:sldChg chg="del">
+        <pc:chgData name="William Estes" userId="a88fcdbc31b6f594" providerId="Windows Live" clId="Web-{10FD8D96-9E5A-4BEB-31AC-11A1018D4BCE}" dt="2020-08-30T20:15:31.117" v="101"/>
+        <pc:sldMkLst>
+          <pc:docMk/>
+          <pc:sldMk cId="285019892" sldId="288"/>
+        </pc:sldMkLst>
+      </pc:sldChg>
+      <pc:sldChg chg="del">
+        <pc:chgData name="William Estes" userId="a88fcdbc31b6f594" providerId="Windows Live" clId="Web-{10FD8D96-9E5A-4BEB-31AC-11A1018D4BCE}" dt="2020-08-30T20:15:31.117" v="100"/>
+        <pc:sldMkLst>
+          <pc:docMk/>
+          <pc:sldMk cId="134332572" sldId="289"/>
+        </pc:sldMkLst>
+      </pc:sldChg>
+      <pc:sldChg chg="del">
+        <pc:chgData name="William Estes" userId="a88fcdbc31b6f594" providerId="Windows Live" clId="Web-{10FD8D96-9E5A-4BEB-31AC-11A1018D4BCE}" dt="2020-08-30T20:15:31.117" v="102"/>
+        <pc:sldMkLst>
+          <pc:docMk/>
+          <pc:sldMk cId="187834809" sldId="290"/>
+        </pc:sldMkLst>
+      </pc:sldChg>
+      <pc:sldChg chg="addSp delSp modSp">
+        <pc:chgData name="William Estes" userId="a88fcdbc31b6f594" providerId="Windows Live" clId="Web-{10FD8D96-9E5A-4BEB-31AC-11A1018D4BCE}" dt="2020-08-30T20:20:17.228" v="231" actId="14100"/>
+        <pc:sldMkLst>
+          <pc:docMk/>
+          <pc:sldMk cId="3007801671" sldId="291"/>
+        </pc:sldMkLst>
+        <pc:spChg chg="mod">
+          <ac:chgData name="William Estes" userId="a88fcdbc31b6f594" providerId="Windows Live" clId="Web-{10FD8D96-9E5A-4BEB-31AC-11A1018D4BCE}" dt="2020-08-30T20:19:47.806" v="222" actId="20577"/>
+          <ac:spMkLst>
+            <pc:docMk/>
+            <pc:sldMk cId="3007801671" sldId="291"/>
+            <ac:spMk id="3" creationId="{1095E837-F77E-AE4D-944C-919B5D780AAA}"/>
+          </ac:spMkLst>
+        </pc:spChg>
+        <pc:spChg chg="del">
+          <ac:chgData name="William Estes" userId="a88fcdbc31b6f594" providerId="Windows Live" clId="Web-{10FD8D96-9E5A-4BEB-31AC-11A1018D4BCE}" dt="2020-08-30T20:14:28.226" v="77"/>
+          <ac:spMkLst>
+            <pc:docMk/>
+            <pc:sldMk cId="3007801671" sldId="291"/>
+            <ac:spMk id="4" creationId="{ADB1C674-FD00-4D6C-866A-6C5E6B13E5F3}"/>
+          </ac:spMkLst>
+        </pc:spChg>
+        <pc:spChg chg="del">
+          <ac:chgData name="William Estes" userId="a88fcdbc31b6f594" providerId="Windows Live" clId="Web-{10FD8D96-9E5A-4BEB-31AC-11A1018D4BCE}" dt="2020-08-30T20:14:30.586" v="78"/>
+          <ac:spMkLst>
+            <pc:docMk/>
+            <pc:sldMk cId="3007801671" sldId="291"/>
+            <ac:spMk id="5" creationId="{4952BA95-9BBD-41E0-9E5D-9FA167EAC776}"/>
+          </ac:spMkLst>
+        </pc:spChg>
+        <pc:spChg chg="del">
+          <ac:chgData name="William Estes" userId="a88fcdbc31b6f594" providerId="Windows Live" clId="Web-{10FD8D96-9E5A-4BEB-31AC-11A1018D4BCE}" dt="2020-08-30T20:14:47.195" v="79"/>
+          <ac:spMkLst>
+            <pc:docMk/>
+            <pc:sldMk cId="3007801671" sldId="291"/>
+            <ac:spMk id="6" creationId="{3A659AA7-456C-4E13-9785-37DE36D63852}"/>
+          </ac:spMkLst>
+        </pc:spChg>
+        <pc:spChg chg="del">
+          <ac:chgData name="William Estes" userId="a88fcdbc31b6f594" providerId="Windows Live" clId="Web-{10FD8D96-9E5A-4BEB-31AC-11A1018D4BCE}" dt="2020-08-30T20:14:48.711" v="80"/>
+          <ac:spMkLst>
+            <pc:docMk/>
+            <pc:sldMk cId="3007801671" sldId="291"/>
+            <ac:spMk id="7" creationId="{7886BCBF-684F-4CAE-A080-5AC735A7B257}"/>
+          </ac:spMkLst>
+        </pc:spChg>
+        <pc:spChg chg="del">
+          <ac:chgData name="William Estes" userId="a88fcdbc31b6f594" providerId="Windows Live" clId="Web-{10FD8D96-9E5A-4BEB-31AC-11A1018D4BCE}" dt="2020-08-30T20:14:50.148" v="81"/>
+          <ac:spMkLst>
+            <pc:docMk/>
+            <pc:sldMk cId="3007801671" sldId="291"/>
+            <ac:spMk id="8" creationId="{54FC6B76-B785-4E1A-B012-472FF0BBF661}"/>
+          </ac:spMkLst>
+        </pc:spChg>
+        <pc:spChg chg="del">
+          <ac:chgData name="William Estes" userId="a88fcdbc31b6f594" providerId="Windows Live" clId="Web-{10FD8D96-9E5A-4BEB-31AC-11A1018D4BCE}" dt="2020-08-30T20:14:51.508" v="82"/>
+          <ac:spMkLst>
+            <pc:docMk/>
+            <pc:sldMk cId="3007801671" sldId="291"/>
+            <ac:spMk id="9" creationId="{224E8681-C71E-4740-BFB7-94339D774377}"/>
+          </ac:spMkLst>
+        </pc:spChg>
+        <pc:spChg chg="del">
+          <ac:chgData name="William Estes" userId="a88fcdbc31b6f594" providerId="Windows Live" clId="Web-{10FD8D96-9E5A-4BEB-31AC-11A1018D4BCE}" dt="2020-08-30T20:14:52.602" v="83"/>
+          <ac:spMkLst>
+            <pc:docMk/>
+            <pc:sldMk cId="3007801671" sldId="291"/>
+            <ac:spMk id="10" creationId="{1D4A377E-20E9-42FA-9CBD-693081493559}"/>
+          </ac:spMkLst>
+        </pc:spChg>
+        <pc:spChg chg="add mod">
+          <ac:chgData name="William Estes" userId="a88fcdbc31b6f594" providerId="Windows Live" clId="Web-{10FD8D96-9E5A-4BEB-31AC-11A1018D4BCE}" dt="2020-08-30T20:20:17.228" v="231" actId="14100"/>
+          <ac:spMkLst>
+            <pc:docMk/>
+            <pc:sldMk cId="3007801671" sldId="291"/>
+            <ac:spMk id="12" creationId="{CF97C5AB-99C6-437C-B2DB-5A3F7C1729C7}"/>
+          </ac:spMkLst>
+        </pc:spChg>
+        <pc:picChg chg="add mod">
+          <ac:chgData name="William Estes" userId="a88fcdbc31b6f594" providerId="Windows Live" clId="Web-{10FD8D96-9E5A-4BEB-31AC-11A1018D4BCE}" dt="2020-08-30T20:19:55.072" v="227" actId="1076"/>
+          <ac:picMkLst>
+            <pc:docMk/>
+            <pc:sldMk cId="3007801671" sldId="291"/>
+            <ac:picMk id="11" creationId="{6D1F8C0C-6DC3-4A53-89E4-F31AE803855B}"/>
+          </ac:picMkLst>
+        </pc:picChg>
+      </pc:sldChg>
+      <pc:sldChg chg="del">
+        <pc:chgData name="William Estes" userId="a88fcdbc31b6f594" providerId="Windows Live" clId="Web-{10FD8D96-9E5A-4BEB-31AC-11A1018D4BCE}" dt="2020-08-30T20:14:58.898" v="85"/>
+        <pc:sldMkLst>
+          <pc:docMk/>
+          <pc:sldMk cId="171356189" sldId="292"/>
+        </pc:sldMkLst>
+      </pc:sldChg>
+      <pc:sldChg chg="addSp delSp modSp add mod replId modClrScheme chgLayout">
+        <pc:chgData name="William Estes" userId="a88fcdbc31b6f594" providerId="Windows Live" clId="Web-{10FD8D96-9E5A-4BEB-31AC-11A1018D4BCE}" dt="2020-08-30T20:42:34.107" v="866" actId="1076"/>
+        <pc:sldMkLst>
+          <pc:docMk/>
+          <pc:sldMk cId="1031257587" sldId="292"/>
+        </pc:sldMkLst>
+        <pc:spChg chg="mod ord">
+          <ac:chgData name="William Estes" userId="a88fcdbc31b6f594" providerId="Windows Live" clId="Web-{10FD8D96-9E5A-4BEB-31AC-11A1018D4BCE}" dt="2020-08-30T20:23:13.964" v="460"/>
+          <ac:spMkLst>
+            <pc:docMk/>
+            <pc:sldMk cId="1031257587" sldId="292"/>
+            <ac:spMk id="2" creationId="{5C86CBF7-69F7-7B44-ABCE-F80D6130EA7B}"/>
+          </ac:spMkLst>
+        </pc:spChg>
+        <pc:spChg chg="mod ord">
+          <ac:chgData name="William Estes" userId="a88fcdbc31b6f594" providerId="Windows Live" clId="Web-{10FD8D96-9E5A-4BEB-31AC-11A1018D4BCE}" dt="2020-08-30T20:23:13.964" v="460"/>
+          <ac:spMkLst>
+            <pc:docMk/>
+            <pc:sldMk cId="1031257587" sldId="292"/>
+            <ac:spMk id="3" creationId="{1095E837-F77E-AE4D-944C-919B5D780AAA}"/>
+          </ac:spMkLst>
+        </pc:spChg>
+        <pc:spChg chg="add del mod ord">
+          <ac:chgData name="William Estes" userId="a88fcdbc31b6f594" providerId="Windows Live" clId="Web-{10FD8D96-9E5A-4BEB-31AC-11A1018D4BCE}" dt="2020-08-30T20:23:13.964" v="460"/>
+          <ac:spMkLst>
+            <pc:docMk/>
+            <pc:sldMk cId="1031257587" sldId="292"/>
+            <ac:spMk id="4" creationId="{ED008AEC-C48C-465F-9CD1-1897012EF341}"/>
+          </ac:spMkLst>
+        </pc:spChg>
+        <pc:spChg chg="add del mod ord">
+          <ac:chgData name="William Estes" userId="a88fcdbc31b6f594" providerId="Windows Live" clId="Web-{10FD8D96-9E5A-4BEB-31AC-11A1018D4BCE}" dt="2020-08-30T20:23:13.964" v="460"/>
+          <ac:spMkLst>
+            <pc:docMk/>
+            <pc:sldMk cId="1031257587" sldId="292"/>
+            <ac:spMk id="5" creationId="{CA9D4ED6-9944-4826-A5D0-C66CBFFBAAAA}"/>
+          </ac:spMkLst>
+        </pc:spChg>
+        <pc:spChg chg="add del mod ord">
+          <ac:chgData name="William Estes" userId="a88fcdbc31b6f594" providerId="Windows Live" clId="Web-{10FD8D96-9E5A-4BEB-31AC-11A1018D4BCE}" dt="2020-08-30T20:23:13.964" v="460"/>
+          <ac:spMkLst>
+            <pc:docMk/>
+            <pc:sldMk cId="1031257587" sldId="292"/>
+            <ac:spMk id="6" creationId="{384646BD-C53A-44A9-839A-E65CB3BE6E39}"/>
+          </ac:spMkLst>
+        </pc:spChg>
+        <pc:spChg chg="add mod">
+          <ac:chgData name="William Estes" userId="a88fcdbc31b6f594" providerId="Windows Live" clId="Web-{10FD8D96-9E5A-4BEB-31AC-11A1018D4BCE}" dt="2020-08-30T20:42:16.481" v="856" actId="1076"/>
+          <ac:spMkLst>
+            <pc:docMk/>
+            <pc:sldMk cId="1031257587" sldId="292"/>
+            <ac:spMk id="7" creationId="{81FEAAF1-55EF-429A-832F-657DD1B08A00}"/>
+          </ac:spMkLst>
+        </pc:spChg>
+        <pc:spChg chg="add mod">
+          <ac:chgData name="William Estes" userId="a88fcdbc31b6f594" providerId="Windows Live" clId="Web-{10FD8D96-9E5A-4BEB-31AC-11A1018D4BCE}" dt="2020-08-30T20:42:19.653" v="858" actId="1076"/>
+          <ac:spMkLst>
+            <pc:docMk/>
+            <pc:sldMk cId="1031257587" sldId="292"/>
+            <ac:spMk id="10" creationId="{A6C69913-6E66-4EF9-912E-4787D37F112A}"/>
+          </ac:spMkLst>
+        </pc:spChg>
+        <pc:spChg chg="del">
+          <ac:chgData name="William Estes" userId="a88fcdbc31b6f594" providerId="Windows Live" clId="Web-{10FD8D96-9E5A-4BEB-31AC-11A1018D4BCE}" dt="2020-08-30T20:20:24.775" v="233"/>
+          <ac:spMkLst>
+            <pc:docMk/>
+            <pc:sldMk cId="1031257587" sldId="292"/>
+            <ac:spMk id="12" creationId="{CF97C5AB-99C6-437C-B2DB-5A3F7C1729C7}"/>
+          </ac:spMkLst>
+        </pc:spChg>
+        <pc:spChg chg="add mod">
+          <ac:chgData name="William Estes" userId="a88fcdbc31b6f594" providerId="Windows Live" clId="Web-{10FD8D96-9E5A-4BEB-31AC-11A1018D4BCE}" dt="2020-08-30T20:42:23.200" v="860" actId="1076"/>
+          <ac:spMkLst>
+            <pc:docMk/>
+            <pc:sldMk cId="1031257587" sldId="292"/>
+            <ac:spMk id="13" creationId="{FA79162F-1F9C-4BB6-9C39-96C8B58E86C3}"/>
+          </ac:spMkLst>
+        </pc:spChg>
+        <pc:spChg chg="add mod">
+          <ac:chgData name="William Estes" userId="a88fcdbc31b6f594" providerId="Windows Live" clId="Web-{10FD8D96-9E5A-4BEB-31AC-11A1018D4BCE}" dt="2020-08-30T20:42:26.263" v="862" actId="1076"/>
+          <ac:spMkLst>
+            <pc:docMk/>
+            <pc:sldMk cId="1031257587" sldId="292"/>
+            <ac:spMk id="14" creationId="{BC68A978-56D8-4B49-B046-44ACD0A585A4}"/>
+          </ac:spMkLst>
+        </pc:spChg>
+        <pc:spChg chg="add mod">
+          <ac:chgData name="William Estes" userId="a88fcdbc31b6f594" providerId="Windows Live" clId="Web-{10FD8D96-9E5A-4BEB-31AC-11A1018D4BCE}" dt="2020-08-30T20:42:30.403" v="864" actId="1076"/>
+          <ac:spMkLst>
+            <pc:docMk/>
+            <pc:sldMk cId="1031257587" sldId="292"/>
+            <ac:spMk id="15" creationId="{7F19F82B-0D64-4D93-8D94-101BBFB46765}"/>
+          </ac:spMkLst>
+        </pc:spChg>
+        <pc:spChg chg="add mod">
+          <ac:chgData name="William Estes" userId="a88fcdbc31b6f594" providerId="Windows Live" clId="Web-{10FD8D96-9E5A-4BEB-31AC-11A1018D4BCE}" dt="2020-08-30T20:42:34.107" v="866" actId="1076"/>
+          <ac:spMkLst>
+            <pc:docMk/>
+            <pc:sldMk cId="1031257587" sldId="292"/>
+            <ac:spMk id="16" creationId="{2CD967FC-6B82-4F09-938B-F9E74AB74DB5}"/>
+          </ac:spMkLst>
+        </pc:spChg>
+        <pc:picChg chg="del">
+          <ac:chgData name="William Estes" userId="a88fcdbc31b6f594" providerId="Windows Live" clId="Web-{10FD8D96-9E5A-4BEB-31AC-11A1018D4BCE}" dt="2020-08-30T20:20:25.681" v="234"/>
+          <ac:picMkLst>
+            <pc:docMk/>
+            <pc:sldMk cId="1031257587" sldId="292"/>
+            <ac:picMk id="11" creationId="{6D1F8C0C-6DC3-4A53-89E4-F31AE803855B}"/>
+          </ac:picMkLst>
+        </pc:picChg>
+      </pc:sldChg>
+      <pc:sldChg chg="modSp add replId">
+        <pc:chgData name="William Estes" userId="a88fcdbc31b6f594" providerId="Windows Live" clId="Web-{10FD8D96-9E5A-4BEB-31AC-11A1018D4BCE}" dt="2020-08-30T20:28:30.565" v="589" actId="20577"/>
         <pc:sldMkLst>
           <pc:docMk/>
           <pc:sldMk cId="1361839843" sldId="293"/>
         </pc:sldMkLst>
+        <pc:spChg chg="mod">
+          <ac:chgData name="William Estes" userId="a88fcdbc31b6f594" providerId="Windows Live" clId="Web-{10FD8D96-9E5A-4BEB-31AC-11A1018D4BCE}" dt="2020-08-30T20:28:30.565" v="589" actId="20577"/>
+          <ac:spMkLst>
+            <pc:docMk/>
+            <pc:sldMk cId="1361839843" sldId="293"/>
+            <ac:spMk id="3" creationId="{1095E837-F77E-AE4D-944C-919B5D780AAA}"/>
+          </ac:spMkLst>
+        </pc:spChg>
       </pc:sldChg>
       <pc:sldChg chg="del">
-        <pc:chgData name="William Estes" userId="a88fcdbc31b6f594" providerId="Windows Live" clId="Web-{031C1E02-F537-4B69-F31C-E9378A6E06AC}" dt="2020-09-07T21:37:32.883" v="1370"/>
+        <pc:chgData name="William Estes" userId="a88fcdbc31b6f594" providerId="Windows Live" clId="Web-{10FD8D96-9E5A-4BEB-31AC-11A1018D4BCE}" dt="2020-08-30T20:14:57.258" v="84"/>
+        <pc:sldMkLst>
+          <pc:docMk/>
+          <pc:sldMk cId="4024895595" sldId="293"/>
+        </pc:sldMkLst>
+      </pc:sldChg>
+      <pc:sldChg chg="addSp modSp add replId">
+        <pc:chgData name="William Estes" userId="a88fcdbc31b6f594" providerId="Windows Live" clId="Web-{10FD8D96-9E5A-4BEB-31AC-11A1018D4BCE}" dt="2020-08-30T20:36:22.510" v="628" actId="14100"/>
         <pc:sldMkLst>
           <pc:docMk/>
           <pc:sldMk cId="18420826" sldId="294"/>
         </pc:sldMkLst>
+        <pc:spChg chg="mod">
+          <ac:chgData name="William Estes" userId="a88fcdbc31b6f594" providerId="Windows Live" clId="Web-{10FD8D96-9E5A-4BEB-31AC-11A1018D4BCE}" dt="2020-08-30T20:35:58.901" v="623" actId="20577"/>
+          <ac:spMkLst>
+            <pc:docMk/>
+            <pc:sldMk cId="18420826" sldId="294"/>
+            <ac:spMk id="3" creationId="{1095E837-F77E-AE4D-944C-919B5D780AAA}"/>
+          </ac:spMkLst>
+        </pc:spChg>
+        <pc:picChg chg="add mod">
+          <ac:chgData name="William Estes" userId="a88fcdbc31b6f594" providerId="Windows Live" clId="Web-{10FD8D96-9E5A-4BEB-31AC-11A1018D4BCE}" dt="2020-08-30T20:36:22.510" v="628" actId="14100"/>
+          <ac:picMkLst>
+            <pc:docMk/>
+            <pc:sldMk cId="18420826" sldId="294"/>
+            <ac:picMk id="4" creationId="{F86C7889-CD4D-48A5-84FB-A1AF08FD274C}"/>
+          </ac:picMkLst>
+        </pc:picChg>
       </pc:sldChg>
-      <pc:sldChg chg="delSp">
-        <pc:chgData name="William Estes" userId="a88fcdbc31b6f594" providerId="Windows Live" clId="Web-{031C1E02-F537-4B69-F31C-E9378A6E06AC}" dt="2020-09-07T21:36:55.883" v="1359"/>
+      <pc:sldChg chg="del">
+        <pc:chgData name="William Estes" userId="a88fcdbc31b6f594" providerId="Windows Live" clId="Web-{10FD8D96-9E5A-4BEB-31AC-11A1018D4BCE}" dt="2020-08-30T20:15:31.102" v="96"/>
+        <pc:sldMkLst>
+          <pc:docMk/>
+          <pc:sldMk cId="3221878255" sldId="294"/>
+        </pc:sldMkLst>
+      </pc:sldChg>
+      <pc:sldChg chg="addSp modSp add ord replId">
+        <pc:chgData name="William Estes" userId="a88fcdbc31b6f594" providerId="Windows Live" clId="Web-{10FD8D96-9E5A-4BEB-31AC-11A1018D4BCE}" dt="2020-08-30T20:41:08.450" v="853" actId="1076"/>
         <pc:sldMkLst>
           <pc:docMk/>
           <pc:sldMk cId="2184220433" sldId="295"/>
         </pc:sldMkLst>
-        <pc:picChg chg="del">
-          <ac:chgData name="William Estes" userId="a88fcdbc31b6f594" providerId="Windows Live" clId="Web-{031C1E02-F537-4B69-F31C-E9378A6E06AC}" dt="2020-09-07T21:36:55.883" v="1359"/>
+        <pc:spChg chg="mod">
+          <ac:chgData name="William Estes" userId="a88fcdbc31b6f594" providerId="Windows Live" clId="Web-{10FD8D96-9E5A-4BEB-31AC-11A1018D4BCE}" dt="2020-08-30T20:40:47.512" v="845" actId="20577"/>
+          <ac:spMkLst>
+            <pc:docMk/>
+            <pc:sldMk cId="2184220433" sldId="295"/>
+            <ac:spMk id="3" creationId="{1095E837-F77E-AE4D-944C-919B5D780AAA}"/>
+          </ac:spMkLst>
+        </pc:spChg>
+        <pc:spChg chg="add mod">
+          <ac:chgData name="William Estes" userId="a88fcdbc31b6f594" providerId="Windows Live" clId="Web-{10FD8D96-9E5A-4BEB-31AC-11A1018D4BCE}" dt="2020-08-30T20:41:00.028" v="850" actId="14100"/>
+          <ac:spMkLst>
+            <pc:docMk/>
+            <pc:sldMk cId="2184220433" sldId="295"/>
+            <ac:spMk id="5" creationId="{7B16B923-1F9B-4609-AF2C-FA03D25659EE}"/>
+          </ac:spMkLst>
+        </pc:spChg>
+        <pc:picChg chg="add mod">
+          <ac:chgData name="William Estes" userId="a88fcdbc31b6f594" providerId="Windows Live" clId="Web-{10FD8D96-9E5A-4BEB-31AC-11A1018D4BCE}" dt="2020-08-30T20:41:08.450" v="853" actId="1076"/>
           <ac:picMkLst>
             <pc:docMk/>
             <pc:sldMk cId="2184220433" sldId="295"/>
@@ -198,22 +813,45 @@
           </ac:picMkLst>
         </pc:picChg>
       </pc:sldChg>
-      <pc:sldChg chg="delSp modSp">
-        <pc:chgData name="William Estes" userId="a88fcdbc31b6f594" providerId="Windows Live" clId="Web-{031C1E02-F537-4B69-F31C-E9378A6E06AC}" dt="2020-09-07T21:37:13.149" v="1368" actId="1076"/>
+      <pc:sldChg chg="del">
+        <pc:chgData name="William Estes" userId="a88fcdbc31b6f594" providerId="Windows Live" clId="Web-{10FD8D96-9E5A-4BEB-31AC-11A1018D4BCE}" dt="2020-08-30T20:15:31.102" v="95"/>
+        <pc:sldMkLst>
+          <pc:docMk/>
+          <pc:sldMk cId="3635157167" sldId="295"/>
+        </pc:sldMkLst>
+      </pc:sldChg>
+      <pc:sldChg chg="addSp delSp modSp add replId">
+        <pc:chgData name="William Estes" userId="a88fcdbc31b6f594" providerId="Windows Live" clId="Web-{10FD8D96-9E5A-4BEB-31AC-11A1018D4BCE}" dt="2020-08-30T20:55:37.564" v="1030" actId="20577"/>
         <pc:sldMkLst>
           <pc:docMk/>
           <pc:sldMk cId="1522982694" sldId="296"/>
         </pc:sldMkLst>
         <pc:spChg chg="mod">
-          <ac:chgData name="William Estes" userId="a88fcdbc31b6f594" providerId="Windows Live" clId="Web-{031C1E02-F537-4B69-F31C-E9378A6E06AC}" dt="2020-09-07T21:37:08.320" v="1365" actId="20577"/>
+          <ac:chgData name="William Estes" userId="a88fcdbc31b6f594" providerId="Windows Live" clId="Web-{10FD8D96-9E5A-4BEB-31AC-11A1018D4BCE}" dt="2020-08-30T20:55:37.564" v="1030" actId="20577"/>
           <ac:spMkLst>
             <pc:docMk/>
             <pc:sldMk cId="1522982694" sldId="296"/>
             <ac:spMk id="3" creationId="{1095E837-F77E-AE4D-944C-919B5D780AAA}"/>
           </ac:spMkLst>
         </pc:spChg>
-        <pc:spChg chg="mod">
-          <ac:chgData name="William Estes" userId="a88fcdbc31b6f594" providerId="Windows Live" clId="Web-{031C1E02-F537-4B69-F31C-E9378A6E06AC}" dt="2020-09-07T21:37:13.149" v="1368" actId="1076"/>
+        <pc:spChg chg="del">
+          <ac:chgData name="William Estes" userId="a88fcdbc31b6f594" providerId="Windows Live" clId="Web-{10FD8D96-9E5A-4BEB-31AC-11A1018D4BCE}" dt="2020-08-30T20:47:01.499" v="872"/>
+          <ac:spMkLst>
+            <pc:docMk/>
+            <pc:sldMk cId="1522982694" sldId="296"/>
+            <ac:spMk id="5" creationId="{7B16B923-1F9B-4609-AF2C-FA03D25659EE}"/>
+          </ac:spMkLst>
+        </pc:spChg>
+        <pc:spChg chg="add mod">
+          <ac:chgData name="William Estes" userId="a88fcdbc31b6f594" providerId="Windows Live" clId="Web-{10FD8D96-9E5A-4BEB-31AC-11A1018D4BCE}" dt="2020-08-30T20:48:48.905" v="913" actId="14100"/>
+          <ac:spMkLst>
+            <pc:docMk/>
+            <pc:sldMk cId="1522982694" sldId="296"/>
+            <ac:spMk id="6" creationId="{8D3881AF-2AF0-4DF1-977D-DEFDD2FCFF0A}"/>
+          </ac:spMkLst>
+        </pc:spChg>
+        <pc:spChg chg="add mod">
+          <ac:chgData name="William Estes" userId="a88fcdbc31b6f594" providerId="Windows Live" clId="Web-{10FD8D96-9E5A-4BEB-31AC-11A1018D4BCE}" dt="2020-08-30T20:51:06.469" v="963" actId="14100"/>
           <ac:spMkLst>
             <pc:docMk/>
             <pc:sldMk cId="1522982694" sldId="296"/>
@@ -221,7 +859,15 @@
           </ac:spMkLst>
         </pc:spChg>
         <pc:picChg chg="del">
-          <ac:chgData name="William Estes" userId="a88fcdbc31b6f594" providerId="Windows Live" clId="Web-{031C1E02-F537-4B69-F31C-E9378A6E06AC}" dt="2020-09-07T21:36:58.384" v="1360"/>
+          <ac:chgData name="William Estes" userId="a88fcdbc31b6f594" providerId="Windows Live" clId="Web-{10FD8D96-9E5A-4BEB-31AC-11A1018D4BCE}" dt="2020-08-30T20:46:55.764" v="868"/>
+          <ac:picMkLst>
+            <pc:docMk/>
+            <pc:sldMk cId="1522982694" sldId="296"/>
+            <ac:picMk id="4" creationId="{04D5CF95-8307-4AE3-987D-18DF7B0726A2}"/>
+          </ac:picMkLst>
+        </pc:picChg>
+        <pc:picChg chg="add mod">
+          <ac:chgData name="William Estes" userId="a88fcdbc31b6f594" providerId="Windows Live" clId="Web-{10FD8D96-9E5A-4BEB-31AC-11A1018D4BCE}" dt="2020-08-30T20:54:23.954" v="967" actId="1076"/>
           <ac:picMkLst>
             <pc:docMk/>
             <pc:sldMk cId="1522982694" sldId="296"/>
@@ -229,338 +875,272 @@
           </ac:picMkLst>
         </pc:picChg>
       </pc:sldChg>
-      <pc:sldChg chg="del">
-        <pc:chgData name="William Estes" userId="a88fcdbc31b6f594" providerId="Windows Live" clId="Web-{031C1E02-F537-4B69-F31C-E9378A6E06AC}" dt="2020-09-07T21:36:36.149" v="1358"/>
+      <pc:sldChg chg="addSp delSp modSp add replId">
+        <pc:chgData name="William Estes" userId="a88fcdbc31b6f594" providerId="Windows Live" clId="Web-{10FD8D96-9E5A-4BEB-31AC-11A1018D4BCE}" dt="2020-08-30T21:10:54.399" v="1198" actId="1076"/>
         <pc:sldMkLst>
           <pc:docMk/>
           <pc:sldMk cId="3207294362" sldId="297"/>
         </pc:sldMkLst>
+        <pc:spChg chg="mod">
+          <ac:chgData name="William Estes" userId="a88fcdbc31b6f594" providerId="Windows Live" clId="Web-{10FD8D96-9E5A-4BEB-31AC-11A1018D4BCE}" dt="2020-08-30T21:10:48.633" v="1193" actId="20577"/>
+          <ac:spMkLst>
+            <pc:docMk/>
+            <pc:sldMk cId="3207294362" sldId="297"/>
+            <ac:spMk id="3" creationId="{1095E837-F77E-AE4D-944C-919B5D780AAA}"/>
+          </ac:spMkLst>
+        </pc:spChg>
+        <pc:spChg chg="del">
+          <ac:chgData name="William Estes" userId="a88fcdbc31b6f594" providerId="Windows Live" clId="Web-{10FD8D96-9E5A-4BEB-31AC-11A1018D4BCE}" dt="2020-08-30T21:03:15.068" v="1035"/>
+          <ac:spMkLst>
+            <pc:docMk/>
+            <pc:sldMk cId="3207294362" sldId="297"/>
+            <ac:spMk id="6" creationId="{8D3881AF-2AF0-4DF1-977D-DEFDD2FCFF0A}"/>
+          </ac:spMkLst>
+        </pc:spChg>
+        <pc:spChg chg="del">
+          <ac:chgData name="William Estes" userId="a88fcdbc31b6f594" providerId="Windows Live" clId="Web-{10FD8D96-9E5A-4BEB-31AC-11A1018D4BCE}" dt="2020-08-30T21:03:12.630" v="1034"/>
+          <ac:spMkLst>
+            <pc:docMk/>
+            <pc:sldMk cId="3207294362" sldId="297"/>
+            <ac:spMk id="7" creationId="{F5D9FE73-3240-4541-BA18-9018D3F5BAA8}"/>
+          </ac:spMkLst>
+        </pc:spChg>
+        <pc:picChg chg="add mod">
+          <ac:chgData name="William Estes" userId="a88fcdbc31b6f594" providerId="Windows Live" clId="Web-{10FD8D96-9E5A-4BEB-31AC-11A1018D4BCE}" dt="2020-08-30T21:10:54.399" v="1198" actId="1076"/>
+          <ac:picMkLst>
+            <pc:docMk/>
+            <pc:sldMk cId="3207294362" sldId="297"/>
+            <ac:picMk id="4" creationId="{42593F90-D938-4E7A-9AC8-891253E5C3BA}"/>
+          </ac:picMkLst>
+        </pc:picChg>
+        <pc:picChg chg="del">
+          <ac:chgData name="William Estes" userId="a88fcdbc31b6f594" providerId="Windows Live" clId="Web-{10FD8D96-9E5A-4BEB-31AC-11A1018D4BCE}" dt="2020-08-30T21:03:08.427" v="1033"/>
+          <ac:picMkLst>
+            <pc:docMk/>
+            <pc:sldMk cId="3207294362" sldId="297"/>
+            <ac:picMk id="8" creationId="{0B629BCE-AF24-4351-ADB1-FA7CD0617AB7}"/>
+          </ac:picMkLst>
+        </pc:picChg>
       </pc:sldChg>
-      <pc:sldChg chg="del">
-        <pc:chgData name="William Estes" userId="a88fcdbc31b6f594" providerId="Windows Live" clId="Web-{031C1E02-F537-4B69-F31C-E9378A6E06AC}" dt="2020-09-07T21:36:33.711" v="1357"/>
+      <pc:sldChg chg="addSp delSp modSp add replId">
+        <pc:chgData name="William Estes" userId="a88fcdbc31b6f594" providerId="Windows Live" clId="Web-{10FD8D96-9E5A-4BEB-31AC-11A1018D4BCE}" dt="2020-08-30T21:22:49.090" v="1363" actId="14100"/>
         <pc:sldMkLst>
           <pc:docMk/>
           <pc:sldMk cId="827534898" sldId="298"/>
         </pc:sldMkLst>
+        <pc:spChg chg="mod">
+          <ac:chgData name="William Estes" userId="a88fcdbc31b6f594" providerId="Windows Live" clId="Web-{10FD8D96-9E5A-4BEB-31AC-11A1018D4BCE}" dt="2020-08-30T21:22:45.122" v="1360" actId="20577"/>
+          <ac:spMkLst>
+            <pc:docMk/>
+            <pc:sldMk cId="827534898" sldId="298"/>
+            <ac:spMk id="3" creationId="{1095E837-F77E-AE4D-944C-919B5D780AAA}"/>
+          </ac:spMkLst>
+        </pc:spChg>
+        <pc:picChg chg="del">
+          <ac:chgData name="William Estes" userId="a88fcdbc31b6f594" providerId="Windows Live" clId="Web-{10FD8D96-9E5A-4BEB-31AC-11A1018D4BCE}" dt="2020-08-30T21:11:09.149" v="1200"/>
+          <ac:picMkLst>
+            <pc:docMk/>
+            <pc:sldMk cId="827534898" sldId="298"/>
+            <ac:picMk id="4" creationId="{42593F90-D938-4E7A-9AC8-891253E5C3BA}"/>
+          </ac:picMkLst>
+        </pc:picChg>
+        <pc:picChg chg="add mod">
+          <ac:chgData name="William Estes" userId="a88fcdbc31b6f594" providerId="Windows Live" clId="Web-{10FD8D96-9E5A-4BEB-31AC-11A1018D4BCE}" dt="2020-08-30T21:22:49.090" v="1363" actId="14100"/>
+          <ac:picMkLst>
+            <pc:docMk/>
+            <pc:sldMk cId="827534898" sldId="298"/>
+            <ac:picMk id="5" creationId="{4782406E-292E-4236-9924-39FDA804D487}"/>
+          </ac:picMkLst>
+        </pc:picChg>
       </pc:sldChg>
       <pc:sldChg chg="del">
-        <pc:chgData name="William Estes" userId="a88fcdbc31b6f594" providerId="Windows Live" clId="Web-{031C1E02-F537-4B69-F31C-E9378A6E06AC}" dt="2020-09-07T21:36:30.243" v="1356"/>
+        <pc:chgData name="William Estes" userId="a88fcdbc31b6f594" providerId="Windows Live" clId="Web-{10FD8D96-9E5A-4BEB-31AC-11A1018D4BCE}" dt="2020-08-30T20:15:31.117" v="99"/>
+        <pc:sldMkLst>
+          <pc:docMk/>
+          <pc:sldMk cId="1978656173" sldId="298"/>
+        </pc:sldMkLst>
+      </pc:sldChg>
+      <pc:sldChg chg="del">
+        <pc:chgData name="William Estes" userId="a88fcdbc31b6f594" providerId="Windows Live" clId="Web-{10FD8D96-9E5A-4BEB-31AC-11A1018D4BCE}" dt="2020-08-30T20:15:31.102" v="98"/>
+        <pc:sldMkLst>
+          <pc:docMk/>
+          <pc:sldMk cId="1101533116" sldId="299"/>
+        </pc:sldMkLst>
+      </pc:sldChg>
+      <pc:sldChg chg="addSp delSp modSp add replId">
+        <pc:chgData name="William Estes" userId="a88fcdbc31b6f594" providerId="Windows Live" clId="Web-{10FD8D96-9E5A-4BEB-31AC-11A1018D4BCE}" dt="2020-08-30T21:37:50.173" v="1475" actId="20577"/>
         <pc:sldMkLst>
           <pc:docMk/>
           <pc:sldMk cId="4080448644" sldId="299"/>
         </pc:sldMkLst>
+        <pc:spChg chg="mod">
+          <ac:chgData name="William Estes" userId="a88fcdbc31b6f594" providerId="Windows Live" clId="Web-{10FD8D96-9E5A-4BEB-31AC-11A1018D4BCE}" dt="2020-08-30T21:37:50.173" v="1475" actId="20577"/>
+          <ac:spMkLst>
+            <pc:docMk/>
+            <pc:sldMk cId="4080448644" sldId="299"/>
+            <ac:spMk id="3" creationId="{1095E837-F77E-AE4D-944C-919B5D780AAA}"/>
+          </ac:spMkLst>
+        </pc:spChg>
+        <pc:picChg chg="add mod">
+          <ac:chgData name="William Estes" userId="a88fcdbc31b6f594" providerId="Windows Live" clId="Web-{10FD8D96-9E5A-4BEB-31AC-11A1018D4BCE}" dt="2020-08-30T21:35:40.829" v="1449" actId="1076"/>
+          <ac:picMkLst>
+            <pc:docMk/>
+            <pc:sldMk cId="4080448644" sldId="299"/>
+            <ac:picMk id="4" creationId="{5CE153C2-E53B-443F-A1B7-1CECE7EE55A0}"/>
+          </ac:picMkLst>
+        </pc:picChg>
+        <pc:picChg chg="del">
+          <ac:chgData name="William Estes" userId="a88fcdbc31b6f594" providerId="Windows Live" clId="Web-{10FD8D96-9E5A-4BEB-31AC-11A1018D4BCE}" dt="2020-08-30T21:33:25.329" v="1376"/>
+          <ac:picMkLst>
+            <pc:docMk/>
+            <pc:sldMk cId="4080448644" sldId="299"/>
+            <ac:picMk id="5" creationId="{4782406E-292E-4236-9924-39FDA804D487}"/>
+          </ac:picMkLst>
+        </pc:picChg>
       </pc:sldChg>
       <pc:sldChg chg="del">
-        <pc:chgData name="William Estes" userId="a88fcdbc31b6f594" providerId="Windows Live" clId="Web-{031C1E02-F537-4B69-F31C-E9378A6E06AC}" dt="2020-09-07T21:36:21.508" v="1352"/>
+        <pc:chgData name="William Estes" userId="a88fcdbc31b6f594" providerId="Windows Live" clId="Web-{10FD8D96-9E5A-4BEB-31AC-11A1018D4BCE}" dt="2020-08-30T20:15:31.102" v="94"/>
+        <pc:sldMkLst>
+          <pc:docMk/>
+          <pc:sldMk cId="433070316" sldId="300"/>
+        </pc:sldMkLst>
+      </pc:sldChg>
+      <pc:sldChg chg="add del replId">
+        <pc:chgData name="William Estes" userId="a88fcdbc31b6f594" providerId="Windows Live" clId="Web-{10FD8D96-9E5A-4BEB-31AC-11A1018D4BCE}" dt="2020-08-30T21:35:57.673" v="1450"/>
+        <pc:sldMkLst>
+          <pc:docMk/>
+          <pc:sldMk cId="1750154891" sldId="300"/>
+        </pc:sldMkLst>
+      </pc:sldChg>
+      <pc:sldChg chg="addSp delSp modSp add replId">
+        <pc:chgData name="William Estes" userId="a88fcdbc31b6f594" providerId="Windows Live" clId="Web-{10FD8D96-9E5A-4BEB-31AC-11A1018D4BCE}" dt="2020-08-30T21:42:58.862" v="1534" actId="20577"/>
         <pc:sldMkLst>
           <pc:docMk/>
           <pc:sldMk cId="4113558887" sldId="300"/>
         </pc:sldMkLst>
+        <pc:spChg chg="mod">
+          <ac:chgData name="William Estes" userId="a88fcdbc31b6f594" providerId="Windows Live" clId="Web-{10FD8D96-9E5A-4BEB-31AC-11A1018D4BCE}" dt="2020-08-30T21:42:58.862" v="1534" actId="20577"/>
+          <ac:spMkLst>
+            <pc:docMk/>
+            <pc:sldMk cId="4113558887" sldId="300"/>
+            <ac:spMk id="3" creationId="{1095E837-F77E-AE4D-944C-919B5D780AAA}"/>
+          </ac:spMkLst>
+        </pc:spChg>
+        <pc:picChg chg="del">
+          <ac:chgData name="William Estes" userId="a88fcdbc31b6f594" providerId="Windows Live" clId="Web-{10FD8D96-9E5A-4BEB-31AC-11A1018D4BCE}" dt="2020-08-30T21:38:48.674" v="1478"/>
+          <ac:picMkLst>
+            <pc:docMk/>
+            <pc:sldMk cId="4113558887" sldId="300"/>
+            <ac:picMk id="4" creationId="{5CE153C2-E53B-443F-A1B7-1CECE7EE55A0}"/>
+          </ac:picMkLst>
+        </pc:picChg>
+        <pc:picChg chg="add mod">
+          <ac:chgData name="William Estes" userId="a88fcdbc31b6f594" providerId="Windows Live" clId="Web-{10FD8D96-9E5A-4BEB-31AC-11A1018D4BCE}" dt="2020-08-30T21:42:40.644" v="1482" actId="14100"/>
+          <ac:picMkLst>
+            <pc:docMk/>
+            <pc:sldMk cId="4113558887" sldId="300"/>
+            <ac:picMk id="5" creationId="{D37651DB-3834-493B-8A24-2FE8EFC6849E}"/>
+          </ac:picMkLst>
+        </pc:picChg>
       </pc:sldChg>
-      <pc:sldChg chg="del">
-        <pc:chgData name="William Estes" userId="a88fcdbc31b6f594" providerId="Windows Live" clId="Web-{031C1E02-F537-4B69-F31C-E9378A6E06AC}" dt="2020-09-07T21:36:22.852" v="1353"/>
+      <pc:sldChg chg="delSp modSp add replId">
+        <pc:chgData name="William Estes" userId="a88fcdbc31b6f594" providerId="Windows Live" clId="Web-{10FD8D96-9E5A-4BEB-31AC-11A1018D4BCE}" dt="2020-08-30T21:55:33.804" v="1808" actId="20577"/>
+        <pc:sldMkLst>
+          <pc:docMk/>
+          <pc:sldMk cId="356878534" sldId="301"/>
+        </pc:sldMkLst>
+        <pc:spChg chg="mod">
+          <ac:chgData name="William Estes" userId="a88fcdbc31b6f594" providerId="Windows Live" clId="Web-{10FD8D96-9E5A-4BEB-31AC-11A1018D4BCE}" dt="2020-08-30T21:55:33.804" v="1808" actId="20577"/>
+          <ac:spMkLst>
+            <pc:docMk/>
+            <pc:sldMk cId="356878534" sldId="301"/>
+            <ac:spMk id="3" creationId="{1095E837-F77E-AE4D-944C-919B5D780AAA}"/>
+          </ac:spMkLst>
+        </pc:spChg>
+        <pc:spChg chg="del">
+          <ac:chgData name="William Estes" userId="a88fcdbc31b6f594" providerId="Windows Live" clId="Web-{10FD8D96-9E5A-4BEB-31AC-11A1018D4BCE}" dt="2020-08-30T21:52:34.553" v="1606"/>
+          <ac:spMkLst>
+            <pc:docMk/>
+            <pc:sldMk cId="356878534" sldId="301"/>
+            <ac:spMk id="5" creationId="{7B16B923-1F9B-4609-AF2C-FA03D25659EE}"/>
+          </ac:spMkLst>
+        </pc:spChg>
+        <pc:picChg chg="del">
+          <ac:chgData name="William Estes" userId="a88fcdbc31b6f594" providerId="Windows Live" clId="Web-{10FD8D96-9E5A-4BEB-31AC-11A1018D4BCE}" dt="2020-08-30T21:52:58.709" v="1646"/>
+          <ac:picMkLst>
+            <pc:docMk/>
+            <pc:sldMk cId="356878534" sldId="301"/>
+            <ac:picMk id="4" creationId="{04D5CF95-8307-4AE3-987D-18DF7B0726A2}"/>
+          </ac:picMkLst>
+        </pc:picChg>
+      </pc:sldChg>
+      <pc:sldChg chg="addSp delSp modSp add replId">
+        <pc:chgData name="William Estes" userId="a88fcdbc31b6f594" providerId="Windows Live" clId="Web-{10FD8D96-9E5A-4BEB-31AC-11A1018D4BCE}" dt="2020-08-30T22:05:58.839" v="1932" actId="20577"/>
         <pc:sldMkLst>
           <pc:docMk/>
           <pc:sldMk cId="871545074" sldId="302"/>
         </pc:sldMkLst>
+        <pc:spChg chg="mod">
+          <ac:chgData name="William Estes" userId="a88fcdbc31b6f594" providerId="Windows Live" clId="Web-{10FD8D96-9E5A-4BEB-31AC-11A1018D4BCE}" dt="2020-08-30T22:05:58.839" v="1932" actId="20577"/>
+          <ac:spMkLst>
+            <pc:docMk/>
+            <pc:sldMk cId="871545074" sldId="302"/>
+            <ac:spMk id="3" creationId="{1095E837-F77E-AE4D-944C-919B5D780AAA}"/>
+          </ac:spMkLst>
+        </pc:spChg>
+        <pc:picChg chg="add mod">
+          <ac:chgData name="William Estes" userId="a88fcdbc31b6f594" providerId="Windows Live" clId="Web-{10FD8D96-9E5A-4BEB-31AC-11A1018D4BCE}" dt="2020-08-30T22:01:41.978" v="1869" actId="1076"/>
+          <ac:picMkLst>
+            <pc:docMk/>
+            <pc:sldMk cId="871545074" sldId="302"/>
+            <ac:picMk id="4" creationId="{D5B4F8F0-E1EC-45B9-8407-773939B2E634}"/>
+          </ac:picMkLst>
+        </pc:picChg>
+        <pc:picChg chg="del">
+          <ac:chgData name="William Estes" userId="a88fcdbc31b6f594" providerId="Windows Live" clId="Web-{10FD8D96-9E5A-4BEB-31AC-11A1018D4BCE}" dt="2020-08-30T22:01:13.868" v="1865"/>
+          <ac:picMkLst>
+            <pc:docMk/>
+            <pc:sldMk cId="871545074" sldId="302"/>
+            <ac:picMk id="5" creationId="{D37651DB-3834-493B-8A24-2FE8EFC6849E}"/>
+          </ac:picMkLst>
+        </pc:picChg>
       </pc:sldChg>
-      <pc:sldChg chg="del">
-        <pc:chgData name="William Estes" userId="a88fcdbc31b6f594" providerId="Windows Live" clId="Web-{031C1E02-F537-4B69-F31C-E9378A6E06AC}" dt="2020-09-07T21:36:23.977" v="1354"/>
+      <pc:sldChg chg="addSp delSp modSp add replId">
+        <pc:chgData name="William Estes" userId="a88fcdbc31b6f594" providerId="Windows Live" clId="Web-{10FD8D96-9E5A-4BEB-31AC-11A1018D4BCE}" dt="2020-08-30T22:08:08.246" v="1941" actId="1076"/>
         <pc:sldMkLst>
           <pc:docMk/>
           <pc:sldMk cId="284483567" sldId="303"/>
         </pc:sldMkLst>
-      </pc:sldChg>
-      <pc:sldChg chg="addSp delSp modSp">
-        <pc:chgData name="William Estes" userId="a88fcdbc31b6f594" providerId="Windows Live" clId="Web-{031C1E02-F537-4B69-F31C-E9378A6E06AC}" dt="2020-09-07T21:23:14.007" v="781" actId="20577"/>
-        <pc:sldMkLst>
-          <pc:docMk/>
-          <pc:sldMk cId="2117440973" sldId="309"/>
-        </pc:sldMkLst>
         <pc:spChg chg="mod">
-          <ac:chgData name="William Estes" userId="a88fcdbc31b6f594" providerId="Windows Live" clId="Web-{031C1E02-F537-4B69-F31C-E9378A6E06AC}" dt="2020-09-07T21:23:14.007" v="781" actId="20577"/>
-          <ac:spMkLst>
-            <pc:docMk/>
-            <pc:sldMk cId="2117440973" sldId="309"/>
-            <ac:spMk id="3" creationId="{3713A5A2-1019-0143-BC00-1B8B12D7C198}"/>
-          </ac:spMkLst>
-        </pc:spChg>
-        <pc:picChg chg="add del mod">
-          <ac:chgData name="William Estes" userId="a88fcdbc31b6f594" providerId="Windows Live" clId="Web-{031C1E02-F537-4B69-F31C-E9378A6E06AC}" dt="2020-09-07T21:20:00.164" v="765"/>
+          <ac:chgData name="William Estes" userId="a88fcdbc31b6f594" providerId="Windows Live" clId="Web-{10FD8D96-9E5A-4BEB-31AC-11A1018D4BCE}" dt="2020-08-30T22:05:48.073" v="1918" actId="20577"/>
+          <ac:spMkLst>
+            <pc:docMk/>
+            <pc:sldMk cId="284483567" sldId="303"/>
+            <ac:spMk id="3" creationId="{1095E837-F77E-AE4D-944C-919B5D780AAA}"/>
+          </ac:spMkLst>
+        </pc:spChg>
+        <pc:picChg chg="del">
+          <ac:chgData name="William Estes" userId="a88fcdbc31b6f594" providerId="Windows Live" clId="Web-{10FD8D96-9E5A-4BEB-31AC-11A1018D4BCE}" dt="2020-08-30T22:06:03.823" v="1934"/>
           <ac:picMkLst>
             <pc:docMk/>
-            <pc:sldMk cId="2117440973" sldId="309"/>
-            <ac:picMk id="4" creationId="{4EE4A1E1-9F40-40B9-BE46-A40DEE1C7756}"/>
-          </ac:picMkLst>
-        </pc:picChg>
-        <pc:picChg chg="add del mod">
-          <ac:chgData name="William Estes" userId="a88fcdbc31b6f594" providerId="Windows Live" clId="Web-{031C1E02-F537-4B69-F31C-E9378A6E06AC}" dt="2020-09-07T21:20:01.289" v="766"/>
-          <ac:picMkLst>
-            <pc:docMk/>
-            <pc:sldMk cId="2117440973" sldId="309"/>
-            <ac:picMk id="5" creationId="{CC33AD93-8584-4C73-ACD1-137E417FEDC1}"/>
-          </ac:picMkLst>
-        </pc:picChg>
-      </pc:sldChg>
-      <pc:sldChg chg="new del">
-        <pc:chgData name="William Estes" userId="a88fcdbc31b6f594" providerId="Windows Live" clId="Web-{031C1E02-F537-4B69-F31C-E9378A6E06AC}" dt="2020-09-07T20:22:59.328" v="51"/>
-        <pc:sldMkLst>
-          <pc:docMk/>
-          <pc:sldMk cId="3081972389" sldId="310"/>
-        </pc:sldMkLst>
-      </pc:sldChg>
-      <pc:sldChg chg="addSp delSp modSp add replId">
-        <pc:chgData name="William Estes" userId="a88fcdbc31b6f594" providerId="Windows Live" clId="Web-{031C1E02-F537-4B69-F31C-E9378A6E06AC}" dt="2020-09-07T20:54:26.215" v="684" actId="1076"/>
-        <pc:sldMkLst>
-          <pc:docMk/>
-          <pc:sldMk cId="3606642476" sldId="310"/>
-        </pc:sldMkLst>
-        <pc:spChg chg="mod">
-          <ac:chgData name="William Estes" userId="a88fcdbc31b6f594" providerId="Windows Live" clId="Web-{031C1E02-F537-4B69-F31C-E9378A6E06AC}" dt="2020-09-07T20:54:14.153" v="677" actId="20577"/>
-          <ac:spMkLst>
-            <pc:docMk/>
-            <pc:sldMk cId="3606642476" sldId="310"/>
-            <ac:spMk id="3" creationId="{3713A5A2-1019-0143-BC00-1B8B12D7C198}"/>
-          </ac:spMkLst>
-        </pc:spChg>
-        <pc:picChg chg="add del mod">
-          <ac:chgData name="William Estes" userId="a88fcdbc31b6f594" providerId="Windows Live" clId="Web-{031C1E02-F537-4B69-F31C-E9378A6E06AC}" dt="2020-09-07T20:31:21.173" v="243"/>
-          <ac:picMkLst>
-            <pc:docMk/>
-            <pc:sldMk cId="3606642476" sldId="310"/>
-            <ac:picMk id="4" creationId="{C2A73B43-63A2-4348-8210-E243D932F19A}"/>
-          </ac:picMkLst>
-        </pc:picChg>
-        <pc:picChg chg="add del mod">
-          <ac:chgData name="William Estes" userId="a88fcdbc31b6f594" providerId="Windows Live" clId="Web-{031C1E02-F537-4B69-F31C-E9378A6E06AC}" dt="2020-09-07T20:31:22.188" v="244"/>
-          <ac:picMkLst>
-            <pc:docMk/>
-            <pc:sldMk cId="3606642476" sldId="310"/>
-            <ac:picMk id="5" creationId="{98C6B8A0-0890-43EE-AFC9-F0CA42B6C48F}"/>
+            <pc:sldMk cId="284483567" sldId="303"/>
+            <ac:picMk id="4" creationId="{D5B4F8F0-E1EC-45B9-8407-773939B2E634}"/>
           </ac:picMkLst>
         </pc:picChg>
         <pc:picChg chg="add mod">
-          <ac:chgData name="William Estes" userId="a88fcdbc31b6f594" providerId="Windows Live" clId="Web-{031C1E02-F537-4B69-F31C-E9378A6E06AC}" dt="2020-09-07T20:54:26.215" v="684" actId="1076"/>
+          <ac:chgData name="William Estes" userId="a88fcdbc31b6f594" providerId="Windows Live" clId="Web-{10FD8D96-9E5A-4BEB-31AC-11A1018D4BCE}" dt="2020-08-30T22:06:38.511" v="1937" actId="14100"/>
           <ac:picMkLst>
             <pc:docMk/>
-            <pc:sldMk cId="3606642476" sldId="310"/>
-            <ac:picMk id="6" creationId="{2EE93A3D-157E-4114-9622-C81895DD233E}"/>
-          </ac:picMkLst>
-        </pc:picChg>
-      </pc:sldChg>
-      <pc:sldChg chg="addSp modSp add ord replId">
-        <pc:chgData name="William Estes" userId="a88fcdbc31b6f594" providerId="Windows Live" clId="Web-{031C1E02-F537-4B69-F31C-E9378A6E06AC}" dt="2020-09-07T21:15:42.352" v="749" actId="14100"/>
-        <pc:sldMkLst>
-          <pc:docMk/>
-          <pc:sldMk cId="1624642261" sldId="311"/>
-        </pc:sldMkLst>
-        <pc:spChg chg="mod">
-          <ac:chgData name="William Estes" userId="a88fcdbc31b6f594" providerId="Windows Live" clId="Web-{031C1E02-F537-4B69-F31C-E9378A6E06AC}" dt="2020-09-07T21:14:12.071" v="742" actId="20577"/>
-          <ac:spMkLst>
-            <pc:docMk/>
-            <pc:sldMk cId="1624642261" sldId="311"/>
-            <ac:spMk id="3" creationId="{3713A5A2-1019-0143-BC00-1B8B12D7C198}"/>
-          </ac:spMkLst>
-        </pc:spChg>
-        <pc:picChg chg="mod">
-          <ac:chgData name="William Estes" userId="a88fcdbc31b6f594" providerId="Windows Live" clId="Web-{031C1E02-F537-4B69-F31C-E9378A6E06AC}" dt="2020-09-07T21:14:16.227" v="745" actId="1076"/>
-          <ac:picMkLst>
-            <pc:docMk/>
-            <pc:sldMk cId="1624642261" sldId="311"/>
-            <ac:picMk id="4" creationId="{C2A73B43-63A2-4348-8210-E243D932F19A}"/>
-          </ac:picMkLst>
-        </pc:picChg>
-        <pc:picChg chg="mod">
-          <ac:chgData name="William Estes" userId="a88fcdbc31b6f594" providerId="Windows Live" clId="Web-{031C1E02-F537-4B69-F31C-E9378A6E06AC}" dt="2020-09-07T21:14:18.399" v="746" actId="1076"/>
-          <ac:picMkLst>
-            <pc:docMk/>
-            <pc:sldMk cId="1624642261" sldId="311"/>
-            <ac:picMk id="5" creationId="{98C6B8A0-0890-43EE-AFC9-F0CA42B6C48F}"/>
+            <pc:sldMk cId="284483567" sldId="303"/>
+            <ac:picMk id="5" creationId="{37922CBB-1EDC-42F3-87C5-053506E379CC}"/>
           </ac:picMkLst>
         </pc:picChg>
         <pc:picChg chg="add mod">
-          <ac:chgData name="William Estes" userId="a88fcdbc31b6f594" providerId="Windows Live" clId="Web-{031C1E02-F537-4B69-F31C-E9378A6E06AC}" dt="2020-09-07T21:15:42.352" v="749" actId="14100"/>
+          <ac:chgData name="William Estes" userId="a88fcdbc31b6f594" providerId="Windows Live" clId="Web-{10FD8D96-9E5A-4BEB-31AC-11A1018D4BCE}" dt="2020-08-30T22:08:08.246" v="1941" actId="1076"/>
           <ac:picMkLst>
             <pc:docMk/>
-            <pc:sldMk cId="1624642261" sldId="311"/>
-            <ac:picMk id="6" creationId="{4F0D4502-44B3-44A8-AED0-897726E24FA0}"/>
-          </ac:picMkLst>
-        </pc:picChg>
-      </pc:sldChg>
-      <pc:sldChg chg="addSp delSp modSp add ord replId">
-        <pc:chgData name="William Estes" userId="a88fcdbc31b6f594" providerId="Windows Live" clId="Web-{031C1E02-F537-4B69-F31C-E9378A6E06AC}" dt="2020-09-07T21:03:13.917" v="697"/>
-        <pc:sldMkLst>
-          <pc:docMk/>
-          <pc:sldMk cId="2603811181" sldId="312"/>
-        </pc:sldMkLst>
-        <pc:spChg chg="mod">
-          <ac:chgData name="William Estes" userId="a88fcdbc31b6f594" providerId="Windows Live" clId="Web-{031C1E02-F537-4B69-F31C-E9378A6E06AC}" dt="2020-09-07T21:00:49.558" v="691" actId="20577"/>
-          <ac:spMkLst>
-            <pc:docMk/>
-            <pc:sldMk cId="2603811181" sldId="312"/>
-            <ac:spMk id="3" creationId="{3713A5A2-1019-0143-BC00-1B8B12D7C198}"/>
-          </ac:spMkLst>
-        </pc:spChg>
-        <pc:picChg chg="add mod">
-          <ac:chgData name="William Estes" userId="a88fcdbc31b6f594" providerId="Windows Live" clId="Web-{031C1E02-F537-4B69-F31C-E9378A6E06AC}" dt="2020-09-07T21:02:56.792" v="696" actId="14100"/>
-          <ac:picMkLst>
-            <pc:docMk/>
-            <pc:sldMk cId="2603811181" sldId="312"/>
-            <ac:picMk id="4" creationId="{C51B3A44-51BC-4E57-B893-22C0D87B7F4F}"/>
-          </ac:picMkLst>
-        </pc:picChg>
-        <pc:picChg chg="del">
-          <ac:chgData name="William Estes" userId="a88fcdbc31b6f594" providerId="Windows Live" clId="Web-{031C1E02-F537-4B69-F31C-E9378A6E06AC}" dt="2020-09-07T21:00:41.386" v="688"/>
-          <ac:picMkLst>
-            <pc:docMk/>
-            <pc:sldMk cId="2603811181" sldId="312"/>
-            <ac:picMk id="6" creationId="{2EE93A3D-157E-4114-9622-C81895DD233E}"/>
-          </ac:picMkLst>
-        </pc:picChg>
-      </pc:sldChg>
-      <pc:sldChg chg="delSp modSp add replId">
-        <pc:chgData name="William Estes" userId="a88fcdbc31b6f594" providerId="Windows Live" clId="Web-{031C1E02-F537-4B69-F31C-E9378A6E06AC}" dt="2020-09-07T21:20:45.507" v="780" actId="1076"/>
-        <pc:sldMkLst>
-          <pc:docMk/>
-          <pc:sldMk cId="2451915283" sldId="313"/>
-        </pc:sldMkLst>
-        <pc:spChg chg="del mod">
-          <ac:chgData name="William Estes" userId="a88fcdbc31b6f594" providerId="Windows Live" clId="Web-{031C1E02-F537-4B69-F31C-E9378A6E06AC}" dt="2020-09-07T21:20:42.757" v="779"/>
-          <ac:spMkLst>
-            <pc:docMk/>
-            <pc:sldMk cId="2451915283" sldId="313"/>
-            <ac:spMk id="3" creationId="{3713A5A2-1019-0143-BC00-1B8B12D7C198}"/>
-          </ac:spMkLst>
-        </pc:spChg>
-        <pc:picChg chg="mod">
-          <ac:chgData name="William Estes" userId="a88fcdbc31b6f594" providerId="Windows Live" clId="Web-{031C1E02-F537-4B69-F31C-E9378A6E06AC}" dt="2020-09-07T21:20:45.507" v="780" actId="1076"/>
-          <ac:picMkLst>
-            <pc:docMk/>
-            <pc:sldMk cId="2451915283" sldId="313"/>
-            <ac:picMk id="4" creationId="{4EE4A1E1-9F40-40B9-BE46-A40DEE1C7756}"/>
-          </ac:picMkLst>
-        </pc:picChg>
-        <pc:picChg chg="mod">
-          <ac:chgData name="William Estes" userId="a88fcdbc31b6f594" providerId="Windows Live" clId="Web-{031C1E02-F537-4B69-F31C-E9378A6E06AC}" dt="2020-09-07T21:20:38.679" v="778" actId="1076"/>
-          <ac:picMkLst>
-            <pc:docMk/>
-            <pc:sldMk cId="2451915283" sldId="313"/>
-            <ac:picMk id="5" creationId="{CC33AD93-8584-4C73-ACD1-137E417FEDC1}"/>
-          </ac:picMkLst>
-        </pc:picChg>
-      </pc:sldChg>
-      <pc:sldChg chg="delSp modSp add del replId">
-        <pc:chgData name="William Estes" userId="a88fcdbc31b6f594" providerId="Windows Live" clId="Web-{031C1E02-F537-4B69-F31C-E9378A6E06AC}" dt="2020-09-07T21:26:50.896" v="845"/>
-        <pc:sldMkLst>
-          <pc:docMk/>
-          <pc:sldMk cId="1190448600" sldId="314"/>
-        </pc:sldMkLst>
-        <pc:spChg chg="mod">
-          <ac:chgData name="William Estes" userId="a88fcdbc31b6f594" providerId="Windows Live" clId="Web-{031C1E02-F537-4B69-F31C-E9378A6E06AC}" dt="2020-09-07T21:24:54.459" v="842" actId="20577"/>
-          <ac:spMkLst>
-            <pc:docMk/>
-            <pc:sldMk cId="1190448600" sldId="314"/>
-            <ac:spMk id="3" creationId="{3713A5A2-1019-0143-BC00-1B8B12D7C198}"/>
-          </ac:spMkLst>
-        </pc:spChg>
-        <pc:picChg chg="del">
-          <ac:chgData name="William Estes" userId="a88fcdbc31b6f594" providerId="Windows Live" clId="Web-{031C1E02-F537-4B69-F31C-E9378A6E06AC}" dt="2020-09-07T21:24:38.100" v="823"/>
-          <ac:picMkLst>
-            <pc:docMk/>
-            <pc:sldMk cId="1190448600" sldId="314"/>
-            <ac:picMk id="4" creationId="{C2A73B43-63A2-4348-8210-E243D932F19A}"/>
-          </ac:picMkLst>
-        </pc:picChg>
-        <pc:picChg chg="del">
-          <ac:chgData name="William Estes" userId="a88fcdbc31b6f594" providerId="Windows Live" clId="Web-{031C1E02-F537-4B69-F31C-E9378A6E06AC}" dt="2020-09-07T21:24:39.147" v="824"/>
-          <ac:picMkLst>
-            <pc:docMk/>
-            <pc:sldMk cId="1190448600" sldId="314"/>
-            <ac:picMk id="5" creationId="{98C6B8A0-0890-43EE-AFC9-F0CA42B6C48F}"/>
-          </ac:picMkLst>
-        </pc:picChg>
-        <pc:picChg chg="del">
-          <ac:chgData name="William Estes" userId="a88fcdbc31b6f594" providerId="Windows Live" clId="Web-{031C1E02-F537-4B69-F31C-E9378A6E06AC}" dt="2020-09-07T21:24:40.194" v="825"/>
-          <ac:picMkLst>
-            <pc:docMk/>
-            <pc:sldMk cId="1190448600" sldId="314"/>
-            <ac:picMk id="6" creationId="{4F0D4502-44B3-44A8-AED0-897726E24FA0}"/>
-          </ac:picMkLst>
-        </pc:picChg>
-      </pc:sldChg>
-      <pc:sldChg chg="modSp add ord replId">
-        <pc:chgData name="William Estes" userId="a88fcdbc31b6f594" providerId="Windows Live" clId="Web-{031C1E02-F537-4B69-F31C-E9378A6E06AC}" dt="2020-09-07T21:30:13.053" v="1348" actId="20577"/>
-        <pc:sldMkLst>
-          <pc:docMk/>
-          <pc:sldMk cId="4059676631" sldId="314"/>
-        </pc:sldMkLst>
-        <pc:spChg chg="mod">
-          <ac:chgData name="William Estes" userId="a88fcdbc31b6f594" providerId="Windows Live" clId="Web-{031C1E02-F537-4B69-F31C-E9378A6E06AC}" dt="2020-09-07T21:30:13.053" v="1348" actId="20577"/>
-          <ac:spMkLst>
-            <pc:docMk/>
-            <pc:sldMk cId="4059676631" sldId="314"/>
-            <ac:spMk id="4" creationId="{5C0E649D-E3FD-41FB-BA87-37C62725C740}"/>
-          </ac:spMkLst>
-        </pc:spChg>
-      </pc:sldChg>
-      <pc:sldChg chg="modSp add ord replId">
-        <pc:chgData name="William Estes" userId="a88fcdbc31b6f594" providerId="Windows Live" clId="Web-{031C1E02-F537-4B69-F31C-E9378A6E06AC}" dt="2020-09-07T22:06:51.443" v="1624" actId="20577"/>
-        <pc:sldMkLst>
-          <pc:docMk/>
-          <pc:sldMk cId="104406143" sldId="315"/>
-        </pc:sldMkLst>
-        <pc:spChg chg="mod">
-          <ac:chgData name="William Estes" userId="a88fcdbc31b6f594" providerId="Windows Live" clId="Web-{031C1E02-F537-4B69-F31C-E9378A6E06AC}" dt="2020-09-07T22:06:51.443" v="1624" actId="20577"/>
-          <ac:spMkLst>
-            <pc:docMk/>
-            <pc:sldMk cId="104406143" sldId="315"/>
-            <ac:spMk id="4" creationId="{5C0E649D-E3FD-41FB-BA87-37C62725C740}"/>
-          </ac:spMkLst>
-        </pc:spChg>
-      </pc:sldChg>
-      <pc:sldChg chg="add del ord replId">
-        <pc:chgData name="William Estes" userId="a88fcdbc31b6f594" providerId="Windows Live" clId="Web-{031C1E02-F537-4B69-F31C-E9378A6E06AC}" dt="2020-09-07T22:05:04.131" v="1374"/>
-        <pc:sldMkLst>
-          <pc:docMk/>
-          <pc:sldMk cId="2401950242" sldId="315"/>
-        </pc:sldMkLst>
-      </pc:sldChg>
-      <pc:sldChg chg="addSp delSp modSp add ord replId">
-        <pc:chgData name="William Estes" userId="a88fcdbc31b6f594" providerId="Windows Live" clId="Web-{031C1E02-F537-4B69-F31C-E9378A6E06AC}" dt="2020-09-07T22:21:05.033" v="1726" actId="14100"/>
-        <pc:sldMkLst>
-          <pc:docMk/>
-          <pc:sldMk cId="3755306264" sldId="316"/>
-        </pc:sldMkLst>
-        <pc:spChg chg="mod">
-          <ac:chgData name="William Estes" userId="a88fcdbc31b6f594" providerId="Windows Live" clId="Web-{031C1E02-F537-4B69-F31C-E9378A6E06AC}" dt="2020-09-07T22:08:35.645" v="1716" actId="20577"/>
-          <ac:spMkLst>
-            <pc:docMk/>
-            <pc:sldMk cId="3755306264" sldId="316"/>
-            <ac:spMk id="3" creationId="{3713A5A2-1019-0143-BC00-1B8B12D7C198}"/>
-          </ac:spMkLst>
-        </pc:spChg>
-        <pc:picChg chg="add mod">
-          <ac:chgData name="William Estes" userId="a88fcdbc31b6f594" providerId="Windows Live" clId="Web-{031C1E02-F537-4B69-F31C-E9378A6E06AC}" dt="2020-09-07T22:21:05.033" v="1726" actId="14100"/>
-          <ac:picMkLst>
-            <pc:docMk/>
-            <pc:sldMk cId="3755306264" sldId="316"/>
-            <ac:picMk id="4" creationId="{30EC191B-3BF8-47B4-B45C-3DAF709CCFE0}"/>
-          </ac:picMkLst>
-        </pc:picChg>
-        <pc:picChg chg="add mod">
-          <ac:chgData name="William Estes" userId="a88fcdbc31b6f594" providerId="Windows Live" clId="Web-{031C1E02-F537-4B69-F31C-E9378A6E06AC}" dt="2020-09-07T22:21:00.205" v="1725" actId="14100"/>
-          <ac:picMkLst>
-            <pc:docMk/>
-            <pc:sldMk cId="3755306264" sldId="316"/>
-            <ac:picMk id="5" creationId="{C89257E1-8984-4C68-B49E-F7CADDFFDD4F}"/>
-          </ac:picMkLst>
-        </pc:picChg>
-        <pc:picChg chg="del">
-          <ac:chgData name="William Estes" userId="a88fcdbc31b6f594" providerId="Windows Live" clId="Web-{031C1E02-F537-4B69-F31C-E9378A6E06AC}" dt="2020-09-07T22:07:14.849" v="1636"/>
-          <ac:picMkLst>
-            <pc:docMk/>
-            <pc:sldMk cId="3755306264" sldId="316"/>
-            <ac:picMk id="6" creationId="{2EE93A3D-157E-4114-9622-C81895DD233E}"/>
+            <pc:sldMk cId="284483567" sldId="303"/>
+            <ac:picMk id="6" creationId="{16C7BFAC-F852-4D7A-8E04-672944FD9991}"/>
           </ac:picMkLst>
         </pc:picChg>
       </pc:sldChg>
@@ -591,35 +1171,20 @@
     </pc:docChg>
   </pc:docChgLst>
   <pc:docChgLst>
-    <pc:chgData name="William Estes" userId="a88fcdbc31b6f594" providerId="LiveId" clId="{F672AB5B-FF42-4746-B776-B42BA4AD19CD}"/>
-    <pc:docChg chg="undo custSel addSld delSld modSld">
-      <pc:chgData name="William Estes" userId="a88fcdbc31b6f594" providerId="LiveId" clId="{F672AB5B-FF42-4746-B776-B42BA4AD19CD}" dt="2021-02-08T23:41:16.844" v="592" actId="1076"/>
+    <pc:chgData name="William Estes" userId="a88fcdbc31b6f594" providerId="Windows Live" clId="Web-{53BDE15D-C984-41FC-29A9-B9E08664827E}"/>
+    <pc:docChg chg="addSld modSld sldOrd">
+      <pc:chgData name="William Estes" userId="a88fcdbc31b6f594" providerId="Windows Live" clId="Web-{53BDE15D-C984-41FC-29A9-B9E08664827E}" dt="2020-09-01T03:31:16.808" v="92" actId="20577"/>
       <pc:docMkLst>
         <pc:docMk/>
       </pc:docMkLst>
-      <pc:sldChg chg="modSp mod">
-        <pc:chgData name="William Estes" userId="a88fcdbc31b6f594" providerId="LiveId" clId="{F672AB5B-FF42-4746-B776-B42BA4AD19CD}" dt="2021-02-08T17:16:26.147" v="0" actId="20577"/>
-        <pc:sldMkLst>
-          <pc:docMk/>
-          <pc:sldMk cId="1945136841" sldId="256"/>
-        </pc:sldMkLst>
-        <pc:spChg chg="mod">
-          <ac:chgData name="William Estes" userId="a88fcdbc31b6f594" providerId="LiveId" clId="{F672AB5B-FF42-4746-B776-B42BA4AD19CD}" dt="2021-02-08T17:16:26.147" v="0" actId="20577"/>
-          <ac:spMkLst>
-            <pc:docMk/>
-            <pc:sldMk cId="1945136841" sldId="256"/>
-            <ac:spMk id="3" creationId="{DDC89ACB-096C-C741-9C1C-5361EC0608AA}"/>
-          </ac:spMkLst>
-        </pc:spChg>
-      </pc:sldChg>
-      <pc:sldChg chg="modSp add del mod">
-        <pc:chgData name="William Estes" userId="a88fcdbc31b6f594" providerId="LiveId" clId="{F672AB5B-FF42-4746-B776-B42BA4AD19CD}" dt="2021-02-08T17:18:50.915" v="110" actId="20577"/>
+      <pc:sldChg chg="modSp">
+        <pc:chgData name="William Estes" userId="a88fcdbc31b6f594" providerId="Windows Live" clId="Web-{53BDE15D-C984-41FC-29A9-B9E08664827E}" dt="2020-09-01T03:30:18.011" v="63" actId="20577"/>
         <pc:sldMkLst>
           <pc:docMk/>
           <pc:sldMk cId="830997286" sldId="264"/>
         </pc:sldMkLst>
         <pc:spChg chg="mod">
-          <ac:chgData name="William Estes" userId="a88fcdbc31b6f594" providerId="LiveId" clId="{F672AB5B-FF42-4746-B776-B42BA4AD19CD}" dt="2021-02-08T17:18:50.915" v="110" actId="20577"/>
+          <ac:chgData name="William Estes" userId="a88fcdbc31b6f594" providerId="Windows Live" clId="Web-{53BDE15D-C984-41FC-29A9-B9E08664827E}" dt="2020-09-01T03:30:18.011" v="63" actId="20577"/>
           <ac:spMkLst>
             <pc:docMk/>
             <pc:sldMk cId="830997286" sldId="264"/>
@@ -627,149 +1192,1183 @@
           </ac:spMkLst>
         </pc:spChg>
       </pc:sldChg>
-      <pc:sldChg chg="modSp mod">
-        <pc:chgData name="William Estes" userId="a88fcdbc31b6f594" providerId="LiveId" clId="{F672AB5B-FF42-4746-B776-B42BA4AD19CD}" dt="2021-02-08T23:35:10.310" v="586" actId="1076"/>
+      <pc:sldChg chg="add">
+        <pc:chgData name="William Estes" userId="a88fcdbc31b6f594" providerId="Windows Live" clId="Web-{53BDE15D-C984-41FC-29A9-B9E08664827E}" dt="2020-09-01T03:29:57.323" v="0"/>
+        <pc:sldMkLst>
+          <pc:docMk/>
+          <pc:sldMk cId="4242654959" sldId="304"/>
+        </pc:sldMkLst>
+      </pc:sldChg>
+      <pc:sldChg chg="add">
+        <pc:chgData name="William Estes" userId="a88fcdbc31b6f594" providerId="Windows Live" clId="Web-{53BDE15D-C984-41FC-29A9-B9E08664827E}" dt="2020-09-01T03:29:57.386" v="1"/>
+        <pc:sldMkLst>
+          <pc:docMk/>
+          <pc:sldMk cId="2469544991" sldId="305"/>
+        </pc:sldMkLst>
+      </pc:sldChg>
+      <pc:sldChg chg="add">
+        <pc:chgData name="William Estes" userId="a88fcdbc31b6f594" providerId="Windows Live" clId="Web-{53BDE15D-C984-41FC-29A9-B9E08664827E}" dt="2020-09-01T03:29:57.448" v="2"/>
+        <pc:sldMkLst>
+          <pc:docMk/>
+          <pc:sldMk cId="2651208645" sldId="306"/>
+        </pc:sldMkLst>
+      </pc:sldChg>
+      <pc:sldChg chg="add ord">
+        <pc:chgData name="William Estes" userId="a88fcdbc31b6f594" providerId="Windows Live" clId="Web-{53BDE15D-C984-41FC-29A9-B9E08664827E}" dt="2020-09-01T03:30:41.214" v="68"/>
+        <pc:sldMkLst>
+          <pc:docMk/>
+          <pc:sldMk cId="746972265" sldId="307"/>
+        </pc:sldMkLst>
+      </pc:sldChg>
+      <pc:sldChg chg="modSp new ord">
+        <pc:chgData name="William Estes" userId="a88fcdbc31b6f594" providerId="Windows Live" clId="Web-{53BDE15D-C984-41FC-29A9-B9E08664827E}" dt="2020-09-01T03:31:16.808" v="91" actId="20577"/>
+        <pc:sldMkLst>
+          <pc:docMk/>
+          <pc:sldMk cId="1575020086" sldId="308"/>
+        </pc:sldMkLst>
+        <pc:spChg chg="mod">
+          <ac:chgData name="William Estes" userId="a88fcdbc31b6f594" providerId="Windows Live" clId="Web-{53BDE15D-C984-41FC-29A9-B9E08664827E}" dt="2020-09-01T03:31:13.464" v="86" actId="20577"/>
+          <ac:spMkLst>
+            <pc:docMk/>
+            <pc:sldMk cId="1575020086" sldId="308"/>
+            <ac:spMk id="2" creationId="{0F6302EC-90FC-4501-AFC3-D85168DEA26A}"/>
+          </ac:spMkLst>
+        </pc:spChg>
+        <pc:spChg chg="mod">
+          <ac:chgData name="William Estes" userId="a88fcdbc31b6f594" providerId="Windows Live" clId="Web-{53BDE15D-C984-41FC-29A9-B9E08664827E}" dt="2020-09-01T03:31:16.808" v="91" actId="20577"/>
+          <ac:spMkLst>
+            <pc:docMk/>
+            <pc:sldMk cId="1575020086" sldId="308"/>
+            <ac:spMk id="3" creationId="{CF346A43-8A67-4B2E-80E1-770DDD72F0D0}"/>
+          </ac:spMkLst>
+        </pc:spChg>
+      </pc:sldChg>
+    </pc:docChg>
+  </pc:docChgLst>
+  <pc:docChgLst>
+    <pc:chgData name="William Estes" userId="a88fcdbc31b6f594" providerId="Windows Live" clId="Web-{9D5E7661-3202-4CBF-D9D6-3C97B3B5A29F}"/>
+    <pc:docChg chg="addSld modSld">
+      <pc:chgData name="William Estes" userId="a88fcdbc31b6f594" providerId="Windows Live" clId="Web-{9D5E7661-3202-4CBF-D9D6-3C97B3B5A29F}" dt="2020-08-30T17:39:55.940" v="307" actId="20577"/>
+      <pc:docMkLst>
+        <pc:docMk/>
+      </pc:docMkLst>
+      <pc:sldChg chg="modSp">
+        <pc:chgData name="William Estes" userId="a88fcdbc31b6f594" providerId="Windows Live" clId="Web-{9D5E7661-3202-4CBF-D9D6-3C97B3B5A29F}" dt="2020-08-30T16:59:29.002" v="17" actId="1076"/>
+        <pc:sldMkLst>
+          <pc:docMk/>
+          <pc:sldMk cId="1056604679" sldId="260"/>
+        </pc:sldMkLst>
+        <pc:spChg chg="mod">
+          <ac:chgData name="William Estes" userId="a88fcdbc31b6f594" providerId="Windows Live" clId="Web-{9D5E7661-3202-4CBF-D9D6-3C97B3B5A29F}" dt="2020-08-30T16:59:18.814" v="12" actId="20577"/>
+          <ac:spMkLst>
+            <pc:docMk/>
+            <pc:sldMk cId="1056604679" sldId="260"/>
+            <ac:spMk id="3" creationId="{3713A5A2-1019-0143-BC00-1B8B12D7C198}"/>
+          </ac:spMkLst>
+        </pc:spChg>
+        <pc:picChg chg="mod">
+          <ac:chgData name="William Estes" userId="a88fcdbc31b6f594" providerId="Windows Live" clId="Web-{9D5E7661-3202-4CBF-D9D6-3C97B3B5A29F}" dt="2020-08-30T16:59:29.002" v="17" actId="1076"/>
+          <ac:picMkLst>
+            <pc:docMk/>
+            <pc:sldMk cId="1056604679" sldId="260"/>
+            <ac:picMk id="7" creationId="{7D0999C3-1D3F-4622-9A1B-8DC734094F20}"/>
+          </ac:picMkLst>
+        </pc:picChg>
+      </pc:sldChg>
+      <pc:sldChg chg="modSp">
+        <pc:chgData name="William Estes" userId="a88fcdbc31b6f594" providerId="Windows Live" clId="Web-{9D5E7661-3202-4CBF-D9D6-3C97B3B5A29F}" dt="2020-08-30T17:04:53.993" v="50" actId="20577"/>
+        <pc:sldMkLst>
+          <pc:docMk/>
+          <pc:sldMk cId="2341259573" sldId="265"/>
+        </pc:sldMkLst>
+        <pc:spChg chg="mod">
+          <ac:chgData name="William Estes" userId="a88fcdbc31b6f594" providerId="Windows Live" clId="Web-{9D5E7661-3202-4CBF-D9D6-3C97B3B5A29F}" dt="2020-08-30T17:04:53.993" v="50" actId="20577"/>
+          <ac:spMkLst>
+            <pc:docMk/>
+            <pc:sldMk cId="2341259573" sldId="265"/>
+            <ac:spMk id="3" creationId="{3713A5A2-1019-0143-BC00-1B8B12D7C198}"/>
+          </ac:spMkLst>
+        </pc:spChg>
+      </pc:sldChg>
+      <pc:sldChg chg="modSp">
+        <pc:chgData name="William Estes" userId="a88fcdbc31b6f594" providerId="Windows Live" clId="Web-{9D5E7661-3202-4CBF-D9D6-3C97B3B5A29F}" dt="2020-08-30T17:17:31.820" v="55" actId="1076"/>
+        <pc:sldMkLst>
+          <pc:docMk/>
+          <pc:sldMk cId="1244393583" sldId="266"/>
+        </pc:sldMkLst>
+        <pc:picChg chg="mod">
+          <ac:chgData name="William Estes" userId="a88fcdbc31b6f594" providerId="Windows Live" clId="Web-{9D5E7661-3202-4CBF-D9D6-3C97B3B5A29F}" dt="2020-08-30T17:17:29.929" v="54" actId="1076"/>
+          <ac:picMkLst>
+            <pc:docMk/>
+            <pc:sldMk cId="1244393583" sldId="266"/>
+            <ac:picMk id="4" creationId="{AC9A6746-5AD2-4677-98D0-BEC258B8AE22}"/>
+          </ac:picMkLst>
+        </pc:picChg>
+        <pc:picChg chg="mod">
+          <ac:chgData name="William Estes" userId="a88fcdbc31b6f594" providerId="Windows Live" clId="Web-{9D5E7661-3202-4CBF-D9D6-3C97B3B5A29F}" dt="2020-08-30T17:17:31.820" v="55" actId="1076"/>
+          <ac:picMkLst>
+            <pc:docMk/>
+            <pc:sldMk cId="1244393583" sldId="266"/>
+            <ac:picMk id="5" creationId="{C4BD236A-ACF3-4D6E-B512-AAFF393A184A}"/>
+          </ac:picMkLst>
+        </pc:picChg>
+      </pc:sldChg>
+      <pc:sldChg chg="modSp">
+        <pc:chgData name="William Estes" userId="a88fcdbc31b6f594" providerId="Windows Live" clId="Web-{9D5E7661-3202-4CBF-D9D6-3C97B3B5A29F}" dt="2020-08-30T17:39:47.064" v="305" actId="20577"/>
+        <pc:sldMkLst>
+          <pc:docMk/>
+          <pc:sldMk cId="496210837" sldId="280"/>
+        </pc:sldMkLst>
+        <pc:spChg chg="mod">
+          <ac:chgData name="William Estes" userId="a88fcdbc31b6f594" providerId="Windows Live" clId="Web-{9D5E7661-3202-4CBF-D9D6-3C97B3B5A29F}" dt="2020-08-30T17:39:47.064" v="305" actId="20577"/>
+          <ac:spMkLst>
+            <pc:docMk/>
+            <pc:sldMk cId="496210837" sldId="280"/>
+            <ac:spMk id="3" creationId="{3713A5A2-1019-0143-BC00-1B8B12D7C198}"/>
+          </ac:spMkLst>
+        </pc:spChg>
+      </pc:sldChg>
+      <pc:sldChg chg="modSp">
+        <pc:chgData name="William Estes" userId="a88fcdbc31b6f594" providerId="Windows Live" clId="Web-{9D5E7661-3202-4CBF-D9D6-3C97B3B5A29F}" dt="2020-08-30T17:00:17.941" v="31" actId="20577"/>
+        <pc:sldMkLst>
+          <pc:docMk/>
+          <pc:sldMk cId="1784549319" sldId="281"/>
+        </pc:sldMkLst>
+        <pc:spChg chg="mod">
+          <ac:chgData name="William Estes" userId="a88fcdbc31b6f594" providerId="Windows Live" clId="Web-{9D5E7661-3202-4CBF-D9D6-3C97B3B5A29F}" dt="2020-08-30T17:00:17.941" v="31" actId="20577"/>
+          <ac:spMkLst>
+            <pc:docMk/>
+            <pc:sldMk cId="1784549319" sldId="281"/>
+            <ac:spMk id="6" creationId="{FDB60DBF-F433-4057-85ED-960E10BB18C1}"/>
+          </ac:spMkLst>
+        </pc:spChg>
+      </pc:sldChg>
+      <pc:sldChg chg="modSp add replId">
+        <pc:chgData name="William Estes" userId="a88fcdbc31b6f594" providerId="Windows Live" clId="Web-{9D5E7661-3202-4CBF-D9D6-3C97B3B5A29F}" dt="2020-08-30T17:38:23.844" v="280" actId="20577"/>
+        <pc:sldMkLst>
+          <pc:docMk/>
+          <pc:sldMk cId="433070316" sldId="300"/>
+        </pc:sldMkLst>
+        <pc:spChg chg="mod">
+          <ac:chgData name="William Estes" userId="a88fcdbc31b6f594" providerId="Windows Live" clId="Web-{9D5E7661-3202-4CBF-D9D6-3C97B3B5A29F}" dt="2020-08-30T17:38:23.844" v="280" actId="20577"/>
+          <ac:spMkLst>
+            <pc:docMk/>
+            <pc:sldMk cId="433070316" sldId="300"/>
+            <ac:spMk id="4" creationId="{5C0E649D-E3FD-41FB-BA87-37C62725C740}"/>
+          </ac:spMkLst>
+        </pc:spChg>
+      </pc:sldChg>
+    </pc:docChg>
+  </pc:docChgLst>
+  <pc:docChgLst>
+    <pc:chgData name="William Estes" userId="a88fcdbc31b6f594" providerId="Windows Live" clId="Web-{A60937DA-1DAE-4721-D42B-07DE7AFCBCF6}"/>
+    <pc:docChg chg="delSld modSld">
+      <pc:chgData name="William Estes" userId="a88fcdbc31b6f594" providerId="Windows Live" clId="Web-{A60937DA-1DAE-4721-D42B-07DE7AFCBCF6}" dt="2020-09-13T03:54:01.092" v="210" actId="20577"/>
+      <pc:docMkLst>
+        <pc:docMk/>
+      </pc:docMkLst>
+      <pc:sldChg chg="modSp">
+        <pc:chgData name="William Estes" userId="a88fcdbc31b6f594" providerId="Windows Live" clId="Web-{A60937DA-1DAE-4721-D42B-07DE7AFCBCF6}" dt="2020-09-13T03:25:49.343" v="10" actId="20577"/>
+        <pc:sldMkLst>
+          <pc:docMk/>
+          <pc:sldMk cId="496210837" sldId="280"/>
+        </pc:sldMkLst>
+        <pc:spChg chg="mod">
+          <ac:chgData name="William Estes" userId="a88fcdbc31b6f594" providerId="Windows Live" clId="Web-{A60937DA-1DAE-4721-D42B-07DE7AFCBCF6}" dt="2020-09-13T03:25:49.343" v="10" actId="20577"/>
+          <ac:spMkLst>
+            <pc:docMk/>
+            <pc:sldMk cId="496210837" sldId="280"/>
+            <ac:spMk id="3" creationId="{3713A5A2-1019-0143-BC00-1B8B12D7C198}"/>
+          </ac:spMkLst>
+        </pc:spChg>
+      </pc:sldChg>
+      <pc:sldChg chg="modSp">
+        <pc:chgData name="William Estes" userId="a88fcdbc31b6f594" providerId="Windows Live" clId="Web-{A60937DA-1DAE-4721-D42B-07DE7AFCBCF6}" dt="2020-09-13T03:39:31.064" v="140" actId="1076"/>
+        <pc:sldMkLst>
+          <pc:docMk/>
+          <pc:sldMk cId="1031257587" sldId="292"/>
+        </pc:sldMkLst>
+        <pc:spChg chg="mod">
+          <ac:chgData name="William Estes" userId="a88fcdbc31b6f594" providerId="Windows Live" clId="Web-{A60937DA-1DAE-4721-D42B-07DE7AFCBCF6}" dt="2020-09-13T03:39:31.064" v="140" actId="1076"/>
+          <ac:spMkLst>
+            <pc:docMk/>
+            <pc:sldMk cId="1031257587" sldId="292"/>
+            <ac:spMk id="7" creationId="{81FEAAF1-55EF-429A-832F-657DD1B08A00}"/>
+          </ac:spMkLst>
+        </pc:spChg>
+        <pc:spChg chg="mod">
+          <ac:chgData name="William Estes" userId="a88fcdbc31b6f594" providerId="Windows Live" clId="Web-{A60937DA-1DAE-4721-D42B-07DE7AFCBCF6}" dt="2020-09-13T03:39:28.455" v="139" actId="1076"/>
+          <ac:spMkLst>
+            <pc:docMk/>
+            <pc:sldMk cId="1031257587" sldId="292"/>
+            <ac:spMk id="13" creationId="{FA79162F-1F9C-4BB6-9C39-96C8B58E86C3}"/>
+          </ac:spMkLst>
+        </pc:spChg>
+        <pc:spChg chg="mod">
+          <ac:chgData name="William Estes" userId="a88fcdbc31b6f594" providerId="Windows Live" clId="Web-{A60937DA-1DAE-4721-D42B-07DE7AFCBCF6}" dt="2020-09-13T03:39:21.096" v="137" actId="1076"/>
+          <ac:spMkLst>
+            <pc:docMk/>
+            <pc:sldMk cId="1031257587" sldId="292"/>
+            <ac:spMk id="14" creationId="{BC68A978-56D8-4B49-B046-44ACD0A585A4}"/>
+          </ac:spMkLst>
+        </pc:spChg>
+        <pc:spChg chg="mod">
+          <ac:chgData name="William Estes" userId="a88fcdbc31b6f594" providerId="Windows Live" clId="Web-{A60937DA-1DAE-4721-D42B-07DE7AFCBCF6}" dt="2020-09-13T03:39:25.269" v="138" actId="1076"/>
+          <ac:spMkLst>
+            <pc:docMk/>
+            <pc:sldMk cId="1031257587" sldId="292"/>
+            <ac:spMk id="15" creationId="{7F19F82B-0D64-4D93-8D94-101BBFB46765}"/>
+          </ac:spMkLst>
+        </pc:spChg>
+        <pc:spChg chg="mod">
+          <ac:chgData name="William Estes" userId="a88fcdbc31b6f594" providerId="Windows Live" clId="Web-{A60937DA-1DAE-4721-D42B-07DE7AFCBCF6}" dt="2020-09-13T03:39:18.221" v="136" actId="1076"/>
+          <ac:spMkLst>
+            <pc:docMk/>
+            <pc:sldMk cId="1031257587" sldId="292"/>
+            <ac:spMk id="16" creationId="{2CD967FC-6B82-4F09-938B-F9E74AB74DB5}"/>
+          </ac:spMkLst>
+        </pc:spChg>
+      </pc:sldChg>
+      <pc:sldChg chg="modSp">
+        <pc:chgData name="William Estes" userId="a88fcdbc31b6f594" providerId="Windows Live" clId="Web-{A60937DA-1DAE-4721-D42B-07DE7AFCBCF6}" dt="2020-09-13T03:41:03.518" v="173" actId="1076"/>
+        <pc:sldMkLst>
+          <pc:docMk/>
+          <pc:sldMk cId="1522982694" sldId="296"/>
+        </pc:sldMkLst>
+        <pc:spChg chg="mod">
+          <ac:chgData name="William Estes" userId="a88fcdbc31b6f594" providerId="Windows Live" clId="Web-{A60937DA-1DAE-4721-D42B-07DE7AFCBCF6}" dt="2020-09-13T03:40:59.158" v="172" actId="1076"/>
+          <ac:spMkLst>
+            <pc:docMk/>
+            <pc:sldMk cId="1522982694" sldId="296"/>
+            <ac:spMk id="6" creationId="{8D3881AF-2AF0-4DF1-977D-DEFDD2FCFF0A}"/>
+          </ac:spMkLst>
+        </pc:spChg>
+        <pc:spChg chg="mod">
+          <ac:chgData name="William Estes" userId="a88fcdbc31b6f594" providerId="Windows Live" clId="Web-{A60937DA-1DAE-4721-D42B-07DE7AFCBCF6}" dt="2020-09-13T03:41:03.518" v="173" actId="1076"/>
+          <ac:spMkLst>
+            <pc:docMk/>
+            <pc:sldMk cId="1522982694" sldId="296"/>
+            <ac:spMk id="7" creationId="{F5D9FE73-3240-4541-BA18-9018D3F5BAA8}"/>
+          </ac:spMkLst>
+        </pc:spChg>
+      </pc:sldChg>
+      <pc:sldChg chg="modSp">
+        <pc:chgData name="William Estes" userId="a88fcdbc31b6f594" providerId="Windows Live" clId="Web-{A60937DA-1DAE-4721-D42B-07DE7AFCBCF6}" dt="2020-09-13T03:40:39.940" v="170" actId="20577"/>
+        <pc:sldMkLst>
+          <pc:docMk/>
+          <pc:sldMk cId="356878534" sldId="301"/>
+        </pc:sldMkLst>
+        <pc:spChg chg="mod">
+          <ac:chgData name="William Estes" userId="a88fcdbc31b6f594" providerId="Windows Live" clId="Web-{A60937DA-1DAE-4721-D42B-07DE7AFCBCF6}" dt="2020-09-13T03:40:39.940" v="170" actId="20577"/>
+          <ac:spMkLst>
+            <pc:docMk/>
+            <pc:sldMk cId="356878534" sldId="301"/>
+            <ac:spMk id="3" creationId="{1095E837-F77E-AE4D-944C-919B5D780AAA}"/>
+          </ac:spMkLst>
+        </pc:spChg>
+      </pc:sldChg>
+      <pc:sldChg chg="modSp">
+        <pc:chgData name="William Estes" userId="a88fcdbc31b6f594" providerId="Windows Live" clId="Web-{A60937DA-1DAE-4721-D42B-07DE7AFCBCF6}" dt="2020-09-13T03:36:21.923" v="126" actId="1076"/>
+        <pc:sldMkLst>
+          <pc:docMk/>
+          <pc:sldMk cId="2469544991" sldId="305"/>
+        </pc:sldMkLst>
+        <pc:spChg chg="mod">
+          <ac:chgData name="William Estes" userId="a88fcdbc31b6f594" providerId="Windows Live" clId="Web-{A60937DA-1DAE-4721-D42B-07DE7AFCBCF6}" dt="2020-09-13T03:36:20.861" v="124" actId="20577"/>
+          <ac:spMkLst>
+            <pc:docMk/>
+            <pc:sldMk cId="2469544991" sldId="305"/>
+            <ac:spMk id="4" creationId="{5C0E649D-E3FD-41FB-BA87-37C62725C740}"/>
+          </ac:spMkLst>
+        </pc:spChg>
+        <pc:picChg chg="mod">
+          <ac:chgData name="William Estes" userId="a88fcdbc31b6f594" providerId="Windows Live" clId="Web-{A60937DA-1DAE-4721-D42B-07DE7AFCBCF6}" dt="2020-09-13T03:36:21.923" v="126" actId="1076"/>
+          <ac:picMkLst>
+            <pc:docMk/>
+            <pc:sldMk cId="2469544991" sldId="305"/>
+            <ac:picMk id="6" creationId="{5E9C30D7-B428-4F3D-9C94-6CE4D4117681}"/>
+          </ac:picMkLst>
+        </pc:picChg>
+      </pc:sldChg>
+      <pc:sldChg chg="modSp">
+        <pc:chgData name="William Estes" userId="a88fcdbc31b6f594" providerId="Windows Live" clId="Web-{A60937DA-1DAE-4721-D42B-07DE7AFCBCF6}" dt="2020-09-13T03:34:23.259" v="68" actId="20577"/>
+        <pc:sldMkLst>
+          <pc:docMk/>
+          <pc:sldMk cId="2651208645" sldId="306"/>
+        </pc:sldMkLst>
+        <pc:spChg chg="mod">
+          <ac:chgData name="William Estes" userId="a88fcdbc31b6f594" providerId="Windows Live" clId="Web-{A60937DA-1DAE-4721-D42B-07DE7AFCBCF6}" dt="2020-09-13T03:34:23.259" v="68" actId="20577"/>
+          <ac:spMkLst>
+            <pc:docMk/>
+            <pc:sldMk cId="2651208645" sldId="306"/>
+            <ac:spMk id="4" creationId="{5C0E649D-E3FD-41FB-BA87-37C62725C740}"/>
+          </ac:spMkLst>
+        </pc:spChg>
+      </pc:sldChg>
+      <pc:sldChg chg="modSp del">
+        <pc:chgData name="William Estes" userId="a88fcdbc31b6f594" providerId="Windows Live" clId="Web-{A60937DA-1DAE-4721-D42B-07DE7AFCBCF6}" dt="2020-09-13T03:38:30.048" v="130"/>
+        <pc:sldMkLst>
+          <pc:docMk/>
+          <pc:sldMk cId="1575020086" sldId="308"/>
+        </pc:sldMkLst>
+        <pc:spChg chg="mod">
+          <ac:chgData name="William Estes" userId="a88fcdbc31b6f594" providerId="Windows Live" clId="Web-{A60937DA-1DAE-4721-D42B-07DE7AFCBCF6}" dt="2020-09-13T03:38:27.658" v="127" actId="20577"/>
+          <ac:spMkLst>
+            <pc:docMk/>
+            <pc:sldMk cId="1575020086" sldId="308"/>
+            <ac:spMk id="3" creationId="{CF346A43-8A67-4B2E-80E1-770DDD72F0D0}"/>
+          </ac:spMkLst>
+        </pc:spChg>
+      </pc:sldChg>
+      <pc:sldChg chg="addSp delSp modSp">
+        <pc:chgData name="William Estes" userId="a88fcdbc31b6f594" providerId="Windows Live" clId="Web-{A60937DA-1DAE-4721-D42B-07DE7AFCBCF6}" dt="2020-09-13T03:48:02.215" v="179" actId="14100"/>
+        <pc:sldMkLst>
+          <pc:docMk/>
+          <pc:sldMk cId="1624642261" sldId="311"/>
+        </pc:sldMkLst>
+        <pc:picChg chg="del">
+          <ac:chgData name="William Estes" userId="a88fcdbc31b6f594" providerId="Windows Live" clId="Web-{A60937DA-1DAE-4721-D42B-07DE7AFCBCF6}" dt="2020-09-13T03:47:48.262" v="174"/>
+          <ac:picMkLst>
+            <pc:docMk/>
+            <pc:sldMk cId="1624642261" sldId="311"/>
+            <ac:picMk id="6" creationId="{4F0D4502-44B3-44A8-AED0-897726E24FA0}"/>
+          </ac:picMkLst>
+        </pc:picChg>
+        <pc:picChg chg="add mod">
+          <ac:chgData name="William Estes" userId="a88fcdbc31b6f594" providerId="Windows Live" clId="Web-{A60937DA-1DAE-4721-D42B-07DE7AFCBCF6}" dt="2020-09-13T03:48:02.215" v="179" actId="14100"/>
+          <ac:picMkLst>
+            <pc:docMk/>
+            <pc:sldMk cId="1624642261" sldId="311"/>
+            <ac:picMk id="7" creationId="{F2A7909D-8AC4-41D4-81B5-35989785D616}"/>
+          </ac:picMkLst>
+        </pc:picChg>
+      </pc:sldChg>
+      <pc:sldChg chg="modSp">
+        <pc:chgData name="William Estes" userId="a88fcdbc31b6f594" providerId="Windows Live" clId="Web-{A60937DA-1DAE-4721-D42B-07DE7AFCBCF6}" dt="2020-09-13T03:49:15.669" v="184" actId="20577"/>
+        <pc:sldMkLst>
+          <pc:docMk/>
+          <pc:sldMk cId="4059676631" sldId="314"/>
+        </pc:sldMkLst>
+        <pc:spChg chg="mod">
+          <ac:chgData name="William Estes" userId="a88fcdbc31b6f594" providerId="Windows Live" clId="Web-{A60937DA-1DAE-4721-D42B-07DE7AFCBCF6}" dt="2020-09-13T03:49:15.669" v="184" actId="20577"/>
+          <ac:spMkLst>
+            <pc:docMk/>
+            <pc:sldMk cId="4059676631" sldId="314"/>
+            <ac:spMk id="4" creationId="{5C0E649D-E3FD-41FB-BA87-37C62725C740}"/>
+          </ac:spMkLst>
+        </pc:spChg>
+      </pc:sldChg>
+      <pc:sldChg chg="modSp">
+        <pc:chgData name="William Estes" userId="a88fcdbc31b6f594" providerId="Windows Live" clId="Web-{A60937DA-1DAE-4721-D42B-07DE7AFCBCF6}" dt="2020-09-13T03:54:00.014" v="208" actId="20577"/>
+        <pc:sldMkLst>
+          <pc:docMk/>
+          <pc:sldMk cId="3755306264" sldId="316"/>
+        </pc:sldMkLst>
+        <pc:spChg chg="mod">
+          <ac:chgData name="William Estes" userId="a88fcdbc31b6f594" providerId="Windows Live" clId="Web-{A60937DA-1DAE-4721-D42B-07DE7AFCBCF6}" dt="2020-09-13T03:54:00.014" v="208" actId="20577"/>
+          <ac:spMkLst>
+            <pc:docMk/>
+            <pc:sldMk cId="3755306264" sldId="316"/>
+            <ac:spMk id="3" creationId="{3713A5A2-1019-0143-BC00-1B8B12D7C198}"/>
+          </ac:spMkLst>
+        </pc:spChg>
+      </pc:sldChg>
+    </pc:docChg>
+  </pc:docChgLst>
+  <pc:docChgLst>
+    <pc:chgData name="William Estes" userId="a88fcdbc31b6f594" providerId="Windows Live" clId="Web-{5B23830A-885F-4AA1-A0A2-535D71453C14}"/>
+    <pc:docChg chg="modSld">
+      <pc:chgData name="William Estes" userId="a88fcdbc31b6f594" providerId="Windows Live" clId="Web-{5B23830A-885F-4AA1-A0A2-535D71453C14}" dt="2020-08-22T17:18:03.769" v="356" actId="20577"/>
+      <pc:docMkLst>
+        <pc:docMk/>
+      </pc:docMkLst>
+      <pc:sldChg chg="modSp">
+        <pc:chgData name="William Estes" userId="a88fcdbc31b6f594" providerId="Windows Live" clId="Web-{5B23830A-885F-4AA1-A0A2-535D71453C14}" dt="2020-08-22T17:18:03.769" v="355" actId="20577"/>
+        <pc:sldMkLst>
+          <pc:docMk/>
+          <pc:sldMk cId="496210837" sldId="280"/>
+        </pc:sldMkLst>
+        <pc:spChg chg="mod">
+          <ac:chgData name="William Estes" userId="a88fcdbc31b6f594" providerId="Windows Live" clId="Web-{5B23830A-885F-4AA1-A0A2-535D71453C14}" dt="2020-08-22T17:18:03.769" v="355" actId="20577"/>
+          <ac:spMkLst>
+            <pc:docMk/>
+            <pc:sldMk cId="496210837" sldId="280"/>
+            <ac:spMk id="3" creationId="{3713A5A2-1019-0143-BC00-1B8B12D7C198}"/>
+          </ac:spMkLst>
+        </pc:spChg>
+      </pc:sldChg>
+    </pc:docChg>
+  </pc:docChgLst>
+  <pc:docChgLst>
+    <pc:chgData name="William Estes" userId="a88fcdbc31b6f594" providerId="Windows Live" clId="Web-{7B637E83-0FC2-4AAD-5131-320C78923F12}"/>
+    <pc:docChg chg="modSld">
+      <pc:chgData name="William Estes" userId="a88fcdbc31b6f594" providerId="Windows Live" clId="Web-{7B637E83-0FC2-4AAD-5131-320C78923F12}" dt="2020-09-03T16:34:49.766" v="51" actId="20577"/>
+      <pc:docMkLst>
+        <pc:docMk/>
+      </pc:docMkLst>
+      <pc:sldChg chg="modSp">
+        <pc:chgData name="William Estes" userId="a88fcdbc31b6f594" providerId="Windows Live" clId="Web-{7B637E83-0FC2-4AAD-5131-320C78923F12}" dt="2020-09-03T16:34:49.766" v="50" actId="20577"/>
+        <pc:sldMkLst>
+          <pc:docMk/>
+          <pc:sldMk cId="496210837" sldId="280"/>
+        </pc:sldMkLst>
+        <pc:spChg chg="mod">
+          <ac:chgData name="William Estes" userId="a88fcdbc31b6f594" providerId="Windows Live" clId="Web-{7B637E83-0FC2-4AAD-5131-320C78923F12}" dt="2020-09-03T16:34:49.766" v="50" actId="20577"/>
+          <ac:spMkLst>
+            <pc:docMk/>
+            <pc:sldMk cId="496210837" sldId="280"/>
+            <ac:spMk id="3" creationId="{3713A5A2-1019-0143-BC00-1B8B12D7C198}"/>
+          </ac:spMkLst>
+        </pc:spChg>
+      </pc:sldChg>
+    </pc:docChg>
+  </pc:docChgLst>
+  <pc:docChgLst>
+    <pc:chgData name="William Estes" userId="a88fcdbc31b6f594" providerId="Windows Live" clId="Web-{DB70B1DC-F3CD-4B79-55DF-C938D75B7304}"/>
+    <pc:docChg chg="addSld modSld">
+      <pc:chgData name="William Estes" userId="a88fcdbc31b6f594" providerId="Windows Live" clId="Web-{DB70B1DC-F3CD-4B79-55DF-C938D75B7304}" dt="2020-08-28T21:42:28.684" v="940" actId="14100"/>
+      <pc:docMkLst>
+        <pc:docMk/>
+      </pc:docMkLst>
+      <pc:sldChg chg="addSp modSp add replId">
+        <pc:chgData name="William Estes" userId="a88fcdbc31b6f594" providerId="Windows Live" clId="Web-{DB70B1DC-F3CD-4B79-55DF-C938D75B7304}" dt="2020-08-28T21:20:49.567" v="327" actId="1076"/>
         <pc:sldMkLst>
           <pc:docMk/>
           <pc:sldMk cId="3007801671" sldId="291"/>
         </pc:sldMkLst>
         <pc:spChg chg="mod">
-          <ac:chgData name="William Estes" userId="a88fcdbc31b6f594" providerId="LiveId" clId="{F672AB5B-FF42-4746-B776-B42BA4AD19CD}" dt="2021-02-08T23:35:10.310" v="586" actId="1076"/>
+          <ac:chgData name="William Estes" userId="a88fcdbc31b6f594" providerId="Windows Live" clId="Web-{DB70B1DC-F3CD-4B79-55DF-C938D75B7304}" dt="2020-08-28T21:04:07.078" v="16" actId="20577"/>
           <ac:spMkLst>
             <pc:docMk/>
             <pc:sldMk cId="3007801671" sldId="291"/>
-            <ac:spMk id="12" creationId="{CF97C5AB-99C6-437C-B2DB-5A3F7C1729C7}"/>
+            <ac:spMk id="2" creationId="{5C86CBF7-69F7-7B44-ABCE-F80D6130EA7B}"/>
+          </ac:spMkLst>
+        </pc:spChg>
+        <pc:spChg chg="mod">
+          <ac:chgData name="William Estes" userId="a88fcdbc31b6f594" providerId="Windows Live" clId="Web-{DB70B1DC-F3CD-4B79-55DF-C938D75B7304}" dt="2020-08-28T21:20:09.333" v="313" actId="20577"/>
+          <ac:spMkLst>
+            <pc:docMk/>
+            <pc:sldMk cId="3007801671" sldId="291"/>
+            <ac:spMk id="3" creationId="{1095E837-F77E-AE4D-944C-919B5D780AAA}"/>
+          </ac:spMkLst>
+        </pc:spChg>
+        <pc:spChg chg="add mod">
+          <ac:chgData name="William Estes" userId="a88fcdbc31b6f594" providerId="Windows Live" clId="Web-{DB70B1DC-F3CD-4B79-55DF-C938D75B7304}" dt="2020-08-28T21:15:38.066" v="157" actId="1076"/>
+          <ac:spMkLst>
+            <pc:docMk/>
+            <pc:sldMk cId="3007801671" sldId="291"/>
+            <ac:spMk id="4" creationId="{ADB1C674-FD00-4D6C-866A-6C5E6B13E5F3}"/>
+          </ac:spMkLst>
+        </pc:spChg>
+        <pc:spChg chg="add mod">
+          <ac:chgData name="William Estes" userId="a88fcdbc31b6f594" providerId="Windows Live" clId="Web-{DB70B1DC-F3CD-4B79-55DF-C938D75B7304}" dt="2020-08-28T21:14:30.643" v="116" actId="1076"/>
+          <ac:spMkLst>
+            <pc:docMk/>
+            <pc:sldMk cId="3007801671" sldId="291"/>
+            <ac:spMk id="5" creationId="{4952BA95-9BBD-41E0-9E5D-9FA167EAC776}"/>
+          </ac:spMkLst>
+        </pc:spChg>
+        <pc:spChg chg="add mod">
+          <ac:chgData name="William Estes" userId="a88fcdbc31b6f594" providerId="Windows Live" clId="Web-{DB70B1DC-F3CD-4B79-55DF-C938D75B7304}" dt="2020-08-28T21:15:45.597" v="160" actId="1076"/>
+          <ac:spMkLst>
+            <pc:docMk/>
+            <pc:sldMk cId="3007801671" sldId="291"/>
+            <ac:spMk id="6" creationId="{3A659AA7-456C-4E13-9785-37DE36D63852}"/>
+          </ac:spMkLst>
+        </pc:spChg>
+        <pc:spChg chg="add mod">
+          <ac:chgData name="William Estes" userId="a88fcdbc31b6f594" providerId="Windows Live" clId="Web-{DB70B1DC-F3CD-4B79-55DF-C938D75B7304}" dt="2020-08-28T21:20:20.927" v="317" actId="14100"/>
+          <ac:spMkLst>
+            <pc:docMk/>
+            <pc:sldMk cId="3007801671" sldId="291"/>
+            <ac:spMk id="7" creationId="{7886BCBF-684F-4CAE-A080-5AC735A7B257}"/>
+          </ac:spMkLst>
+        </pc:spChg>
+        <pc:spChg chg="add mod">
+          <ac:chgData name="William Estes" userId="a88fcdbc31b6f594" providerId="Windows Live" clId="Web-{DB70B1DC-F3CD-4B79-55DF-C938D75B7304}" dt="2020-08-28T21:20:24.989" v="319" actId="1076"/>
+          <ac:spMkLst>
+            <pc:docMk/>
+            <pc:sldMk cId="3007801671" sldId="291"/>
+            <ac:spMk id="8" creationId="{54FC6B76-B785-4E1A-B012-472FF0BBF661}"/>
+          </ac:spMkLst>
+        </pc:spChg>
+        <pc:spChg chg="add mod">
+          <ac:chgData name="William Estes" userId="a88fcdbc31b6f594" providerId="Windows Live" clId="Web-{DB70B1DC-F3CD-4B79-55DF-C938D75B7304}" dt="2020-08-28T21:20:29.411" v="322" actId="14100"/>
+          <ac:spMkLst>
+            <pc:docMk/>
+            <pc:sldMk cId="3007801671" sldId="291"/>
+            <ac:spMk id="9" creationId="{224E8681-C71E-4740-BFB7-94339D774377}"/>
+          </ac:spMkLst>
+        </pc:spChg>
+        <pc:spChg chg="add mod">
+          <ac:chgData name="William Estes" userId="a88fcdbc31b6f594" providerId="Windows Live" clId="Web-{DB70B1DC-F3CD-4B79-55DF-C938D75B7304}" dt="2020-08-28T21:20:49.567" v="327" actId="1076"/>
+          <ac:spMkLst>
+            <pc:docMk/>
+            <pc:sldMk cId="3007801671" sldId="291"/>
+            <ac:spMk id="10" creationId="{1D4A377E-20E9-42FA-9CBD-693081493559}"/>
           </ac:spMkLst>
         </pc:spChg>
       </pc:sldChg>
-      <pc:sldChg chg="modSp mod">
-        <pc:chgData name="William Estes" userId="a88fcdbc31b6f594" providerId="LiveId" clId="{F672AB5B-FF42-4746-B776-B42BA4AD19CD}" dt="2021-02-08T23:36:14.656" v="588" actId="1076"/>
+      <pc:sldChg chg="addSp delSp modSp add replId">
+        <pc:chgData name="William Estes" userId="a88fcdbc31b6f594" providerId="Windows Live" clId="Web-{DB70B1DC-F3CD-4B79-55DF-C938D75B7304}" dt="2020-08-28T21:26:55.476" v="549" actId="1076"/>
         <pc:sldMkLst>
           <pc:docMk/>
-          <pc:sldMk cId="1031257587" sldId="292"/>
+          <pc:sldMk cId="171356189" sldId="292"/>
         </pc:sldMkLst>
         <pc:spChg chg="mod">
-          <ac:chgData name="William Estes" userId="a88fcdbc31b6f594" providerId="LiveId" clId="{F672AB5B-FF42-4746-B776-B42BA4AD19CD}" dt="2021-02-08T23:36:14.656" v="588" actId="1076"/>
-          <ac:spMkLst>
-            <pc:docMk/>
-            <pc:sldMk cId="1031257587" sldId="292"/>
-            <ac:spMk id="7" creationId="{81FEAAF1-55EF-429A-832F-657DD1B08A00}"/>
+          <ac:chgData name="William Estes" userId="a88fcdbc31b6f594" providerId="Windows Live" clId="Web-{DB70B1DC-F3CD-4B79-55DF-C938D75B7304}" dt="2020-08-28T21:24:18.256" v="416" actId="20577"/>
+          <ac:spMkLst>
+            <pc:docMk/>
+            <pc:sldMk cId="171356189" sldId="292"/>
+            <ac:spMk id="3" creationId="{1095E837-F77E-AE4D-944C-919B5D780AAA}"/>
           </ac:spMkLst>
         </pc:spChg>
         <pc:spChg chg="mod">
-          <ac:chgData name="William Estes" userId="a88fcdbc31b6f594" providerId="LiveId" clId="{F672AB5B-FF42-4746-B776-B42BA4AD19CD}" dt="2021-02-08T23:36:14.656" v="588" actId="1076"/>
-          <ac:spMkLst>
-            <pc:docMk/>
-            <pc:sldMk cId="1031257587" sldId="292"/>
-            <ac:spMk id="10" creationId="{A6C69913-6E66-4EF9-912E-4787D37F112A}"/>
-          </ac:spMkLst>
-        </pc:spChg>
-        <pc:spChg chg="mod">
-          <ac:chgData name="William Estes" userId="a88fcdbc31b6f594" providerId="LiveId" clId="{F672AB5B-FF42-4746-B776-B42BA4AD19CD}" dt="2021-02-08T23:36:14.656" v="588" actId="1076"/>
-          <ac:spMkLst>
-            <pc:docMk/>
-            <pc:sldMk cId="1031257587" sldId="292"/>
-            <ac:spMk id="13" creationId="{FA79162F-1F9C-4BB6-9C39-96C8B58E86C3}"/>
-          </ac:spMkLst>
-        </pc:spChg>
-        <pc:spChg chg="mod">
-          <ac:chgData name="William Estes" userId="a88fcdbc31b6f594" providerId="LiveId" clId="{F672AB5B-FF42-4746-B776-B42BA4AD19CD}" dt="2021-02-08T23:36:14.656" v="588" actId="1076"/>
-          <ac:spMkLst>
-            <pc:docMk/>
-            <pc:sldMk cId="1031257587" sldId="292"/>
-            <ac:spMk id="14" creationId="{BC68A978-56D8-4B49-B046-44ACD0A585A4}"/>
-          </ac:spMkLst>
-        </pc:spChg>
-        <pc:spChg chg="mod">
-          <ac:chgData name="William Estes" userId="a88fcdbc31b6f594" providerId="LiveId" clId="{F672AB5B-FF42-4746-B776-B42BA4AD19CD}" dt="2021-02-08T23:36:14.656" v="588" actId="1076"/>
-          <ac:spMkLst>
-            <pc:docMk/>
-            <pc:sldMk cId="1031257587" sldId="292"/>
-            <ac:spMk id="15" creationId="{7F19F82B-0D64-4D93-8D94-101BBFB46765}"/>
-          </ac:spMkLst>
-        </pc:spChg>
-        <pc:spChg chg="mod">
-          <ac:chgData name="William Estes" userId="a88fcdbc31b6f594" providerId="LiveId" clId="{F672AB5B-FF42-4746-B776-B42BA4AD19CD}" dt="2021-02-08T23:36:14.656" v="588" actId="1076"/>
-          <ac:spMkLst>
-            <pc:docMk/>
-            <pc:sldMk cId="1031257587" sldId="292"/>
-            <ac:spMk id="16" creationId="{2CD967FC-6B82-4F09-938B-F9E74AB74DB5}"/>
-          </ac:spMkLst>
-        </pc:spChg>
+          <ac:chgData name="William Estes" userId="a88fcdbc31b6f594" providerId="Windows Live" clId="Web-{DB70B1DC-F3CD-4B79-55DF-C938D75B7304}" dt="2020-08-28T21:22:42.943" v="384" actId="14100"/>
+          <ac:spMkLst>
+            <pc:docMk/>
+            <pc:sldMk cId="171356189" sldId="292"/>
+            <ac:spMk id="4" creationId="{ADB1C674-FD00-4D6C-866A-6C5E6B13E5F3}"/>
+          </ac:spMkLst>
+        </pc:spChg>
+        <pc:spChg chg="del">
+          <ac:chgData name="William Estes" userId="a88fcdbc31b6f594" providerId="Windows Live" clId="Web-{DB70B1DC-F3CD-4B79-55DF-C938D75B7304}" dt="2020-08-28T21:23:32.256" v="389"/>
+          <ac:spMkLst>
+            <pc:docMk/>
+            <pc:sldMk cId="171356189" sldId="292"/>
+            <ac:spMk id="5" creationId="{4952BA95-9BBD-41E0-9E5D-9FA167EAC776}"/>
+          </ac:spMkLst>
+        </pc:spChg>
+        <pc:spChg chg="del">
+          <ac:chgData name="William Estes" userId="a88fcdbc31b6f594" providerId="Windows Live" clId="Web-{DB70B1DC-F3CD-4B79-55DF-C938D75B7304}" dt="2020-08-28T21:23:29.506" v="388"/>
+          <ac:spMkLst>
+            <pc:docMk/>
+            <pc:sldMk cId="171356189" sldId="292"/>
+            <ac:spMk id="6" creationId="{3A659AA7-456C-4E13-9785-37DE36D63852}"/>
+          </ac:spMkLst>
+        </pc:spChg>
+        <pc:spChg chg="del">
+          <ac:chgData name="William Estes" userId="a88fcdbc31b6f594" providerId="Windows Live" clId="Web-{DB70B1DC-F3CD-4B79-55DF-C938D75B7304}" dt="2020-08-28T21:23:33.787" v="390"/>
+          <ac:spMkLst>
+            <pc:docMk/>
+            <pc:sldMk cId="171356189" sldId="292"/>
+            <ac:spMk id="7" creationId="{7886BCBF-684F-4CAE-A080-5AC735A7B257}"/>
+          </ac:spMkLst>
+        </pc:spChg>
+        <pc:spChg chg="del">
+          <ac:chgData name="William Estes" userId="a88fcdbc31b6f594" providerId="Windows Live" clId="Web-{DB70B1DC-F3CD-4B79-55DF-C938D75B7304}" dt="2020-08-28T21:23:36.646" v="391"/>
+          <ac:spMkLst>
+            <pc:docMk/>
+            <pc:sldMk cId="171356189" sldId="292"/>
+            <ac:spMk id="8" creationId="{54FC6B76-B785-4E1A-B012-472FF0BBF661}"/>
+          </ac:spMkLst>
+        </pc:spChg>
+        <pc:spChg chg="del">
+          <ac:chgData name="William Estes" userId="a88fcdbc31b6f594" providerId="Windows Live" clId="Web-{DB70B1DC-F3CD-4B79-55DF-C938D75B7304}" dt="2020-08-28T21:23:38.084" v="392"/>
+          <ac:spMkLst>
+            <pc:docMk/>
+            <pc:sldMk cId="171356189" sldId="292"/>
+            <ac:spMk id="9" creationId="{224E8681-C71E-4740-BFB7-94339D774377}"/>
+          </ac:spMkLst>
+        </pc:spChg>
+        <pc:spChg chg="del">
+          <ac:chgData name="William Estes" userId="a88fcdbc31b6f594" providerId="Windows Live" clId="Web-{DB70B1DC-F3CD-4B79-55DF-C938D75B7304}" dt="2020-08-28T21:23:40.225" v="393"/>
+          <ac:spMkLst>
+            <pc:docMk/>
+            <pc:sldMk cId="171356189" sldId="292"/>
+            <ac:spMk id="10" creationId="{1D4A377E-20E9-42FA-9CBD-693081493559}"/>
+          </ac:spMkLst>
+        </pc:spChg>
+        <pc:spChg chg="add mod">
+          <ac:chgData name="William Estes" userId="a88fcdbc31b6f594" providerId="Windows Live" clId="Web-{DB70B1DC-F3CD-4B79-55DF-C938D75B7304}" dt="2020-08-28T21:26:03.507" v="537" actId="1076"/>
+          <ac:spMkLst>
+            <pc:docMk/>
+            <pc:sldMk cId="171356189" sldId="292"/>
+            <ac:spMk id="11" creationId="{78CD0106-D05B-48F8-88DB-525D34C0A1A4}"/>
+          </ac:spMkLst>
+        </pc:spChg>
+        <pc:spChg chg="add mod">
+          <ac:chgData name="William Estes" userId="a88fcdbc31b6f594" providerId="Windows Live" clId="Web-{DB70B1DC-F3CD-4B79-55DF-C938D75B7304}" dt="2020-08-28T21:26:11.897" v="539" actId="1076"/>
+          <ac:spMkLst>
+            <pc:docMk/>
+            <pc:sldMk cId="171356189" sldId="292"/>
+            <ac:spMk id="12" creationId="{463E7D16-0E64-401F-AB9D-650B3290882F}"/>
+          </ac:spMkLst>
+        </pc:spChg>
+        <pc:spChg chg="add mod">
+          <ac:chgData name="William Estes" userId="a88fcdbc31b6f594" providerId="Windows Live" clId="Web-{DB70B1DC-F3CD-4B79-55DF-C938D75B7304}" dt="2020-08-28T21:26:16.460" v="540" actId="1076"/>
+          <ac:spMkLst>
+            <pc:docMk/>
+            <pc:sldMk cId="171356189" sldId="292"/>
+            <ac:spMk id="13" creationId="{85449B42-0E50-4771-A03D-AB1D291740A4}"/>
+          </ac:spMkLst>
+        </pc:spChg>
+        <pc:spChg chg="add mod">
+          <ac:chgData name="William Estes" userId="a88fcdbc31b6f594" providerId="Windows Live" clId="Web-{DB70B1DC-F3CD-4B79-55DF-C938D75B7304}" dt="2020-08-28T21:26:07.663" v="538" actId="1076"/>
+          <ac:spMkLst>
+            <pc:docMk/>
+            <pc:sldMk cId="171356189" sldId="292"/>
+            <ac:spMk id="14" creationId="{DA9640AD-8476-475D-8585-B3FF518B2F8A}"/>
+          </ac:spMkLst>
+        </pc:spChg>
+        <pc:spChg chg="add mod">
+          <ac:chgData name="William Estes" userId="a88fcdbc31b6f594" providerId="Windows Live" clId="Web-{DB70B1DC-F3CD-4B79-55DF-C938D75B7304}" dt="2020-08-28T21:25:43.975" v="514" actId="20577"/>
+          <ac:spMkLst>
+            <pc:docMk/>
+            <pc:sldMk cId="171356189" sldId="292"/>
+            <ac:spMk id="15" creationId="{0AA2F10F-EDBF-4224-9420-736F6FFE10FE}"/>
+          </ac:spMkLst>
+        </pc:spChg>
+        <pc:spChg chg="add mod">
+          <ac:chgData name="William Estes" userId="a88fcdbc31b6f594" providerId="Windows Live" clId="Web-{DB70B1DC-F3CD-4B79-55DF-C938D75B7304}" dt="2020-08-28T21:25:48.428" v="529" actId="20577"/>
+          <ac:spMkLst>
+            <pc:docMk/>
+            <pc:sldMk cId="171356189" sldId="292"/>
+            <ac:spMk id="16" creationId="{FC004729-9277-4FEB-92A0-2445B4CD18ED}"/>
+          </ac:spMkLst>
+        </pc:spChg>
+        <pc:spChg chg="add mod">
+          <ac:chgData name="William Estes" userId="a88fcdbc31b6f594" providerId="Windows Live" clId="Web-{DB70B1DC-F3CD-4B79-55DF-C938D75B7304}" dt="2020-08-28T21:25:52.428" v="534" actId="20577"/>
+          <ac:spMkLst>
+            <pc:docMk/>
+            <pc:sldMk cId="171356189" sldId="292"/>
+            <ac:spMk id="17" creationId="{FC5E33D3-1151-48B4-B1E9-569E51809E49}"/>
+          </ac:spMkLst>
+        </pc:spChg>
+        <pc:cxnChg chg="add mod">
+          <ac:chgData name="William Estes" userId="a88fcdbc31b6f594" providerId="Windows Live" clId="Web-{DB70B1DC-F3CD-4B79-55DF-C938D75B7304}" dt="2020-08-28T21:26:48.601" v="548" actId="1076"/>
+          <ac:cxnSpMkLst>
+            <pc:docMk/>
+            <pc:sldMk cId="171356189" sldId="292"/>
+            <ac:cxnSpMk id="18" creationId="{BAC96D7B-8998-499E-BF5C-15409E7D858B}"/>
+          </ac:cxnSpMkLst>
+        </pc:cxnChg>
+        <pc:cxnChg chg="add mod">
+          <ac:chgData name="William Estes" userId="a88fcdbc31b6f594" providerId="Windows Live" clId="Web-{DB70B1DC-F3CD-4B79-55DF-C938D75B7304}" dt="2020-08-28T21:26:55.476" v="549" actId="1076"/>
+          <ac:cxnSpMkLst>
+            <pc:docMk/>
+            <pc:sldMk cId="171356189" sldId="292"/>
+            <ac:cxnSpMk id="19" creationId="{32F6DD03-6306-4873-BC80-2C1AD86FC3B2}"/>
+          </ac:cxnSpMkLst>
+        </pc:cxnChg>
       </pc:sldChg>
-      <pc:sldChg chg="modSp mod">
-        <pc:chgData name="William Estes" userId="a88fcdbc31b6f594" providerId="LiveId" clId="{F672AB5B-FF42-4746-B776-B42BA4AD19CD}" dt="2021-02-08T23:37:45.712" v="590" actId="1076"/>
+      <pc:sldChg chg="addSp delSp modSp add replId">
+        <pc:chgData name="William Estes" userId="a88fcdbc31b6f594" providerId="Windows Live" clId="Web-{DB70B1DC-F3CD-4B79-55DF-C938D75B7304}" dt="2020-08-28T21:42:28.684" v="940" actId="14100"/>
         <pc:sldMkLst>
           <pc:docMk/>
-          <pc:sldMk cId="2184220433" sldId="295"/>
+          <pc:sldMk cId="4024895595" sldId="293"/>
         </pc:sldMkLst>
         <pc:spChg chg="mod">
-          <ac:chgData name="William Estes" userId="a88fcdbc31b6f594" providerId="LiveId" clId="{F672AB5B-FF42-4746-B776-B42BA4AD19CD}" dt="2021-02-08T23:37:45.712" v="590" actId="1076"/>
-          <ac:spMkLst>
-            <pc:docMk/>
-            <pc:sldMk cId="2184220433" sldId="295"/>
-            <ac:spMk id="5" creationId="{7B16B923-1F9B-4609-AF2C-FA03D25659EE}"/>
+          <ac:chgData name="William Estes" userId="a88fcdbc31b6f594" providerId="Windows Live" clId="Web-{DB70B1DC-F3CD-4B79-55DF-C938D75B7304}" dt="2020-08-28T21:42:21.668" v="936" actId="20577"/>
+          <ac:spMkLst>
+            <pc:docMk/>
+            <pc:sldMk cId="4024895595" sldId="293"/>
+            <ac:spMk id="3" creationId="{1095E837-F77E-AE4D-944C-919B5D780AAA}"/>
+          </ac:spMkLst>
+        </pc:spChg>
+        <pc:spChg chg="del">
+          <ac:chgData name="William Estes" userId="a88fcdbc31b6f594" providerId="Windows Live" clId="Web-{DB70B1DC-F3CD-4B79-55DF-C938D75B7304}" dt="2020-08-28T21:27:36.804" v="555"/>
+          <ac:spMkLst>
+            <pc:docMk/>
+            <pc:sldMk cId="4024895595" sldId="293"/>
+            <ac:spMk id="4" creationId="{ADB1C674-FD00-4D6C-866A-6C5E6B13E5F3}"/>
+          </ac:spMkLst>
+        </pc:spChg>
+        <pc:spChg chg="del">
+          <ac:chgData name="William Estes" userId="a88fcdbc31b6f594" providerId="Windows Live" clId="Web-{DB70B1DC-F3CD-4B79-55DF-C938D75B7304}" dt="2020-08-28T21:27:35.538" v="554"/>
+          <ac:spMkLst>
+            <pc:docMk/>
+            <pc:sldMk cId="4024895595" sldId="293"/>
+            <ac:spMk id="5" creationId="{4952BA95-9BBD-41E0-9E5D-9FA167EAC776}"/>
+          </ac:spMkLst>
+        </pc:spChg>
+        <pc:spChg chg="del">
+          <ac:chgData name="William Estes" userId="a88fcdbc31b6f594" providerId="Windows Live" clId="Web-{DB70B1DC-F3CD-4B79-55DF-C938D75B7304}" dt="2020-08-28T21:27:38.023" v="556"/>
+          <ac:spMkLst>
+            <pc:docMk/>
+            <pc:sldMk cId="4024895595" sldId="293"/>
+            <ac:spMk id="6" creationId="{3A659AA7-456C-4E13-9785-37DE36D63852}"/>
+          </ac:spMkLst>
+        </pc:spChg>
+        <pc:spChg chg="del">
+          <ac:chgData name="William Estes" userId="a88fcdbc31b6f594" providerId="Windows Live" clId="Web-{DB70B1DC-F3CD-4B79-55DF-C938D75B7304}" dt="2020-08-28T21:27:39.148" v="557"/>
+          <ac:spMkLst>
+            <pc:docMk/>
+            <pc:sldMk cId="4024895595" sldId="293"/>
+            <ac:spMk id="7" creationId="{7886BCBF-684F-4CAE-A080-5AC735A7B257}"/>
+          </ac:spMkLst>
+        </pc:spChg>
+        <pc:spChg chg="del">
+          <ac:chgData name="William Estes" userId="a88fcdbc31b6f594" providerId="Windows Live" clId="Web-{DB70B1DC-F3CD-4B79-55DF-C938D75B7304}" dt="2020-08-28T21:27:39.976" v="558"/>
+          <ac:spMkLst>
+            <pc:docMk/>
+            <pc:sldMk cId="4024895595" sldId="293"/>
+            <ac:spMk id="8" creationId="{54FC6B76-B785-4E1A-B012-472FF0BBF661}"/>
+          </ac:spMkLst>
+        </pc:spChg>
+        <pc:spChg chg="del">
+          <ac:chgData name="William Estes" userId="a88fcdbc31b6f594" providerId="Windows Live" clId="Web-{DB70B1DC-F3CD-4B79-55DF-C938D75B7304}" dt="2020-08-28T21:27:40.867" v="559"/>
+          <ac:spMkLst>
+            <pc:docMk/>
+            <pc:sldMk cId="4024895595" sldId="293"/>
+            <ac:spMk id="9" creationId="{224E8681-C71E-4740-BFB7-94339D774377}"/>
+          </ac:spMkLst>
+        </pc:spChg>
+        <pc:spChg chg="del">
+          <ac:chgData name="William Estes" userId="a88fcdbc31b6f594" providerId="Windows Live" clId="Web-{DB70B1DC-F3CD-4B79-55DF-C938D75B7304}" dt="2020-08-28T21:27:41.757" v="560"/>
+          <ac:spMkLst>
+            <pc:docMk/>
+            <pc:sldMk cId="4024895595" sldId="293"/>
+            <ac:spMk id="10" creationId="{1D4A377E-20E9-42FA-9CBD-693081493559}"/>
+          </ac:spMkLst>
+        </pc:spChg>
+        <pc:spChg chg="add mod">
+          <ac:chgData name="William Estes" userId="a88fcdbc31b6f594" providerId="Windows Live" clId="Web-{DB70B1DC-F3CD-4B79-55DF-C938D75B7304}" dt="2020-08-28T21:28:42.945" v="649" actId="14100"/>
+          <ac:spMkLst>
+            <pc:docMk/>
+            <pc:sldMk cId="4024895595" sldId="293"/>
+            <ac:spMk id="11" creationId="{3207FE19-F1CE-410A-AAE5-C514AFCD9962}"/>
+          </ac:spMkLst>
+        </pc:spChg>
+        <pc:spChg chg="add mod">
+          <ac:chgData name="William Estes" userId="a88fcdbc31b6f594" providerId="Windows Live" clId="Web-{DB70B1DC-F3CD-4B79-55DF-C938D75B7304}" dt="2020-08-28T21:29:44.805" v="765" actId="14100"/>
+          <ac:spMkLst>
+            <pc:docMk/>
+            <pc:sldMk cId="4024895595" sldId="293"/>
+            <ac:spMk id="12" creationId="{E685F5F8-0BE0-40EA-9282-95C550E44D12}"/>
+          </ac:spMkLst>
+        </pc:spChg>
+        <pc:spChg chg="add mod">
+          <ac:chgData name="William Estes" userId="a88fcdbc31b6f594" providerId="Windows Live" clId="Web-{DB70B1DC-F3CD-4B79-55DF-C938D75B7304}" dt="2020-08-28T21:42:28.684" v="940" actId="14100"/>
+          <ac:spMkLst>
+            <pc:docMk/>
+            <pc:sldMk cId="4024895595" sldId="293"/>
+            <ac:spMk id="13" creationId="{014E91E8-8BA1-4BE7-8636-2D4D82AC14F3}"/>
           </ac:spMkLst>
         </pc:spChg>
       </pc:sldChg>
-      <pc:sldChg chg="modSp mod">
-        <pc:chgData name="William Estes" userId="a88fcdbc31b6f594" providerId="LiveId" clId="{F672AB5B-FF42-4746-B776-B42BA4AD19CD}" dt="2021-02-08T23:41:16.844" v="592" actId="1076"/>
+    </pc:docChg>
+  </pc:docChgLst>
+  <pc:docChgLst>
+    <pc:chgData name="William Estes" userId="a88fcdbc31b6f594" providerId="Windows Live" clId="Web-{FB8EBDAE-A786-487F-1B40-B30CBDEC3F4F}"/>
+    <pc:docChg chg="addSld delSld modSld">
+      <pc:chgData name="William Estes" userId="a88fcdbc31b6f594" providerId="Windows Live" clId="Web-{FB8EBDAE-A786-487F-1B40-B30CBDEC3F4F}" dt="2020-09-06T17:44:38.113" v="542" actId="20577"/>
+      <pc:docMkLst>
+        <pc:docMk/>
+      </pc:docMkLst>
+      <pc:sldChg chg="modSp">
+        <pc:chgData name="William Estes" userId="a88fcdbc31b6f594" providerId="Windows Live" clId="Web-{FB8EBDAE-A786-487F-1B40-B30CBDEC3F4F}" dt="2020-09-05T18:13:44.669" v="455" actId="20577"/>
         <pc:sldMkLst>
           <pc:docMk/>
-          <pc:sldMk cId="1522982694" sldId="296"/>
+          <pc:sldMk cId="3421889743" sldId="277"/>
         </pc:sldMkLst>
         <pc:spChg chg="mod">
-          <ac:chgData name="William Estes" userId="a88fcdbc31b6f594" providerId="LiveId" clId="{F672AB5B-FF42-4746-B776-B42BA4AD19CD}" dt="2021-02-08T23:41:16.844" v="592" actId="1076"/>
-          <ac:spMkLst>
-            <pc:docMk/>
-            <pc:sldMk cId="1522982694" sldId="296"/>
-            <ac:spMk id="6" creationId="{8D3881AF-2AF0-4DF1-977D-DEFDD2FCFF0A}"/>
-          </ac:spMkLst>
-        </pc:spChg>
+          <ac:chgData name="William Estes" userId="a88fcdbc31b6f594" providerId="Windows Live" clId="Web-{FB8EBDAE-A786-487F-1B40-B30CBDEC3F4F}" dt="2020-09-05T18:13:44.669" v="455" actId="20577"/>
+          <ac:spMkLst>
+            <pc:docMk/>
+            <pc:sldMk cId="3421889743" sldId="277"/>
+            <ac:spMk id="4" creationId="{5C0E649D-E3FD-41FB-BA87-37C62725C740}"/>
+          </ac:spMkLst>
+        </pc:spChg>
+      </pc:sldChg>
+      <pc:sldChg chg="modSp">
+        <pc:chgData name="William Estes" userId="a88fcdbc31b6f594" providerId="Windows Live" clId="Web-{FB8EBDAE-A786-487F-1B40-B30CBDEC3F4F}" dt="2020-09-06T17:44:34.894" v="540" actId="20577"/>
+        <pc:sldMkLst>
+          <pc:docMk/>
+          <pc:sldMk cId="496210837" sldId="280"/>
+        </pc:sldMkLst>
         <pc:spChg chg="mod">
-          <ac:chgData name="William Estes" userId="a88fcdbc31b6f594" providerId="LiveId" clId="{F672AB5B-FF42-4746-B776-B42BA4AD19CD}" dt="2021-02-08T23:41:16.844" v="592" actId="1076"/>
-          <ac:spMkLst>
-            <pc:docMk/>
-            <pc:sldMk cId="1522982694" sldId="296"/>
-            <ac:spMk id="7" creationId="{F5D9FE73-3240-4541-BA18-9018D3F5BAA8}"/>
+          <ac:chgData name="William Estes" userId="a88fcdbc31b6f594" providerId="Windows Live" clId="Web-{FB8EBDAE-A786-487F-1B40-B30CBDEC3F4F}" dt="2020-09-06T17:44:34.894" v="540" actId="20577"/>
+          <ac:spMkLst>
+            <pc:docMk/>
+            <pc:sldMk cId="496210837" sldId="280"/>
+            <ac:spMk id="3" creationId="{3713A5A2-1019-0143-BC00-1B8B12D7C198}"/>
           </ac:spMkLst>
         </pc:spChg>
       </pc:sldChg>
       <pc:sldChg chg="add del">
-        <pc:chgData name="William Estes" userId="a88fcdbc31b6f594" providerId="LiveId" clId="{F672AB5B-FF42-4746-B776-B42BA4AD19CD}" dt="2021-02-08T17:18:21.404" v="3" actId="2696"/>
+        <pc:chgData name="William Estes" userId="a88fcdbc31b6f594" providerId="Windows Live" clId="Web-{FB8EBDAE-A786-487F-1B40-B30CBDEC3F4F}" dt="2020-09-05T16:51:34.675" v="1"/>
         <pc:sldMkLst>
           <pc:docMk/>
-          <pc:sldMk cId="4242654959" sldId="304"/>
+          <pc:sldMk cId="18420826" sldId="294"/>
         </pc:sldMkLst>
       </pc:sldChg>
-      <pc:sldChg chg="add del">
-        <pc:chgData name="William Estes" userId="a88fcdbc31b6f594" providerId="LiveId" clId="{F672AB5B-FF42-4746-B776-B42BA4AD19CD}" dt="2021-02-08T17:18:21.404" v="3" actId="2696"/>
+      <pc:sldChg chg="addSp delSp modSp">
+        <pc:chgData name="William Estes" userId="a88fcdbc31b6f594" providerId="Windows Live" clId="Web-{FB8EBDAE-A786-487F-1B40-B30CBDEC3F4F}" dt="2020-09-05T17:08:37.206" v="75" actId="1076"/>
         <pc:sldMkLst>
           <pc:docMk/>
-          <pc:sldMk cId="2469544991" sldId="305"/>
+          <pc:sldMk cId="4080448644" sldId="299"/>
+        </pc:sldMkLst>
+        <pc:picChg chg="del">
+          <ac:chgData name="William Estes" userId="a88fcdbc31b6f594" providerId="Windows Live" clId="Web-{FB8EBDAE-A786-487F-1B40-B30CBDEC3F4F}" dt="2020-09-05T17:08:29.050" v="71"/>
+          <ac:picMkLst>
+            <pc:docMk/>
+            <pc:sldMk cId="4080448644" sldId="299"/>
+            <ac:picMk id="4" creationId="{5CE153C2-E53B-443F-A1B7-1CECE7EE55A0}"/>
+          </ac:picMkLst>
+        </pc:picChg>
+        <pc:picChg chg="add mod">
+          <ac:chgData name="William Estes" userId="a88fcdbc31b6f594" providerId="Windows Live" clId="Web-{FB8EBDAE-A786-487F-1B40-B30CBDEC3F4F}" dt="2020-09-05T17:08:37.206" v="75" actId="1076"/>
+          <ac:picMkLst>
+            <pc:docMk/>
+            <pc:sldMk cId="4080448644" sldId="299"/>
+            <ac:picMk id="5" creationId="{3978EFC9-22F4-43EA-941F-95906CDF7E8E}"/>
+          </ac:picMkLst>
+        </pc:picChg>
+      </pc:sldChg>
+      <pc:sldChg chg="addSp delSp modSp">
+        <pc:chgData name="William Estes" userId="a88fcdbc31b6f594" providerId="Windows Live" clId="Web-{FB8EBDAE-A786-487F-1B40-B30CBDEC3F4F}" dt="2020-09-05T17:17:38.742" v="83" actId="20577"/>
+        <pc:sldMkLst>
+          <pc:docMk/>
+          <pc:sldMk cId="4113558887" sldId="300"/>
+        </pc:sldMkLst>
+        <pc:spChg chg="mod">
+          <ac:chgData name="William Estes" userId="a88fcdbc31b6f594" providerId="Windows Live" clId="Web-{FB8EBDAE-A786-487F-1B40-B30CBDEC3F4F}" dt="2020-09-05T17:17:38.742" v="83" actId="20577"/>
+          <ac:spMkLst>
+            <pc:docMk/>
+            <pc:sldMk cId="4113558887" sldId="300"/>
+            <ac:spMk id="3" creationId="{1095E837-F77E-AE4D-944C-919B5D780AAA}"/>
+          </ac:spMkLst>
+        </pc:spChg>
+        <pc:picChg chg="add mod">
+          <ac:chgData name="William Estes" userId="a88fcdbc31b6f594" providerId="Windows Live" clId="Web-{FB8EBDAE-A786-487F-1B40-B30CBDEC3F4F}" dt="2020-09-05T17:13:54.802" v="80" actId="1076"/>
+          <ac:picMkLst>
+            <pc:docMk/>
+            <pc:sldMk cId="4113558887" sldId="300"/>
+            <ac:picMk id="4" creationId="{35579B6A-8784-435F-8258-F5BA08604F52}"/>
+          </ac:picMkLst>
+        </pc:picChg>
+        <pc:picChg chg="del mod">
+          <ac:chgData name="William Estes" userId="a88fcdbc31b6f594" providerId="Windows Live" clId="Web-{FB8EBDAE-A786-487F-1B40-B30CBDEC3F4F}" dt="2020-09-05T17:13:44.192" v="76"/>
+          <ac:picMkLst>
+            <pc:docMk/>
+            <pc:sldMk cId="4113558887" sldId="300"/>
+            <ac:picMk id="5" creationId="{D37651DB-3834-493B-8A24-2FE8EFC6849E}"/>
+          </ac:picMkLst>
+        </pc:picChg>
+      </pc:sldChg>
+      <pc:sldChg chg="modSp">
+        <pc:chgData name="William Estes" userId="a88fcdbc31b6f594" providerId="Windows Live" clId="Web-{FB8EBDAE-A786-487F-1B40-B30CBDEC3F4F}" dt="2020-09-06T15:01:29.873" v="460" actId="20577"/>
+        <pc:sldMkLst>
+          <pc:docMk/>
+          <pc:sldMk cId="284483567" sldId="303"/>
+        </pc:sldMkLst>
+        <pc:spChg chg="mod">
+          <ac:chgData name="William Estes" userId="a88fcdbc31b6f594" providerId="Windows Live" clId="Web-{FB8EBDAE-A786-487F-1B40-B30CBDEC3F4F}" dt="2020-09-06T15:01:29.873" v="460" actId="20577"/>
+          <ac:spMkLst>
+            <pc:docMk/>
+            <pc:sldMk cId="284483567" sldId="303"/>
+            <ac:spMk id="3" creationId="{1095E837-F77E-AE4D-944C-919B5D780AAA}"/>
+          </ac:spMkLst>
+        </pc:spChg>
+      </pc:sldChg>
+      <pc:sldChg chg="delSp add del replId">
+        <pc:chgData name="William Estes" userId="a88fcdbc31b6f594" providerId="Windows Live" clId="Web-{FB8EBDAE-A786-487F-1B40-B30CBDEC3F4F}" dt="2020-09-05T16:55:31.364" v="4"/>
+        <pc:sldMkLst>
+          <pc:docMk/>
+          <pc:sldMk cId="54336157" sldId="309"/>
+        </pc:sldMkLst>
+        <pc:picChg chg="del">
+          <ac:chgData name="William Estes" userId="a88fcdbc31b6f594" providerId="Windows Live" clId="Web-{FB8EBDAE-A786-487F-1B40-B30CBDEC3F4F}" dt="2020-09-05T16:51:39.831" v="3"/>
+          <ac:picMkLst>
+            <pc:docMk/>
+            <pc:sldMk cId="54336157" sldId="309"/>
+            <ac:picMk id="4" creationId="{F86C7889-CD4D-48A5-84FB-A1AF08FD274C}"/>
+          </ac:picMkLst>
+        </pc:picChg>
+      </pc:sldChg>
+    </pc:docChg>
+  </pc:docChgLst>
+  <pc:docChgLst>
+    <pc:chgData name="William Estes" userId="a88fcdbc31b6f594" providerId="Windows Live" clId="Web-{1A15A8C6-7F5E-4D8D-5352-2EA23EAA5965}"/>
+    <pc:docChg chg="addSld modSld">
+      <pc:chgData name="William Estes" userId="a88fcdbc31b6f594" providerId="Windows Live" clId="Web-{1A15A8C6-7F5E-4D8D-5352-2EA23EAA5965}" dt="2020-09-07T15:01:30.185" v="35" actId="20577"/>
+      <pc:docMkLst>
+        <pc:docMk/>
+      </pc:docMkLst>
+      <pc:sldChg chg="modSp">
+        <pc:chgData name="William Estes" userId="a88fcdbc31b6f594" providerId="Windows Live" clId="Web-{1A15A8C6-7F5E-4D8D-5352-2EA23EAA5965}" dt="2020-09-07T15:01:29.544" v="33" actId="20577"/>
+        <pc:sldMkLst>
+          <pc:docMk/>
+          <pc:sldMk cId="1056604679" sldId="260"/>
+        </pc:sldMkLst>
+        <pc:spChg chg="mod">
+          <ac:chgData name="William Estes" userId="a88fcdbc31b6f594" providerId="Windows Live" clId="Web-{1A15A8C6-7F5E-4D8D-5352-2EA23EAA5965}" dt="2020-09-07T15:01:15.747" v="9" actId="20577"/>
+          <ac:spMkLst>
+            <pc:docMk/>
+            <pc:sldMk cId="1056604679" sldId="260"/>
+            <ac:spMk id="2" creationId="{089AB04D-874D-0245-A562-02212EE48CA7}"/>
+          </ac:spMkLst>
+        </pc:spChg>
+        <pc:spChg chg="mod">
+          <ac:chgData name="William Estes" userId="a88fcdbc31b6f594" providerId="Windows Live" clId="Web-{1A15A8C6-7F5E-4D8D-5352-2EA23EAA5965}" dt="2020-09-07T15:01:29.544" v="33" actId="20577"/>
+          <ac:spMkLst>
+            <pc:docMk/>
+            <pc:sldMk cId="1056604679" sldId="260"/>
+            <ac:spMk id="3" creationId="{3713A5A2-1019-0143-BC00-1B8B12D7C198}"/>
+          </ac:spMkLst>
+        </pc:spChg>
+      </pc:sldChg>
+      <pc:sldChg chg="add replId">
+        <pc:chgData name="William Estes" userId="a88fcdbc31b6f594" providerId="Windows Live" clId="Web-{1A15A8C6-7F5E-4D8D-5352-2EA23EAA5965}" dt="2020-09-07T15:01:12.153" v="0"/>
+        <pc:sldMkLst>
+          <pc:docMk/>
+          <pc:sldMk cId="2117440973" sldId="309"/>
         </pc:sldMkLst>
       </pc:sldChg>
-      <pc:sldChg chg="add del">
-        <pc:chgData name="William Estes" userId="a88fcdbc31b6f594" providerId="LiveId" clId="{F672AB5B-FF42-4746-B776-B42BA4AD19CD}" dt="2021-02-08T17:18:21.404" v="3" actId="2696"/>
+    </pc:docChg>
+  </pc:docChgLst>
+  <pc:docChgLst>
+    <pc:chgData name="William Estes" userId="a88fcdbc31b6f594" providerId="Windows Live" clId="Web-{A6C77E77-BD87-4310-AAEF-8517C3D9C5FB}"/>
+    <pc:docChg chg="addSld delSld modSld sldOrd">
+      <pc:chgData name="William Estes" userId="a88fcdbc31b6f594" providerId="Windows Live" clId="Web-{A6C77E77-BD87-4310-AAEF-8517C3D9C5FB}" dt="2020-08-26T03:27:37.070" v="962" actId="1076"/>
+      <pc:docMkLst>
+        <pc:docMk/>
+      </pc:docMkLst>
+      <pc:sldChg chg="modSp">
+        <pc:chgData name="William Estes" userId="a88fcdbc31b6f594" providerId="Windows Live" clId="Web-{A6C77E77-BD87-4310-AAEF-8517C3D9C5FB}" dt="2020-08-26T03:15:59.426" v="554" actId="20577"/>
         <pc:sldMkLst>
           <pc:docMk/>
-          <pc:sldMk cId="2651208645" sldId="306"/>
+          <pc:sldMk cId="3421889743" sldId="277"/>
         </pc:sldMkLst>
+        <pc:spChg chg="mod">
+          <ac:chgData name="William Estes" userId="a88fcdbc31b6f594" providerId="Windows Live" clId="Web-{A6C77E77-BD87-4310-AAEF-8517C3D9C5FB}" dt="2020-08-26T03:15:59.426" v="554" actId="20577"/>
+          <ac:spMkLst>
+            <pc:docMk/>
+            <pc:sldMk cId="3421889743" sldId="277"/>
+            <ac:spMk id="4" creationId="{5C0E649D-E3FD-41FB-BA87-37C62725C740}"/>
+          </ac:spMkLst>
+        </pc:spChg>
       </pc:sldChg>
-      <pc:sldChg chg="modSp add del mod">
-        <pc:chgData name="William Estes" userId="a88fcdbc31b6f594" providerId="LiveId" clId="{F672AB5B-FF42-4746-B776-B42BA4AD19CD}" dt="2021-02-08T17:22:41.524" v="584" actId="5793"/>
+      <pc:sldChg chg="modSp">
+        <pc:chgData name="William Estes" userId="a88fcdbc31b6f594" providerId="Windows Live" clId="Web-{A6C77E77-BD87-4310-AAEF-8517C3D9C5FB}" dt="2020-08-26T01:20:26.775" v="140" actId="20577"/>
         <pc:sldMkLst>
           <pc:docMk/>
-          <pc:sldMk cId="746972265" sldId="307"/>
+          <pc:sldMk cId="496210837" sldId="280"/>
         </pc:sldMkLst>
         <pc:spChg chg="mod">
-          <ac:chgData name="William Estes" userId="a88fcdbc31b6f594" providerId="LiveId" clId="{F672AB5B-FF42-4746-B776-B42BA4AD19CD}" dt="2021-02-08T17:22:41.524" v="584" actId="5793"/>
-          <ac:spMkLst>
-            <pc:docMk/>
-            <pc:sldMk cId="746972265" sldId="307"/>
+          <ac:chgData name="William Estes" userId="a88fcdbc31b6f594" providerId="Windows Live" clId="Web-{A6C77E77-BD87-4310-AAEF-8517C3D9C5FB}" dt="2020-08-26T01:20:26.775" v="140" actId="20577"/>
+          <ac:spMkLst>
+            <pc:docMk/>
+            <pc:sldMk cId="496210837" sldId="280"/>
+            <ac:spMk id="3" creationId="{3713A5A2-1019-0143-BC00-1B8B12D7C198}"/>
+          </ac:spMkLst>
+        </pc:spChg>
+      </pc:sldChg>
+      <pc:sldChg chg="modSp">
+        <pc:chgData name="William Estes" userId="a88fcdbc31b6f594" providerId="Windows Live" clId="Web-{A6C77E77-BD87-4310-AAEF-8517C3D9C5FB}" dt="2020-08-26T03:16:10.020" v="557" actId="20577"/>
+        <pc:sldMkLst>
+          <pc:docMk/>
+          <pc:sldMk cId="2362235639" sldId="282"/>
+        </pc:sldMkLst>
+        <pc:spChg chg="mod">
+          <ac:chgData name="William Estes" userId="a88fcdbc31b6f594" providerId="Windows Live" clId="Web-{A6C77E77-BD87-4310-AAEF-8517C3D9C5FB}" dt="2020-08-26T03:16:10.020" v="557" actId="20577"/>
+          <ac:spMkLst>
+            <pc:docMk/>
+            <pc:sldMk cId="2362235639" sldId="282"/>
             <ac:spMk id="4" creationId="{5C0E649D-E3FD-41FB-BA87-37C62725C740}"/>
           </ac:spMkLst>
         </pc:spChg>
+      </pc:sldChg>
+      <pc:sldChg chg="addSp modSp add replId">
+        <pc:chgData name="William Estes" userId="a88fcdbc31b6f594" providerId="Windows Live" clId="Web-{A6C77E77-BD87-4310-AAEF-8517C3D9C5FB}" dt="2020-08-26T02:45:04.278" v="539" actId="1076"/>
+        <pc:sldMkLst>
+          <pc:docMk/>
+          <pc:sldMk cId="1761172003" sldId="284"/>
+        </pc:sldMkLst>
+        <pc:spChg chg="mod">
+          <ac:chgData name="William Estes" userId="a88fcdbc31b6f594" providerId="Windows Live" clId="Web-{A6C77E77-BD87-4310-AAEF-8517C3D9C5FB}" dt="2020-08-26T02:44:42.716" v="533" actId="20577"/>
+          <ac:spMkLst>
+            <pc:docMk/>
+            <pc:sldMk cId="1761172003" sldId="284"/>
+            <ac:spMk id="3" creationId="{3713A5A2-1019-0143-BC00-1B8B12D7C198}"/>
+          </ac:spMkLst>
+        </pc:spChg>
+        <pc:picChg chg="add mod">
+          <ac:chgData name="William Estes" userId="a88fcdbc31b6f594" providerId="Windows Live" clId="Web-{A6C77E77-BD87-4310-AAEF-8517C3D9C5FB}" dt="2020-08-26T02:45:04.278" v="539" actId="1076"/>
+          <ac:picMkLst>
+            <pc:docMk/>
+            <pc:sldMk cId="1761172003" sldId="284"/>
+            <ac:picMk id="4" creationId="{0AAB46F1-32FF-49EB-85F0-DC9919487A99}"/>
+          </ac:picMkLst>
+        </pc:picChg>
+      </pc:sldChg>
+      <pc:sldChg chg="addSp modSp add replId">
+        <pc:chgData name="William Estes" userId="a88fcdbc31b6f594" providerId="Windows Live" clId="Web-{A6C77E77-BD87-4310-AAEF-8517C3D9C5FB}" dt="2020-08-26T01:39:20.822" v="290" actId="14100"/>
+        <pc:sldMkLst>
+          <pc:docMk/>
+          <pc:sldMk cId="3619621420" sldId="285"/>
+        </pc:sldMkLst>
+        <pc:spChg chg="mod">
+          <ac:chgData name="William Estes" userId="a88fcdbc31b6f594" providerId="Windows Live" clId="Web-{A6C77E77-BD87-4310-AAEF-8517C3D9C5FB}" dt="2020-08-26T01:39:08.744" v="286" actId="20577"/>
+          <ac:spMkLst>
+            <pc:docMk/>
+            <pc:sldMk cId="3619621420" sldId="285"/>
+            <ac:spMk id="3" creationId="{1095E837-F77E-AE4D-944C-919B5D780AAA}"/>
+          </ac:spMkLst>
+        </pc:spChg>
+        <pc:picChg chg="add mod">
+          <ac:chgData name="William Estes" userId="a88fcdbc31b6f594" providerId="Windows Live" clId="Web-{A6C77E77-BD87-4310-AAEF-8517C3D9C5FB}" dt="2020-08-26T01:39:20.822" v="290" actId="14100"/>
+          <ac:picMkLst>
+            <pc:docMk/>
+            <pc:sldMk cId="3619621420" sldId="285"/>
+            <ac:picMk id="4" creationId="{EDC43611-772D-4F8D-8AC8-E989597ACBEE}"/>
+          </ac:picMkLst>
+        </pc:picChg>
+      </pc:sldChg>
+      <pc:sldChg chg="addSp delSp modSp add replId">
+        <pc:chgData name="William Estes" userId="a88fcdbc31b6f594" providerId="Windows Live" clId="Web-{A6C77E77-BD87-4310-AAEF-8517C3D9C5FB}" dt="2020-08-26T01:46:57.636" v="331" actId="1076"/>
+        <pc:sldMkLst>
+          <pc:docMk/>
+          <pc:sldMk cId="1733125250" sldId="286"/>
+        </pc:sldMkLst>
+        <pc:spChg chg="mod">
+          <ac:chgData name="William Estes" userId="a88fcdbc31b6f594" providerId="Windows Live" clId="Web-{A6C77E77-BD87-4310-AAEF-8517C3D9C5FB}" dt="2020-08-26T01:39:53.213" v="317" actId="20577"/>
+          <ac:spMkLst>
+            <pc:docMk/>
+            <pc:sldMk cId="1733125250" sldId="286"/>
+            <ac:spMk id="3" creationId="{1095E837-F77E-AE4D-944C-919B5D780AAA}"/>
+          </ac:spMkLst>
+        </pc:spChg>
+        <pc:picChg chg="del">
+          <ac:chgData name="William Estes" userId="a88fcdbc31b6f594" providerId="Windows Live" clId="Web-{A6C77E77-BD87-4310-AAEF-8517C3D9C5FB}" dt="2020-08-26T01:39:57.854" v="321"/>
+          <ac:picMkLst>
+            <pc:docMk/>
+            <pc:sldMk cId="1733125250" sldId="286"/>
+            <ac:picMk id="4" creationId="{EDC43611-772D-4F8D-8AC8-E989597ACBEE}"/>
+          </ac:picMkLst>
+        </pc:picChg>
+        <pc:picChg chg="add mod">
+          <ac:chgData name="William Estes" userId="a88fcdbc31b6f594" providerId="Windows Live" clId="Web-{A6C77E77-BD87-4310-AAEF-8517C3D9C5FB}" dt="2020-08-26T01:46:52.855" v="329" actId="1076"/>
+          <ac:picMkLst>
+            <pc:docMk/>
+            <pc:sldMk cId="1733125250" sldId="286"/>
+            <ac:picMk id="5" creationId="{B1CA5894-019A-4758-883C-ED5815D0A5E9}"/>
+          </ac:picMkLst>
+        </pc:picChg>
+        <pc:picChg chg="add mod">
+          <ac:chgData name="William Estes" userId="a88fcdbc31b6f594" providerId="Windows Live" clId="Web-{A6C77E77-BD87-4310-AAEF-8517C3D9C5FB}" dt="2020-08-26T01:46:57.636" v="331" actId="1076"/>
+          <ac:picMkLst>
+            <pc:docMk/>
+            <pc:sldMk cId="1733125250" sldId="286"/>
+            <ac:picMk id="6" creationId="{0B3613EF-C45A-4A6B-8053-062DCF1F4D35}"/>
+          </ac:picMkLst>
+        </pc:picChg>
+      </pc:sldChg>
+      <pc:sldChg chg="modSp add ord replId">
+        <pc:chgData name="William Estes" userId="a88fcdbc31b6f594" providerId="Windows Live" clId="Web-{A6C77E77-BD87-4310-AAEF-8517C3D9C5FB}" dt="2020-08-26T03:09:10.805" v="547" actId="20577"/>
+        <pc:sldMkLst>
+          <pc:docMk/>
+          <pc:sldMk cId="3016926997" sldId="287"/>
+        </pc:sldMkLst>
+        <pc:spChg chg="mod">
+          <ac:chgData name="William Estes" userId="a88fcdbc31b6f594" providerId="Windows Live" clId="Web-{A6C77E77-BD87-4310-AAEF-8517C3D9C5FB}" dt="2020-08-26T03:09:10.805" v="547" actId="20577"/>
+          <ac:spMkLst>
+            <pc:docMk/>
+            <pc:sldMk cId="3016926997" sldId="287"/>
+            <ac:spMk id="4" creationId="{5C0E649D-E3FD-41FB-BA87-37C62725C740}"/>
+          </ac:spMkLst>
+        </pc:spChg>
+      </pc:sldChg>
+      <pc:sldChg chg="addSp delSp modSp add replId">
+        <pc:chgData name="William Estes" userId="a88fcdbc31b6f594" providerId="Windows Live" clId="Web-{A6C77E77-BD87-4310-AAEF-8517C3D9C5FB}" dt="2020-08-26T03:21:20.075" v="764" actId="20577"/>
+        <pc:sldMkLst>
+          <pc:docMk/>
+          <pc:sldMk cId="285019892" sldId="288"/>
+        </pc:sldMkLst>
+        <pc:spChg chg="mod">
+          <ac:chgData name="William Estes" userId="a88fcdbc31b6f594" providerId="Windows Live" clId="Web-{A6C77E77-BD87-4310-AAEF-8517C3D9C5FB}" dt="2020-08-26T03:21:20.075" v="764" actId="20577"/>
+          <ac:spMkLst>
+            <pc:docMk/>
+            <pc:sldMk cId="285019892" sldId="288"/>
+            <ac:spMk id="3" creationId="{3713A5A2-1019-0143-BC00-1B8B12D7C198}"/>
+          </ac:spMkLst>
+        </pc:spChg>
+        <pc:picChg chg="del">
+          <ac:chgData name="William Estes" userId="a88fcdbc31b6f594" providerId="Windows Live" clId="Web-{A6C77E77-BD87-4310-AAEF-8517C3D9C5FB}" dt="2020-08-26T03:18:23.461" v="561"/>
+          <ac:picMkLst>
+            <pc:docMk/>
+            <pc:sldMk cId="285019892" sldId="288"/>
+            <ac:picMk id="4" creationId="{0AAB46F1-32FF-49EB-85F0-DC9919487A99}"/>
+          </ac:picMkLst>
+        </pc:picChg>
+        <pc:picChg chg="add mod">
+          <ac:chgData name="William Estes" userId="a88fcdbc31b6f594" providerId="Windows Live" clId="Web-{A6C77E77-BD87-4310-AAEF-8517C3D9C5FB}" dt="2020-08-26T03:20:57.183" v="733" actId="1076"/>
+          <ac:picMkLst>
+            <pc:docMk/>
+            <pc:sldMk cId="285019892" sldId="288"/>
+            <ac:picMk id="5" creationId="{04D6FB7C-0757-4A34-84F2-D794EA9EA312}"/>
+          </ac:picMkLst>
+        </pc:picChg>
+      </pc:sldChg>
+      <pc:sldChg chg="addSp delSp modSp add replId">
+        <pc:chgData name="William Estes" userId="a88fcdbc31b6f594" providerId="Windows Live" clId="Web-{A6C77E77-BD87-4310-AAEF-8517C3D9C5FB}" dt="2020-08-26T03:24:12.220" v="838" actId="1076"/>
+        <pc:sldMkLst>
+          <pc:docMk/>
+          <pc:sldMk cId="134332572" sldId="289"/>
+        </pc:sldMkLst>
+        <pc:spChg chg="mod">
+          <ac:chgData name="William Estes" userId="a88fcdbc31b6f594" providerId="Windows Live" clId="Web-{A6C77E77-BD87-4310-AAEF-8517C3D9C5FB}" dt="2020-08-26T03:23:02.015" v="831" actId="20577"/>
+          <ac:spMkLst>
+            <pc:docMk/>
+            <pc:sldMk cId="134332572" sldId="289"/>
+            <ac:spMk id="3" creationId="{3713A5A2-1019-0143-BC00-1B8B12D7C198}"/>
+          </ac:spMkLst>
+        </pc:spChg>
+        <pc:picChg chg="add mod">
+          <ac:chgData name="William Estes" userId="a88fcdbc31b6f594" providerId="Windows Live" clId="Web-{A6C77E77-BD87-4310-AAEF-8517C3D9C5FB}" dt="2020-08-26T03:24:12.220" v="838" actId="1076"/>
+          <ac:picMkLst>
+            <pc:docMk/>
+            <pc:sldMk cId="134332572" sldId="289"/>
+            <ac:picMk id="4" creationId="{4259BACA-FCD8-48E2-9A07-B9333745DEDB}"/>
+          </ac:picMkLst>
+        </pc:picChg>
+        <pc:picChg chg="del">
+          <ac:chgData name="William Estes" userId="a88fcdbc31b6f594" providerId="Windows Live" clId="Web-{A6C77E77-BD87-4310-AAEF-8517C3D9C5FB}" dt="2020-08-26T03:23:03.343" v="834"/>
+          <ac:picMkLst>
+            <pc:docMk/>
+            <pc:sldMk cId="134332572" sldId="289"/>
+            <ac:picMk id="5" creationId="{04D6FB7C-0757-4A34-84F2-D794EA9EA312}"/>
+          </ac:picMkLst>
+        </pc:picChg>
+      </pc:sldChg>
+      <pc:sldChg chg="addSp delSp modSp add replId">
+        <pc:chgData name="William Estes" userId="a88fcdbc31b6f594" providerId="Windows Live" clId="Web-{A6C77E77-BD87-4310-AAEF-8517C3D9C5FB}" dt="2020-08-26T03:27:37.070" v="962" actId="1076"/>
+        <pc:sldMkLst>
+          <pc:docMk/>
+          <pc:sldMk cId="187834809" sldId="290"/>
+        </pc:sldMkLst>
+        <pc:spChg chg="mod">
+          <ac:chgData name="William Estes" userId="a88fcdbc31b6f594" providerId="Windows Live" clId="Web-{A6C77E77-BD87-4310-AAEF-8517C3D9C5FB}" dt="2020-08-26T03:25:37.911" v="956" actId="20577"/>
+          <ac:spMkLst>
+            <pc:docMk/>
+            <pc:sldMk cId="187834809" sldId="290"/>
+            <ac:spMk id="3" creationId="{3713A5A2-1019-0143-BC00-1B8B12D7C198}"/>
+          </ac:spMkLst>
+        </pc:spChg>
+        <pc:picChg chg="del">
+          <ac:chgData name="William Estes" userId="a88fcdbc31b6f594" providerId="Windows Live" clId="Web-{A6C77E77-BD87-4310-AAEF-8517C3D9C5FB}" dt="2020-08-26T03:24:45.784" v="845"/>
+          <ac:picMkLst>
+            <pc:docMk/>
+            <pc:sldMk cId="187834809" sldId="290"/>
+            <ac:picMk id="4" creationId="{0AAB46F1-32FF-49EB-85F0-DC9919487A99}"/>
+          </ac:picMkLst>
+        </pc:picChg>
+        <pc:picChg chg="add mod">
+          <ac:chgData name="William Estes" userId="a88fcdbc31b6f594" providerId="Windows Live" clId="Web-{A6C77E77-BD87-4310-AAEF-8517C3D9C5FB}" dt="2020-08-26T03:27:37.070" v="962" actId="1076"/>
+          <ac:picMkLst>
+            <pc:docMk/>
+            <pc:sldMk cId="187834809" sldId="290"/>
+            <ac:picMk id="5" creationId="{B057C833-D30E-41C1-9931-A05FBB997D65}"/>
+          </ac:picMkLst>
+        </pc:picChg>
+      </pc:sldChg>
+      <pc:sldChg chg="new del">
+        <pc:chgData name="William Estes" userId="a88fcdbc31b6f594" providerId="Windows Live" clId="Web-{A6C77E77-BD87-4310-AAEF-8517C3D9C5FB}" dt="2020-08-26T03:24:36.300" v="840"/>
+        <pc:sldMkLst>
+          <pc:docMk/>
+          <pc:sldMk cId="1788817066" sldId="290"/>
+        </pc:sldMkLst>
       </pc:sldChg>
     </pc:docChg>
   </pc:docChgLst>
@@ -825,121 +2424,6 @@
             <ac:picMk id="5" creationId="{7527B50C-2AB6-C94F-B961-251132699D14}"/>
           </ac:picMkLst>
         </pc:picChg>
-      </pc:sldChg>
-    </pc:docChg>
-  </pc:docChgLst>
-  <pc:docChgLst>
-    <pc:chgData name="William Estes" userId="a88fcdbc31b6f594" providerId="Windows Live" clId="Web-{9D5E7661-3202-4CBF-D9D6-3C97B3B5A29F}"/>
-    <pc:docChg chg="addSld modSld">
-      <pc:chgData name="William Estes" userId="a88fcdbc31b6f594" providerId="Windows Live" clId="Web-{9D5E7661-3202-4CBF-D9D6-3C97B3B5A29F}" dt="2020-08-30T17:39:55.940" v="307" actId="20577"/>
-      <pc:docMkLst>
-        <pc:docMk/>
-      </pc:docMkLst>
-      <pc:sldChg chg="modSp">
-        <pc:chgData name="William Estes" userId="a88fcdbc31b6f594" providerId="Windows Live" clId="Web-{9D5E7661-3202-4CBF-D9D6-3C97B3B5A29F}" dt="2020-08-30T16:59:29.002" v="17" actId="1076"/>
-        <pc:sldMkLst>
-          <pc:docMk/>
-          <pc:sldMk cId="1056604679" sldId="260"/>
-        </pc:sldMkLst>
-        <pc:spChg chg="mod">
-          <ac:chgData name="William Estes" userId="a88fcdbc31b6f594" providerId="Windows Live" clId="Web-{9D5E7661-3202-4CBF-D9D6-3C97B3B5A29F}" dt="2020-08-30T16:59:18.814" v="12" actId="20577"/>
-          <ac:spMkLst>
-            <pc:docMk/>
-            <pc:sldMk cId="1056604679" sldId="260"/>
-            <ac:spMk id="3" creationId="{3713A5A2-1019-0143-BC00-1B8B12D7C198}"/>
-          </ac:spMkLst>
-        </pc:spChg>
-        <pc:picChg chg="mod">
-          <ac:chgData name="William Estes" userId="a88fcdbc31b6f594" providerId="Windows Live" clId="Web-{9D5E7661-3202-4CBF-D9D6-3C97B3B5A29F}" dt="2020-08-30T16:59:29.002" v="17" actId="1076"/>
-          <ac:picMkLst>
-            <pc:docMk/>
-            <pc:sldMk cId="1056604679" sldId="260"/>
-            <ac:picMk id="7" creationId="{7D0999C3-1D3F-4622-9A1B-8DC734094F20}"/>
-          </ac:picMkLst>
-        </pc:picChg>
-      </pc:sldChg>
-      <pc:sldChg chg="modSp">
-        <pc:chgData name="William Estes" userId="a88fcdbc31b6f594" providerId="Windows Live" clId="Web-{9D5E7661-3202-4CBF-D9D6-3C97B3B5A29F}" dt="2020-08-30T17:04:53.993" v="50" actId="20577"/>
-        <pc:sldMkLst>
-          <pc:docMk/>
-          <pc:sldMk cId="2341259573" sldId="265"/>
-        </pc:sldMkLst>
-        <pc:spChg chg="mod">
-          <ac:chgData name="William Estes" userId="a88fcdbc31b6f594" providerId="Windows Live" clId="Web-{9D5E7661-3202-4CBF-D9D6-3C97B3B5A29F}" dt="2020-08-30T17:04:53.993" v="50" actId="20577"/>
-          <ac:spMkLst>
-            <pc:docMk/>
-            <pc:sldMk cId="2341259573" sldId="265"/>
-            <ac:spMk id="3" creationId="{3713A5A2-1019-0143-BC00-1B8B12D7C198}"/>
-          </ac:spMkLst>
-        </pc:spChg>
-      </pc:sldChg>
-      <pc:sldChg chg="modSp">
-        <pc:chgData name="William Estes" userId="a88fcdbc31b6f594" providerId="Windows Live" clId="Web-{9D5E7661-3202-4CBF-D9D6-3C97B3B5A29F}" dt="2020-08-30T17:17:31.820" v="55" actId="1076"/>
-        <pc:sldMkLst>
-          <pc:docMk/>
-          <pc:sldMk cId="1244393583" sldId="266"/>
-        </pc:sldMkLst>
-        <pc:picChg chg="mod">
-          <ac:chgData name="William Estes" userId="a88fcdbc31b6f594" providerId="Windows Live" clId="Web-{9D5E7661-3202-4CBF-D9D6-3C97B3B5A29F}" dt="2020-08-30T17:17:29.929" v="54" actId="1076"/>
-          <ac:picMkLst>
-            <pc:docMk/>
-            <pc:sldMk cId="1244393583" sldId="266"/>
-            <ac:picMk id="4" creationId="{AC9A6746-5AD2-4677-98D0-BEC258B8AE22}"/>
-          </ac:picMkLst>
-        </pc:picChg>
-        <pc:picChg chg="mod">
-          <ac:chgData name="William Estes" userId="a88fcdbc31b6f594" providerId="Windows Live" clId="Web-{9D5E7661-3202-4CBF-D9D6-3C97B3B5A29F}" dt="2020-08-30T17:17:31.820" v="55" actId="1076"/>
-          <ac:picMkLst>
-            <pc:docMk/>
-            <pc:sldMk cId="1244393583" sldId="266"/>
-            <ac:picMk id="5" creationId="{C4BD236A-ACF3-4D6E-B512-AAFF393A184A}"/>
-          </ac:picMkLst>
-        </pc:picChg>
-      </pc:sldChg>
-      <pc:sldChg chg="modSp">
-        <pc:chgData name="William Estes" userId="a88fcdbc31b6f594" providerId="Windows Live" clId="Web-{9D5E7661-3202-4CBF-D9D6-3C97B3B5A29F}" dt="2020-08-30T17:39:47.064" v="305" actId="20577"/>
-        <pc:sldMkLst>
-          <pc:docMk/>
-          <pc:sldMk cId="496210837" sldId="280"/>
-        </pc:sldMkLst>
-        <pc:spChg chg="mod">
-          <ac:chgData name="William Estes" userId="a88fcdbc31b6f594" providerId="Windows Live" clId="Web-{9D5E7661-3202-4CBF-D9D6-3C97B3B5A29F}" dt="2020-08-30T17:39:47.064" v="305" actId="20577"/>
-          <ac:spMkLst>
-            <pc:docMk/>
-            <pc:sldMk cId="496210837" sldId="280"/>
-            <ac:spMk id="3" creationId="{3713A5A2-1019-0143-BC00-1B8B12D7C198}"/>
-          </ac:spMkLst>
-        </pc:spChg>
-      </pc:sldChg>
-      <pc:sldChg chg="modSp">
-        <pc:chgData name="William Estes" userId="a88fcdbc31b6f594" providerId="Windows Live" clId="Web-{9D5E7661-3202-4CBF-D9D6-3C97B3B5A29F}" dt="2020-08-30T17:00:17.941" v="31" actId="20577"/>
-        <pc:sldMkLst>
-          <pc:docMk/>
-          <pc:sldMk cId="1784549319" sldId="281"/>
-        </pc:sldMkLst>
-        <pc:spChg chg="mod">
-          <ac:chgData name="William Estes" userId="a88fcdbc31b6f594" providerId="Windows Live" clId="Web-{9D5E7661-3202-4CBF-D9D6-3C97B3B5A29F}" dt="2020-08-30T17:00:17.941" v="31" actId="20577"/>
-          <ac:spMkLst>
-            <pc:docMk/>
-            <pc:sldMk cId="1784549319" sldId="281"/>
-            <ac:spMk id="6" creationId="{FDB60DBF-F433-4057-85ED-960E10BB18C1}"/>
-          </ac:spMkLst>
-        </pc:spChg>
-      </pc:sldChg>
-      <pc:sldChg chg="modSp add replId">
-        <pc:chgData name="William Estes" userId="a88fcdbc31b6f594" providerId="Windows Live" clId="Web-{9D5E7661-3202-4CBF-D9D6-3C97B3B5A29F}" dt="2020-08-30T17:38:23.844" v="280" actId="20577"/>
-        <pc:sldMkLst>
-          <pc:docMk/>
-          <pc:sldMk cId="433070316" sldId="300"/>
-        </pc:sldMkLst>
-        <pc:spChg chg="mod">
-          <ac:chgData name="William Estes" userId="a88fcdbc31b6f594" providerId="Windows Live" clId="Web-{9D5E7661-3202-4CBF-D9D6-3C97B3B5A29F}" dt="2020-08-30T17:38:23.844" v="280" actId="20577"/>
-          <ac:spMkLst>
-            <pc:docMk/>
-            <pc:sldMk cId="433070316" sldId="300"/>
-            <ac:spMk id="4" creationId="{5C0E649D-E3FD-41FB-BA87-37C62725C740}"/>
-          </ac:spMkLst>
-        </pc:spChg>
       </pc:sldChg>
     </pc:docChg>
   </pc:docChgLst>
@@ -1405,63 +2889,758 @@
     </pc:docChg>
   </pc:docChgLst>
   <pc:docChgLst>
-    <pc:chgData name="William Estes" userId="a88fcdbc31b6f594" providerId="Windows Live" clId="Web-{1A15A8C6-7F5E-4D8D-5352-2EA23EAA5965}"/>
-    <pc:docChg chg="addSld modSld">
-      <pc:chgData name="William Estes" userId="a88fcdbc31b6f594" providerId="Windows Live" clId="Web-{1A15A8C6-7F5E-4D8D-5352-2EA23EAA5965}" dt="2020-09-07T15:01:30.185" v="35" actId="20577"/>
+    <pc:chgData name="William Estes" userId="a88fcdbc31b6f594" providerId="LiveId" clId="{EA8B5388-DCDC-4189-896D-E99D3FFA17A8}"/>
+    <pc:docChg chg="modSld">
+      <pc:chgData name="William Estes" userId="a88fcdbc31b6f594" providerId="LiveId" clId="{EA8B5388-DCDC-4189-896D-E99D3FFA17A8}" dt="2021-05-19T03:41:43.962" v="1" actId="20577"/>
       <pc:docMkLst>
         <pc:docMk/>
       </pc:docMkLst>
-      <pc:sldChg chg="modSp">
-        <pc:chgData name="William Estes" userId="a88fcdbc31b6f594" providerId="Windows Live" clId="Web-{1A15A8C6-7F5E-4D8D-5352-2EA23EAA5965}" dt="2020-09-07T15:01:29.544" v="33" actId="20577"/>
-        <pc:sldMkLst>
-          <pc:docMk/>
-          <pc:sldMk cId="1056604679" sldId="260"/>
-        </pc:sldMkLst>
-        <pc:spChg chg="mod">
-          <ac:chgData name="William Estes" userId="a88fcdbc31b6f594" providerId="Windows Live" clId="Web-{1A15A8C6-7F5E-4D8D-5352-2EA23EAA5965}" dt="2020-09-07T15:01:15.747" v="9" actId="20577"/>
-          <ac:spMkLst>
-            <pc:docMk/>
-            <pc:sldMk cId="1056604679" sldId="260"/>
-            <ac:spMk id="2" creationId="{089AB04D-874D-0245-A562-02212EE48CA7}"/>
-          </ac:spMkLst>
-        </pc:spChg>
-        <pc:spChg chg="mod">
-          <ac:chgData name="William Estes" userId="a88fcdbc31b6f594" providerId="Windows Live" clId="Web-{1A15A8C6-7F5E-4D8D-5352-2EA23EAA5965}" dt="2020-09-07T15:01:29.544" v="33" actId="20577"/>
-          <ac:spMkLst>
-            <pc:docMk/>
-            <pc:sldMk cId="1056604679" sldId="260"/>
-            <ac:spMk id="3" creationId="{3713A5A2-1019-0143-BC00-1B8B12D7C198}"/>
-          </ac:spMkLst>
-        </pc:spChg>
-      </pc:sldChg>
-      <pc:sldChg chg="add replId">
-        <pc:chgData name="William Estes" userId="a88fcdbc31b6f594" providerId="Windows Live" clId="Web-{1A15A8C6-7F5E-4D8D-5352-2EA23EAA5965}" dt="2020-09-07T15:01:12.153" v="0"/>
-        <pc:sldMkLst>
-          <pc:docMk/>
-          <pc:sldMk cId="2117440973" sldId="309"/>
-        </pc:sldMkLst>
-      </pc:sldChg>
-    </pc:docChg>
-  </pc:docChgLst>
-  <pc:docChgLst>
-    <pc:chgData name="William Estes" userId="a88fcdbc31b6f594" providerId="Windows Live" clId="Web-{5B23830A-885F-4AA1-A0A2-535D71453C14}"/>
-    <pc:docChg chg="modSld">
-      <pc:chgData name="William Estes" userId="a88fcdbc31b6f594" providerId="Windows Live" clId="Web-{5B23830A-885F-4AA1-A0A2-535D71453C14}" dt="2020-08-22T17:18:03.769" v="356" actId="20577"/>
-      <pc:docMkLst>
-        <pc:docMk/>
-      </pc:docMkLst>
-      <pc:sldChg chg="modSp">
-        <pc:chgData name="William Estes" userId="a88fcdbc31b6f594" providerId="Windows Live" clId="Web-{5B23830A-885F-4AA1-A0A2-535D71453C14}" dt="2020-08-22T17:18:03.769" v="355" actId="20577"/>
+      <pc:sldChg chg="modSp mod">
+        <pc:chgData name="William Estes" userId="a88fcdbc31b6f594" providerId="LiveId" clId="{EA8B5388-DCDC-4189-896D-E99D3FFA17A8}" dt="2021-05-19T03:41:43.962" v="1" actId="20577"/>
         <pc:sldMkLst>
           <pc:docMk/>
           <pc:sldMk cId="496210837" sldId="280"/>
         </pc:sldMkLst>
         <pc:spChg chg="mod">
-          <ac:chgData name="William Estes" userId="a88fcdbc31b6f594" providerId="Windows Live" clId="Web-{5B23830A-885F-4AA1-A0A2-535D71453C14}" dt="2020-08-22T17:18:03.769" v="355" actId="20577"/>
+          <ac:chgData name="William Estes" userId="a88fcdbc31b6f594" providerId="LiveId" clId="{EA8B5388-DCDC-4189-896D-E99D3FFA17A8}" dt="2021-05-19T03:41:43.962" v="1" actId="20577"/>
           <ac:spMkLst>
             <pc:docMk/>
             <pc:sldMk cId="496210837" sldId="280"/>
             <ac:spMk id="3" creationId="{3713A5A2-1019-0143-BC00-1B8B12D7C198}"/>
+          </ac:spMkLst>
+        </pc:spChg>
+      </pc:sldChg>
+    </pc:docChg>
+  </pc:docChgLst>
+  <pc:docChgLst>
+    <pc:chgData name="William Estes" userId="a88fcdbc31b6f594" providerId="Windows Live" clId="Web-{031C1E02-F537-4B69-F31C-E9378A6E06AC}"/>
+    <pc:docChg chg="addSld delSld modSld sldOrd">
+      <pc:chgData name="William Estes" userId="a88fcdbc31b6f594" providerId="Windows Live" clId="Web-{031C1E02-F537-4B69-F31C-E9378A6E06AC}" dt="2020-09-07T22:31:27.349" v="1780" actId="20577"/>
+      <pc:docMkLst>
+        <pc:docMk/>
+      </pc:docMkLst>
+      <pc:sldChg chg="del">
+        <pc:chgData name="William Estes" userId="a88fcdbc31b6f594" providerId="Windows Live" clId="Web-{031C1E02-F537-4B69-F31C-E9378A6E06AC}" dt="2020-09-07T21:37:53.086" v="1371"/>
+        <pc:sldMkLst>
+          <pc:docMk/>
+          <pc:sldMk cId="1056604679" sldId="260"/>
+        </pc:sldMkLst>
+      </pc:sldChg>
+      <pc:sldChg chg="del">
+        <pc:chgData name="William Estes" userId="a88fcdbc31b6f594" providerId="Windows Live" clId="Web-{031C1E02-F537-4B69-F31C-E9378A6E06AC}" dt="2020-09-07T21:36:26.618" v="1355"/>
+        <pc:sldMkLst>
+          <pc:docMk/>
+          <pc:sldMk cId="3421889743" sldId="277"/>
+        </pc:sldMkLst>
+      </pc:sldChg>
+      <pc:sldChg chg="modSp">
+        <pc:chgData name="William Estes" userId="a88fcdbc31b6f594" providerId="Windows Live" clId="Web-{031C1E02-F537-4B69-F31C-E9378A6E06AC}" dt="2020-09-07T22:31:27.349" v="1779" actId="20577"/>
+        <pc:sldMkLst>
+          <pc:docMk/>
+          <pc:sldMk cId="496210837" sldId="280"/>
+        </pc:sldMkLst>
+        <pc:spChg chg="mod">
+          <ac:chgData name="William Estes" userId="a88fcdbc31b6f594" providerId="Windows Live" clId="Web-{031C1E02-F537-4B69-F31C-E9378A6E06AC}" dt="2020-09-07T22:31:27.349" v="1779" actId="20577"/>
+          <ac:spMkLst>
+            <pc:docMk/>
+            <pc:sldMk cId="496210837" sldId="280"/>
+            <ac:spMk id="3" creationId="{3713A5A2-1019-0143-BC00-1B8B12D7C198}"/>
+          </ac:spMkLst>
+        </pc:spChg>
+      </pc:sldChg>
+      <pc:sldChg chg="del">
+        <pc:chgData name="William Estes" userId="a88fcdbc31b6f594" providerId="Windows Live" clId="Web-{031C1E02-F537-4B69-F31C-E9378A6E06AC}" dt="2020-09-07T21:37:31.508" v="1369"/>
+        <pc:sldMkLst>
+          <pc:docMk/>
+          <pc:sldMk cId="1361839843" sldId="293"/>
+        </pc:sldMkLst>
+      </pc:sldChg>
+      <pc:sldChg chg="del">
+        <pc:chgData name="William Estes" userId="a88fcdbc31b6f594" providerId="Windows Live" clId="Web-{031C1E02-F537-4B69-F31C-E9378A6E06AC}" dt="2020-09-07T21:37:32.883" v="1370"/>
+        <pc:sldMkLst>
+          <pc:docMk/>
+          <pc:sldMk cId="18420826" sldId="294"/>
+        </pc:sldMkLst>
+      </pc:sldChg>
+      <pc:sldChg chg="delSp">
+        <pc:chgData name="William Estes" userId="a88fcdbc31b6f594" providerId="Windows Live" clId="Web-{031C1E02-F537-4B69-F31C-E9378A6E06AC}" dt="2020-09-07T21:36:55.883" v="1359"/>
+        <pc:sldMkLst>
+          <pc:docMk/>
+          <pc:sldMk cId="2184220433" sldId="295"/>
+        </pc:sldMkLst>
+        <pc:picChg chg="del">
+          <ac:chgData name="William Estes" userId="a88fcdbc31b6f594" providerId="Windows Live" clId="Web-{031C1E02-F537-4B69-F31C-E9378A6E06AC}" dt="2020-09-07T21:36:55.883" v="1359"/>
+          <ac:picMkLst>
+            <pc:docMk/>
+            <pc:sldMk cId="2184220433" sldId="295"/>
+            <ac:picMk id="4" creationId="{04D5CF95-8307-4AE3-987D-18DF7B0726A2}"/>
+          </ac:picMkLst>
+        </pc:picChg>
+      </pc:sldChg>
+      <pc:sldChg chg="delSp modSp">
+        <pc:chgData name="William Estes" userId="a88fcdbc31b6f594" providerId="Windows Live" clId="Web-{031C1E02-F537-4B69-F31C-E9378A6E06AC}" dt="2020-09-07T21:37:13.149" v="1368" actId="1076"/>
+        <pc:sldMkLst>
+          <pc:docMk/>
+          <pc:sldMk cId="1522982694" sldId="296"/>
+        </pc:sldMkLst>
+        <pc:spChg chg="mod">
+          <ac:chgData name="William Estes" userId="a88fcdbc31b6f594" providerId="Windows Live" clId="Web-{031C1E02-F537-4B69-F31C-E9378A6E06AC}" dt="2020-09-07T21:37:08.320" v="1365" actId="20577"/>
+          <ac:spMkLst>
+            <pc:docMk/>
+            <pc:sldMk cId="1522982694" sldId="296"/>
+            <ac:spMk id="3" creationId="{1095E837-F77E-AE4D-944C-919B5D780AAA}"/>
+          </ac:spMkLst>
+        </pc:spChg>
+        <pc:spChg chg="mod">
+          <ac:chgData name="William Estes" userId="a88fcdbc31b6f594" providerId="Windows Live" clId="Web-{031C1E02-F537-4B69-F31C-E9378A6E06AC}" dt="2020-09-07T21:37:13.149" v="1368" actId="1076"/>
+          <ac:spMkLst>
+            <pc:docMk/>
+            <pc:sldMk cId="1522982694" sldId="296"/>
+            <ac:spMk id="7" creationId="{F5D9FE73-3240-4541-BA18-9018D3F5BAA8}"/>
+          </ac:spMkLst>
+        </pc:spChg>
+        <pc:picChg chg="del">
+          <ac:chgData name="William Estes" userId="a88fcdbc31b6f594" providerId="Windows Live" clId="Web-{031C1E02-F537-4B69-F31C-E9378A6E06AC}" dt="2020-09-07T21:36:58.384" v="1360"/>
+          <ac:picMkLst>
+            <pc:docMk/>
+            <pc:sldMk cId="1522982694" sldId="296"/>
+            <ac:picMk id="8" creationId="{0B629BCE-AF24-4351-ADB1-FA7CD0617AB7}"/>
+          </ac:picMkLst>
+        </pc:picChg>
+      </pc:sldChg>
+      <pc:sldChg chg="del">
+        <pc:chgData name="William Estes" userId="a88fcdbc31b6f594" providerId="Windows Live" clId="Web-{031C1E02-F537-4B69-F31C-E9378A6E06AC}" dt="2020-09-07T21:36:36.149" v="1358"/>
+        <pc:sldMkLst>
+          <pc:docMk/>
+          <pc:sldMk cId="3207294362" sldId="297"/>
+        </pc:sldMkLst>
+      </pc:sldChg>
+      <pc:sldChg chg="del">
+        <pc:chgData name="William Estes" userId="a88fcdbc31b6f594" providerId="Windows Live" clId="Web-{031C1E02-F537-4B69-F31C-E9378A6E06AC}" dt="2020-09-07T21:36:33.711" v="1357"/>
+        <pc:sldMkLst>
+          <pc:docMk/>
+          <pc:sldMk cId="827534898" sldId="298"/>
+        </pc:sldMkLst>
+      </pc:sldChg>
+      <pc:sldChg chg="del">
+        <pc:chgData name="William Estes" userId="a88fcdbc31b6f594" providerId="Windows Live" clId="Web-{031C1E02-F537-4B69-F31C-E9378A6E06AC}" dt="2020-09-07T21:36:30.243" v="1356"/>
+        <pc:sldMkLst>
+          <pc:docMk/>
+          <pc:sldMk cId="4080448644" sldId="299"/>
+        </pc:sldMkLst>
+      </pc:sldChg>
+      <pc:sldChg chg="del">
+        <pc:chgData name="William Estes" userId="a88fcdbc31b6f594" providerId="Windows Live" clId="Web-{031C1E02-F537-4B69-F31C-E9378A6E06AC}" dt="2020-09-07T21:36:21.508" v="1352"/>
+        <pc:sldMkLst>
+          <pc:docMk/>
+          <pc:sldMk cId="4113558887" sldId="300"/>
+        </pc:sldMkLst>
+      </pc:sldChg>
+      <pc:sldChg chg="del">
+        <pc:chgData name="William Estes" userId="a88fcdbc31b6f594" providerId="Windows Live" clId="Web-{031C1E02-F537-4B69-F31C-E9378A6E06AC}" dt="2020-09-07T21:36:22.852" v="1353"/>
+        <pc:sldMkLst>
+          <pc:docMk/>
+          <pc:sldMk cId="871545074" sldId="302"/>
+        </pc:sldMkLst>
+      </pc:sldChg>
+      <pc:sldChg chg="del">
+        <pc:chgData name="William Estes" userId="a88fcdbc31b6f594" providerId="Windows Live" clId="Web-{031C1E02-F537-4B69-F31C-E9378A6E06AC}" dt="2020-09-07T21:36:23.977" v="1354"/>
+        <pc:sldMkLst>
+          <pc:docMk/>
+          <pc:sldMk cId="284483567" sldId="303"/>
+        </pc:sldMkLst>
+      </pc:sldChg>
+      <pc:sldChg chg="addSp delSp modSp">
+        <pc:chgData name="William Estes" userId="a88fcdbc31b6f594" providerId="Windows Live" clId="Web-{031C1E02-F537-4B69-F31C-E9378A6E06AC}" dt="2020-09-07T21:23:14.007" v="781" actId="20577"/>
+        <pc:sldMkLst>
+          <pc:docMk/>
+          <pc:sldMk cId="2117440973" sldId="309"/>
+        </pc:sldMkLst>
+        <pc:spChg chg="mod">
+          <ac:chgData name="William Estes" userId="a88fcdbc31b6f594" providerId="Windows Live" clId="Web-{031C1E02-F537-4B69-F31C-E9378A6E06AC}" dt="2020-09-07T21:23:14.007" v="781" actId="20577"/>
+          <ac:spMkLst>
+            <pc:docMk/>
+            <pc:sldMk cId="2117440973" sldId="309"/>
+            <ac:spMk id="3" creationId="{3713A5A2-1019-0143-BC00-1B8B12D7C198}"/>
+          </ac:spMkLst>
+        </pc:spChg>
+        <pc:picChg chg="add del mod">
+          <ac:chgData name="William Estes" userId="a88fcdbc31b6f594" providerId="Windows Live" clId="Web-{031C1E02-F537-4B69-F31C-E9378A6E06AC}" dt="2020-09-07T21:20:00.164" v="765"/>
+          <ac:picMkLst>
+            <pc:docMk/>
+            <pc:sldMk cId="2117440973" sldId="309"/>
+            <ac:picMk id="4" creationId="{4EE4A1E1-9F40-40B9-BE46-A40DEE1C7756}"/>
+          </ac:picMkLst>
+        </pc:picChg>
+        <pc:picChg chg="add del mod">
+          <ac:chgData name="William Estes" userId="a88fcdbc31b6f594" providerId="Windows Live" clId="Web-{031C1E02-F537-4B69-F31C-E9378A6E06AC}" dt="2020-09-07T21:20:01.289" v="766"/>
+          <ac:picMkLst>
+            <pc:docMk/>
+            <pc:sldMk cId="2117440973" sldId="309"/>
+            <ac:picMk id="5" creationId="{CC33AD93-8584-4C73-ACD1-137E417FEDC1}"/>
+          </ac:picMkLst>
+        </pc:picChg>
+      </pc:sldChg>
+      <pc:sldChg chg="new del">
+        <pc:chgData name="William Estes" userId="a88fcdbc31b6f594" providerId="Windows Live" clId="Web-{031C1E02-F537-4B69-F31C-E9378A6E06AC}" dt="2020-09-07T20:22:59.328" v="51"/>
+        <pc:sldMkLst>
+          <pc:docMk/>
+          <pc:sldMk cId="3081972389" sldId="310"/>
+        </pc:sldMkLst>
+      </pc:sldChg>
+      <pc:sldChg chg="addSp delSp modSp add replId">
+        <pc:chgData name="William Estes" userId="a88fcdbc31b6f594" providerId="Windows Live" clId="Web-{031C1E02-F537-4B69-F31C-E9378A6E06AC}" dt="2020-09-07T20:54:26.215" v="684" actId="1076"/>
+        <pc:sldMkLst>
+          <pc:docMk/>
+          <pc:sldMk cId="3606642476" sldId="310"/>
+        </pc:sldMkLst>
+        <pc:spChg chg="mod">
+          <ac:chgData name="William Estes" userId="a88fcdbc31b6f594" providerId="Windows Live" clId="Web-{031C1E02-F537-4B69-F31C-E9378A6E06AC}" dt="2020-09-07T20:54:14.153" v="677" actId="20577"/>
+          <ac:spMkLst>
+            <pc:docMk/>
+            <pc:sldMk cId="3606642476" sldId="310"/>
+            <ac:spMk id="3" creationId="{3713A5A2-1019-0143-BC00-1B8B12D7C198}"/>
+          </ac:spMkLst>
+        </pc:spChg>
+        <pc:picChg chg="add del mod">
+          <ac:chgData name="William Estes" userId="a88fcdbc31b6f594" providerId="Windows Live" clId="Web-{031C1E02-F537-4B69-F31C-E9378A6E06AC}" dt="2020-09-07T20:31:21.173" v="243"/>
+          <ac:picMkLst>
+            <pc:docMk/>
+            <pc:sldMk cId="3606642476" sldId="310"/>
+            <ac:picMk id="4" creationId="{C2A73B43-63A2-4348-8210-E243D932F19A}"/>
+          </ac:picMkLst>
+        </pc:picChg>
+        <pc:picChg chg="add del mod">
+          <ac:chgData name="William Estes" userId="a88fcdbc31b6f594" providerId="Windows Live" clId="Web-{031C1E02-F537-4B69-F31C-E9378A6E06AC}" dt="2020-09-07T20:31:22.188" v="244"/>
+          <ac:picMkLst>
+            <pc:docMk/>
+            <pc:sldMk cId="3606642476" sldId="310"/>
+            <ac:picMk id="5" creationId="{98C6B8A0-0890-43EE-AFC9-F0CA42B6C48F}"/>
+          </ac:picMkLst>
+        </pc:picChg>
+        <pc:picChg chg="add mod">
+          <ac:chgData name="William Estes" userId="a88fcdbc31b6f594" providerId="Windows Live" clId="Web-{031C1E02-F537-4B69-F31C-E9378A6E06AC}" dt="2020-09-07T20:54:26.215" v="684" actId="1076"/>
+          <ac:picMkLst>
+            <pc:docMk/>
+            <pc:sldMk cId="3606642476" sldId="310"/>
+            <ac:picMk id="6" creationId="{2EE93A3D-157E-4114-9622-C81895DD233E}"/>
+          </ac:picMkLst>
+        </pc:picChg>
+      </pc:sldChg>
+      <pc:sldChg chg="addSp modSp add ord replId">
+        <pc:chgData name="William Estes" userId="a88fcdbc31b6f594" providerId="Windows Live" clId="Web-{031C1E02-F537-4B69-F31C-E9378A6E06AC}" dt="2020-09-07T21:15:42.352" v="749" actId="14100"/>
+        <pc:sldMkLst>
+          <pc:docMk/>
+          <pc:sldMk cId="1624642261" sldId="311"/>
+        </pc:sldMkLst>
+        <pc:spChg chg="mod">
+          <ac:chgData name="William Estes" userId="a88fcdbc31b6f594" providerId="Windows Live" clId="Web-{031C1E02-F537-4B69-F31C-E9378A6E06AC}" dt="2020-09-07T21:14:12.071" v="742" actId="20577"/>
+          <ac:spMkLst>
+            <pc:docMk/>
+            <pc:sldMk cId="1624642261" sldId="311"/>
+            <ac:spMk id="3" creationId="{3713A5A2-1019-0143-BC00-1B8B12D7C198}"/>
+          </ac:spMkLst>
+        </pc:spChg>
+        <pc:picChg chg="mod">
+          <ac:chgData name="William Estes" userId="a88fcdbc31b6f594" providerId="Windows Live" clId="Web-{031C1E02-F537-4B69-F31C-E9378A6E06AC}" dt="2020-09-07T21:14:16.227" v="745" actId="1076"/>
+          <ac:picMkLst>
+            <pc:docMk/>
+            <pc:sldMk cId="1624642261" sldId="311"/>
+            <ac:picMk id="4" creationId="{C2A73B43-63A2-4348-8210-E243D932F19A}"/>
+          </ac:picMkLst>
+        </pc:picChg>
+        <pc:picChg chg="mod">
+          <ac:chgData name="William Estes" userId="a88fcdbc31b6f594" providerId="Windows Live" clId="Web-{031C1E02-F537-4B69-F31C-E9378A6E06AC}" dt="2020-09-07T21:14:18.399" v="746" actId="1076"/>
+          <ac:picMkLst>
+            <pc:docMk/>
+            <pc:sldMk cId="1624642261" sldId="311"/>
+            <ac:picMk id="5" creationId="{98C6B8A0-0890-43EE-AFC9-F0CA42B6C48F}"/>
+          </ac:picMkLst>
+        </pc:picChg>
+        <pc:picChg chg="add mod">
+          <ac:chgData name="William Estes" userId="a88fcdbc31b6f594" providerId="Windows Live" clId="Web-{031C1E02-F537-4B69-F31C-E9378A6E06AC}" dt="2020-09-07T21:15:42.352" v="749" actId="14100"/>
+          <ac:picMkLst>
+            <pc:docMk/>
+            <pc:sldMk cId="1624642261" sldId="311"/>
+            <ac:picMk id="6" creationId="{4F0D4502-44B3-44A8-AED0-897726E24FA0}"/>
+          </ac:picMkLst>
+        </pc:picChg>
+      </pc:sldChg>
+      <pc:sldChg chg="addSp delSp modSp add ord replId">
+        <pc:chgData name="William Estes" userId="a88fcdbc31b6f594" providerId="Windows Live" clId="Web-{031C1E02-F537-4B69-F31C-E9378A6E06AC}" dt="2020-09-07T21:03:13.917" v="697"/>
+        <pc:sldMkLst>
+          <pc:docMk/>
+          <pc:sldMk cId="2603811181" sldId="312"/>
+        </pc:sldMkLst>
+        <pc:spChg chg="mod">
+          <ac:chgData name="William Estes" userId="a88fcdbc31b6f594" providerId="Windows Live" clId="Web-{031C1E02-F537-4B69-F31C-E9378A6E06AC}" dt="2020-09-07T21:00:49.558" v="691" actId="20577"/>
+          <ac:spMkLst>
+            <pc:docMk/>
+            <pc:sldMk cId="2603811181" sldId="312"/>
+            <ac:spMk id="3" creationId="{3713A5A2-1019-0143-BC00-1B8B12D7C198}"/>
+          </ac:spMkLst>
+        </pc:spChg>
+        <pc:picChg chg="add mod">
+          <ac:chgData name="William Estes" userId="a88fcdbc31b6f594" providerId="Windows Live" clId="Web-{031C1E02-F537-4B69-F31C-E9378A6E06AC}" dt="2020-09-07T21:02:56.792" v="696" actId="14100"/>
+          <ac:picMkLst>
+            <pc:docMk/>
+            <pc:sldMk cId="2603811181" sldId="312"/>
+            <ac:picMk id="4" creationId="{C51B3A44-51BC-4E57-B893-22C0D87B7F4F}"/>
+          </ac:picMkLst>
+        </pc:picChg>
+        <pc:picChg chg="del">
+          <ac:chgData name="William Estes" userId="a88fcdbc31b6f594" providerId="Windows Live" clId="Web-{031C1E02-F537-4B69-F31C-E9378A6E06AC}" dt="2020-09-07T21:00:41.386" v="688"/>
+          <ac:picMkLst>
+            <pc:docMk/>
+            <pc:sldMk cId="2603811181" sldId="312"/>
+            <ac:picMk id="6" creationId="{2EE93A3D-157E-4114-9622-C81895DD233E}"/>
+          </ac:picMkLst>
+        </pc:picChg>
+      </pc:sldChg>
+      <pc:sldChg chg="delSp modSp add replId">
+        <pc:chgData name="William Estes" userId="a88fcdbc31b6f594" providerId="Windows Live" clId="Web-{031C1E02-F537-4B69-F31C-E9378A6E06AC}" dt="2020-09-07T21:20:45.507" v="780" actId="1076"/>
+        <pc:sldMkLst>
+          <pc:docMk/>
+          <pc:sldMk cId="2451915283" sldId="313"/>
+        </pc:sldMkLst>
+        <pc:spChg chg="del mod">
+          <ac:chgData name="William Estes" userId="a88fcdbc31b6f594" providerId="Windows Live" clId="Web-{031C1E02-F537-4B69-F31C-E9378A6E06AC}" dt="2020-09-07T21:20:42.757" v="779"/>
+          <ac:spMkLst>
+            <pc:docMk/>
+            <pc:sldMk cId="2451915283" sldId="313"/>
+            <ac:spMk id="3" creationId="{3713A5A2-1019-0143-BC00-1B8B12D7C198}"/>
+          </ac:spMkLst>
+        </pc:spChg>
+        <pc:picChg chg="mod">
+          <ac:chgData name="William Estes" userId="a88fcdbc31b6f594" providerId="Windows Live" clId="Web-{031C1E02-F537-4B69-F31C-E9378A6E06AC}" dt="2020-09-07T21:20:45.507" v="780" actId="1076"/>
+          <ac:picMkLst>
+            <pc:docMk/>
+            <pc:sldMk cId="2451915283" sldId="313"/>
+            <ac:picMk id="4" creationId="{4EE4A1E1-9F40-40B9-BE46-A40DEE1C7756}"/>
+          </ac:picMkLst>
+        </pc:picChg>
+        <pc:picChg chg="mod">
+          <ac:chgData name="William Estes" userId="a88fcdbc31b6f594" providerId="Windows Live" clId="Web-{031C1E02-F537-4B69-F31C-E9378A6E06AC}" dt="2020-09-07T21:20:38.679" v="778" actId="1076"/>
+          <ac:picMkLst>
+            <pc:docMk/>
+            <pc:sldMk cId="2451915283" sldId="313"/>
+            <ac:picMk id="5" creationId="{CC33AD93-8584-4C73-ACD1-137E417FEDC1}"/>
+          </ac:picMkLst>
+        </pc:picChg>
+      </pc:sldChg>
+      <pc:sldChg chg="delSp modSp add del replId">
+        <pc:chgData name="William Estes" userId="a88fcdbc31b6f594" providerId="Windows Live" clId="Web-{031C1E02-F537-4B69-F31C-E9378A6E06AC}" dt="2020-09-07T21:26:50.896" v="845"/>
+        <pc:sldMkLst>
+          <pc:docMk/>
+          <pc:sldMk cId="1190448600" sldId="314"/>
+        </pc:sldMkLst>
+        <pc:spChg chg="mod">
+          <ac:chgData name="William Estes" userId="a88fcdbc31b6f594" providerId="Windows Live" clId="Web-{031C1E02-F537-4B69-F31C-E9378A6E06AC}" dt="2020-09-07T21:24:54.459" v="842" actId="20577"/>
+          <ac:spMkLst>
+            <pc:docMk/>
+            <pc:sldMk cId="1190448600" sldId="314"/>
+            <ac:spMk id="3" creationId="{3713A5A2-1019-0143-BC00-1B8B12D7C198}"/>
+          </ac:spMkLst>
+        </pc:spChg>
+        <pc:picChg chg="del">
+          <ac:chgData name="William Estes" userId="a88fcdbc31b6f594" providerId="Windows Live" clId="Web-{031C1E02-F537-4B69-F31C-E9378A6E06AC}" dt="2020-09-07T21:24:38.100" v="823"/>
+          <ac:picMkLst>
+            <pc:docMk/>
+            <pc:sldMk cId="1190448600" sldId="314"/>
+            <ac:picMk id="4" creationId="{C2A73B43-63A2-4348-8210-E243D932F19A}"/>
+          </ac:picMkLst>
+        </pc:picChg>
+        <pc:picChg chg="del">
+          <ac:chgData name="William Estes" userId="a88fcdbc31b6f594" providerId="Windows Live" clId="Web-{031C1E02-F537-4B69-F31C-E9378A6E06AC}" dt="2020-09-07T21:24:39.147" v="824"/>
+          <ac:picMkLst>
+            <pc:docMk/>
+            <pc:sldMk cId="1190448600" sldId="314"/>
+            <ac:picMk id="5" creationId="{98C6B8A0-0890-43EE-AFC9-F0CA42B6C48F}"/>
+          </ac:picMkLst>
+        </pc:picChg>
+        <pc:picChg chg="del">
+          <ac:chgData name="William Estes" userId="a88fcdbc31b6f594" providerId="Windows Live" clId="Web-{031C1E02-F537-4B69-F31C-E9378A6E06AC}" dt="2020-09-07T21:24:40.194" v="825"/>
+          <ac:picMkLst>
+            <pc:docMk/>
+            <pc:sldMk cId="1190448600" sldId="314"/>
+            <ac:picMk id="6" creationId="{4F0D4502-44B3-44A8-AED0-897726E24FA0}"/>
+          </ac:picMkLst>
+        </pc:picChg>
+      </pc:sldChg>
+      <pc:sldChg chg="modSp add ord replId">
+        <pc:chgData name="William Estes" userId="a88fcdbc31b6f594" providerId="Windows Live" clId="Web-{031C1E02-F537-4B69-F31C-E9378A6E06AC}" dt="2020-09-07T21:30:13.053" v="1348" actId="20577"/>
+        <pc:sldMkLst>
+          <pc:docMk/>
+          <pc:sldMk cId="4059676631" sldId="314"/>
+        </pc:sldMkLst>
+        <pc:spChg chg="mod">
+          <ac:chgData name="William Estes" userId="a88fcdbc31b6f594" providerId="Windows Live" clId="Web-{031C1E02-F537-4B69-F31C-E9378A6E06AC}" dt="2020-09-07T21:30:13.053" v="1348" actId="20577"/>
+          <ac:spMkLst>
+            <pc:docMk/>
+            <pc:sldMk cId="4059676631" sldId="314"/>
+            <ac:spMk id="4" creationId="{5C0E649D-E3FD-41FB-BA87-37C62725C740}"/>
+          </ac:spMkLst>
+        </pc:spChg>
+      </pc:sldChg>
+      <pc:sldChg chg="modSp add ord replId">
+        <pc:chgData name="William Estes" userId="a88fcdbc31b6f594" providerId="Windows Live" clId="Web-{031C1E02-F537-4B69-F31C-E9378A6E06AC}" dt="2020-09-07T22:06:51.443" v="1624" actId="20577"/>
+        <pc:sldMkLst>
+          <pc:docMk/>
+          <pc:sldMk cId="104406143" sldId="315"/>
+        </pc:sldMkLst>
+        <pc:spChg chg="mod">
+          <ac:chgData name="William Estes" userId="a88fcdbc31b6f594" providerId="Windows Live" clId="Web-{031C1E02-F537-4B69-F31C-E9378A6E06AC}" dt="2020-09-07T22:06:51.443" v="1624" actId="20577"/>
+          <ac:spMkLst>
+            <pc:docMk/>
+            <pc:sldMk cId="104406143" sldId="315"/>
+            <ac:spMk id="4" creationId="{5C0E649D-E3FD-41FB-BA87-37C62725C740}"/>
+          </ac:spMkLst>
+        </pc:spChg>
+      </pc:sldChg>
+      <pc:sldChg chg="add del ord replId">
+        <pc:chgData name="William Estes" userId="a88fcdbc31b6f594" providerId="Windows Live" clId="Web-{031C1E02-F537-4B69-F31C-E9378A6E06AC}" dt="2020-09-07T22:05:04.131" v="1374"/>
+        <pc:sldMkLst>
+          <pc:docMk/>
+          <pc:sldMk cId="2401950242" sldId="315"/>
+        </pc:sldMkLst>
+      </pc:sldChg>
+      <pc:sldChg chg="addSp delSp modSp add ord replId">
+        <pc:chgData name="William Estes" userId="a88fcdbc31b6f594" providerId="Windows Live" clId="Web-{031C1E02-F537-4B69-F31C-E9378A6E06AC}" dt="2020-09-07T22:21:05.033" v="1726" actId="14100"/>
+        <pc:sldMkLst>
+          <pc:docMk/>
+          <pc:sldMk cId="3755306264" sldId="316"/>
+        </pc:sldMkLst>
+        <pc:spChg chg="mod">
+          <ac:chgData name="William Estes" userId="a88fcdbc31b6f594" providerId="Windows Live" clId="Web-{031C1E02-F537-4B69-F31C-E9378A6E06AC}" dt="2020-09-07T22:08:35.645" v="1716" actId="20577"/>
+          <ac:spMkLst>
+            <pc:docMk/>
+            <pc:sldMk cId="3755306264" sldId="316"/>
+            <ac:spMk id="3" creationId="{3713A5A2-1019-0143-BC00-1B8B12D7C198}"/>
+          </ac:spMkLst>
+        </pc:spChg>
+        <pc:picChg chg="add mod">
+          <ac:chgData name="William Estes" userId="a88fcdbc31b6f594" providerId="Windows Live" clId="Web-{031C1E02-F537-4B69-F31C-E9378A6E06AC}" dt="2020-09-07T22:21:05.033" v="1726" actId="14100"/>
+          <ac:picMkLst>
+            <pc:docMk/>
+            <pc:sldMk cId="3755306264" sldId="316"/>
+            <ac:picMk id="4" creationId="{30EC191B-3BF8-47B4-B45C-3DAF709CCFE0}"/>
+          </ac:picMkLst>
+        </pc:picChg>
+        <pc:picChg chg="add mod">
+          <ac:chgData name="William Estes" userId="a88fcdbc31b6f594" providerId="Windows Live" clId="Web-{031C1E02-F537-4B69-F31C-E9378A6E06AC}" dt="2020-09-07T22:21:00.205" v="1725" actId="14100"/>
+          <ac:picMkLst>
+            <pc:docMk/>
+            <pc:sldMk cId="3755306264" sldId="316"/>
+            <ac:picMk id="5" creationId="{C89257E1-8984-4C68-B49E-F7CADDFFDD4F}"/>
+          </ac:picMkLst>
+        </pc:picChg>
+        <pc:picChg chg="del">
+          <ac:chgData name="William Estes" userId="a88fcdbc31b6f594" providerId="Windows Live" clId="Web-{031C1E02-F537-4B69-F31C-E9378A6E06AC}" dt="2020-09-07T22:07:14.849" v="1636"/>
+          <ac:picMkLst>
+            <pc:docMk/>
+            <pc:sldMk cId="3755306264" sldId="316"/>
+            <ac:picMk id="6" creationId="{2EE93A3D-157E-4114-9622-C81895DD233E}"/>
+          </ac:picMkLst>
+        </pc:picChg>
+      </pc:sldChg>
+    </pc:docChg>
+  </pc:docChgLst>
+  <pc:docChgLst>
+    <pc:chgData name="William Estes" userId="a88fcdbc31b6f594" providerId="Windows Live" clId="Web-{7787D62D-49AE-4D2D-B90A-2B4FEEB98020}"/>
+    <pc:docChg chg="modSld">
+      <pc:chgData name="William Estes" userId="a88fcdbc31b6f594" providerId="Windows Live" clId="Web-{7787D62D-49AE-4D2D-B90A-2B4FEEB98020}" dt="2020-09-02T20:47:25.883" v="45" actId="1076"/>
+      <pc:docMkLst>
+        <pc:docMk/>
+      </pc:docMkLst>
+      <pc:sldChg chg="modSp">
+        <pc:chgData name="William Estes" userId="a88fcdbc31b6f594" providerId="Windows Live" clId="Web-{7787D62D-49AE-4D2D-B90A-2B4FEEB98020}" dt="2020-09-02T20:41:44.736" v="0" actId="1076"/>
+        <pc:sldMkLst>
+          <pc:docMk/>
+          <pc:sldMk cId="3007801671" sldId="291"/>
+        </pc:sldMkLst>
+        <pc:spChg chg="mod">
+          <ac:chgData name="William Estes" userId="a88fcdbc31b6f594" providerId="Windows Live" clId="Web-{7787D62D-49AE-4D2D-B90A-2B4FEEB98020}" dt="2020-09-02T20:41:44.736" v="0" actId="1076"/>
+          <ac:spMkLst>
+            <pc:docMk/>
+            <pc:sldMk cId="3007801671" sldId="291"/>
+            <ac:spMk id="12" creationId="{CF97C5AB-99C6-437C-B2DB-5A3F7C1729C7}"/>
+          </ac:spMkLst>
+        </pc:spChg>
+      </pc:sldChg>
+      <pc:sldChg chg="addSp delSp modSp">
+        <pc:chgData name="William Estes" userId="a88fcdbc31b6f594" providerId="Windows Live" clId="Web-{7787D62D-49AE-4D2D-B90A-2B4FEEB98020}" dt="2020-09-02T20:47:25.883" v="45" actId="1076"/>
+        <pc:sldMkLst>
+          <pc:docMk/>
+          <pc:sldMk cId="1031257587" sldId="292"/>
+        </pc:sldMkLst>
+        <pc:spChg chg="add del mod">
+          <ac:chgData name="William Estes" userId="a88fcdbc31b6f594" providerId="Windows Live" clId="Web-{7787D62D-49AE-4D2D-B90A-2B4FEEB98020}" dt="2020-09-02T20:47:25.883" v="45" actId="1076"/>
+          <ac:spMkLst>
+            <pc:docMk/>
+            <pc:sldMk cId="1031257587" sldId="292"/>
+            <ac:spMk id="7" creationId="{81FEAAF1-55EF-429A-832F-657DD1B08A00}"/>
+          </ac:spMkLst>
+        </pc:spChg>
+        <pc:spChg chg="add del mod">
+          <ac:chgData name="William Estes" userId="a88fcdbc31b6f594" providerId="Windows Live" clId="Web-{7787D62D-49AE-4D2D-B90A-2B4FEEB98020}" dt="2020-09-02T20:47:23.540" v="44" actId="1076"/>
+          <ac:spMkLst>
+            <pc:docMk/>
+            <pc:sldMk cId="1031257587" sldId="292"/>
+            <ac:spMk id="10" creationId="{A6C69913-6E66-4EF9-912E-4787D37F112A}"/>
+          </ac:spMkLst>
+        </pc:spChg>
+        <pc:spChg chg="add del mod">
+          <ac:chgData name="William Estes" userId="a88fcdbc31b6f594" providerId="Windows Live" clId="Web-{7787D62D-49AE-4D2D-B90A-2B4FEEB98020}" dt="2020-09-02T20:47:22.883" v="43" actId="1076"/>
+          <ac:spMkLst>
+            <pc:docMk/>
+            <pc:sldMk cId="1031257587" sldId="292"/>
+            <ac:spMk id="13" creationId="{FA79162F-1F9C-4BB6-9C39-96C8B58E86C3}"/>
+          </ac:spMkLst>
+        </pc:spChg>
+        <pc:spChg chg="add del mod">
+          <ac:chgData name="William Estes" userId="a88fcdbc31b6f594" providerId="Windows Live" clId="Web-{7787D62D-49AE-4D2D-B90A-2B4FEEB98020}" dt="2020-09-02T20:47:22.211" v="42" actId="1076"/>
+          <ac:spMkLst>
+            <pc:docMk/>
+            <pc:sldMk cId="1031257587" sldId="292"/>
+            <ac:spMk id="14" creationId="{BC68A978-56D8-4B49-B046-44ACD0A585A4}"/>
+          </ac:spMkLst>
+        </pc:spChg>
+        <pc:spChg chg="add del mod">
+          <ac:chgData name="William Estes" userId="a88fcdbc31b6f594" providerId="Windows Live" clId="Web-{7787D62D-49AE-4D2D-B90A-2B4FEEB98020}" dt="2020-09-02T20:47:19.711" v="41" actId="1076"/>
+          <ac:spMkLst>
+            <pc:docMk/>
+            <pc:sldMk cId="1031257587" sldId="292"/>
+            <ac:spMk id="15" creationId="{7F19F82B-0D64-4D93-8D94-101BBFB46765}"/>
+          </ac:spMkLst>
+        </pc:spChg>
+        <pc:spChg chg="add del mod">
+          <ac:chgData name="William Estes" userId="a88fcdbc31b6f594" providerId="Windows Live" clId="Web-{7787D62D-49AE-4D2D-B90A-2B4FEEB98020}" dt="2020-09-02T20:47:18.664" v="40" actId="1076"/>
+          <ac:spMkLst>
+            <pc:docMk/>
+            <pc:sldMk cId="1031257587" sldId="292"/>
+            <ac:spMk id="16" creationId="{2CD967FC-6B82-4F09-938B-F9E74AB74DB5}"/>
+          </ac:spMkLst>
+        </pc:spChg>
+      </pc:sldChg>
+      <pc:sldChg chg="modSp">
+        <pc:chgData name="William Estes" userId="a88fcdbc31b6f594" providerId="Windows Live" clId="Web-{7787D62D-49AE-4D2D-B90A-2B4FEEB98020}" dt="2020-09-02T20:43:32.696" v="31" actId="20577"/>
+        <pc:sldMkLst>
+          <pc:docMk/>
+          <pc:sldMk cId="1361839843" sldId="293"/>
+        </pc:sldMkLst>
+        <pc:spChg chg="mod">
+          <ac:chgData name="William Estes" userId="a88fcdbc31b6f594" providerId="Windows Live" clId="Web-{7787D62D-49AE-4D2D-B90A-2B4FEEB98020}" dt="2020-09-02T20:43:32.696" v="31" actId="20577"/>
+          <ac:spMkLst>
+            <pc:docMk/>
+            <pc:sldMk cId="1361839843" sldId="293"/>
+            <ac:spMk id="3" creationId="{1095E837-F77E-AE4D-944C-919B5D780AAA}"/>
+          </ac:spMkLst>
+        </pc:spChg>
+      </pc:sldChg>
+    </pc:docChg>
+  </pc:docChgLst>
+  <pc:docChgLst>
+    <pc:chgData name="William Estes" userId="a88fcdbc31b6f594" providerId="Windows Live" clId="Web-{1468B90B-16D1-4C9C-8EE1-A35BA39A78D5}"/>
+    <pc:docChg chg="modSld">
+      <pc:chgData name="William Estes" userId="a88fcdbc31b6f594" providerId="Windows Live" clId="Web-{1468B90B-16D1-4C9C-8EE1-A35BA39A78D5}" dt="2020-09-08T15:10:14.255" v="326" actId="20577"/>
+      <pc:docMkLst>
+        <pc:docMk/>
+      </pc:docMkLst>
+      <pc:sldChg chg="modSp">
+        <pc:chgData name="William Estes" userId="a88fcdbc31b6f594" providerId="Windows Live" clId="Web-{1468B90B-16D1-4C9C-8EE1-A35BA39A78D5}" dt="2020-09-08T15:10:14.255" v="325" actId="20577"/>
+        <pc:sldMkLst>
+          <pc:docMk/>
+          <pc:sldMk cId="104406143" sldId="315"/>
+        </pc:sldMkLst>
+        <pc:spChg chg="mod">
+          <ac:chgData name="William Estes" userId="a88fcdbc31b6f594" providerId="Windows Live" clId="Web-{1468B90B-16D1-4C9C-8EE1-A35BA39A78D5}" dt="2020-09-08T15:10:14.255" v="325" actId="20577"/>
+          <ac:spMkLst>
+            <pc:docMk/>
+            <pc:sldMk cId="104406143" sldId="315"/>
+            <ac:spMk id="4" creationId="{5C0E649D-E3FD-41FB-BA87-37C62725C740}"/>
+          </ac:spMkLst>
+        </pc:spChg>
+      </pc:sldChg>
+    </pc:docChg>
+  </pc:docChgLst>
+  <pc:docChgLst>
+    <pc:chgData name="William Estes" userId="a88fcdbc31b6f594" providerId="LiveId" clId="{F672AB5B-FF42-4746-B776-B42BA4AD19CD}"/>
+    <pc:docChg chg="undo custSel addSld delSld modSld">
+      <pc:chgData name="William Estes" userId="a88fcdbc31b6f594" providerId="LiveId" clId="{F672AB5B-FF42-4746-B776-B42BA4AD19CD}" dt="2021-02-08T23:41:16.844" v="592" actId="1076"/>
+      <pc:docMkLst>
+        <pc:docMk/>
+      </pc:docMkLst>
+      <pc:sldChg chg="modSp mod">
+        <pc:chgData name="William Estes" userId="a88fcdbc31b6f594" providerId="LiveId" clId="{F672AB5B-FF42-4746-B776-B42BA4AD19CD}" dt="2021-02-08T17:16:26.147" v="0" actId="20577"/>
+        <pc:sldMkLst>
+          <pc:docMk/>
+          <pc:sldMk cId="1945136841" sldId="256"/>
+        </pc:sldMkLst>
+        <pc:spChg chg="mod">
+          <ac:chgData name="William Estes" userId="a88fcdbc31b6f594" providerId="LiveId" clId="{F672AB5B-FF42-4746-B776-B42BA4AD19CD}" dt="2021-02-08T17:16:26.147" v="0" actId="20577"/>
+          <ac:spMkLst>
+            <pc:docMk/>
+            <pc:sldMk cId="1945136841" sldId="256"/>
+            <ac:spMk id="3" creationId="{DDC89ACB-096C-C741-9C1C-5361EC0608AA}"/>
+          </ac:spMkLst>
+        </pc:spChg>
+      </pc:sldChg>
+      <pc:sldChg chg="modSp add del mod">
+        <pc:chgData name="William Estes" userId="a88fcdbc31b6f594" providerId="LiveId" clId="{F672AB5B-FF42-4746-B776-B42BA4AD19CD}" dt="2021-02-08T17:18:50.915" v="110" actId="20577"/>
+        <pc:sldMkLst>
+          <pc:docMk/>
+          <pc:sldMk cId="830997286" sldId="264"/>
+        </pc:sldMkLst>
+        <pc:spChg chg="mod">
+          <ac:chgData name="William Estes" userId="a88fcdbc31b6f594" providerId="LiveId" clId="{F672AB5B-FF42-4746-B776-B42BA4AD19CD}" dt="2021-02-08T17:18:50.915" v="110" actId="20577"/>
+          <ac:spMkLst>
+            <pc:docMk/>
+            <pc:sldMk cId="830997286" sldId="264"/>
+            <ac:spMk id="3" creationId="{1095E837-F77E-AE4D-944C-919B5D780AAA}"/>
+          </ac:spMkLst>
+        </pc:spChg>
+      </pc:sldChg>
+      <pc:sldChg chg="modSp mod">
+        <pc:chgData name="William Estes" userId="a88fcdbc31b6f594" providerId="LiveId" clId="{F672AB5B-FF42-4746-B776-B42BA4AD19CD}" dt="2021-02-08T23:35:10.310" v="586" actId="1076"/>
+        <pc:sldMkLst>
+          <pc:docMk/>
+          <pc:sldMk cId="3007801671" sldId="291"/>
+        </pc:sldMkLst>
+        <pc:spChg chg="mod">
+          <ac:chgData name="William Estes" userId="a88fcdbc31b6f594" providerId="LiveId" clId="{F672AB5B-FF42-4746-B776-B42BA4AD19CD}" dt="2021-02-08T23:35:10.310" v="586" actId="1076"/>
+          <ac:spMkLst>
+            <pc:docMk/>
+            <pc:sldMk cId="3007801671" sldId="291"/>
+            <ac:spMk id="12" creationId="{CF97C5AB-99C6-437C-B2DB-5A3F7C1729C7}"/>
+          </ac:spMkLst>
+        </pc:spChg>
+      </pc:sldChg>
+      <pc:sldChg chg="modSp mod">
+        <pc:chgData name="William Estes" userId="a88fcdbc31b6f594" providerId="LiveId" clId="{F672AB5B-FF42-4746-B776-B42BA4AD19CD}" dt="2021-02-08T23:36:14.656" v="588" actId="1076"/>
+        <pc:sldMkLst>
+          <pc:docMk/>
+          <pc:sldMk cId="1031257587" sldId="292"/>
+        </pc:sldMkLst>
+        <pc:spChg chg="mod">
+          <ac:chgData name="William Estes" userId="a88fcdbc31b6f594" providerId="LiveId" clId="{F672AB5B-FF42-4746-B776-B42BA4AD19CD}" dt="2021-02-08T23:36:14.656" v="588" actId="1076"/>
+          <ac:spMkLst>
+            <pc:docMk/>
+            <pc:sldMk cId="1031257587" sldId="292"/>
+            <ac:spMk id="7" creationId="{81FEAAF1-55EF-429A-832F-657DD1B08A00}"/>
+          </ac:spMkLst>
+        </pc:spChg>
+        <pc:spChg chg="mod">
+          <ac:chgData name="William Estes" userId="a88fcdbc31b6f594" providerId="LiveId" clId="{F672AB5B-FF42-4746-B776-B42BA4AD19CD}" dt="2021-02-08T23:36:14.656" v="588" actId="1076"/>
+          <ac:spMkLst>
+            <pc:docMk/>
+            <pc:sldMk cId="1031257587" sldId="292"/>
+            <ac:spMk id="10" creationId="{A6C69913-6E66-4EF9-912E-4787D37F112A}"/>
+          </ac:spMkLst>
+        </pc:spChg>
+        <pc:spChg chg="mod">
+          <ac:chgData name="William Estes" userId="a88fcdbc31b6f594" providerId="LiveId" clId="{F672AB5B-FF42-4746-B776-B42BA4AD19CD}" dt="2021-02-08T23:36:14.656" v="588" actId="1076"/>
+          <ac:spMkLst>
+            <pc:docMk/>
+            <pc:sldMk cId="1031257587" sldId="292"/>
+            <ac:spMk id="13" creationId="{FA79162F-1F9C-4BB6-9C39-96C8B58E86C3}"/>
+          </ac:spMkLst>
+        </pc:spChg>
+        <pc:spChg chg="mod">
+          <ac:chgData name="William Estes" userId="a88fcdbc31b6f594" providerId="LiveId" clId="{F672AB5B-FF42-4746-B776-B42BA4AD19CD}" dt="2021-02-08T23:36:14.656" v="588" actId="1076"/>
+          <ac:spMkLst>
+            <pc:docMk/>
+            <pc:sldMk cId="1031257587" sldId="292"/>
+            <ac:spMk id="14" creationId="{BC68A978-56D8-4B49-B046-44ACD0A585A4}"/>
+          </ac:spMkLst>
+        </pc:spChg>
+        <pc:spChg chg="mod">
+          <ac:chgData name="William Estes" userId="a88fcdbc31b6f594" providerId="LiveId" clId="{F672AB5B-FF42-4746-B776-B42BA4AD19CD}" dt="2021-02-08T23:36:14.656" v="588" actId="1076"/>
+          <ac:spMkLst>
+            <pc:docMk/>
+            <pc:sldMk cId="1031257587" sldId="292"/>
+            <ac:spMk id="15" creationId="{7F19F82B-0D64-4D93-8D94-101BBFB46765}"/>
+          </ac:spMkLst>
+        </pc:spChg>
+        <pc:spChg chg="mod">
+          <ac:chgData name="William Estes" userId="a88fcdbc31b6f594" providerId="LiveId" clId="{F672AB5B-FF42-4746-B776-B42BA4AD19CD}" dt="2021-02-08T23:36:14.656" v="588" actId="1076"/>
+          <ac:spMkLst>
+            <pc:docMk/>
+            <pc:sldMk cId="1031257587" sldId="292"/>
+            <ac:spMk id="16" creationId="{2CD967FC-6B82-4F09-938B-F9E74AB74DB5}"/>
+          </ac:spMkLst>
+        </pc:spChg>
+      </pc:sldChg>
+      <pc:sldChg chg="modSp mod">
+        <pc:chgData name="William Estes" userId="a88fcdbc31b6f594" providerId="LiveId" clId="{F672AB5B-FF42-4746-B776-B42BA4AD19CD}" dt="2021-02-08T23:37:45.712" v="590" actId="1076"/>
+        <pc:sldMkLst>
+          <pc:docMk/>
+          <pc:sldMk cId="2184220433" sldId="295"/>
+        </pc:sldMkLst>
+        <pc:spChg chg="mod">
+          <ac:chgData name="William Estes" userId="a88fcdbc31b6f594" providerId="LiveId" clId="{F672AB5B-FF42-4746-B776-B42BA4AD19CD}" dt="2021-02-08T23:37:45.712" v="590" actId="1076"/>
+          <ac:spMkLst>
+            <pc:docMk/>
+            <pc:sldMk cId="2184220433" sldId="295"/>
+            <ac:spMk id="5" creationId="{7B16B923-1F9B-4609-AF2C-FA03D25659EE}"/>
+          </ac:spMkLst>
+        </pc:spChg>
+      </pc:sldChg>
+      <pc:sldChg chg="modSp mod">
+        <pc:chgData name="William Estes" userId="a88fcdbc31b6f594" providerId="LiveId" clId="{F672AB5B-FF42-4746-B776-B42BA4AD19CD}" dt="2021-02-08T23:41:16.844" v="592" actId="1076"/>
+        <pc:sldMkLst>
+          <pc:docMk/>
+          <pc:sldMk cId="1522982694" sldId="296"/>
+        </pc:sldMkLst>
+        <pc:spChg chg="mod">
+          <ac:chgData name="William Estes" userId="a88fcdbc31b6f594" providerId="LiveId" clId="{F672AB5B-FF42-4746-B776-B42BA4AD19CD}" dt="2021-02-08T23:41:16.844" v="592" actId="1076"/>
+          <ac:spMkLst>
+            <pc:docMk/>
+            <pc:sldMk cId="1522982694" sldId="296"/>
+            <ac:spMk id="6" creationId="{8D3881AF-2AF0-4DF1-977D-DEFDD2FCFF0A}"/>
+          </ac:spMkLst>
+        </pc:spChg>
+        <pc:spChg chg="mod">
+          <ac:chgData name="William Estes" userId="a88fcdbc31b6f594" providerId="LiveId" clId="{F672AB5B-FF42-4746-B776-B42BA4AD19CD}" dt="2021-02-08T23:41:16.844" v="592" actId="1076"/>
+          <ac:spMkLst>
+            <pc:docMk/>
+            <pc:sldMk cId="1522982694" sldId="296"/>
+            <ac:spMk id="7" creationId="{F5D9FE73-3240-4541-BA18-9018D3F5BAA8}"/>
+          </ac:spMkLst>
+        </pc:spChg>
+      </pc:sldChg>
+      <pc:sldChg chg="add del">
+        <pc:chgData name="William Estes" userId="a88fcdbc31b6f594" providerId="LiveId" clId="{F672AB5B-FF42-4746-B776-B42BA4AD19CD}" dt="2021-02-08T17:18:21.404" v="3" actId="2696"/>
+        <pc:sldMkLst>
+          <pc:docMk/>
+          <pc:sldMk cId="4242654959" sldId="304"/>
+        </pc:sldMkLst>
+      </pc:sldChg>
+      <pc:sldChg chg="add del">
+        <pc:chgData name="William Estes" userId="a88fcdbc31b6f594" providerId="LiveId" clId="{F672AB5B-FF42-4746-B776-B42BA4AD19CD}" dt="2021-02-08T17:18:21.404" v="3" actId="2696"/>
+        <pc:sldMkLst>
+          <pc:docMk/>
+          <pc:sldMk cId="2469544991" sldId="305"/>
+        </pc:sldMkLst>
+      </pc:sldChg>
+      <pc:sldChg chg="add del">
+        <pc:chgData name="William Estes" userId="a88fcdbc31b6f594" providerId="LiveId" clId="{F672AB5B-FF42-4746-B776-B42BA4AD19CD}" dt="2021-02-08T17:18:21.404" v="3" actId="2696"/>
+        <pc:sldMkLst>
+          <pc:docMk/>
+          <pc:sldMk cId="2651208645" sldId="306"/>
+        </pc:sldMkLst>
+      </pc:sldChg>
+      <pc:sldChg chg="modSp add del mod">
+        <pc:chgData name="William Estes" userId="a88fcdbc31b6f594" providerId="LiveId" clId="{F672AB5B-FF42-4746-B776-B42BA4AD19CD}" dt="2021-02-08T17:22:41.524" v="584" actId="5793"/>
+        <pc:sldMkLst>
+          <pc:docMk/>
+          <pc:sldMk cId="746972265" sldId="307"/>
+        </pc:sldMkLst>
+        <pc:spChg chg="mod">
+          <ac:chgData name="William Estes" userId="a88fcdbc31b6f594" providerId="LiveId" clId="{F672AB5B-FF42-4746-B776-B42BA4AD19CD}" dt="2021-02-08T17:22:41.524" v="584" actId="5793"/>
+          <ac:spMkLst>
+            <pc:docMk/>
+            <pc:sldMk cId="746972265" sldId="307"/>
+            <ac:spMk id="4" creationId="{5C0E649D-E3FD-41FB-BA87-37C62725C740}"/>
           </ac:spMkLst>
         </pc:spChg>
       </pc:sldChg>
@@ -1921,2185 +4100,6 @@
             <pc:docMk/>
             <pc:sldMk cId="1575020086" sldId="308"/>
             <ac:spMk id="3" creationId="{CF346A43-8A67-4B2E-80E1-770DDD72F0D0}"/>
-          </ac:spMkLst>
-        </pc:spChg>
-      </pc:sldChg>
-    </pc:docChg>
-  </pc:docChgLst>
-  <pc:docChgLst>
-    <pc:chgData name="William Estes" userId="a88fcdbc31b6f594" providerId="Windows Live" clId="Web-{7787D62D-49AE-4D2D-B90A-2B4FEEB98020}"/>
-    <pc:docChg chg="modSld">
-      <pc:chgData name="William Estes" userId="a88fcdbc31b6f594" providerId="Windows Live" clId="Web-{7787D62D-49AE-4D2D-B90A-2B4FEEB98020}" dt="2020-09-02T20:47:25.883" v="45" actId="1076"/>
-      <pc:docMkLst>
-        <pc:docMk/>
-      </pc:docMkLst>
-      <pc:sldChg chg="modSp">
-        <pc:chgData name="William Estes" userId="a88fcdbc31b6f594" providerId="Windows Live" clId="Web-{7787D62D-49AE-4D2D-B90A-2B4FEEB98020}" dt="2020-09-02T20:41:44.736" v="0" actId="1076"/>
-        <pc:sldMkLst>
-          <pc:docMk/>
-          <pc:sldMk cId="3007801671" sldId="291"/>
-        </pc:sldMkLst>
-        <pc:spChg chg="mod">
-          <ac:chgData name="William Estes" userId="a88fcdbc31b6f594" providerId="Windows Live" clId="Web-{7787D62D-49AE-4D2D-B90A-2B4FEEB98020}" dt="2020-09-02T20:41:44.736" v="0" actId="1076"/>
-          <ac:spMkLst>
-            <pc:docMk/>
-            <pc:sldMk cId="3007801671" sldId="291"/>
-            <ac:spMk id="12" creationId="{CF97C5AB-99C6-437C-B2DB-5A3F7C1729C7}"/>
-          </ac:spMkLst>
-        </pc:spChg>
-      </pc:sldChg>
-      <pc:sldChg chg="addSp delSp modSp">
-        <pc:chgData name="William Estes" userId="a88fcdbc31b6f594" providerId="Windows Live" clId="Web-{7787D62D-49AE-4D2D-B90A-2B4FEEB98020}" dt="2020-09-02T20:47:25.883" v="45" actId="1076"/>
-        <pc:sldMkLst>
-          <pc:docMk/>
-          <pc:sldMk cId="1031257587" sldId="292"/>
-        </pc:sldMkLst>
-        <pc:spChg chg="add del mod">
-          <ac:chgData name="William Estes" userId="a88fcdbc31b6f594" providerId="Windows Live" clId="Web-{7787D62D-49AE-4D2D-B90A-2B4FEEB98020}" dt="2020-09-02T20:47:25.883" v="45" actId="1076"/>
-          <ac:spMkLst>
-            <pc:docMk/>
-            <pc:sldMk cId="1031257587" sldId="292"/>
-            <ac:spMk id="7" creationId="{81FEAAF1-55EF-429A-832F-657DD1B08A00}"/>
-          </ac:spMkLst>
-        </pc:spChg>
-        <pc:spChg chg="add del mod">
-          <ac:chgData name="William Estes" userId="a88fcdbc31b6f594" providerId="Windows Live" clId="Web-{7787D62D-49AE-4D2D-B90A-2B4FEEB98020}" dt="2020-09-02T20:47:23.540" v="44" actId="1076"/>
-          <ac:spMkLst>
-            <pc:docMk/>
-            <pc:sldMk cId="1031257587" sldId="292"/>
-            <ac:spMk id="10" creationId="{A6C69913-6E66-4EF9-912E-4787D37F112A}"/>
-          </ac:spMkLst>
-        </pc:spChg>
-        <pc:spChg chg="add del mod">
-          <ac:chgData name="William Estes" userId="a88fcdbc31b6f594" providerId="Windows Live" clId="Web-{7787D62D-49AE-4D2D-B90A-2B4FEEB98020}" dt="2020-09-02T20:47:22.883" v="43" actId="1076"/>
-          <ac:spMkLst>
-            <pc:docMk/>
-            <pc:sldMk cId="1031257587" sldId="292"/>
-            <ac:spMk id="13" creationId="{FA79162F-1F9C-4BB6-9C39-96C8B58E86C3}"/>
-          </ac:spMkLst>
-        </pc:spChg>
-        <pc:spChg chg="add del mod">
-          <ac:chgData name="William Estes" userId="a88fcdbc31b6f594" providerId="Windows Live" clId="Web-{7787D62D-49AE-4D2D-B90A-2B4FEEB98020}" dt="2020-09-02T20:47:22.211" v="42" actId="1076"/>
-          <ac:spMkLst>
-            <pc:docMk/>
-            <pc:sldMk cId="1031257587" sldId="292"/>
-            <ac:spMk id="14" creationId="{BC68A978-56D8-4B49-B046-44ACD0A585A4}"/>
-          </ac:spMkLst>
-        </pc:spChg>
-        <pc:spChg chg="add del mod">
-          <ac:chgData name="William Estes" userId="a88fcdbc31b6f594" providerId="Windows Live" clId="Web-{7787D62D-49AE-4D2D-B90A-2B4FEEB98020}" dt="2020-09-02T20:47:19.711" v="41" actId="1076"/>
-          <ac:spMkLst>
-            <pc:docMk/>
-            <pc:sldMk cId="1031257587" sldId="292"/>
-            <ac:spMk id="15" creationId="{7F19F82B-0D64-4D93-8D94-101BBFB46765}"/>
-          </ac:spMkLst>
-        </pc:spChg>
-        <pc:spChg chg="add del mod">
-          <ac:chgData name="William Estes" userId="a88fcdbc31b6f594" providerId="Windows Live" clId="Web-{7787D62D-49AE-4D2D-B90A-2B4FEEB98020}" dt="2020-09-02T20:47:18.664" v="40" actId="1076"/>
-          <ac:spMkLst>
-            <pc:docMk/>
-            <pc:sldMk cId="1031257587" sldId="292"/>
-            <ac:spMk id="16" creationId="{2CD967FC-6B82-4F09-938B-F9E74AB74DB5}"/>
-          </ac:spMkLst>
-        </pc:spChg>
-      </pc:sldChg>
-      <pc:sldChg chg="modSp">
-        <pc:chgData name="William Estes" userId="a88fcdbc31b6f594" providerId="Windows Live" clId="Web-{7787D62D-49AE-4D2D-B90A-2B4FEEB98020}" dt="2020-09-02T20:43:32.696" v="31" actId="20577"/>
-        <pc:sldMkLst>
-          <pc:docMk/>
-          <pc:sldMk cId="1361839843" sldId="293"/>
-        </pc:sldMkLst>
-        <pc:spChg chg="mod">
-          <ac:chgData name="William Estes" userId="a88fcdbc31b6f594" providerId="Windows Live" clId="Web-{7787D62D-49AE-4D2D-B90A-2B4FEEB98020}" dt="2020-09-02T20:43:32.696" v="31" actId="20577"/>
-          <ac:spMkLst>
-            <pc:docMk/>
-            <pc:sldMk cId="1361839843" sldId="293"/>
-            <ac:spMk id="3" creationId="{1095E837-F77E-AE4D-944C-919B5D780AAA}"/>
-          </ac:spMkLst>
-        </pc:spChg>
-      </pc:sldChg>
-    </pc:docChg>
-  </pc:docChgLst>
-  <pc:docChgLst>
-    <pc:chgData name="William Estes" userId="a88fcdbc31b6f594" providerId="Windows Live" clId="Web-{53BDE15D-C984-41FC-29A9-B9E08664827E}"/>
-    <pc:docChg chg="addSld modSld sldOrd">
-      <pc:chgData name="William Estes" userId="a88fcdbc31b6f594" providerId="Windows Live" clId="Web-{53BDE15D-C984-41FC-29A9-B9E08664827E}" dt="2020-09-01T03:31:16.808" v="92" actId="20577"/>
-      <pc:docMkLst>
-        <pc:docMk/>
-      </pc:docMkLst>
-      <pc:sldChg chg="modSp">
-        <pc:chgData name="William Estes" userId="a88fcdbc31b6f594" providerId="Windows Live" clId="Web-{53BDE15D-C984-41FC-29A9-B9E08664827E}" dt="2020-09-01T03:30:18.011" v="63" actId="20577"/>
-        <pc:sldMkLst>
-          <pc:docMk/>
-          <pc:sldMk cId="830997286" sldId="264"/>
-        </pc:sldMkLst>
-        <pc:spChg chg="mod">
-          <ac:chgData name="William Estes" userId="a88fcdbc31b6f594" providerId="Windows Live" clId="Web-{53BDE15D-C984-41FC-29A9-B9E08664827E}" dt="2020-09-01T03:30:18.011" v="63" actId="20577"/>
-          <ac:spMkLst>
-            <pc:docMk/>
-            <pc:sldMk cId="830997286" sldId="264"/>
-            <ac:spMk id="3" creationId="{1095E837-F77E-AE4D-944C-919B5D780AAA}"/>
-          </ac:spMkLst>
-        </pc:spChg>
-      </pc:sldChg>
-      <pc:sldChg chg="add">
-        <pc:chgData name="William Estes" userId="a88fcdbc31b6f594" providerId="Windows Live" clId="Web-{53BDE15D-C984-41FC-29A9-B9E08664827E}" dt="2020-09-01T03:29:57.323" v="0"/>
-        <pc:sldMkLst>
-          <pc:docMk/>
-          <pc:sldMk cId="4242654959" sldId="304"/>
-        </pc:sldMkLst>
-      </pc:sldChg>
-      <pc:sldChg chg="add">
-        <pc:chgData name="William Estes" userId="a88fcdbc31b6f594" providerId="Windows Live" clId="Web-{53BDE15D-C984-41FC-29A9-B9E08664827E}" dt="2020-09-01T03:29:57.386" v="1"/>
-        <pc:sldMkLst>
-          <pc:docMk/>
-          <pc:sldMk cId="2469544991" sldId="305"/>
-        </pc:sldMkLst>
-      </pc:sldChg>
-      <pc:sldChg chg="add">
-        <pc:chgData name="William Estes" userId="a88fcdbc31b6f594" providerId="Windows Live" clId="Web-{53BDE15D-C984-41FC-29A9-B9E08664827E}" dt="2020-09-01T03:29:57.448" v="2"/>
-        <pc:sldMkLst>
-          <pc:docMk/>
-          <pc:sldMk cId="2651208645" sldId="306"/>
-        </pc:sldMkLst>
-      </pc:sldChg>
-      <pc:sldChg chg="add ord">
-        <pc:chgData name="William Estes" userId="a88fcdbc31b6f594" providerId="Windows Live" clId="Web-{53BDE15D-C984-41FC-29A9-B9E08664827E}" dt="2020-09-01T03:30:41.214" v="68"/>
-        <pc:sldMkLst>
-          <pc:docMk/>
-          <pc:sldMk cId="746972265" sldId="307"/>
-        </pc:sldMkLst>
-      </pc:sldChg>
-      <pc:sldChg chg="modSp new ord">
-        <pc:chgData name="William Estes" userId="a88fcdbc31b6f594" providerId="Windows Live" clId="Web-{53BDE15D-C984-41FC-29A9-B9E08664827E}" dt="2020-09-01T03:31:16.808" v="91" actId="20577"/>
-        <pc:sldMkLst>
-          <pc:docMk/>
-          <pc:sldMk cId="1575020086" sldId="308"/>
-        </pc:sldMkLst>
-        <pc:spChg chg="mod">
-          <ac:chgData name="William Estes" userId="a88fcdbc31b6f594" providerId="Windows Live" clId="Web-{53BDE15D-C984-41FC-29A9-B9E08664827E}" dt="2020-09-01T03:31:13.464" v="86" actId="20577"/>
-          <ac:spMkLst>
-            <pc:docMk/>
-            <pc:sldMk cId="1575020086" sldId="308"/>
-            <ac:spMk id="2" creationId="{0F6302EC-90FC-4501-AFC3-D85168DEA26A}"/>
-          </ac:spMkLst>
-        </pc:spChg>
-        <pc:spChg chg="mod">
-          <ac:chgData name="William Estes" userId="a88fcdbc31b6f594" providerId="Windows Live" clId="Web-{53BDE15D-C984-41FC-29A9-B9E08664827E}" dt="2020-09-01T03:31:16.808" v="91" actId="20577"/>
-          <ac:spMkLst>
-            <pc:docMk/>
-            <pc:sldMk cId="1575020086" sldId="308"/>
-            <ac:spMk id="3" creationId="{CF346A43-8A67-4B2E-80E1-770DDD72F0D0}"/>
-          </ac:spMkLst>
-        </pc:spChg>
-      </pc:sldChg>
-    </pc:docChg>
-  </pc:docChgLst>
-  <pc:docChgLst>
-    <pc:chgData name="William Estes" userId="a88fcdbc31b6f594" providerId="Windows Live" clId="Web-{10FD8D96-9E5A-4BEB-31AC-11A1018D4BCE}"/>
-    <pc:docChg chg="addSld delSld modSld sldOrd">
-      <pc:chgData name="William Estes" userId="a88fcdbc31b6f594" providerId="Windows Live" clId="Web-{10FD8D96-9E5A-4BEB-31AC-11A1018D4BCE}" dt="2020-08-30T22:08:08.246" v="1941" actId="1076"/>
-      <pc:docMkLst>
-        <pc:docMk/>
-      </pc:docMkLst>
-      <pc:sldChg chg="modSp">
-        <pc:chgData name="William Estes" userId="a88fcdbc31b6f594" providerId="Windows Live" clId="Web-{10FD8D96-9E5A-4BEB-31AC-11A1018D4BCE}" dt="2020-08-30T20:13:45.867" v="0" actId="20577"/>
-        <pc:sldMkLst>
-          <pc:docMk/>
-          <pc:sldMk cId="1945136841" sldId="256"/>
-        </pc:sldMkLst>
-        <pc:spChg chg="mod">
-          <ac:chgData name="William Estes" userId="a88fcdbc31b6f594" providerId="Windows Live" clId="Web-{10FD8D96-9E5A-4BEB-31AC-11A1018D4BCE}" dt="2020-08-30T20:13:45.867" v="0" actId="20577"/>
-          <ac:spMkLst>
-            <pc:docMk/>
-            <pc:sldMk cId="1945136841" sldId="256"/>
-            <ac:spMk id="2" creationId="{073FCCB2-5FFC-AF47-90CA-9CC12D113DDD}"/>
-          </ac:spMkLst>
-        </pc:spChg>
-      </pc:sldChg>
-      <pc:sldChg chg="delSp modSp">
-        <pc:chgData name="William Estes" userId="a88fcdbc31b6f594" providerId="Windows Live" clId="Web-{10FD8D96-9E5A-4BEB-31AC-11A1018D4BCE}" dt="2020-08-30T20:15:16.211" v="93"/>
-        <pc:sldMkLst>
-          <pc:docMk/>
-          <pc:sldMk cId="1056604679" sldId="260"/>
-        </pc:sldMkLst>
-        <pc:spChg chg="mod">
-          <ac:chgData name="William Estes" userId="a88fcdbc31b6f594" providerId="Windows Live" clId="Web-{10FD8D96-9E5A-4BEB-31AC-11A1018D4BCE}" dt="2020-08-30T20:15:14.961" v="90" actId="20577"/>
-          <ac:spMkLst>
-            <pc:docMk/>
-            <pc:sldMk cId="1056604679" sldId="260"/>
-            <ac:spMk id="3" creationId="{3713A5A2-1019-0143-BC00-1B8B12D7C198}"/>
-          </ac:spMkLst>
-        </pc:spChg>
-        <pc:picChg chg="del">
-          <ac:chgData name="William Estes" userId="a88fcdbc31b6f594" providerId="Windows Live" clId="Web-{10FD8D96-9E5A-4BEB-31AC-11A1018D4BCE}" dt="2020-08-30T20:15:16.211" v="93"/>
-          <ac:picMkLst>
-            <pc:docMk/>
-            <pc:sldMk cId="1056604679" sldId="260"/>
-            <ac:picMk id="7" creationId="{7D0999C3-1D3F-4622-9A1B-8DC734094F20}"/>
-          </ac:picMkLst>
-        </pc:picChg>
-      </pc:sldChg>
-      <pc:sldChg chg="del">
-        <pc:chgData name="William Estes" userId="a88fcdbc31b6f594" providerId="Windows Live" clId="Web-{10FD8D96-9E5A-4BEB-31AC-11A1018D4BCE}" dt="2020-08-30T20:15:31.117" v="109"/>
-        <pc:sldMkLst>
-          <pc:docMk/>
-          <pc:sldMk cId="2840496418" sldId="261"/>
-        </pc:sldMkLst>
-      </pc:sldChg>
-      <pc:sldChg chg="modSp">
-        <pc:chgData name="William Estes" userId="a88fcdbc31b6f594" providerId="Windows Live" clId="Web-{10FD8D96-9E5A-4BEB-31AC-11A1018D4BCE}" dt="2020-08-30T20:14:13.117" v="72" actId="20577"/>
-        <pc:sldMkLst>
-          <pc:docMk/>
-          <pc:sldMk cId="830997286" sldId="264"/>
-        </pc:sldMkLst>
-        <pc:spChg chg="mod">
-          <ac:chgData name="William Estes" userId="a88fcdbc31b6f594" providerId="Windows Live" clId="Web-{10FD8D96-9E5A-4BEB-31AC-11A1018D4BCE}" dt="2020-08-30T20:14:13.117" v="72" actId="20577"/>
-          <ac:spMkLst>
-            <pc:docMk/>
-            <pc:sldMk cId="830997286" sldId="264"/>
-            <ac:spMk id="3" creationId="{1095E837-F77E-AE4D-944C-919B5D780AAA}"/>
-          </ac:spMkLst>
-        </pc:spChg>
-      </pc:sldChg>
-      <pc:sldChg chg="del">
-        <pc:chgData name="William Estes" userId="a88fcdbc31b6f594" providerId="Windows Live" clId="Web-{10FD8D96-9E5A-4BEB-31AC-11A1018D4BCE}" dt="2020-08-30T20:15:31.117" v="107"/>
-        <pc:sldMkLst>
-          <pc:docMk/>
-          <pc:sldMk cId="2341259573" sldId="265"/>
-        </pc:sldMkLst>
-      </pc:sldChg>
-      <pc:sldChg chg="del">
-        <pc:chgData name="William Estes" userId="a88fcdbc31b6f594" providerId="Windows Live" clId="Web-{10FD8D96-9E5A-4BEB-31AC-11A1018D4BCE}" dt="2020-08-30T20:15:31.117" v="105"/>
-        <pc:sldMkLst>
-          <pc:docMk/>
-          <pc:sldMk cId="1244393583" sldId="266"/>
-        </pc:sldMkLst>
-      </pc:sldChg>
-      <pc:sldChg chg="modSp">
-        <pc:chgData name="William Estes" userId="a88fcdbc31b6f594" providerId="Windows Live" clId="Web-{10FD8D96-9E5A-4BEB-31AC-11A1018D4BCE}" dt="2020-08-30T20:15:08.289" v="87" actId="20577"/>
-        <pc:sldMkLst>
-          <pc:docMk/>
-          <pc:sldMk cId="3421889743" sldId="277"/>
-        </pc:sldMkLst>
-        <pc:spChg chg="mod">
-          <ac:chgData name="William Estes" userId="a88fcdbc31b6f594" providerId="Windows Live" clId="Web-{10FD8D96-9E5A-4BEB-31AC-11A1018D4BCE}" dt="2020-08-30T20:15:08.289" v="87" actId="20577"/>
-          <ac:spMkLst>
-            <pc:docMk/>
-            <pc:sldMk cId="3421889743" sldId="277"/>
-            <ac:spMk id="4" creationId="{5C0E649D-E3FD-41FB-BA87-37C62725C740}"/>
-          </ac:spMkLst>
-        </pc:spChg>
-      </pc:sldChg>
-      <pc:sldChg chg="modSp">
-        <pc:chgData name="William Estes" userId="a88fcdbc31b6f594" providerId="Windows Live" clId="Web-{10FD8D96-9E5A-4BEB-31AC-11A1018D4BCE}" dt="2020-08-30T20:17:06.883" v="130" actId="20577"/>
-        <pc:sldMkLst>
-          <pc:docMk/>
-          <pc:sldMk cId="496210837" sldId="280"/>
-        </pc:sldMkLst>
-        <pc:spChg chg="mod">
-          <ac:chgData name="William Estes" userId="a88fcdbc31b6f594" providerId="Windows Live" clId="Web-{10FD8D96-9E5A-4BEB-31AC-11A1018D4BCE}" dt="2020-08-30T20:17:06.883" v="130" actId="20577"/>
-          <ac:spMkLst>
-            <pc:docMk/>
-            <pc:sldMk cId="496210837" sldId="280"/>
-            <ac:spMk id="3" creationId="{3713A5A2-1019-0143-BC00-1B8B12D7C198}"/>
-          </ac:spMkLst>
-        </pc:spChg>
-      </pc:sldChg>
-      <pc:sldChg chg="del">
-        <pc:chgData name="William Estes" userId="a88fcdbc31b6f594" providerId="Windows Live" clId="Web-{10FD8D96-9E5A-4BEB-31AC-11A1018D4BCE}" dt="2020-08-30T20:15:31.117" v="108"/>
-        <pc:sldMkLst>
-          <pc:docMk/>
-          <pc:sldMk cId="1784549319" sldId="281"/>
-        </pc:sldMkLst>
-      </pc:sldChg>
-      <pc:sldChg chg="del">
-        <pc:chgData name="William Estes" userId="a88fcdbc31b6f594" providerId="Windows Live" clId="Web-{10FD8D96-9E5A-4BEB-31AC-11A1018D4BCE}" dt="2020-08-30T20:15:31.117" v="106"/>
-        <pc:sldMkLst>
-          <pc:docMk/>
-          <pc:sldMk cId="2362235639" sldId="282"/>
-        </pc:sldMkLst>
-      </pc:sldChg>
-      <pc:sldChg chg="del">
-        <pc:chgData name="William Estes" userId="a88fcdbc31b6f594" providerId="Windows Live" clId="Web-{10FD8D96-9E5A-4BEB-31AC-11A1018D4BCE}" dt="2020-08-30T20:15:31.117" v="104"/>
-        <pc:sldMkLst>
-          <pc:docMk/>
-          <pc:sldMk cId="3068982192" sldId="283"/>
-        </pc:sldMkLst>
-      </pc:sldChg>
-      <pc:sldChg chg="del">
-        <pc:chgData name="William Estes" userId="a88fcdbc31b6f594" providerId="Windows Live" clId="Web-{10FD8D96-9E5A-4BEB-31AC-11A1018D4BCE}" dt="2020-08-30T20:15:31.117" v="103"/>
-        <pc:sldMkLst>
-          <pc:docMk/>
-          <pc:sldMk cId="1761172003" sldId="284"/>
-        </pc:sldMkLst>
-      </pc:sldChg>
-      <pc:sldChg chg="del">
-        <pc:chgData name="William Estes" userId="a88fcdbc31b6f594" providerId="Windows Live" clId="Web-{10FD8D96-9E5A-4BEB-31AC-11A1018D4BCE}" dt="2020-08-30T20:15:01.805" v="86"/>
-        <pc:sldMkLst>
-          <pc:docMk/>
-          <pc:sldMk cId="1733125250" sldId="286"/>
-        </pc:sldMkLst>
-      </pc:sldChg>
-      <pc:sldChg chg="del">
-        <pc:chgData name="William Estes" userId="a88fcdbc31b6f594" providerId="Windows Live" clId="Web-{10FD8D96-9E5A-4BEB-31AC-11A1018D4BCE}" dt="2020-08-30T20:15:31.102" v="97"/>
-        <pc:sldMkLst>
-          <pc:docMk/>
-          <pc:sldMk cId="3016926997" sldId="287"/>
-        </pc:sldMkLst>
-      </pc:sldChg>
-      <pc:sldChg chg="del">
-        <pc:chgData name="William Estes" userId="a88fcdbc31b6f594" providerId="Windows Live" clId="Web-{10FD8D96-9E5A-4BEB-31AC-11A1018D4BCE}" dt="2020-08-30T20:15:31.117" v="101"/>
-        <pc:sldMkLst>
-          <pc:docMk/>
-          <pc:sldMk cId="285019892" sldId="288"/>
-        </pc:sldMkLst>
-      </pc:sldChg>
-      <pc:sldChg chg="del">
-        <pc:chgData name="William Estes" userId="a88fcdbc31b6f594" providerId="Windows Live" clId="Web-{10FD8D96-9E5A-4BEB-31AC-11A1018D4BCE}" dt="2020-08-30T20:15:31.117" v="100"/>
-        <pc:sldMkLst>
-          <pc:docMk/>
-          <pc:sldMk cId="134332572" sldId="289"/>
-        </pc:sldMkLst>
-      </pc:sldChg>
-      <pc:sldChg chg="del">
-        <pc:chgData name="William Estes" userId="a88fcdbc31b6f594" providerId="Windows Live" clId="Web-{10FD8D96-9E5A-4BEB-31AC-11A1018D4BCE}" dt="2020-08-30T20:15:31.117" v="102"/>
-        <pc:sldMkLst>
-          <pc:docMk/>
-          <pc:sldMk cId="187834809" sldId="290"/>
-        </pc:sldMkLst>
-      </pc:sldChg>
-      <pc:sldChg chg="addSp delSp modSp">
-        <pc:chgData name="William Estes" userId="a88fcdbc31b6f594" providerId="Windows Live" clId="Web-{10FD8D96-9E5A-4BEB-31AC-11A1018D4BCE}" dt="2020-08-30T20:20:17.228" v="231" actId="14100"/>
-        <pc:sldMkLst>
-          <pc:docMk/>
-          <pc:sldMk cId="3007801671" sldId="291"/>
-        </pc:sldMkLst>
-        <pc:spChg chg="mod">
-          <ac:chgData name="William Estes" userId="a88fcdbc31b6f594" providerId="Windows Live" clId="Web-{10FD8D96-9E5A-4BEB-31AC-11A1018D4BCE}" dt="2020-08-30T20:19:47.806" v="222" actId="20577"/>
-          <ac:spMkLst>
-            <pc:docMk/>
-            <pc:sldMk cId="3007801671" sldId="291"/>
-            <ac:spMk id="3" creationId="{1095E837-F77E-AE4D-944C-919B5D780AAA}"/>
-          </ac:spMkLst>
-        </pc:spChg>
-        <pc:spChg chg="del">
-          <ac:chgData name="William Estes" userId="a88fcdbc31b6f594" providerId="Windows Live" clId="Web-{10FD8D96-9E5A-4BEB-31AC-11A1018D4BCE}" dt="2020-08-30T20:14:28.226" v="77"/>
-          <ac:spMkLst>
-            <pc:docMk/>
-            <pc:sldMk cId="3007801671" sldId="291"/>
-            <ac:spMk id="4" creationId="{ADB1C674-FD00-4D6C-866A-6C5E6B13E5F3}"/>
-          </ac:spMkLst>
-        </pc:spChg>
-        <pc:spChg chg="del">
-          <ac:chgData name="William Estes" userId="a88fcdbc31b6f594" providerId="Windows Live" clId="Web-{10FD8D96-9E5A-4BEB-31AC-11A1018D4BCE}" dt="2020-08-30T20:14:30.586" v="78"/>
-          <ac:spMkLst>
-            <pc:docMk/>
-            <pc:sldMk cId="3007801671" sldId="291"/>
-            <ac:spMk id="5" creationId="{4952BA95-9BBD-41E0-9E5D-9FA167EAC776}"/>
-          </ac:spMkLst>
-        </pc:spChg>
-        <pc:spChg chg="del">
-          <ac:chgData name="William Estes" userId="a88fcdbc31b6f594" providerId="Windows Live" clId="Web-{10FD8D96-9E5A-4BEB-31AC-11A1018D4BCE}" dt="2020-08-30T20:14:47.195" v="79"/>
-          <ac:spMkLst>
-            <pc:docMk/>
-            <pc:sldMk cId="3007801671" sldId="291"/>
-            <ac:spMk id="6" creationId="{3A659AA7-456C-4E13-9785-37DE36D63852}"/>
-          </ac:spMkLst>
-        </pc:spChg>
-        <pc:spChg chg="del">
-          <ac:chgData name="William Estes" userId="a88fcdbc31b6f594" providerId="Windows Live" clId="Web-{10FD8D96-9E5A-4BEB-31AC-11A1018D4BCE}" dt="2020-08-30T20:14:48.711" v="80"/>
-          <ac:spMkLst>
-            <pc:docMk/>
-            <pc:sldMk cId="3007801671" sldId="291"/>
-            <ac:spMk id="7" creationId="{7886BCBF-684F-4CAE-A080-5AC735A7B257}"/>
-          </ac:spMkLst>
-        </pc:spChg>
-        <pc:spChg chg="del">
-          <ac:chgData name="William Estes" userId="a88fcdbc31b6f594" providerId="Windows Live" clId="Web-{10FD8D96-9E5A-4BEB-31AC-11A1018D4BCE}" dt="2020-08-30T20:14:50.148" v="81"/>
-          <ac:spMkLst>
-            <pc:docMk/>
-            <pc:sldMk cId="3007801671" sldId="291"/>
-            <ac:spMk id="8" creationId="{54FC6B76-B785-4E1A-B012-472FF0BBF661}"/>
-          </ac:spMkLst>
-        </pc:spChg>
-        <pc:spChg chg="del">
-          <ac:chgData name="William Estes" userId="a88fcdbc31b6f594" providerId="Windows Live" clId="Web-{10FD8D96-9E5A-4BEB-31AC-11A1018D4BCE}" dt="2020-08-30T20:14:51.508" v="82"/>
-          <ac:spMkLst>
-            <pc:docMk/>
-            <pc:sldMk cId="3007801671" sldId="291"/>
-            <ac:spMk id="9" creationId="{224E8681-C71E-4740-BFB7-94339D774377}"/>
-          </ac:spMkLst>
-        </pc:spChg>
-        <pc:spChg chg="del">
-          <ac:chgData name="William Estes" userId="a88fcdbc31b6f594" providerId="Windows Live" clId="Web-{10FD8D96-9E5A-4BEB-31AC-11A1018D4BCE}" dt="2020-08-30T20:14:52.602" v="83"/>
-          <ac:spMkLst>
-            <pc:docMk/>
-            <pc:sldMk cId="3007801671" sldId="291"/>
-            <ac:spMk id="10" creationId="{1D4A377E-20E9-42FA-9CBD-693081493559}"/>
-          </ac:spMkLst>
-        </pc:spChg>
-        <pc:spChg chg="add mod">
-          <ac:chgData name="William Estes" userId="a88fcdbc31b6f594" providerId="Windows Live" clId="Web-{10FD8D96-9E5A-4BEB-31AC-11A1018D4BCE}" dt="2020-08-30T20:20:17.228" v="231" actId="14100"/>
-          <ac:spMkLst>
-            <pc:docMk/>
-            <pc:sldMk cId="3007801671" sldId="291"/>
-            <ac:spMk id="12" creationId="{CF97C5AB-99C6-437C-B2DB-5A3F7C1729C7}"/>
-          </ac:spMkLst>
-        </pc:spChg>
-        <pc:picChg chg="add mod">
-          <ac:chgData name="William Estes" userId="a88fcdbc31b6f594" providerId="Windows Live" clId="Web-{10FD8D96-9E5A-4BEB-31AC-11A1018D4BCE}" dt="2020-08-30T20:19:55.072" v="227" actId="1076"/>
-          <ac:picMkLst>
-            <pc:docMk/>
-            <pc:sldMk cId="3007801671" sldId="291"/>
-            <ac:picMk id="11" creationId="{6D1F8C0C-6DC3-4A53-89E4-F31AE803855B}"/>
-          </ac:picMkLst>
-        </pc:picChg>
-      </pc:sldChg>
-      <pc:sldChg chg="del">
-        <pc:chgData name="William Estes" userId="a88fcdbc31b6f594" providerId="Windows Live" clId="Web-{10FD8D96-9E5A-4BEB-31AC-11A1018D4BCE}" dt="2020-08-30T20:14:58.898" v="85"/>
-        <pc:sldMkLst>
-          <pc:docMk/>
-          <pc:sldMk cId="171356189" sldId="292"/>
-        </pc:sldMkLst>
-      </pc:sldChg>
-      <pc:sldChg chg="addSp delSp modSp add mod replId modClrScheme chgLayout">
-        <pc:chgData name="William Estes" userId="a88fcdbc31b6f594" providerId="Windows Live" clId="Web-{10FD8D96-9E5A-4BEB-31AC-11A1018D4BCE}" dt="2020-08-30T20:42:34.107" v="866" actId="1076"/>
-        <pc:sldMkLst>
-          <pc:docMk/>
-          <pc:sldMk cId="1031257587" sldId="292"/>
-        </pc:sldMkLst>
-        <pc:spChg chg="mod ord">
-          <ac:chgData name="William Estes" userId="a88fcdbc31b6f594" providerId="Windows Live" clId="Web-{10FD8D96-9E5A-4BEB-31AC-11A1018D4BCE}" dt="2020-08-30T20:23:13.964" v="460"/>
-          <ac:spMkLst>
-            <pc:docMk/>
-            <pc:sldMk cId="1031257587" sldId="292"/>
-            <ac:spMk id="2" creationId="{5C86CBF7-69F7-7B44-ABCE-F80D6130EA7B}"/>
-          </ac:spMkLst>
-        </pc:spChg>
-        <pc:spChg chg="mod ord">
-          <ac:chgData name="William Estes" userId="a88fcdbc31b6f594" providerId="Windows Live" clId="Web-{10FD8D96-9E5A-4BEB-31AC-11A1018D4BCE}" dt="2020-08-30T20:23:13.964" v="460"/>
-          <ac:spMkLst>
-            <pc:docMk/>
-            <pc:sldMk cId="1031257587" sldId="292"/>
-            <ac:spMk id="3" creationId="{1095E837-F77E-AE4D-944C-919B5D780AAA}"/>
-          </ac:spMkLst>
-        </pc:spChg>
-        <pc:spChg chg="add del mod ord">
-          <ac:chgData name="William Estes" userId="a88fcdbc31b6f594" providerId="Windows Live" clId="Web-{10FD8D96-9E5A-4BEB-31AC-11A1018D4BCE}" dt="2020-08-30T20:23:13.964" v="460"/>
-          <ac:spMkLst>
-            <pc:docMk/>
-            <pc:sldMk cId="1031257587" sldId="292"/>
-            <ac:spMk id="4" creationId="{ED008AEC-C48C-465F-9CD1-1897012EF341}"/>
-          </ac:spMkLst>
-        </pc:spChg>
-        <pc:spChg chg="add del mod ord">
-          <ac:chgData name="William Estes" userId="a88fcdbc31b6f594" providerId="Windows Live" clId="Web-{10FD8D96-9E5A-4BEB-31AC-11A1018D4BCE}" dt="2020-08-30T20:23:13.964" v="460"/>
-          <ac:spMkLst>
-            <pc:docMk/>
-            <pc:sldMk cId="1031257587" sldId="292"/>
-            <ac:spMk id="5" creationId="{CA9D4ED6-9944-4826-A5D0-C66CBFFBAAAA}"/>
-          </ac:spMkLst>
-        </pc:spChg>
-        <pc:spChg chg="add del mod ord">
-          <ac:chgData name="William Estes" userId="a88fcdbc31b6f594" providerId="Windows Live" clId="Web-{10FD8D96-9E5A-4BEB-31AC-11A1018D4BCE}" dt="2020-08-30T20:23:13.964" v="460"/>
-          <ac:spMkLst>
-            <pc:docMk/>
-            <pc:sldMk cId="1031257587" sldId="292"/>
-            <ac:spMk id="6" creationId="{384646BD-C53A-44A9-839A-E65CB3BE6E39}"/>
-          </ac:spMkLst>
-        </pc:spChg>
-        <pc:spChg chg="add mod">
-          <ac:chgData name="William Estes" userId="a88fcdbc31b6f594" providerId="Windows Live" clId="Web-{10FD8D96-9E5A-4BEB-31AC-11A1018D4BCE}" dt="2020-08-30T20:42:16.481" v="856" actId="1076"/>
-          <ac:spMkLst>
-            <pc:docMk/>
-            <pc:sldMk cId="1031257587" sldId="292"/>
-            <ac:spMk id="7" creationId="{81FEAAF1-55EF-429A-832F-657DD1B08A00}"/>
-          </ac:spMkLst>
-        </pc:spChg>
-        <pc:spChg chg="add mod">
-          <ac:chgData name="William Estes" userId="a88fcdbc31b6f594" providerId="Windows Live" clId="Web-{10FD8D96-9E5A-4BEB-31AC-11A1018D4BCE}" dt="2020-08-30T20:42:19.653" v="858" actId="1076"/>
-          <ac:spMkLst>
-            <pc:docMk/>
-            <pc:sldMk cId="1031257587" sldId="292"/>
-            <ac:spMk id="10" creationId="{A6C69913-6E66-4EF9-912E-4787D37F112A}"/>
-          </ac:spMkLst>
-        </pc:spChg>
-        <pc:spChg chg="del">
-          <ac:chgData name="William Estes" userId="a88fcdbc31b6f594" providerId="Windows Live" clId="Web-{10FD8D96-9E5A-4BEB-31AC-11A1018D4BCE}" dt="2020-08-30T20:20:24.775" v="233"/>
-          <ac:spMkLst>
-            <pc:docMk/>
-            <pc:sldMk cId="1031257587" sldId="292"/>
-            <ac:spMk id="12" creationId="{CF97C5AB-99C6-437C-B2DB-5A3F7C1729C7}"/>
-          </ac:spMkLst>
-        </pc:spChg>
-        <pc:spChg chg="add mod">
-          <ac:chgData name="William Estes" userId="a88fcdbc31b6f594" providerId="Windows Live" clId="Web-{10FD8D96-9E5A-4BEB-31AC-11A1018D4BCE}" dt="2020-08-30T20:42:23.200" v="860" actId="1076"/>
-          <ac:spMkLst>
-            <pc:docMk/>
-            <pc:sldMk cId="1031257587" sldId="292"/>
-            <ac:spMk id="13" creationId="{FA79162F-1F9C-4BB6-9C39-96C8B58E86C3}"/>
-          </ac:spMkLst>
-        </pc:spChg>
-        <pc:spChg chg="add mod">
-          <ac:chgData name="William Estes" userId="a88fcdbc31b6f594" providerId="Windows Live" clId="Web-{10FD8D96-9E5A-4BEB-31AC-11A1018D4BCE}" dt="2020-08-30T20:42:26.263" v="862" actId="1076"/>
-          <ac:spMkLst>
-            <pc:docMk/>
-            <pc:sldMk cId="1031257587" sldId="292"/>
-            <ac:spMk id="14" creationId="{BC68A978-56D8-4B49-B046-44ACD0A585A4}"/>
-          </ac:spMkLst>
-        </pc:spChg>
-        <pc:spChg chg="add mod">
-          <ac:chgData name="William Estes" userId="a88fcdbc31b6f594" providerId="Windows Live" clId="Web-{10FD8D96-9E5A-4BEB-31AC-11A1018D4BCE}" dt="2020-08-30T20:42:30.403" v="864" actId="1076"/>
-          <ac:spMkLst>
-            <pc:docMk/>
-            <pc:sldMk cId="1031257587" sldId="292"/>
-            <ac:spMk id="15" creationId="{7F19F82B-0D64-4D93-8D94-101BBFB46765}"/>
-          </ac:spMkLst>
-        </pc:spChg>
-        <pc:spChg chg="add mod">
-          <ac:chgData name="William Estes" userId="a88fcdbc31b6f594" providerId="Windows Live" clId="Web-{10FD8D96-9E5A-4BEB-31AC-11A1018D4BCE}" dt="2020-08-30T20:42:34.107" v="866" actId="1076"/>
-          <ac:spMkLst>
-            <pc:docMk/>
-            <pc:sldMk cId="1031257587" sldId="292"/>
-            <ac:spMk id="16" creationId="{2CD967FC-6B82-4F09-938B-F9E74AB74DB5}"/>
-          </ac:spMkLst>
-        </pc:spChg>
-        <pc:picChg chg="del">
-          <ac:chgData name="William Estes" userId="a88fcdbc31b6f594" providerId="Windows Live" clId="Web-{10FD8D96-9E5A-4BEB-31AC-11A1018D4BCE}" dt="2020-08-30T20:20:25.681" v="234"/>
-          <ac:picMkLst>
-            <pc:docMk/>
-            <pc:sldMk cId="1031257587" sldId="292"/>
-            <ac:picMk id="11" creationId="{6D1F8C0C-6DC3-4A53-89E4-F31AE803855B}"/>
-          </ac:picMkLst>
-        </pc:picChg>
-      </pc:sldChg>
-      <pc:sldChg chg="modSp add replId">
-        <pc:chgData name="William Estes" userId="a88fcdbc31b6f594" providerId="Windows Live" clId="Web-{10FD8D96-9E5A-4BEB-31AC-11A1018D4BCE}" dt="2020-08-30T20:28:30.565" v="589" actId="20577"/>
-        <pc:sldMkLst>
-          <pc:docMk/>
-          <pc:sldMk cId="1361839843" sldId="293"/>
-        </pc:sldMkLst>
-        <pc:spChg chg="mod">
-          <ac:chgData name="William Estes" userId="a88fcdbc31b6f594" providerId="Windows Live" clId="Web-{10FD8D96-9E5A-4BEB-31AC-11A1018D4BCE}" dt="2020-08-30T20:28:30.565" v="589" actId="20577"/>
-          <ac:spMkLst>
-            <pc:docMk/>
-            <pc:sldMk cId="1361839843" sldId="293"/>
-            <ac:spMk id="3" creationId="{1095E837-F77E-AE4D-944C-919B5D780AAA}"/>
-          </ac:spMkLst>
-        </pc:spChg>
-      </pc:sldChg>
-      <pc:sldChg chg="del">
-        <pc:chgData name="William Estes" userId="a88fcdbc31b6f594" providerId="Windows Live" clId="Web-{10FD8D96-9E5A-4BEB-31AC-11A1018D4BCE}" dt="2020-08-30T20:14:57.258" v="84"/>
-        <pc:sldMkLst>
-          <pc:docMk/>
-          <pc:sldMk cId="4024895595" sldId="293"/>
-        </pc:sldMkLst>
-      </pc:sldChg>
-      <pc:sldChg chg="addSp modSp add replId">
-        <pc:chgData name="William Estes" userId="a88fcdbc31b6f594" providerId="Windows Live" clId="Web-{10FD8D96-9E5A-4BEB-31AC-11A1018D4BCE}" dt="2020-08-30T20:36:22.510" v="628" actId="14100"/>
-        <pc:sldMkLst>
-          <pc:docMk/>
-          <pc:sldMk cId="18420826" sldId="294"/>
-        </pc:sldMkLst>
-        <pc:spChg chg="mod">
-          <ac:chgData name="William Estes" userId="a88fcdbc31b6f594" providerId="Windows Live" clId="Web-{10FD8D96-9E5A-4BEB-31AC-11A1018D4BCE}" dt="2020-08-30T20:35:58.901" v="623" actId="20577"/>
-          <ac:spMkLst>
-            <pc:docMk/>
-            <pc:sldMk cId="18420826" sldId="294"/>
-            <ac:spMk id="3" creationId="{1095E837-F77E-AE4D-944C-919B5D780AAA}"/>
-          </ac:spMkLst>
-        </pc:spChg>
-        <pc:picChg chg="add mod">
-          <ac:chgData name="William Estes" userId="a88fcdbc31b6f594" providerId="Windows Live" clId="Web-{10FD8D96-9E5A-4BEB-31AC-11A1018D4BCE}" dt="2020-08-30T20:36:22.510" v="628" actId="14100"/>
-          <ac:picMkLst>
-            <pc:docMk/>
-            <pc:sldMk cId="18420826" sldId="294"/>
-            <ac:picMk id="4" creationId="{F86C7889-CD4D-48A5-84FB-A1AF08FD274C}"/>
-          </ac:picMkLst>
-        </pc:picChg>
-      </pc:sldChg>
-      <pc:sldChg chg="del">
-        <pc:chgData name="William Estes" userId="a88fcdbc31b6f594" providerId="Windows Live" clId="Web-{10FD8D96-9E5A-4BEB-31AC-11A1018D4BCE}" dt="2020-08-30T20:15:31.102" v="96"/>
-        <pc:sldMkLst>
-          <pc:docMk/>
-          <pc:sldMk cId="3221878255" sldId="294"/>
-        </pc:sldMkLst>
-      </pc:sldChg>
-      <pc:sldChg chg="addSp modSp add ord replId">
-        <pc:chgData name="William Estes" userId="a88fcdbc31b6f594" providerId="Windows Live" clId="Web-{10FD8D96-9E5A-4BEB-31AC-11A1018D4BCE}" dt="2020-08-30T20:41:08.450" v="853" actId="1076"/>
-        <pc:sldMkLst>
-          <pc:docMk/>
-          <pc:sldMk cId="2184220433" sldId="295"/>
-        </pc:sldMkLst>
-        <pc:spChg chg="mod">
-          <ac:chgData name="William Estes" userId="a88fcdbc31b6f594" providerId="Windows Live" clId="Web-{10FD8D96-9E5A-4BEB-31AC-11A1018D4BCE}" dt="2020-08-30T20:40:47.512" v="845" actId="20577"/>
-          <ac:spMkLst>
-            <pc:docMk/>
-            <pc:sldMk cId="2184220433" sldId="295"/>
-            <ac:spMk id="3" creationId="{1095E837-F77E-AE4D-944C-919B5D780AAA}"/>
-          </ac:spMkLst>
-        </pc:spChg>
-        <pc:spChg chg="add mod">
-          <ac:chgData name="William Estes" userId="a88fcdbc31b6f594" providerId="Windows Live" clId="Web-{10FD8D96-9E5A-4BEB-31AC-11A1018D4BCE}" dt="2020-08-30T20:41:00.028" v="850" actId="14100"/>
-          <ac:spMkLst>
-            <pc:docMk/>
-            <pc:sldMk cId="2184220433" sldId="295"/>
-            <ac:spMk id="5" creationId="{7B16B923-1F9B-4609-AF2C-FA03D25659EE}"/>
-          </ac:spMkLst>
-        </pc:spChg>
-        <pc:picChg chg="add mod">
-          <ac:chgData name="William Estes" userId="a88fcdbc31b6f594" providerId="Windows Live" clId="Web-{10FD8D96-9E5A-4BEB-31AC-11A1018D4BCE}" dt="2020-08-30T20:41:08.450" v="853" actId="1076"/>
-          <ac:picMkLst>
-            <pc:docMk/>
-            <pc:sldMk cId="2184220433" sldId="295"/>
-            <ac:picMk id="4" creationId="{04D5CF95-8307-4AE3-987D-18DF7B0726A2}"/>
-          </ac:picMkLst>
-        </pc:picChg>
-      </pc:sldChg>
-      <pc:sldChg chg="del">
-        <pc:chgData name="William Estes" userId="a88fcdbc31b6f594" providerId="Windows Live" clId="Web-{10FD8D96-9E5A-4BEB-31AC-11A1018D4BCE}" dt="2020-08-30T20:15:31.102" v="95"/>
-        <pc:sldMkLst>
-          <pc:docMk/>
-          <pc:sldMk cId="3635157167" sldId="295"/>
-        </pc:sldMkLst>
-      </pc:sldChg>
-      <pc:sldChg chg="addSp delSp modSp add replId">
-        <pc:chgData name="William Estes" userId="a88fcdbc31b6f594" providerId="Windows Live" clId="Web-{10FD8D96-9E5A-4BEB-31AC-11A1018D4BCE}" dt="2020-08-30T20:55:37.564" v="1030" actId="20577"/>
-        <pc:sldMkLst>
-          <pc:docMk/>
-          <pc:sldMk cId="1522982694" sldId="296"/>
-        </pc:sldMkLst>
-        <pc:spChg chg="mod">
-          <ac:chgData name="William Estes" userId="a88fcdbc31b6f594" providerId="Windows Live" clId="Web-{10FD8D96-9E5A-4BEB-31AC-11A1018D4BCE}" dt="2020-08-30T20:55:37.564" v="1030" actId="20577"/>
-          <ac:spMkLst>
-            <pc:docMk/>
-            <pc:sldMk cId="1522982694" sldId="296"/>
-            <ac:spMk id="3" creationId="{1095E837-F77E-AE4D-944C-919B5D780AAA}"/>
-          </ac:spMkLst>
-        </pc:spChg>
-        <pc:spChg chg="del">
-          <ac:chgData name="William Estes" userId="a88fcdbc31b6f594" providerId="Windows Live" clId="Web-{10FD8D96-9E5A-4BEB-31AC-11A1018D4BCE}" dt="2020-08-30T20:47:01.499" v="872"/>
-          <ac:spMkLst>
-            <pc:docMk/>
-            <pc:sldMk cId="1522982694" sldId="296"/>
-            <ac:spMk id="5" creationId="{7B16B923-1F9B-4609-AF2C-FA03D25659EE}"/>
-          </ac:spMkLst>
-        </pc:spChg>
-        <pc:spChg chg="add mod">
-          <ac:chgData name="William Estes" userId="a88fcdbc31b6f594" providerId="Windows Live" clId="Web-{10FD8D96-9E5A-4BEB-31AC-11A1018D4BCE}" dt="2020-08-30T20:48:48.905" v="913" actId="14100"/>
-          <ac:spMkLst>
-            <pc:docMk/>
-            <pc:sldMk cId="1522982694" sldId="296"/>
-            <ac:spMk id="6" creationId="{8D3881AF-2AF0-4DF1-977D-DEFDD2FCFF0A}"/>
-          </ac:spMkLst>
-        </pc:spChg>
-        <pc:spChg chg="add mod">
-          <ac:chgData name="William Estes" userId="a88fcdbc31b6f594" providerId="Windows Live" clId="Web-{10FD8D96-9E5A-4BEB-31AC-11A1018D4BCE}" dt="2020-08-30T20:51:06.469" v="963" actId="14100"/>
-          <ac:spMkLst>
-            <pc:docMk/>
-            <pc:sldMk cId="1522982694" sldId="296"/>
-            <ac:spMk id="7" creationId="{F5D9FE73-3240-4541-BA18-9018D3F5BAA8}"/>
-          </ac:spMkLst>
-        </pc:spChg>
-        <pc:picChg chg="del">
-          <ac:chgData name="William Estes" userId="a88fcdbc31b6f594" providerId="Windows Live" clId="Web-{10FD8D96-9E5A-4BEB-31AC-11A1018D4BCE}" dt="2020-08-30T20:46:55.764" v="868"/>
-          <ac:picMkLst>
-            <pc:docMk/>
-            <pc:sldMk cId="1522982694" sldId="296"/>
-            <ac:picMk id="4" creationId="{04D5CF95-8307-4AE3-987D-18DF7B0726A2}"/>
-          </ac:picMkLst>
-        </pc:picChg>
-        <pc:picChg chg="add mod">
-          <ac:chgData name="William Estes" userId="a88fcdbc31b6f594" providerId="Windows Live" clId="Web-{10FD8D96-9E5A-4BEB-31AC-11A1018D4BCE}" dt="2020-08-30T20:54:23.954" v="967" actId="1076"/>
-          <ac:picMkLst>
-            <pc:docMk/>
-            <pc:sldMk cId="1522982694" sldId="296"/>
-            <ac:picMk id="8" creationId="{0B629BCE-AF24-4351-ADB1-FA7CD0617AB7}"/>
-          </ac:picMkLst>
-        </pc:picChg>
-      </pc:sldChg>
-      <pc:sldChg chg="addSp delSp modSp add replId">
-        <pc:chgData name="William Estes" userId="a88fcdbc31b6f594" providerId="Windows Live" clId="Web-{10FD8D96-9E5A-4BEB-31AC-11A1018D4BCE}" dt="2020-08-30T21:10:54.399" v="1198" actId="1076"/>
-        <pc:sldMkLst>
-          <pc:docMk/>
-          <pc:sldMk cId="3207294362" sldId="297"/>
-        </pc:sldMkLst>
-        <pc:spChg chg="mod">
-          <ac:chgData name="William Estes" userId="a88fcdbc31b6f594" providerId="Windows Live" clId="Web-{10FD8D96-9E5A-4BEB-31AC-11A1018D4BCE}" dt="2020-08-30T21:10:48.633" v="1193" actId="20577"/>
-          <ac:spMkLst>
-            <pc:docMk/>
-            <pc:sldMk cId="3207294362" sldId="297"/>
-            <ac:spMk id="3" creationId="{1095E837-F77E-AE4D-944C-919B5D780AAA}"/>
-          </ac:spMkLst>
-        </pc:spChg>
-        <pc:spChg chg="del">
-          <ac:chgData name="William Estes" userId="a88fcdbc31b6f594" providerId="Windows Live" clId="Web-{10FD8D96-9E5A-4BEB-31AC-11A1018D4BCE}" dt="2020-08-30T21:03:15.068" v="1035"/>
-          <ac:spMkLst>
-            <pc:docMk/>
-            <pc:sldMk cId="3207294362" sldId="297"/>
-            <ac:spMk id="6" creationId="{8D3881AF-2AF0-4DF1-977D-DEFDD2FCFF0A}"/>
-          </ac:spMkLst>
-        </pc:spChg>
-        <pc:spChg chg="del">
-          <ac:chgData name="William Estes" userId="a88fcdbc31b6f594" providerId="Windows Live" clId="Web-{10FD8D96-9E5A-4BEB-31AC-11A1018D4BCE}" dt="2020-08-30T21:03:12.630" v="1034"/>
-          <ac:spMkLst>
-            <pc:docMk/>
-            <pc:sldMk cId="3207294362" sldId="297"/>
-            <ac:spMk id="7" creationId="{F5D9FE73-3240-4541-BA18-9018D3F5BAA8}"/>
-          </ac:spMkLst>
-        </pc:spChg>
-        <pc:picChg chg="add mod">
-          <ac:chgData name="William Estes" userId="a88fcdbc31b6f594" providerId="Windows Live" clId="Web-{10FD8D96-9E5A-4BEB-31AC-11A1018D4BCE}" dt="2020-08-30T21:10:54.399" v="1198" actId="1076"/>
-          <ac:picMkLst>
-            <pc:docMk/>
-            <pc:sldMk cId="3207294362" sldId="297"/>
-            <ac:picMk id="4" creationId="{42593F90-D938-4E7A-9AC8-891253E5C3BA}"/>
-          </ac:picMkLst>
-        </pc:picChg>
-        <pc:picChg chg="del">
-          <ac:chgData name="William Estes" userId="a88fcdbc31b6f594" providerId="Windows Live" clId="Web-{10FD8D96-9E5A-4BEB-31AC-11A1018D4BCE}" dt="2020-08-30T21:03:08.427" v="1033"/>
-          <ac:picMkLst>
-            <pc:docMk/>
-            <pc:sldMk cId="3207294362" sldId="297"/>
-            <ac:picMk id="8" creationId="{0B629BCE-AF24-4351-ADB1-FA7CD0617AB7}"/>
-          </ac:picMkLst>
-        </pc:picChg>
-      </pc:sldChg>
-      <pc:sldChg chg="addSp delSp modSp add replId">
-        <pc:chgData name="William Estes" userId="a88fcdbc31b6f594" providerId="Windows Live" clId="Web-{10FD8D96-9E5A-4BEB-31AC-11A1018D4BCE}" dt="2020-08-30T21:22:49.090" v="1363" actId="14100"/>
-        <pc:sldMkLst>
-          <pc:docMk/>
-          <pc:sldMk cId="827534898" sldId="298"/>
-        </pc:sldMkLst>
-        <pc:spChg chg="mod">
-          <ac:chgData name="William Estes" userId="a88fcdbc31b6f594" providerId="Windows Live" clId="Web-{10FD8D96-9E5A-4BEB-31AC-11A1018D4BCE}" dt="2020-08-30T21:22:45.122" v="1360" actId="20577"/>
-          <ac:spMkLst>
-            <pc:docMk/>
-            <pc:sldMk cId="827534898" sldId="298"/>
-            <ac:spMk id="3" creationId="{1095E837-F77E-AE4D-944C-919B5D780AAA}"/>
-          </ac:spMkLst>
-        </pc:spChg>
-        <pc:picChg chg="del">
-          <ac:chgData name="William Estes" userId="a88fcdbc31b6f594" providerId="Windows Live" clId="Web-{10FD8D96-9E5A-4BEB-31AC-11A1018D4BCE}" dt="2020-08-30T21:11:09.149" v="1200"/>
-          <ac:picMkLst>
-            <pc:docMk/>
-            <pc:sldMk cId="827534898" sldId="298"/>
-            <ac:picMk id="4" creationId="{42593F90-D938-4E7A-9AC8-891253E5C3BA}"/>
-          </ac:picMkLst>
-        </pc:picChg>
-        <pc:picChg chg="add mod">
-          <ac:chgData name="William Estes" userId="a88fcdbc31b6f594" providerId="Windows Live" clId="Web-{10FD8D96-9E5A-4BEB-31AC-11A1018D4BCE}" dt="2020-08-30T21:22:49.090" v="1363" actId="14100"/>
-          <ac:picMkLst>
-            <pc:docMk/>
-            <pc:sldMk cId="827534898" sldId="298"/>
-            <ac:picMk id="5" creationId="{4782406E-292E-4236-9924-39FDA804D487}"/>
-          </ac:picMkLst>
-        </pc:picChg>
-      </pc:sldChg>
-      <pc:sldChg chg="del">
-        <pc:chgData name="William Estes" userId="a88fcdbc31b6f594" providerId="Windows Live" clId="Web-{10FD8D96-9E5A-4BEB-31AC-11A1018D4BCE}" dt="2020-08-30T20:15:31.117" v="99"/>
-        <pc:sldMkLst>
-          <pc:docMk/>
-          <pc:sldMk cId="1978656173" sldId="298"/>
-        </pc:sldMkLst>
-      </pc:sldChg>
-      <pc:sldChg chg="del">
-        <pc:chgData name="William Estes" userId="a88fcdbc31b6f594" providerId="Windows Live" clId="Web-{10FD8D96-9E5A-4BEB-31AC-11A1018D4BCE}" dt="2020-08-30T20:15:31.102" v="98"/>
-        <pc:sldMkLst>
-          <pc:docMk/>
-          <pc:sldMk cId="1101533116" sldId="299"/>
-        </pc:sldMkLst>
-      </pc:sldChg>
-      <pc:sldChg chg="addSp delSp modSp add replId">
-        <pc:chgData name="William Estes" userId="a88fcdbc31b6f594" providerId="Windows Live" clId="Web-{10FD8D96-9E5A-4BEB-31AC-11A1018D4BCE}" dt="2020-08-30T21:37:50.173" v="1475" actId="20577"/>
-        <pc:sldMkLst>
-          <pc:docMk/>
-          <pc:sldMk cId="4080448644" sldId="299"/>
-        </pc:sldMkLst>
-        <pc:spChg chg="mod">
-          <ac:chgData name="William Estes" userId="a88fcdbc31b6f594" providerId="Windows Live" clId="Web-{10FD8D96-9E5A-4BEB-31AC-11A1018D4BCE}" dt="2020-08-30T21:37:50.173" v="1475" actId="20577"/>
-          <ac:spMkLst>
-            <pc:docMk/>
-            <pc:sldMk cId="4080448644" sldId="299"/>
-            <ac:spMk id="3" creationId="{1095E837-F77E-AE4D-944C-919B5D780AAA}"/>
-          </ac:spMkLst>
-        </pc:spChg>
-        <pc:picChg chg="add mod">
-          <ac:chgData name="William Estes" userId="a88fcdbc31b6f594" providerId="Windows Live" clId="Web-{10FD8D96-9E5A-4BEB-31AC-11A1018D4BCE}" dt="2020-08-30T21:35:40.829" v="1449" actId="1076"/>
-          <ac:picMkLst>
-            <pc:docMk/>
-            <pc:sldMk cId="4080448644" sldId="299"/>
-            <ac:picMk id="4" creationId="{5CE153C2-E53B-443F-A1B7-1CECE7EE55A0}"/>
-          </ac:picMkLst>
-        </pc:picChg>
-        <pc:picChg chg="del">
-          <ac:chgData name="William Estes" userId="a88fcdbc31b6f594" providerId="Windows Live" clId="Web-{10FD8D96-9E5A-4BEB-31AC-11A1018D4BCE}" dt="2020-08-30T21:33:25.329" v="1376"/>
-          <ac:picMkLst>
-            <pc:docMk/>
-            <pc:sldMk cId="4080448644" sldId="299"/>
-            <ac:picMk id="5" creationId="{4782406E-292E-4236-9924-39FDA804D487}"/>
-          </ac:picMkLst>
-        </pc:picChg>
-      </pc:sldChg>
-      <pc:sldChg chg="del">
-        <pc:chgData name="William Estes" userId="a88fcdbc31b6f594" providerId="Windows Live" clId="Web-{10FD8D96-9E5A-4BEB-31AC-11A1018D4BCE}" dt="2020-08-30T20:15:31.102" v="94"/>
-        <pc:sldMkLst>
-          <pc:docMk/>
-          <pc:sldMk cId="433070316" sldId="300"/>
-        </pc:sldMkLst>
-      </pc:sldChg>
-      <pc:sldChg chg="add del replId">
-        <pc:chgData name="William Estes" userId="a88fcdbc31b6f594" providerId="Windows Live" clId="Web-{10FD8D96-9E5A-4BEB-31AC-11A1018D4BCE}" dt="2020-08-30T21:35:57.673" v="1450"/>
-        <pc:sldMkLst>
-          <pc:docMk/>
-          <pc:sldMk cId="1750154891" sldId="300"/>
-        </pc:sldMkLst>
-      </pc:sldChg>
-      <pc:sldChg chg="addSp delSp modSp add replId">
-        <pc:chgData name="William Estes" userId="a88fcdbc31b6f594" providerId="Windows Live" clId="Web-{10FD8D96-9E5A-4BEB-31AC-11A1018D4BCE}" dt="2020-08-30T21:42:58.862" v="1534" actId="20577"/>
-        <pc:sldMkLst>
-          <pc:docMk/>
-          <pc:sldMk cId="4113558887" sldId="300"/>
-        </pc:sldMkLst>
-        <pc:spChg chg="mod">
-          <ac:chgData name="William Estes" userId="a88fcdbc31b6f594" providerId="Windows Live" clId="Web-{10FD8D96-9E5A-4BEB-31AC-11A1018D4BCE}" dt="2020-08-30T21:42:58.862" v="1534" actId="20577"/>
-          <ac:spMkLst>
-            <pc:docMk/>
-            <pc:sldMk cId="4113558887" sldId="300"/>
-            <ac:spMk id="3" creationId="{1095E837-F77E-AE4D-944C-919B5D780AAA}"/>
-          </ac:spMkLst>
-        </pc:spChg>
-        <pc:picChg chg="del">
-          <ac:chgData name="William Estes" userId="a88fcdbc31b6f594" providerId="Windows Live" clId="Web-{10FD8D96-9E5A-4BEB-31AC-11A1018D4BCE}" dt="2020-08-30T21:38:48.674" v="1478"/>
-          <ac:picMkLst>
-            <pc:docMk/>
-            <pc:sldMk cId="4113558887" sldId="300"/>
-            <ac:picMk id="4" creationId="{5CE153C2-E53B-443F-A1B7-1CECE7EE55A0}"/>
-          </ac:picMkLst>
-        </pc:picChg>
-        <pc:picChg chg="add mod">
-          <ac:chgData name="William Estes" userId="a88fcdbc31b6f594" providerId="Windows Live" clId="Web-{10FD8D96-9E5A-4BEB-31AC-11A1018D4BCE}" dt="2020-08-30T21:42:40.644" v="1482" actId="14100"/>
-          <ac:picMkLst>
-            <pc:docMk/>
-            <pc:sldMk cId="4113558887" sldId="300"/>
-            <ac:picMk id="5" creationId="{D37651DB-3834-493B-8A24-2FE8EFC6849E}"/>
-          </ac:picMkLst>
-        </pc:picChg>
-      </pc:sldChg>
-      <pc:sldChg chg="delSp modSp add replId">
-        <pc:chgData name="William Estes" userId="a88fcdbc31b6f594" providerId="Windows Live" clId="Web-{10FD8D96-9E5A-4BEB-31AC-11A1018D4BCE}" dt="2020-08-30T21:55:33.804" v="1808" actId="20577"/>
-        <pc:sldMkLst>
-          <pc:docMk/>
-          <pc:sldMk cId="356878534" sldId="301"/>
-        </pc:sldMkLst>
-        <pc:spChg chg="mod">
-          <ac:chgData name="William Estes" userId="a88fcdbc31b6f594" providerId="Windows Live" clId="Web-{10FD8D96-9E5A-4BEB-31AC-11A1018D4BCE}" dt="2020-08-30T21:55:33.804" v="1808" actId="20577"/>
-          <ac:spMkLst>
-            <pc:docMk/>
-            <pc:sldMk cId="356878534" sldId="301"/>
-            <ac:spMk id="3" creationId="{1095E837-F77E-AE4D-944C-919B5D780AAA}"/>
-          </ac:spMkLst>
-        </pc:spChg>
-        <pc:spChg chg="del">
-          <ac:chgData name="William Estes" userId="a88fcdbc31b6f594" providerId="Windows Live" clId="Web-{10FD8D96-9E5A-4BEB-31AC-11A1018D4BCE}" dt="2020-08-30T21:52:34.553" v="1606"/>
-          <ac:spMkLst>
-            <pc:docMk/>
-            <pc:sldMk cId="356878534" sldId="301"/>
-            <ac:spMk id="5" creationId="{7B16B923-1F9B-4609-AF2C-FA03D25659EE}"/>
-          </ac:spMkLst>
-        </pc:spChg>
-        <pc:picChg chg="del">
-          <ac:chgData name="William Estes" userId="a88fcdbc31b6f594" providerId="Windows Live" clId="Web-{10FD8D96-9E5A-4BEB-31AC-11A1018D4BCE}" dt="2020-08-30T21:52:58.709" v="1646"/>
-          <ac:picMkLst>
-            <pc:docMk/>
-            <pc:sldMk cId="356878534" sldId="301"/>
-            <ac:picMk id="4" creationId="{04D5CF95-8307-4AE3-987D-18DF7B0726A2}"/>
-          </ac:picMkLst>
-        </pc:picChg>
-      </pc:sldChg>
-      <pc:sldChg chg="addSp delSp modSp add replId">
-        <pc:chgData name="William Estes" userId="a88fcdbc31b6f594" providerId="Windows Live" clId="Web-{10FD8D96-9E5A-4BEB-31AC-11A1018D4BCE}" dt="2020-08-30T22:05:58.839" v="1932" actId="20577"/>
-        <pc:sldMkLst>
-          <pc:docMk/>
-          <pc:sldMk cId="871545074" sldId="302"/>
-        </pc:sldMkLst>
-        <pc:spChg chg="mod">
-          <ac:chgData name="William Estes" userId="a88fcdbc31b6f594" providerId="Windows Live" clId="Web-{10FD8D96-9E5A-4BEB-31AC-11A1018D4BCE}" dt="2020-08-30T22:05:58.839" v="1932" actId="20577"/>
-          <ac:spMkLst>
-            <pc:docMk/>
-            <pc:sldMk cId="871545074" sldId="302"/>
-            <ac:spMk id="3" creationId="{1095E837-F77E-AE4D-944C-919B5D780AAA}"/>
-          </ac:spMkLst>
-        </pc:spChg>
-        <pc:picChg chg="add mod">
-          <ac:chgData name="William Estes" userId="a88fcdbc31b6f594" providerId="Windows Live" clId="Web-{10FD8D96-9E5A-4BEB-31AC-11A1018D4BCE}" dt="2020-08-30T22:01:41.978" v="1869" actId="1076"/>
-          <ac:picMkLst>
-            <pc:docMk/>
-            <pc:sldMk cId="871545074" sldId="302"/>
-            <ac:picMk id="4" creationId="{D5B4F8F0-E1EC-45B9-8407-773939B2E634}"/>
-          </ac:picMkLst>
-        </pc:picChg>
-        <pc:picChg chg="del">
-          <ac:chgData name="William Estes" userId="a88fcdbc31b6f594" providerId="Windows Live" clId="Web-{10FD8D96-9E5A-4BEB-31AC-11A1018D4BCE}" dt="2020-08-30T22:01:13.868" v="1865"/>
-          <ac:picMkLst>
-            <pc:docMk/>
-            <pc:sldMk cId="871545074" sldId="302"/>
-            <ac:picMk id="5" creationId="{D37651DB-3834-493B-8A24-2FE8EFC6849E}"/>
-          </ac:picMkLst>
-        </pc:picChg>
-      </pc:sldChg>
-      <pc:sldChg chg="addSp delSp modSp add replId">
-        <pc:chgData name="William Estes" userId="a88fcdbc31b6f594" providerId="Windows Live" clId="Web-{10FD8D96-9E5A-4BEB-31AC-11A1018D4BCE}" dt="2020-08-30T22:08:08.246" v="1941" actId="1076"/>
-        <pc:sldMkLst>
-          <pc:docMk/>
-          <pc:sldMk cId="284483567" sldId="303"/>
-        </pc:sldMkLst>
-        <pc:spChg chg="mod">
-          <ac:chgData name="William Estes" userId="a88fcdbc31b6f594" providerId="Windows Live" clId="Web-{10FD8D96-9E5A-4BEB-31AC-11A1018D4BCE}" dt="2020-08-30T22:05:48.073" v="1918" actId="20577"/>
-          <ac:spMkLst>
-            <pc:docMk/>
-            <pc:sldMk cId="284483567" sldId="303"/>
-            <ac:spMk id="3" creationId="{1095E837-F77E-AE4D-944C-919B5D780AAA}"/>
-          </ac:spMkLst>
-        </pc:spChg>
-        <pc:picChg chg="del">
-          <ac:chgData name="William Estes" userId="a88fcdbc31b6f594" providerId="Windows Live" clId="Web-{10FD8D96-9E5A-4BEB-31AC-11A1018D4BCE}" dt="2020-08-30T22:06:03.823" v="1934"/>
-          <ac:picMkLst>
-            <pc:docMk/>
-            <pc:sldMk cId="284483567" sldId="303"/>
-            <ac:picMk id="4" creationId="{D5B4F8F0-E1EC-45B9-8407-773939B2E634}"/>
-          </ac:picMkLst>
-        </pc:picChg>
-        <pc:picChg chg="add mod">
-          <ac:chgData name="William Estes" userId="a88fcdbc31b6f594" providerId="Windows Live" clId="Web-{10FD8D96-9E5A-4BEB-31AC-11A1018D4BCE}" dt="2020-08-30T22:06:38.511" v="1937" actId="14100"/>
-          <ac:picMkLst>
-            <pc:docMk/>
-            <pc:sldMk cId="284483567" sldId="303"/>
-            <ac:picMk id="5" creationId="{37922CBB-1EDC-42F3-87C5-053506E379CC}"/>
-          </ac:picMkLst>
-        </pc:picChg>
-        <pc:picChg chg="add mod">
-          <ac:chgData name="William Estes" userId="a88fcdbc31b6f594" providerId="Windows Live" clId="Web-{10FD8D96-9E5A-4BEB-31AC-11A1018D4BCE}" dt="2020-08-30T22:08:08.246" v="1941" actId="1076"/>
-          <ac:picMkLst>
-            <pc:docMk/>
-            <pc:sldMk cId="284483567" sldId="303"/>
-            <ac:picMk id="6" creationId="{16C7BFAC-F852-4D7A-8E04-672944FD9991}"/>
-          </ac:picMkLst>
-        </pc:picChg>
-      </pc:sldChg>
-    </pc:docChg>
-  </pc:docChgLst>
-  <pc:docChgLst>
-    <pc:chgData name="William Estes" userId="a88fcdbc31b6f594" providerId="Windows Live" clId="Web-{DB70B1DC-F3CD-4B79-55DF-C938D75B7304}"/>
-    <pc:docChg chg="addSld modSld">
-      <pc:chgData name="William Estes" userId="a88fcdbc31b6f594" providerId="Windows Live" clId="Web-{DB70B1DC-F3CD-4B79-55DF-C938D75B7304}" dt="2020-08-28T21:42:28.684" v="940" actId="14100"/>
-      <pc:docMkLst>
-        <pc:docMk/>
-      </pc:docMkLst>
-      <pc:sldChg chg="addSp modSp add replId">
-        <pc:chgData name="William Estes" userId="a88fcdbc31b6f594" providerId="Windows Live" clId="Web-{DB70B1DC-F3CD-4B79-55DF-C938D75B7304}" dt="2020-08-28T21:20:49.567" v="327" actId="1076"/>
-        <pc:sldMkLst>
-          <pc:docMk/>
-          <pc:sldMk cId="3007801671" sldId="291"/>
-        </pc:sldMkLst>
-        <pc:spChg chg="mod">
-          <ac:chgData name="William Estes" userId="a88fcdbc31b6f594" providerId="Windows Live" clId="Web-{DB70B1DC-F3CD-4B79-55DF-C938D75B7304}" dt="2020-08-28T21:04:07.078" v="16" actId="20577"/>
-          <ac:spMkLst>
-            <pc:docMk/>
-            <pc:sldMk cId="3007801671" sldId="291"/>
-            <ac:spMk id="2" creationId="{5C86CBF7-69F7-7B44-ABCE-F80D6130EA7B}"/>
-          </ac:spMkLst>
-        </pc:spChg>
-        <pc:spChg chg="mod">
-          <ac:chgData name="William Estes" userId="a88fcdbc31b6f594" providerId="Windows Live" clId="Web-{DB70B1DC-F3CD-4B79-55DF-C938D75B7304}" dt="2020-08-28T21:20:09.333" v="313" actId="20577"/>
-          <ac:spMkLst>
-            <pc:docMk/>
-            <pc:sldMk cId="3007801671" sldId="291"/>
-            <ac:spMk id="3" creationId="{1095E837-F77E-AE4D-944C-919B5D780AAA}"/>
-          </ac:spMkLst>
-        </pc:spChg>
-        <pc:spChg chg="add mod">
-          <ac:chgData name="William Estes" userId="a88fcdbc31b6f594" providerId="Windows Live" clId="Web-{DB70B1DC-F3CD-4B79-55DF-C938D75B7304}" dt="2020-08-28T21:15:38.066" v="157" actId="1076"/>
-          <ac:spMkLst>
-            <pc:docMk/>
-            <pc:sldMk cId="3007801671" sldId="291"/>
-            <ac:spMk id="4" creationId="{ADB1C674-FD00-4D6C-866A-6C5E6B13E5F3}"/>
-          </ac:spMkLst>
-        </pc:spChg>
-        <pc:spChg chg="add mod">
-          <ac:chgData name="William Estes" userId="a88fcdbc31b6f594" providerId="Windows Live" clId="Web-{DB70B1DC-F3CD-4B79-55DF-C938D75B7304}" dt="2020-08-28T21:14:30.643" v="116" actId="1076"/>
-          <ac:spMkLst>
-            <pc:docMk/>
-            <pc:sldMk cId="3007801671" sldId="291"/>
-            <ac:spMk id="5" creationId="{4952BA95-9BBD-41E0-9E5D-9FA167EAC776}"/>
-          </ac:spMkLst>
-        </pc:spChg>
-        <pc:spChg chg="add mod">
-          <ac:chgData name="William Estes" userId="a88fcdbc31b6f594" providerId="Windows Live" clId="Web-{DB70B1DC-F3CD-4B79-55DF-C938D75B7304}" dt="2020-08-28T21:15:45.597" v="160" actId="1076"/>
-          <ac:spMkLst>
-            <pc:docMk/>
-            <pc:sldMk cId="3007801671" sldId="291"/>
-            <ac:spMk id="6" creationId="{3A659AA7-456C-4E13-9785-37DE36D63852}"/>
-          </ac:spMkLst>
-        </pc:spChg>
-        <pc:spChg chg="add mod">
-          <ac:chgData name="William Estes" userId="a88fcdbc31b6f594" providerId="Windows Live" clId="Web-{DB70B1DC-F3CD-4B79-55DF-C938D75B7304}" dt="2020-08-28T21:20:20.927" v="317" actId="14100"/>
-          <ac:spMkLst>
-            <pc:docMk/>
-            <pc:sldMk cId="3007801671" sldId="291"/>
-            <ac:spMk id="7" creationId="{7886BCBF-684F-4CAE-A080-5AC735A7B257}"/>
-          </ac:spMkLst>
-        </pc:spChg>
-        <pc:spChg chg="add mod">
-          <ac:chgData name="William Estes" userId="a88fcdbc31b6f594" providerId="Windows Live" clId="Web-{DB70B1DC-F3CD-4B79-55DF-C938D75B7304}" dt="2020-08-28T21:20:24.989" v="319" actId="1076"/>
-          <ac:spMkLst>
-            <pc:docMk/>
-            <pc:sldMk cId="3007801671" sldId="291"/>
-            <ac:spMk id="8" creationId="{54FC6B76-B785-4E1A-B012-472FF0BBF661}"/>
-          </ac:spMkLst>
-        </pc:spChg>
-        <pc:spChg chg="add mod">
-          <ac:chgData name="William Estes" userId="a88fcdbc31b6f594" providerId="Windows Live" clId="Web-{DB70B1DC-F3CD-4B79-55DF-C938D75B7304}" dt="2020-08-28T21:20:29.411" v="322" actId="14100"/>
-          <ac:spMkLst>
-            <pc:docMk/>
-            <pc:sldMk cId="3007801671" sldId="291"/>
-            <ac:spMk id="9" creationId="{224E8681-C71E-4740-BFB7-94339D774377}"/>
-          </ac:spMkLst>
-        </pc:spChg>
-        <pc:spChg chg="add mod">
-          <ac:chgData name="William Estes" userId="a88fcdbc31b6f594" providerId="Windows Live" clId="Web-{DB70B1DC-F3CD-4B79-55DF-C938D75B7304}" dt="2020-08-28T21:20:49.567" v="327" actId="1076"/>
-          <ac:spMkLst>
-            <pc:docMk/>
-            <pc:sldMk cId="3007801671" sldId="291"/>
-            <ac:spMk id="10" creationId="{1D4A377E-20E9-42FA-9CBD-693081493559}"/>
-          </ac:spMkLst>
-        </pc:spChg>
-      </pc:sldChg>
-      <pc:sldChg chg="addSp delSp modSp add replId">
-        <pc:chgData name="William Estes" userId="a88fcdbc31b6f594" providerId="Windows Live" clId="Web-{DB70B1DC-F3CD-4B79-55DF-C938D75B7304}" dt="2020-08-28T21:26:55.476" v="549" actId="1076"/>
-        <pc:sldMkLst>
-          <pc:docMk/>
-          <pc:sldMk cId="171356189" sldId="292"/>
-        </pc:sldMkLst>
-        <pc:spChg chg="mod">
-          <ac:chgData name="William Estes" userId="a88fcdbc31b6f594" providerId="Windows Live" clId="Web-{DB70B1DC-F3CD-4B79-55DF-C938D75B7304}" dt="2020-08-28T21:24:18.256" v="416" actId="20577"/>
-          <ac:spMkLst>
-            <pc:docMk/>
-            <pc:sldMk cId="171356189" sldId="292"/>
-            <ac:spMk id="3" creationId="{1095E837-F77E-AE4D-944C-919B5D780AAA}"/>
-          </ac:spMkLst>
-        </pc:spChg>
-        <pc:spChg chg="mod">
-          <ac:chgData name="William Estes" userId="a88fcdbc31b6f594" providerId="Windows Live" clId="Web-{DB70B1DC-F3CD-4B79-55DF-C938D75B7304}" dt="2020-08-28T21:22:42.943" v="384" actId="14100"/>
-          <ac:spMkLst>
-            <pc:docMk/>
-            <pc:sldMk cId="171356189" sldId="292"/>
-            <ac:spMk id="4" creationId="{ADB1C674-FD00-4D6C-866A-6C5E6B13E5F3}"/>
-          </ac:spMkLst>
-        </pc:spChg>
-        <pc:spChg chg="del">
-          <ac:chgData name="William Estes" userId="a88fcdbc31b6f594" providerId="Windows Live" clId="Web-{DB70B1DC-F3CD-4B79-55DF-C938D75B7304}" dt="2020-08-28T21:23:32.256" v="389"/>
-          <ac:spMkLst>
-            <pc:docMk/>
-            <pc:sldMk cId="171356189" sldId="292"/>
-            <ac:spMk id="5" creationId="{4952BA95-9BBD-41E0-9E5D-9FA167EAC776}"/>
-          </ac:spMkLst>
-        </pc:spChg>
-        <pc:spChg chg="del">
-          <ac:chgData name="William Estes" userId="a88fcdbc31b6f594" providerId="Windows Live" clId="Web-{DB70B1DC-F3CD-4B79-55DF-C938D75B7304}" dt="2020-08-28T21:23:29.506" v="388"/>
-          <ac:spMkLst>
-            <pc:docMk/>
-            <pc:sldMk cId="171356189" sldId="292"/>
-            <ac:spMk id="6" creationId="{3A659AA7-456C-4E13-9785-37DE36D63852}"/>
-          </ac:spMkLst>
-        </pc:spChg>
-        <pc:spChg chg="del">
-          <ac:chgData name="William Estes" userId="a88fcdbc31b6f594" providerId="Windows Live" clId="Web-{DB70B1DC-F3CD-4B79-55DF-C938D75B7304}" dt="2020-08-28T21:23:33.787" v="390"/>
-          <ac:spMkLst>
-            <pc:docMk/>
-            <pc:sldMk cId="171356189" sldId="292"/>
-            <ac:spMk id="7" creationId="{7886BCBF-684F-4CAE-A080-5AC735A7B257}"/>
-          </ac:spMkLst>
-        </pc:spChg>
-        <pc:spChg chg="del">
-          <ac:chgData name="William Estes" userId="a88fcdbc31b6f594" providerId="Windows Live" clId="Web-{DB70B1DC-F3CD-4B79-55DF-C938D75B7304}" dt="2020-08-28T21:23:36.646" v="391"/>
-          <ac:spMkLst>
-            <pc:docMk/>
-            <pc:sldMk cId="171356189" sldId="292"/>
-            <ac:spMk id="8" creationId="{54FC6B76-B785-4E1A-B012-472FF0BBF661}"/>
-          </ac:spMkLst>
-        </pc:spChg>
-        <pc:spChg chg="del">
-          <ac:chgData name="William Estes" userId="a88fcdbc31b6f594" providerId="Windows Live" clId="Web-{DB70B1DC-F3CD-4B79-55DF-C938D75B7304}" dt="2020-08-28T21:23:38.084" v="392"/>
-          <ac:spMkLst>
-            <pc:docMk/>
-            <pc:sldMk cId="171356189" sldId="292"/>
-            <ac:spMk id="9" creationId="{224E8681-C71E-4740-BFB7-94339D774377}"/>
-          </ac:spMkLst>
-        </pc:spChg>
-        <pc:spChg chg="del">
-          <ac:chgData name="William Estes" userId="a88fcdbc31b6f594" providerId="Windows Live" clId="Web-{DB70B1DC-F3CD-4B79-55DF-C938D75B7304}" dt="2020-08-28T21:23:40.225" v="393"/>
-          <ac:spMkLst>
-            <pc:docMk/>
-            <pc:sldMk cId="171356189" sldId="292"/>
-            <ac:spMk id="10" creationId="{1D4A377E-20E9-42FA-9CBD-693081493559}"/>
-          </ac:spMkLst>
-        </pc:spChg>
-        <pc:spChg chg="add mod">
-          <ac:chgData name="William Estes" userId="a88fcdbc31b6f594" providerId="Windows Live" clId="Web-{DB70B1DC-F3CD-4B79-55DF-C938D75B7304}" dt="2020-08-28T21:26:03.507" v="537" actId="1076"/>
-          <ac:spMkLst>
-            <pc:docMk/>
-            <pc:sldMk cId="171356189" sldId="292"/>
-            <ac:spMk id="11" creationId="{78CD0106-D05B-48F8-88DB-525D34C0A1A4}"/>
-          </ac:spMkLst>
-        </pc:spChg>
-        <pc:spChg chg="add mod">
-          <ac:chgData name="William Estes" userId="a88fcdbc31b6f594" providerId="Windows Live" clId="Web-{DB70B1DC-F3CD-4B79-55DF-C938D75B7304}" dt="2020-08-28T21:26:11.897" v="539" actId="1076"/>
-          <ac:spMkLst>
-            <pc:docMk/>
-            <pc:sldMk cId="171356189" sldId="292"/>
-            <ac:spMk id="12" creationId="{463E7D16-0E64-401F-AB9D-650B3290882F}"/>
-          </ac:spMkLst>
-        </pc:spChg>
-        <pc:spChg chg="add mod">
-          <ac:chgData name="William Estes" userId="a88fcdbc31b6f594" providerId="Windows Live" clId="Web-{DB70B1DC-F3CD-4B79-55DF-C938D75B7304}" dt="2020-08-28T21:26:16.460" v="540" actId="1076"/>
-          <ac:spMkLst>
-            <pc:docMk/>
-            <pc:sldMk cId="171356189" sldId="292"/>
-            <ac:spMk id="13" creationId="{85449B42-0E50-4771-A03D-AB1D291740A4}"/>
-          </ac:spMkLst>
-        </pc:spChg>
-        <pc:spChg chg="add mod">
-          <ac:chgData name="William Estes" userId="a88fcdbc31b6f594" providerId="Windows Live" clId="Web-{DB70B1DC-F3CD-4B79-55DF-C938D75B7304}" dt="2020-08-28T21:26:07.663" v="538" actId="1076"/>
-          <ac:spMkLst>
-            <pc:docMk/>
-            <pc:sldMk cId="171356189" sldId="292"/>
-            <ac:spMk id="14" creationId="{DA9640AD-8476-475D-8585-B3FF518B2F8A}"/>
-          </ac:spMkLst>
-        </pc:spChg>
-        <pc:spChg chg="add mod">
-          <ac:chgData name="William Estes" userId="a88fcdbc31b6f594" providerId="Windows Live" clId="Web-{DB70B1DC-F3CD-4B79-55DF-C938D75B7304}" dt="2020-08-28T21:25:43.975" v="514" actId="20577"/>
-          <ac:spMkLst>
-            <pc:docMk/>
-            <pc:sldMk cId="171356189" sldId="292"/>
-            <ac:spMk id="15" creationId="{0AA2F10F-EDBF-4224-9420-736F6FFE10FE}"/>
-          </ac:spMkLst>
-        </pc:spChg>
-        <pc:spChg chg="add mod">
-          <ac:chgData name="William Estes" userId="a88fcdbc31b6f594" providerId="Windows Live" clId="Web-{DB70B1DC-F3CD-4B79-55DF-C938D75B7304}" dt="2020-08-28T21:25:48.428" v="529" actId="20577"/>
-          <ac:spMkLst>
-            <pc:docMk/>
-            <pc:sldMk cId="171356189" sldId="292"/>
-            <ac:spMk id="16" creationId="{FC004729-9277-4FEB-92A0-2445B4CD18ED}"/>
-          </ac:spMkLst>
-        </pc:spChg>
-        <pc:spChg chg="add mod">
-          <ac:chgData name="William Estes" userId="a88fcdbc31b6f594" providerId="Windows Live" clId="Web-{DB70B1DC-F3CD-4B79-55DF-C938D75B7304}" dt="2020-08-28T21:25:52.428" v="534" actId="20577"/>
-          <ac:spMkLst>
-            <pc:docMk/>
-            <pc:sldMk cId="171356189" sldId="292"/>
-            <ac:spMk id="17" creationId="{FC5E33D3-1151-48B4-B1E9-569E51809E49}"/>
-          </ac:spMkLst>
-        </pc:spChg>
-        <pc:cxnChg chg="add mod">
-          <ac:chgData name="William Estes" userId="a88fcdbc31b6f594" providerId="Windows Live" clId="Web-{DB70B1DC-F3CD-4B79-55DF-C938D75B7304}" dt="2020-08-28T21:26:48.601" v="548" actId="1076"/>
-          <ac:cxnSpMkLst>
-            <pc:docMk/>
-            <pc:sldMk cId="171356189" sldId="292"/>
-            <ac:cxnSpMk id="18" creationId="{BAC96D7B-8998-499E-BF5C-15409E7D858B}"/>
-          </ac:cxnSpMkLst>
-        </pc:cxnChg>
-        <pc:cxnChg chg="add mod">
-          <ac:chgData name="William Estes" userId="a88fcdbc31b6f594" providerId="Windows Live" clId="Web-{DB70B1DC-F3CD-4B79-55DF-C938D75B7304}" dt="2020-08-28T21:26:55.476" v="549" actId="1076"/>
-          <ac:cxnSpMkLst>
-            <pc:docMk/>
-            <pc:sldMk cId="171356189" sldId="292"/>
-            <ac:cxnSpMk id="19" creationId="{32F6DD03-6306-4873-BC80-2C1AD86FC3B2}"/>
-          </ac:cxnSpMkLst>
-        </pc:cxnChg>
-      </pc:sldChg>
-      <pc:sldChg chg="addSp delSp modSp add replId">
-        <pc:chgData name="William Estes" userId="a88fcdbc31b6f594" providerId="Windows Live" clId="Web-{DB70B1DC-F3CD-4B79-55DF-C938D75B7304}" dt="2020-08-28T21:42:28.684" v="940" actId="14100"/>
-        <pc:sldMkLst>
-          <pc:docMk/>
-          <pc:sldMk cId="4024895595" sldId="293"/>
-        </pc:sldMkLst>
-        <pc:spChg chg="mod">
-          <ac:chgData name="William Estes" userId="a88fcdbc31b6f594" providerId="Windows Live" clId="Web-{DB70B1DC-F3CD-4B79-55DF-C938D75B7304}" dt="2020-08-28T21:42:21.668" v="936" actId="20577"/>
-          <ac:spMkLst>
-            <pc:docMk/>
-            <pc:sldMk cId="4024895595" sldId="293"/>
-            <ac:spMk id="3" creationId="{1095E837-F77E-AE4D-944C-919B5D780AAA}"/>
-          </ac:spMkLst>
-        </pc:spChg>
-        <pc:spChg chg="del">
-          <ac:chgData name="William Estes" userId="a88fcdbc31b6f594" providerId="Windows Live" clId="Web-{DB70B1DC-F3CD-4B79-55DF-C938D75B7304}" dt="2020-08-28T21:27:36.804" v="555"/>
-          <ac:spMkLst>
-            <pc:docMk/>
-            <pc:sldMk cId="4024895595" sldId="293"/>
-            <ac:spMk id="4" creationId="{ADB1C674-FD00-4D6C-866A-6C5E6B13E5F3}"/>
-          </ac:spMkLst>
-        </pc:spChg>
-        <pc:spChg chg="del">
-          <ac:chgData name="William Estes" userId="a88fcdbc31b6f594" providerId="Windows Live" clId="Web-{DB70B1DC-F3CD-4B79-55DF-C938D75B7304}" dt="2020-08-28T21:27:35.538" v="554"/>
-          <ac:spMkLst>
-            <pc:docMk/>
-            <pc:sldMk cId="4024895595" sldId="293"/>
-            <ac:spMk id="5" creationId="{4952BA95-9BBD-41E0-9E5D-9FA167EAC776}"/>
-          </ac:spMkLst>
-        </pc:spChg>
-        <pc:spChg chg="del">
-          <ac:chgData name="William Estes" userId="a88fcdbc31b6f594" providerId="Windows Live" clId="Web-{DB70B1DC-F3CD-4B79-55DF-C938D75B7304}" dt="2020-08-28T21:27:38.023" v="556"/>
-          <ac:spMkLst>
-            <pc:docMk/>
-            <pc:sldMk cId="4024895595" sldId="293"/>
-            <ac:spMk id="6" creationId="{3A659AA7-456C-4E13-9785-37DE36D63852}"/>
-          </ac:spMkLst>
-        </pc:spChg>
-        <pc:spChg chg="del">
-          <ac:chgData name="William Estes" userId="a88fcdbc31b6f594" providerId="Windows Live" clId="Web-{DB70B1DC-F3CD-4B79-55DF-C938D75B7304}" dt="2020-08-28T21:27:39.148" v="557"/>
-          <ac:spMkLst>
-            <pc:docMk/>
-            <pc:sldMk cId="4024895595" sldId="293"/>
-            <ac:spMk id="7" creationId="{7886BCBF-684F-4CAE-A080-5AC735A7B257}"/>
-          </ac:spMkLst>
-        </pc:spChg>
-        <pc:spChg chg="del">
-          <ac:chgData name="William Estes" userId="a88fcdbc31b6f594" providerId="Windows Live" clId="Web-{DB70B1DC-F3CD-4B79-55DF-C938D75B7304}" dt="2020-08-28T21:27:39.976" v="558"/>
-          <ac:spMkLst>
-            <pc:docMk/>
-            <pc:sldMk cId="4024895595" sldId="293"/>
-            <ac:spMk id="8" creationId="{54FC6B76-B785-4E1A-B012-472FF0BBF661}"/>
-          </ac:spMkLst>
-        </pc:spChg>
-        <pc:spChg chg="del">
-          <ac:chgData name="William Estes" userId="a88fcdbc31b6f594" providerId="Windows Live" clId="Web-{DB70B1DC-F3CD-4B79-55DF-C938D75B7304}" dt="2020-08-28T21:27:40.867" v="559"/>
-          <ac:spMkLst>
-            <pc:docMk/>
-            <pc:sldMk cId="4024895595" sldId="293"/>
-            <ac:spMk id="9" creationId="{224E8681-C71E-4740-BFB7-94339D774377}"/>
-          </ac:spMkLst>
-        </pc:spChg>
-        <pc:spChg chg="del">
-          <ac:chgData name="William Estes" userId="a88fcdbc31b6f594" providerId="Windows Live" clId="Web-{DB70B1DC-F3CD-4B79-55DF-C938D75B7304}" dt="2020-08-28T21:27:41.757" v="560"/>
-          <ac:spMkLst>
-            <pc:docMk/>
-            <pc:sldMk cId="4024895595" sldId="293"/>
-            <ac:spMk id="10" creationId="{1D4A377E-20E9-42FA-9CBD-693081493559}"/>
-          </ac:spMkLst>
-        </pc:spChg>
-        <pc:spChg chg="add mod">
-          <ac:chgData name="William Estes" userId="a88fcdbc31b6f594" providerId="Windows Live" clId="Web-{DB70B1DC-F3CD-4B79-55DF-C938D75B7304}" dt="2020-08-28T21:28:42.945" v="649" actId="14100"/>
-          <ac:spMkLst>
-            <pc:docMk/>
-            <pc:sldMk cId="4024895595" sldId="293"/>
-            <ac:spMk id="11" creationId="{3207FE19-F1CE-410A-AAE5-C514AFCD9962}"/>
-          </ac:spMkLst>
-        </pc:spChg>
-        <pc:spChg chg="add mod">
-          <ac:chgData name="William Estes" userId="a88fcdbc31b6f594" providerId="Windows Live" clId="Web-{DB70B1DC-F3CD-4B79-55DF-C938D75B7304}" dt="2020-08-28T21:29:44.805" v="765" actId="14100"/>
-          <ac:spMkLst>
-            <pc:docMk/>
-            <pc:sldMk cId="4024895595" sldId="293"/>
-            <ac:spMk id="12" creationId="{E685F5F8-0BE0-40EA-9282-95C550E44D12}"/>
-          </ac:spMkLst>
-        </pc:spChg>
-        <pc:spChg chg="add mod">
-          <ac:chgData name="William Estes" userId="a88fcdbc31b6f594" providerId="Windows Live" clId="Web-{DB70B1DC-F3CD-4B79-55DF-C938D75B7304}" dt="2020-08-28T21:42:28.684" v="940" actId="14100"/>
-          <ac:spMkLst>
-            <pc:docMk/>
-            <pc:sldMk cId="4024895595" sldId="293"/>
-            <ac:spMk id="13" creationId="{014E91E8-8BA1-4BE7-8636-2D4D82AC14F3}"/>
-          </ac:spMkLst>
-        </pc:spChg>
-      </pc:sldChg>
-    </pc:docChg>
-  </pc:docChgLst>
-  <pc:docChgLst>
-    <pc:chgData name="William Estes" userId="a88fcdbc31b6f594" providerId="Windows Live" clId="Web-{FB8EBDAE-A786-487F-1B40-B30CBDEC3F4F}"/>
-    <pc:docChg chg="addSld delSld modSld">
-      <pc:chgData name="William Estes" userId="a88fcdbc31b6f594" providerId="Windows Live" clId="Web-{FB8EBDAE-A786-487F-1B40-B30CBDEC3F4F}" dt="2020-09-06T17:44:38.113" v="542" actId="20577"/>
-      <pc:docMkLst>
-        <pc:docMk/>
-      </pc:docMkLst>
-      <pc:sldChg chg="modSp">
-        <pc:chgData name="William Estes" userId="a88fcdbc31b6f594" providerId="Windows Live" clId="Web-{FB8EBDAE-A786-487F-1B40-B30CBDEC3F4F}" dt="2020-09-05T18:13:44.669" v="455" actId="20577"/>
-        <pc:sldMkLst>
-          <pc:docMk/>
-          <pc:sldMk cId="3421889743" sldId="277"/>
-        </pc:sldMkLst>
-        <pc:spChg chg="mod">
-          <ac:chgData name="William Estes" userId="a88fcdbc31b6f594" providerId="Windows Live" clId="Web-{FB8EBDAE-A786-487F-1B40-B30CBDEC3F4F}" dt="2020-09-05T18:13:44.669" v="455" actId="20577"/>
-          <ac:spMkLst>
-            <pc:docMk/>
-            <pc:sldMk cId="3421889743" sldId="277"/>
-            <ac:spMk id="4" creationId="{5C0E649D-E3FD-41FB-BA87-37C62725C740}"/>
-          </ac:spMkLst>
-        </pc:spChg>
-      </pc:sldChg>
-      <pc:sldChg chg="modSp">
-        <pc:chgData name="William Estes" userId="a88fcdbc31b6f594" providerId="Windows Live" clId="Web-{FB8EBDAE-A786-487F-1B40-B30CBDEC3F4F}" dt="2020-09-06T17:44:34.894" v="540" actId="20577"/>
-        <pc:sldMkLst>
-          <pc:docMk/>
-          <pc:sldMk cId="496210837" sldId="280"/>
-        </pc:sldMkLst>
-        <pc:spChg chg="mod">
-          <ac:chgData name="William Estes" userId="a88fcdbc31b6f594" providerId="Windows Live" clId="Web-{FB8EBDAE-A786-487F-1B40-B30CBDEC3F4F}" dt="2020-09-06T17:44:34.894" v="540" actId="20577"/>
-          <ac:spMkLst>
-            <pc:docMk/>
-            <pc:sldMk cId="496210837" sldId="280"/>
-            <ac:spMk id="3" creationId="{3713A5A2-1019-0143-BC00-1B8B12D7C198}"/>
-          </ac:spMkLst>
-        </pc:spChg>
-      </pc:sldChg>
-      <pc:sldChg chg="add del">
-        <pc:chgData name="William Estes" userId="a88fcdbc31b6f594" providerId="Windows Live" clId="Web-{FB8EBDAE-A786-487F-1B40-B30CBDEC3F4F}" dt="2020-09-05T16:51:34.675" v="1"/>
-        <pc:sldMkLst>
-          <pc:docMk/>
-          <pc:sldMk cId="18420826" sldId="294"/>
-        </pc:sldMkLst>
-      </pc:sldChg>
-      <pc:sldChg chg="addSp delSp modSp">
-        <pc:chgData name="William Estes" userId="a88fcdbc31b6f594" providerId="Windows Live" clId="Web-{FB8EBDAE-A786-487F-1B40-B30CBDEC3F4F}" dt="2020-09-05T17:08:37.206" v="75" actId="1076"/>
-        <pc:sldMkLst>
-          <pc:docMk/>
-          <pc:sldMk cId="4080448644" sldId="299"/>
-        </pc:sldMkLst>
-        <pc:picChg chg="del">
-          <ac:chgData name="William Estes" userId="a88fcdbc31b6f594" providerId="Windows Live" clId="Web-{FB8EBDAE-A786-487F-1B40-B30CBDEC3F4F}" dt="2020-09-05T17:08:29.050" v="71"/>
-          <ac:picMkLst>
-            <pc:docMk/>
-            <pc:sldMk cId="4080448644" sldId="299"/>
-            <ac:picMk id="4" creationId="{5CE153C2-E53B-443F-A1B7-1CECE7EE55A0}"/>
-          </ac:picMkLst>
-        </pc:picChg>
-        <pc:picChg chg="add mod">
-          <ac:chgData name="William Estes" userId="a88fcdbc31b6f594" providerId="Windows Live" clId="Web-{FB8EBDAE-A786-487F-1B40-B30CBDEC3F4F}" dt="2020-09-05T17:08:37.206" v="75" actId="1076"/>
-          <ac:picMkLst>
-            <pc:docMk/>
-            <pc:sldMk cId="4080448644" sldId="299"/>
-            <ac:picMk id="5" creationId="{3978EFC9-22F4-43EA-941F-95906CDF7E8E}"/>
-          </ac:picMkLst>
-        </pc:picChg>
-      </pc:sldChg>
-      <pc:sldChg chg="addSp delSp modSp">
-        <pc:chgData name="William Estes" userId="a88fcdbc31b6f594" providerId="Windows Live" clId="Web-{FB8EBDAE-A786-487F-1B40-B30CBDEC3F4F}" dt="2020-09-05T17:17:38.742" v="83" actId="20577"/>
-        <pc:sldMkLst>
-          <pc:docMk/>
-          <pc:sldMk cId="4113558887" sldId="300"/>
-        </pc:sldMkLst>
-        <pc:spChg chg="mod">
-          <ac:chgData name="William Estes" userId="a88fcdbc31b6f594" providerId="Windows Live" clId="Web-{FB8EBDAE-A786-487F-1B40-B30CBDEC3F4F}" dt="2020-09-05T17:17:38.742" v="83" actId="20577"/>
-          <ac:spMkLst>
-            <pc:docMk/>
-            <pc:sldMk cId="4113558887" sldId="300"/>
-            <ac:spMk id="3" creationId="{1095E837-F77E-AE4D-944C-919B5D780AAA}"/>
-          </ac:spMkLst>
-        </pc:spChg>
-        <pc:picChg chg="add mod">
-          <ac:chgData name="William Estes" userId="a88fcdbc31b6f594" providerId="Windows Live" clId="Web-{FB8EBDAE-A786-487F-1B40-B30CBDEC3F4F}" dt="2020-09-05T17:13:54.802" v="80" actId="1076"/>
-          <ac:picMkLst>
-            <pc:docMk/>
-            <pc:sldMk cId="4113558887" sldId="300"/>
-            <ac:picMk id="4" creationId="{35579B6A-8784-435F-8258-F5BA08604F52}"/>
-          </ac:picMkLst>
-        </pc:picChg>
-        <pc:picChg chg="del mod">
-          <ac:chgData name="William Estes" userId="a88fcdbc31b6f594" providerId="Windows Live" clId="Web-{FB8EBDAE-A786-487F-1B40-B30CBDEC3F4F}" dt="2020-09-05T17:13:44.192" v="76"/>
-          <ac:picMkLst>
-            <pc:docMk/>
-            <pc:sldMk cId="4113558887" sldId="300"/>
-            <ac:picMk id="5" creationId="{D37651DB-3834-493B-8A24-2FE8EFC6849E}"/>
-          </ac:picMkLst>
-        </pc:picChg>
-      </pc:sldChg>
-      <pc:sldChg chg="modSp">
-        <pc:chgData name="William Estes" userId="a88fcdbc31b6f594" providerId="Windows Live" clId="Web-{FB8EBDAE-A786-487F-1B40-B30CBDEC3F4F}" dt="2020-09-06T15:01:29.873" v="460" actId="20577"/>
-        <pc:sldMkLst>
-          <pc:docMk/>
-          <pc:sldMk cId="284483567" sldId="303"/>
-        </pc:sldMkLst>
-        <pc:spChg chg="mod">
-          <ac:chgData name="William Estes" userId="a88fcdbc31b6f594" providerId="Windows Live" clId="Web-{FB8EBDAE-A786-487F-1B40-B30CBDEC3F4F}" dt="2020-09-06T15:01:29.873" v="460" actId="20577"/>
-          <ac:spMkLst>
-            <pc:docMk/>
-            <pc:sldMk cId="284483567" sldId="303"/>
-            <ac:spMk id="3" creationId="{1095E837-F77E-AE4D-944C-919B5D780AAA}"/>
-          </ac:spMkLst>
-        </pc:spChg>
-      </pc:sldChg>
-      <pc:sldChg chg="delSp add del replId">
-        <pc:chgData name="William Estes" userId="a88fcdbc31b6f594" providerId="Windows Live" clId="Web-{FB8EBDAE-A786-487F-1B40-B30CBDEC3F4F}" dt="2020-09-05T16:55:31.364" v="4"/>
-        <pc:sldMkLst>
-          <pc:docMk/>
-          <pc:sldMk cId="54336157" sldId="309"/>
-        </pc:sldMkLst>
-        <pc:picChg chg="del">
-          <ac:chgData name="William Estes" userId="a88fcdbc31b6f594" providerId="Windows Live" clId="Web-{FB8EBDAE-A786-487F-1B40-B30CBDEC3F4F}" dt="2020-09-05T16:51:39.831" v="3"/>
-          <ac:picMkLst>
-            <pc:docMk/>
-            <pc:sldMk cId="54336157" sldId="309"/>
-            <ac:picMk id="4" creationId="{F86C7889-CD4D-48A5-84FB-A1AF08FD274C}"/>
-          </ac:picMkLst>
-        </pc:picChg>
-      </pc:sldChg>
-    </pc:docChg>
-  </pc:docChgLst>
-  <pc:docChgLst>
-    <pc:chgData name="William Estes" userId="a88fcdbc31b6f594" providerId="Windows Live" clId="Web-{4F3B90B2-B3CE-4814-9FD2-338761465FCC}"/>
-    <pc:docChg chg="modSld">
-      <pc:chgData name="William Estes" userId="a88fcdbc31b6f594" providerId="Windows Live" clId="Web-{4F3B90B2-B3CE-4814-9FD2-338761465FCC}" dt="2020-09-15T00:25:07.854" v="41" actId="1076"/>
-      <pc:docMkLst>
-        <pc:docMk/>
-      </pc:docMkLst>
-      <pc:sldChg chg="modSp">
-        <pc:chgData name="William Estes" userId="a88fcdbc31b6f594" providerId="Windows Live" clId="Web-{4F3B90B2-B3CE-4814-9FD2-338761465FCC}" dt="2020-09-15T00:17:05.111" v="24" actId="1076"/>
-        <pc:sldMkLst>
-          <pc:docMk/>
-          <pc:sldMk cId="3007801671" sldId="291"/>
-        </pc:sldMkLst>
-        <pc:spChg chg="mod">
-          <ac:chgData name="William Estes" userId="a88fcdbc31b6f594" providerId="Windows Live" clId="Web-{4F3B90B2-B3CE-4814-9FD2-338761465FCC}" dt="2020-09-15T00:17:05.111" v="24" actId="1076"/>
-          <ac:spMkLst>
-            <pc:docMk/>
-            <pc:sldMk cId="3007801671" sldId="291"/>
-            <ac:spMk id="12" creationId="{CF97C5AB-99C6-437C-B2DB-5A3F7C1729C7}"/>
-          </ac:spMkLst>
-        </pc:spChg>
-      </pc:sldChg>
-      <pc:sldChg chg="modSp">
-        <pc:chgData name="William Estes" userId="a88fcdbc31b6f594" providerId="Windows Live" clId="Web-{4F3B90B2-B3CE-4814-9FD2-338761465FCC}" dt="2020-09-15T00:18:07.048" v="36" actId="1076"/>
-        <pc:sldMkLst>
-          <pc:docMk/>
-          <pc:sldMk cId="1031257587" sldId="292"/>
-        </pc:sldMkLst>
-        <pc:spChg chg="mod">
-          <ac:chgData name="William Estes" userId="a88fcdbc31b6f594" providerId="Windows Live" clId="Web-{4F3B90B2-B3CE-4814-9FD2-338761465FCC}" dt="2020-09-15T00:18:07.016" v="31" actId="1076"/>
-          <ac:spMkLst>
-            <pc:docMk/>
-            <pc:sldMk cId="1031257587" sldId="292"/>
-            <ac:spMk id="7" creationId="{81FEAAF1-55EF-429A-832F-657DD1B08A00}"/>
-          </ac:spMkLst>
-        </pc:spChg>
-        <pc:spChg chg="mod">
-          <ac:chgData name="William Estes" userId="a88fcdbc31b6f594" providerId="Windows Live" clId="Web-{4F3B90B2-B3CE-4814-9FD2-338761465FCC}" dt="2020-09-15T00:18:07.016" v="32" actId="1076"/>
-          <ac:spMkLst>
-            <pc:docMk/>
-            <pc:sldMk cId="1031257587" sldId="292"/>
-            <ac:spMk id="10" creationId="{A6C69913-6E66-4EF9-912E-4787D37F112A}"/>
-          </ac:spMkLst>
-        </pc:spChg>
-        <pc:spChg chg="mod">
-          <ac:chgData name="William Estes" userId="a88fcdbc31b6f594" providerId="Windows Live" clId="Web-{4F3B90B2-B3CE-4814-9FD2-338761465FCC}" dt="2020-09-15T00:18:07.032" v="33" actId="1076"/>
-          <ac:spMkLst>
-            <pc:docMk/>
-            <pc:sldMk cId="1031257587" sldId="292"/>
-            <ac:spMk id="13" creationId="{FA79162F-1F9C-4BB6-9C39-96C8B58E86C3}"/>
-          </ac:spMkLst>
-        </pc:spChg>
-        <pc:spChg chg="mod">
-          <ac:chgData name="William Estes" userId="a88fcdbc31b6f594" providerId="Windows Live" clId="Web-{4F3B90B2-B3CE-4814-9FD2-338761465FCC}" dt="2020-09-15T00:18:07.032" v="34" actId="1076"/>
-          <ac:spMkLst>
-            <pc:docMk/>
-            <pc:sldMk cId="1031257587" sldId="292"/>
-            <ac:spMk id="14" creationId="{BC68A978-56D8-4B49-B046-44ACD0A585A4}"/>
-          </ac:spMkLst>
-        </pc:spChg>
-        <pc:spChg chg="mod">
-          <ac:chgData name="William Estes" userId="a88fcdbc31b6f594" providerId="Windows Live" clId="Web-{4F3B90B2-B3CE-4814-9FD2-338761465FCC}" dt="2020-09-15T00:18:07.032" v="35" actId="1076"/>
-          <ac:spMkLst>
-            <pc:docMk/>
-            <pc:sldMk cId="1031257587" sldId="292"/>
-            <ac:spMk id="15" creationId="{7F19F82B-0D64-4D93-8D94-101BBFB46765}"/>
-          </ac:spMkLst>
-        </pc:spChg>
-        <pc:spChg chg="mod">
-          <ac:chgData name="William Estes" userId="a88fcdbc31b6f594" providerId="Windows Live" clId="Web-{4F3B90B2-B3CE-4814-9FD2-338761465FCC}" dt="2020-09-15T00:18:07.048" v="36" actId="1076"/>
-          <ac:spMkLst>
-            <pc:docMk/>
-            <pc:sldMk cId="1031257587" sldId="292"/>
-            <ac:spMk id="16" creationId="{2CD967FC-6B82-4F09-938B-F9E74AB74DB5}"/>
-          </ac:spMkLst>
-        </pc:spChg>
-      </pc:sldChg>
-      <pc:sldChg chg="modSp">
-        <pc:chgData name="William Estes" userId="a88fcdbc31b6f594" providerId="Windows Live" clId="Web-{4F3B90B2-B3CE-4814-9FD2-338761465FCC}" dt="2020-09-15T00:19:36.140" v="37" actId="1076"/>
-        <pc:sldMkLst>
-          <pc:docMk/>
-          <pc:sldMk cId="2184220433" sldId="295"/>
-        </pc:sldMkLst>
-        <pc:spChg chg="mod">
-          <ac:chgData name="William Estes" userId="a88fcdbc31b6f594" providerId="Windows Live" clId="Web-{4F3B90B2-B3CE-4814-9FD2-338761465FCC}" dt="2020-09-15T00:19:36.140" v="37" actId="1076"/>
-          <ac:spMkLst>
-            <pc:docMk/>
-            <pc:sldMk cId="2184220433" sldId="295"/>
-            <ac:spMk id="5" creationId="{7B16B923-1F9B-4609-AF2C-FA03D25659EE}"/>
-          </ac:spMkLst>
-        </pc:spChg>
-      </pc:sldChg>
-      <pc:sldChg chg="modSp">
-        <pc:chgData name="William Estes" userId="a88fcdbc31b6f594" providerId="Windows Live" clId="Web-{4F3B90B2-B3CE-4814-9FD2-338761465FCC}" dt="2020-09-15T00:25:07.854" v="41" actId="1076"/>
-        <pc:sldMkLst>
-          <pc:docMk/>
-          <pc:sldMk cId="1522982694" sldId="296"/>
-        </pc:sldMkLst>
-        <pc:spChg chg="mod">
-          <ac:chgData name="William Estes" userId="a88fcdbc31b6f594" providerId="Windows Live" clId="Web-{4F3B90B2-B3CE-4814-9FD2-338761465FCC}" dt="2020-09-15T00:24:33.432" v="39" actId="1076"/>
-          <ac:spMkLst>
-            <pc:docMk/>
-            <pc:sldMk cId="1522982694" sldId="296"/>
-            <ac:spMk id="6" creationId="{8D3881AF-2AF0-4DF1-977D-DEFDD2FCFF0A}"/>
-          </ac:spMkLst>
-        </pc:spChg>
-        <pc:spChg chg="mod">
-          <ac:chgData name="William Estes" userId="a88fcdbc31b6f594" providerId="Windows Live" clId="Web-{4F3B90B2-B3CE-4814-9FD2-338761465FCC}" dt="2020-09-15T00:25:07.854" v="41" actId="1076"/>
-          <ac:spMkLst>
-            <pc:docMk/>
-            <pc:sldMk cId="1522982694" sldId="296"/>
-            <ac:spMk id="7" creationId="{F5D9FE73-3240-4541-BA18-9018D3F5BAA8}"/>
-          </ac:spMkLst>
-        </pc:spChg>
-      </pc:sldChg>
-      <pc:sldChg chg="modSp">
-        <pc:chgData name="William Estes" userId="a88fcdbc31b6f594" providerId="Windows Live" clId="Web-{4F3B90B2-B3CE-4814-9FD2-338761465FCC}" dt="2020-09-14T23:59:53.080" v="20" actId="20577"/>
-        <pc:sldMkLst>
-          <pc:docMk/>
-          <pc:sldMk cId="2469544991" sldId="305"/>
-        </pc:sldMkLst>
-        <pc:spChg chg="mod">
-          <ac:chgData name="William Estes" userId="a88fcdbc31b6f594" providerId="Windows Live" clId="Web-{4F3B90B2-B3CE-4814-9FD2-338761465FCC}" dt="2020-09-14T23:59:53.080" v="20" actId="20577"/>
-          <ac:spMkLst>
-            <pc:docMk/>
-            <pc:sldMk cId="2469544991" sldId="305"/>
-            <ac:spMk id="4" creationId="{5C0E649D-E3FD-41FB-BA87-37C62725C740}"/>
-          </ac:spMkLst>
-        </pc:spChg>
-      </pc:sldChg>
-    </pc:docChg>
-  </pc:docChgLst>
-  <pc:docChgLst>
-    <pc:chgData name="William Estes" userId="a88fcdbc31b6f594" providerId="Windows Live" clId="Web-{012D8266-D906-4638-51F0-D3051500BA92}"/>
-    <pc:docChg chg="modSld">
-      <pc:chgData name="William Estes" userId="a88fcdbc31b6f594" providerId="Windows Live" clId="Web-{012D8266-D906-4638-51F0-D3051500BA92}" dt="2020-09-11T14:49:11.120" v="13" actId="20577"/>
-      <pc:docMkLst>
-        <pc:docMk/>
-      </pc:docMkLst>
-      <pc:sldChg chg="modSp">
-        <pc:chgData name="William Estes" userId="a88fcdbc31b6f594" providerId="Windows Live" clId="Web-{012D8266-D906-4638-51F0-D3051500BA92}" dt="2020-09-11T14:49:01.464" v="6" actId="20577"/>
-        <pc:sldMkLst>
-          <pc:docMk/>
-          <pc:sldMk cId="746972265" sldId="307"/>
-        </pc:sldMkLst>
-        <pc:spChg chg="mod">
-          <ac:chgData name="William Estes" userId="a88fcdbc31b6f594" providerId="Windows Live" clId="Web-{012D8266-D906-4638-51F0-D3051500BA92}" dt="2020-09-11T14:49:01.464" v="6" actId="20577"/>
-          <ac:spMkLst>
-            <pc:docMk/>
-            <pc:sldMk cId="746972265" sldId="307"/>
-            <ac:spMk id="4" creationId="{5C0E649D-E3FD-41FB-BA87-37C62725C740}"/>
-          </ac:spMkLst>
-        </pc:spChg>
-      </pc:sldChg>
-      <pc:sldChg chg="modSp">
-        <pc:chgData name="William Estes" userId="a88fcdbc31b6f594" providerId="Windows Live" clId="Web-{012D8266-D906-4638-51F0-D3051500BA92}" dt="2020-09-11T14:49:06.151" v="10" actId="20577"/>
-        <pc:sldMkLst>
-          <pc:docMk/>
-          <pc:sldMk cId="104406143" sldId="315"/>
-        </pc:sldMkLst>
-        <pc:spChg chg="mod">
-          <ac:chgData name="William Estes" userId="a88fcdbc31b6f594" providerId="Windows Live" clId="Web-{012D8266-D906-4638-51F0-D3051500BA92}" dt="2020-09-11T14:49:06.151" v="10" actId="20577"/>
-          <ac:spMkLst>
-            <pc:docMk/>
-            <pc:sldMk cId="104406143" sldId="315"/>
-            <ac:spMk id="4" creationId="{5C0E649D-E3FD-41FB-BA87-37C62725C740}"/>
-          </ac:spMkLst>
-        </pc:spChg>
-      </pc:sldChg>
-    </pc:docChg>
-  </pc:docChgLst>
-  <pc:docChgLst>
-    <pc:chgData name="William Estes" userId="a88fcdbc31b6f594" providerId="Windows Live" clId="Web-{1468B90B-16D1-4C9C-8EE1-A35BA39A78D5}"/>
-    <pc:docChg chg="modSld">
-      <pc:chgData name="William Estes" userId="a88fcdbc31b6f594" providerId="Windows Live" clId="Web-{1468B90B-16D1-4C9C-8EE1-A35BA39A78D5}" dt="2020-09-08T15:10:14.255" v="326" actId="20577"/>
-      <pc:docMkLst>
-        <pc:docMk/>
-      </pc:docMkLst>
-      <pc:sldChg chg="modSp">
-        <pc:chgData name="William Estes" userId="a88fcdbc31b6f594" providerId="Windows Live" clId="Web-{1468B90B-16D1-4C9C-8EE1-A35BA39A78D5}" dt="2020-09-08T15:10:14.255" v="325" actId="20577"/>
-        <pc:sldMkLst>
-          <pc:docMk/>
-          <pc:sldMk cId="104406143" sldId="315"/>
-        </pc:sldMkLst>
-        <pc:spChg chg="mod">
-          <ac:chgData name="William Estes" userId="a88fcdbc31b6f594" providerId="Windows Live" clId="Web-{1468B90B-16D1-4C9C-8EE1-A35BA39A78D5}" dt="2020-09-08T15:10:14.255" v="325" actId="20577"/>
-          <ac:spMkLst>
-            <pc:docMk/>
-            <pc:sldMk cId="104406143" sldId="315"/>
-            <ac:spMk id="4" creationId="{5C0E649D-E3FD-41FB-BA87-37C62725C740}"/>
-          </ac:spMkLst>
-        </pc:spChg>
-      </pc:sldChg>
-    </pc:docChg>
-  </pc:docChgLst>
-  <pc:docChgLst>
-    <pc:chgData name="William Estes" userId="a88fcdbc31b6f594" providerId="Windows Live" clId="Web-{A60937DA-1DAE-4721-D42B-07DE7AFCBCF6}"/>
-    <pc:docChg chg="delSld modSld">
-      <pc:chgData name="William Estes" userId="a88fcdbc31b6f594" providerId="Windows Live" clId="Web-{A60937DA-1DAE-4721-D42B-07DE7AFCBCF6}" dt="2020-09-13T03:54:01.092" v="210" actId="20577"/>
-      <pc:docMkLst>
-        <pc:docMk/>
-      </pc:docMkLst>
-      <pc:sldChg chg="modSp">
-        <pc:chgData name="William Estes" userId="a88fcdbc31b6f594" providerId="Windows Live" clId="Web-{A60937DA-1DAE-4721-D42B-07DE7AFCBCF6}" dt="2020-09-13T03:25:49.343" v="10" actId="20577"/>
-        <pc:sldMkLst>
-          <pc:docMk/>
-          <pc:sldMk cId="496210837" sldId="280"/>
-        </pc:sldMkLst>
-        <pc:spChg chg="mod">
-          <ac:chgData name="William Estes" userId="a88fcdbc31b6f594" providerId="Windows Live" clId="Web-{A60937DA-1DAE-4721-D42B-07DE7AFCBCF6}" dt="2020-09-13T03:25:49.343" v="10" actId="20577"/>
-          <ac:spMkLst>
-            <pc:docMk/>
-            <pc:sldMk cId="496210837" sldId="280"/>
-            <ac:spMk id="3" creationId="{3713A5A2-1019-0143-BC00-1B8B12D7C198}"/>
-          </ac:spMkLst>
-        </pc:spChg>
-      </pc:sldChg>
-      <pc:sldChg chg="modSp">
-        <pc:chgData name="William Estes" userId="a88fcdbc31b6f594" providerId="Windows Live" clId="Web-{A60937DA-1DAE-4721-D42B-07DE7AFCBCF6}" dt="2020-09-13T03:39:31.064" v="140" actId="1076"/>
-        <pc:sldMkLst>
-          <pc:docMk/>
-          <pc:sldMk cId="1031257587" sldId="292"/>
-        </pc:sldMkLst>
-        <pc:spChg chg="mod">
-          <ac:chgData name="William Estes" userId="a88fcdbc31b6f594" providerId="Windows Live" clId="Web-{A60937DA-1DAE-4721-D42B-07DE7AFCBCF6}" dt="2020-09-13T03:39:31.064" v="140" actId="1076"/>
-          <ac:spMkLst>
-            <pc:docMk/>
-            <pc:sldMk cId="1031257587" sldId="292"/>
-            <ac:spMk id="7" creationId="{81FEAAF1-55EF-429A-832F-657DD1B08A00}"/>
-          </ac:spMkLst>
-        </pc:spChg>
-        <pc:spChg chg="mod">
-          <ac:chgData name="William Estes" userId="a88fcdbc31b6f594" providerId="Windows Live" clId="Web-{A60937DA-1DAE-4721-D42B-07DE7AFCBCF6}" dt="2020-09-13T03:39:28.455" v="139" actId="1076"/>
-          <ac:spMkLst>
-            <pc:docMk/>
-            <pc:sldMk cId="1031257587" sldId="292"/>
-            <ac:spMk id="13" creationId="{FA79162F-1F9C-4BB6-9C39-96C8B58E86C3}"/>
-          </ac:spMkLst>
-        </pc:spChg>
-        <pc:spChg chg="mod">
-          <ac:chgData name="William Estes" userId="a88fcdbc31b6f594" providerId="Windows Live" clId="Web-{A60937DA-1DAE-4721-D42B-07DE7AFCBCF6}" dt="2020-09-13T03:39:21.096" v="137" actId="1076"/>
-          <ac:spMkLst>
-            <pc:docMk/>
-            <pc:sldMk cId="1031257587" sldId="292"/>
-            <ac:spMk id="14" creationId="{BC68A978-56D8-4B49-B046-44ACD0A585A4}"/>
-          </ac:spMkLst>
-        </pc:spChg>
-        <pc:spChg chg="mod">
-          <ac:chgData name="William Estes" userId="a88fcdbc31b6f594" providerId="Windows Live" clId="Web-{A60937DA-1DAE-4721-D42B-07DE7AFCBCF6}" dt="2020-09-13T03:39:25.269" v="138" actId="1076"/>
-          <ac:spMkLst>
-            <pc:docMk/>
-            <pc:sldMk cId="1031257587" sldId="292"/>
-            <ac:spMk id="15" creationId="{7F19F82B-0D64-4D93-8D94-101BBFB46765}"/>
-          </ac:spMkLst>
-        </pc:spChg>
-        <pc:spChg chg="mod">
-          <ac:chgData name="William Estes" userId="a88fcdbc31b6f594" providerId="Windows Live" clId="Web-{A60937DA-1DAE-4721-D42B-07DE7AFCBCF6}" dt="2020-09-13T03:39:18.221" v="136" actId="1076"/>
-          <ac:spMkLst>
-            <pc:docMk/>
-            <pc:sldMk cId="1031257587" sldId="292"/>
-            <ac:spMk id="16" creationId="{2CD967FC-6B82-4F09-938B-F9E74AB74DB5}"/>
-          </ac:spMkLst>
-        </pc:spChg>
-      </pc:sldChg>
-      <pc:sldChg chg="modSp">
-        <pc:chgData name="William Estes" userId="a88fcdbc31b6f594" providerId="Windows Live" clId="Web-{A60937DA-1DAE-4721-D42B-07DE7AFCBCF6}" dt="2020-09-13T03:41:03.518" v="173" actId="1076"/>
-        <pc:sldMkLst>
-          <pc:docMk/>
-          <pc:sldMk cId="1522982694" sldId="296"/>
-        </pc:sldMkLst>
-        <pc:spChg chg="mod">
-          <ac:chgData name="William Estes" userId="a88fcdbc31b6f594" providerId="Windows Live" clId="Web-{A60937DA-1DAE-4721-D42B-07DE7AFCBCF6}" dt="2020-09-13T03:40:59.158" v="172" actId="1076"/>
-          <ac:spMkLst>
-            <pc:docMk/>
-            <pc:sldMk cId="1522982694" sldId="296"/>
-            <ac:spMk id="6" creationId="{8D3881AF-2AF0-4DF1-977D-DEFDD2FCFF0A}"/>
-          </ac:spMkLst>
-        </pc:spChg>
-        <pc:spChg chg="mod">
-          <ac:chgData name="William Estes" userId="a88fcdbc31b6f594" providerId="Windows Live" clId="Web-{A60937DA-1DAE-4721-D42B-07DE7AFCBCF6}" dt="2020-09-13T03:41:03.518" v="173" actId="1076"/>
-          <ac:spMkLst>
-            <pc:docMk/>
-            <pc:sldMk cId="1522982694" sldId="296"/>
-            <ac:spMk id="7" creationId="{F5D9FE73-3240-4541-BA18-9018D3F5BAA8}"/>
-          </ac:spMkLst>
-        </pc:spChg>
-      </pc:sldChg>
-      <pc:sldChg chg="modSp">
-        <pc:chgData name="William Estes" userId="a88fcdbc31b6f594" providerId="Windows Live" clId="Web-{A60937DA-1DAE-4721-D42B-07DE7AFCBCF6}" dt="2020-09-13T03:40:39.940" v="170" actId="20577"/>
-        <pc:sldMkLst>
-          <pc:docMk/>
-          <pc:sldMk cId="356878534" sldId="301"/>
-        </pc:sldMkLst>
-        <pc:spChg chg="mod">
-          <ac:chgData name="William Estes" userId="a88fcdbc31b6f594" providerId="Windows Live" clId="Web-{A60937DA-1DAE-4721-D42B-07DE7AFCBCF6}" dt="2020-09-13T03:40:39.940" v="170" actId="20577"/>
-          <ac:spMkLst>
-            <pc:docMk/>
-            <pc:sldMk cId="356878534" sldId="301"/>
-            <ac:spMk id="3" creationId="{1095E837-F77E-AE4D-944C-919B5D780AAA}"/>
-          </ac:spMkLst>
-        </pc:spChg>
-      </pc:sldChg>
-      <pc:sldChg chg="modSp">
-        <pc:chgData name="William Estes" userId="a88fcdbc31b6f594" providerId="Windows Live" clId="Web-{A60937DA-1DAE-4721-D42B-07DE7AFCBCF6}" dt="2020-09-13T03:36:21.923" v="126" actId="1076"/>
-        <pc:sldMkLst>
-          <pc:docMk/>
-          <pc:sldMk cId="2469544991" sldId="305"/>
-        </pc:sldMkLst>
-        <pc:spChg chg="mod">
-          <ac:chgData name="William Estes" userId="a88fcdbc31b6f594" providerId="Windows Live" clId="Web-{A60937DA-1DAE-4721-D42B-07DE7AFCBCF6}" dt="2020-09-13T03:36:20.861" v="124" actId="20577"/>
-          <ac:spMkLst>
-            <pc:docMk/>
-            <pc:sldMk cId="2469544991" sldId="305"/>
-            <ac:spMk id="4" creationId="{5C0E649D-E3FD-41FB-BA87-37C62725C740}"/>
-          </ac:spMkLst>
-        </pc:spChg>
-        <pc:picChg chg="mod">
-          <ac:chgData name="William Estes" userId="a88fcdbc31b6f594" providerId="Windows Live" clId="Web-{A60937DA-1DAE-4721-D42B-07DE7AFCBCF6}" dt="2020-09-13T03:36:21.923" v="126" actId="1076"/>
-          <ac:picMkLst>
-            <pc:docMk/>
-            <pc:sldMk cId="2469544991" sldId="305"/>
-            <ac:picMk id="6" creationId="{5E9C30D7-B428-4F3D-9C94-6CE4D4117681}"/>
-          </ac:picMkLst>
-        </pc:picChg>
-      </pc:sldChg>
-      <pc:sldChg chg="modSp">
-        <pc:chgData name="William Estes" userId="a88fcdbc31b6f594" providerId="Windows Live" clId="Web-{A60937DA-1DAE-4721-D42B-07DE7AFCBCF6}" dt="2020-09-13T03:34:23.259" v="68" actId="20577"/>
-        <pc:sldMkLst>
-          <pc:docMk/>
-          <pc:sldMk cId="2651208645" sldId="306"/>
-        </pc:sldMkLst>
-        <pc:spChg chg="mod">
-          <ac:chgData name="William Estes" userId="a88fcdbc31b6f594" providerId="Windows Live" clId="Web-{A60937DA-1DAE-4721-D42B-07DE7AFCBCF6}" dt="2020-09-13T03:34:23.259" v="68" actId="20577"/>
-          <ac:spMkLst>
-            <pc:docMk/>
-            <pc:sldMk cId="2651208645" sldId="306"/>
-            <ac:spMk id="4" creationId="{5C0E649D-E3FD-41FB-BA87-37C62725C740}"/>
-          </ac:spMkLst>
-        </pc:spChg>
-      </pc:sldChg>
-      <pc:sldChg chg="modSp del">
-        <pc:chgData name="William Estes" userId="a88fcdbc31b6f594" providerId="Windows Live" clId="Web-{A60937DA-1DAE-4721-D42B-07DE7AFCBCF6}" dt="2020-09-13T03:38:30.048" v="130"/>
-        <pc:sldMkLst>
-          <pc:docMk/>
-          <pc:sldMk cId="1575020086" sldId="308"/>
-        </pc:sldMkLst>
-        <pc:spChg chg="mod">
-          <ac:chgData name="William Estes" userId="a88fcdbc31b6f594" providerId="Windows Live" clId="Web-{A60937DA-1DAE-4721-D42B-07DE7AFCBCF6}" dt="2020-09-13T03:38:27.658" v="127" actId="20577"/>
-          <ac:spMkLst>
-            <pc:docMk/>
-            <pc:sldMk cId="1575020086" sldId="308"/>
-            <ac:spMk id="3" creationId="{CF346A43-8A67-4B2E-80E1-770DDD72F0D0}"/>
-          </ac:spMkLst>
-        </pc:spChg>
-      </pc:sldChg>
-      <pc:sldChg chg="addSp delSp modSp">
-        <pc:chgData name="William Estes" userId="a88fcdbc31b6f594" providerId="Windows Live" clId="Web-{A60937DA-1DAE-4721-D42B-07DE7AFCBCF6}" dt="2020-09-13T03:48:02.215" v="179" actId="14100"/>
-        <pc:sldMkLst>
-          <pc:docMk/>
-          <pc:sldMk cId="1624642261" sldId="311"/>
-        </pc:sldMkLst>
-        <pc:picChg chg="del">
-          <ac:chgData name="William Estes" userId="a88fcdbc31b6f594" providerId="Windows Live" clId="Web-{A60937DA-1DAE-4721-D42B-07DE7AFCBCF6}" dt="2020-09-13T03:47:48.262" v="174"/>
-          <ac:picMkLst>
-            <pc:docMk/>
-            <pc:sldMk cId="1624642261" sldId="311"/>
-            <ac:picMk id="6" creationId="{4F0D4502-44B3-44A8-AED0-897726E24FA0}"/>
-          </ac:picMkLst>
-        </pc:picChg>
-        <pc:picChg chg="add mod">
-          <ac:chgData name="William Estes" userId="a88fcdbc31b6f594" providerId="Windows Live" clId="Web-{A60937DA-1DAE-4721-D42B-07DE7AFCBCF6}" dt="2020-09-13T03:48:02.215" v="179" actId="14100"/>
-          <ac:picMkLst>
-            <pc:docMk/>
-            <pc:sldMk cId="1624642261" sldId="311"/>
-            <ac:picMk id="7" creationId="{F2A7909D-8AC4-41D4-81B5-35989785D616}"/>
-          </ac:picMkLst>
-        </pc:picChg>
-      </pc:sldChg>
-      <pc:sldChg chg="modSp">
-        <pc:chgData name="William Estes" userId="a88fcdbc31b6f594" providerId="Windows Live" clId="Web-{A60937DA-1DAE-4721-D42B-07DE7AFCBCF6}" dt="2020-09-13T03:49:15.669" v="184" actId="20577"/>
-        <pc:sldMkLst>
-          <pc:docMk/>
-          <pc:sldMk cId="4059676631" sldId="314"/>
-        </pc:sldMkLst>
-        <pc:spChg chg="mod">
-          <ac:chgData name="William Estes" userId="a88fcdbc31b6f594" providerId="Windows Live" clId="Web-{A60937DA-1DAE-4721-D42B-07DE7AFCBCF6}" dt="2020-09-13T03:49:15.669" v="184" actId="20577"/>
-          <ac:spMkLst>
-            <pc:docMk/>
-            <pc:sldMk cId="4059676631" sldId="314"/>
-            <ac:spMk id="4" creationId="{5C0E649D-E3FD-41FB-BA87-37C62725C740}"/>
-          </ac:spMkLst>
-        </pc:spChg>
-      </pc:sldChg>
-      <pc:sldChg chg="modSp">
-        <pc:chgData name="William Estes" userId="a88fcdbc31b6f594" providerId="Windows Live" clId="Web-{A60937DA-1DAE-4721-D42B-07DE7AFCBCF6}" dt="2020-09-13T03:54:00.014" v="208" actId="20577"/>
-        <pc:sldMkLst>
-          <pc:docMk/>
-          <pc:sldMk cId="3755306264" sldId="316"/>
-        </pc:sldMkLst>
-        <pc:spChg chg="mod">
-          <ac:chgData name="William Estes" userId="a88fcdbc31b6f594" providerId="Windows Live" clId="Web-{A60937DA-1DAE-4721-D42B-07DE7AFCBCF6}" dt="2020-09-13T03:54:00.014" v="208" actId="20577"/>
-          <ac:spMkLst>
-            <pc:docMk/>
-            <pc:sldMk cId="3755306264" sldId="316"/>
-            <ac:spMk id="3" creationId="{3713A5A2-1019-0143-BC00-1B8B12D7C198}"/>
-          </ac:spMkLst>
-        </pc:spChg>
-      </pc:sldChg>
-    </pc:docChg>
-  </pc:docChgLst>
-  <pc:docChgLst>
-    <pc:chgData name="William Estes" userId="a88fcdbc31b6f594" providerId="Windows Live" clId="Web-{A6C77E77-BD87-4310-AAEF-8517C3D9C5FB}"/>
-    <pc:docChg chg="addSld delSld modSld sldOrd">
-      <pc:chgData name="William Estes" userId="a88fcdbc31b6f594" providerId="Windows Live" clId="Web-{A6C77E77-BD87-4310-AAEF-8517C3D9C5FB}" dt="2020-08-26T03:27:37.070" v="962" actId="1076"/>
-      <pc:docMkLst>
-        <pc:docMk/>
-      </pc:docMkLst>
-      <pc:sldChg chg="modSp">
-        <pc:chgData name="William Estes" userId="a88fcdbc31b6f594" providerId="Windows Live" clId="Web-{A6C77E77-BD87-4310-AAEF-8517C3D9C5FB}" dt="2020-08-26T03:15:59.426" v="554" actId="20577"/>
-        <pc:sldMkLst>
-          <pc:docMk/>
-          <pc:sldMk cId="3421889743" sldId="277"/>
-        </pc:sldMkLst>
-        <pc:spChg chg="mod">
-          <ac:chgData name="William Estes" userId="a88fcdbc31b6f594" providerId="Windows Live" clId="Web-{A6C77E77-BD87-4310-AAEF-8517C3D9C5FB}" dt="2020-08-26T03:15:59.426" v="554" actId="20577"/>
-          <ac:spMkLst>
-            <pc:docMk/>
-            <pc:sldMk cId="3421889743" sldId="277"/>
-            <ac:spMk id="4" creationId="{5C0E649D-E3FD-41FB-BA87-37C62725C740}"/>
-          </ac:spMkLst>
-        </pc:spChg>
-      </pc:sldChg>
-      <pc:sldChg chg="modSp">
-        <pc:chgData name="William Estes" userId="a88fcdbc31b6f594" providerId="Windows Live" clId="Web-{A6C77E77-BD87-4310-AAEF-8517C3D9C5FB}" dt="2020-08-26T01:20:26.775" v="140" actId="20577"/>
-        <pc:sldMkLst>
-          <pc:docMk/>
-          <pc:sldMk cId="496210837" sldId="280"/>
-        </pc:sldMkLst>
-        <pc:spChg chg="mod">
-          <ac:chgData name="William Estes" userId="a88fcdbc31b6f594" providerId="Windows Live" clId="Web-{A6C77E77-BD87-4310-AAEF-8517C3D9C5FB}" dt="2020-08-26T01:20:26.775" v="140" actId="20577"/>
-          <ac:spMkLst>
-            <pc:docMk/>
-            <pc:sldMk cId="496210837" sldId="280"/>
-            <ac:spMk id="3" creationId="{3713A5A2-1019-0143-BC00-1B8B12D7C198}"/>
-          </ac:spMkLst>
-        </pc:spChg>
-      </pc:sldChg>
-      <pc:sldChg chg="modSp">
-        <pc:chgData name="William Estes" userId="a88fcdbc31b6f594" providerId="Windows Live" clId="Web-{A6C77E77-BD87-4310-AAEF-8517C3D9C5FB}" dt="2020-08-26T03:16:10.020" v="557" actId="20577"/>
-        <pc:sldMkLst>
-          <pc:docMk/>
-          <pc:sldMk cId="2362235639" sldId="282"/>
-        </pc:sldMkLst>
-        <pc:spChg chg="mod">
-          <ac:chgData name="William Estes" userId="a88fcdbc31b6f594" providerId="Windows Live" clId="Web-{A6C77E77-BD87-4310-AAEF-8517C3D9C5FB}" dt="2020-08-26T03:16:10.020" v="557" actId="20577"/>
-          <ac:spMkLst>
-            <pc:docMk/>
-            <pc:sldMk cId="2362235639" sldId="282"/>
-            <ac:spMk id="4" creationId="{5C0E649D-E3FD-41FB-BA87-37C62725C740}"/>
-          </ac:spMkLst>
-        </pc:spChg>
-      </pc:sldChg>
-      <pc:sldChg chg="addSp modSp add replId">
-        <pc:chgData name="William Estes" userId="a88fcdbc31b6f594" providerId="Windows Live" clId="Web-{A6C77E77-BD87-4310-AAEF-8517C3D9C5FB}" dt="2020-08-26T02:45:04.278" v="539" actId="1076"/>
-        <pc:sldMkLst>
-          <pc:docMk/>
-          <pc:sldMk cId="1761172003" sldId="284"/>
-        </pc:sldMkLst>
-        <pc:spChg chg="mod">
-          <ac:chgData name="William Estes" userId="a88fcdbc31b6f594" providerId="Windows Live" clId="Web-{A6C77E77-BD87-4310-AAEF-8517C3D9C5FB}" dt="2020-08-26T02:44:42.716" v="533" actId="20577"/>
-          <ac:spMkLst>
-            <pc:docMk/>
-            <pc:sldMk cId="1761172003" sldId="284"/>
-            <ac:spMk id="3" creationId="{3713A5A2-1019-0143-BC00-1B8B12D7C198}"/>
-          </ac:spMkLst>
-        </pc:spChg>
-        <pc:picChg chg="add mod">
-          <ac:chgData name="William Estes" userId="a88fcdbc31b6f594" providerId="Windows Live" clId="Web-{A6C77E77-BD87-4310-AAEF-8517C3D9C5FB}" dt="2020-08-26T02:45:04.278" v="539" actId="1076"/>
-          <ac:picMkLst>
-            <pc:docMk/>
-            <pc:sldMk cId="1761172003" sldId="284"/>
-            <ac:picMk id="4" creationId="{0AAB46F1-32FF-49EB-85F0-DC9919487A99}"/>
-          </ac:picMkLst>
-        </pc:picChg>
-      </pc:sldChg>
-      <pc:sldChg chg="addSp modSp add replId">
-        <pc:chgData name="William Estes" userId="a88fcdbc31b6f594" providerId="Windows Live" clId="Web-{A6C77E77-BD87-4310-AAEF-8517C3D9C5FB}" dt="2020-08-26T01:39:20.822" v="290" actId="14100"/>
-        <pc:sldMkLst>
-          <pc:docMk/>
-          <pc:sldMk cId="3619621420" sldId="285"/>
-        </pc:sldMkLst>
-        <pc:spChg chg="mod">
-          <ac:chgData name="William Estes" userId="a88fcdbc31b6f594" providerId="Windows Live" clId="Web-{A6C77E77-BD87-4310-AAEF-8517C3D9C5FB}" dt="2020-08-26T01:39:08.744" v="286" actId="20577"/>
-          <ac:spMkLst>
-            <pc:docMk/>
-            <pc:sldMk cId="3619621420" sldId="285"/>
-            <ac:spMk id="3" creationId="{1095E837-F77E-AE4D-944C-919B5D780AAA}"/>
-          </ac:spMkLst>
-        </pc:spChg>
-        <pc:picChg chg="add mod">
-          <ac:chgData name="William Estes" userId="a88fcdbc31b6f594" providerId="Windows Live" clId="Web-{A6C77E77-BD87-4310-AAEF-8517C3D9C5FB}" dt="2020-08-26T01:39:20.822" v="290" actId="14100"/>
-          <ac:picMkLst>
-            <pc:docMk/>
-            <pc:sldMk cId="3619621420" sldId="285"/>
-            <ac:picMk id="4" creationId="{EDC43611-772D-4F8D-8AC8-E989597ACBEE}"/>
-          </ac:picMkLst>
-        </pc:picChg>
-      </pc:sldChg>
-      <pc:sldChg chg="addSp delSp modSp add replId">
-        <pc:chgData name="William Estes" userId="a88fcdbc31b6f594" providerId="Windows Live" clId="Web-{A6C77E77-BD87-4310-AAEF-8517C3D9C5FB}" dt="2020-08-26T01:46:57.636" v="331" actId="1076"/>
-        <pc:sldMkLst>
-          <pc:docMk/>
-          <pc:sldMk cId="1733125250" sldId="286"/>
-        </pc:sldMkLst>
-        <pc:spChg chg="mod">
-          <ac:chgData name="William Estes" userId="a88fcdbc31b6f594" providerId="Windows Live" clId="Web-{A6C77E77-BD87-4310-AAEF-8517C3D9C5FB}" dt="2020-08-26T01:39:53.213" v="317" actId="20577"/>
-          <ac:spMkLst>
-            <pc:docMk/>
-            <pc:sldMk cId="1733125250" sldId="286"/>
-            <ac:spMk id="3" creationId="{1095E837-F77E-AE4D-944C-919B5D780AAA}"/>
-          </ac:spMkLst>
-        </pc:spChg>
-        <pc:picChg chg="del">
-          <ac:chgData name="William Estes" userId="a88fcdbc31b6f594" providerId="Windows Live" clId="Web-{A6C77E77-BD87-4310-AAEF-8517C3D9C5FB}" dt="2020-08-26T01:39:57.854" v="321"/>
-          <ac:picMkLst>
-            <pc:docMk/>
-            <pc:sldMk cId="1733125250" sldId="286"/>
-            <ac:picMk id="4" creationId="{EDC43611-772D-4F8D-8AC8-E989597ACBEE}"/>
-          </ac:picMkLst>
-        </pc:picChg>
-        <pc:picChg chg="add mod">
-          <ac:chgData name="William Estes" userId="a88fcdbc31b6f594" providerId="Windows Live" clId="Web-{A6C77E77-BD87-4310-AAEF-8517C3D9C5FB}" dt="2020-08-26T01:46:52.855" v="329" actId="1076"/>
-          <ac:picMkLst>
-            <pc:docMk/>
-            <pc:sldMk cId="1733125250" sldId="286"/>
-            <ac:picMk id="5" creationId="{B1CA5894-019A-4758-883C-ED5815D0A5E9}"/>
-          </ac:picMkLst>
-        </pc:picChg>
-        <pc:picChg chg="add mod">
-          <ac:chgData name="William Estes" userId="a88fcdbc31b6f594" providerId="Windows Live" clId="Web-{A6C77E77-BD87-4310-AAEF-8517C3D9C5FB}" dt="2020-08-26T01:46:57.636" v="331" actId="1076"/>
-          <ac:picMkLst>
-            <pc:docMk/>
-            <pc:sldMk cId="1733125250" sldId="286"/>
-            <ac:picMk id="6" creationId="{0B3613EF-C45A-4A6B-8053-062DCF1F4D35}"/>
-          </ac:picMkLst>
-        </pc:picChg>
-      </pc:sldChg>
-      <pc:sldChg chg="modSp add ord replId">
-        <pc:chgData name="William Estes" userId="a88fcdbc31b6f594" providerId="Windows Live" clId="Web-{A6C77E77-BD87-4310-AAEF-8517C3D9C5FB}" dt="2020-08-26T03:09:10.805" v="547" actId="20577"/>
-        <pc:sldMkLst>
-          <pc:docMk/>
-          <pc:sldMk cId="3016926997" sldId="287"/>
-        </pc:sldMkLst>
-        <pc:spChg chg="mod">
-          <ac:chgData name="William Estes" userId="a88fcdbc31b6f594" providerId="Windows Live" clId="Web-{A6C77E77-BD87-4310-AAEF-8517C3D9C5FB}" dt="2020-08-26T03:09:10.805" v="547" actId="20577"/>
-          <ac:spMkLst>
-            <pc:docMk/>
-            <pc:sldMk cId="3016926997" sldId="287"/>
-            <ac:spMk id="4" creationId="{5C0E649D-E3FD-41FB-BA87-37C62725C740}"/>
-          </ac:spMkLst>
-        </pc:spChg>
-      </pc:sldChg>
-      <pc:sldChg chg="addSp delSp modSp add replId">
-        <pc:chgData name="William Estes" userId="a88fcdbc31b6f594" providerId="Windows Live" clId="Web-{A6C77E77-BD87-4310-AAEF-8517C3D9C5FB}" dt="2020-08-26T03:21:20.075" v="764" actId="20577"/>
-        <pc:sldMkLst>
-          <pc:docMk/>
-          <pc:sldMk cId="285019892" sldId="288"/>
-        </pc:sldMkLst>
-        <pc:spChg chg="mod">
-          <ac:chgData name="William Estes" userId="a88fcdbc31b6f594" providerId="Windows Live" clId="Web-{A6C77E77-BD87-4310-AAEF-8517C3D9C5FB}" dt="2020-08-26T03:21:20.075" v="764" actId="20577"/>
-          <ac:spMkLst>
-            <pc:docMk/>
-            <pc:sldMk cId="285019892" sldId="288"/>
-            <ac:spMk id="3" creationId="{3713A5A2-1019-0143-BC00-1B8B12D7C198}"/>
-          </ac:spMkLst>
-        </pc:spChg>
-        <pc:picChg chg="del">
-          <ac:chgData name="William Estes" userId="a88fcdbc31b6f594" providerId="Windows Live" clId="Web-{A6C77E77-BD87-4310-AAEF-8517C3D9C5FB}" dt="2020-08-26T03:18:23.461" v="561"/>
-          <ac:picMkLst>
-            <pc:docMk/>
-            <pc:sldMk cId="285019892" sldId="288"/>
-            <ac:picMk id="4" creationId="{0AAB46F1-32FF-49EB-85F0-DC9919487A99}"/>
-          </ac:picMkLst>
-        </pc:picChg>
-        <pc:picChg chg="add mod">
-          <ac:chgData name="William Estes" userId="a88fcdbc31b6f594" providerId="Windows Live" clId="Web-{A6C77E77-BD87-4310-AAEF-8517C3D9C5FB}" dt="2020-08-26T03:20:57.183" v="733" actId="1076"/>
-          <ac:picMkLst>
-            <pc:docMk/>
-            <pc:sldMk cId="285019892" sldId="288"/>
-            <ac:picMk id="5" creationId="{04D6FB7C-0757-4A34-84F2-D794EA9EA312}"/>
-          </ac:picMkLst>
-        </pc:picChg>
-      </pc:sldChg>
-      <pc:sldChg chg="addSp delSp modSp add replId">
-        <pc:chgData name="William Estes" userId="a88fcdbc31b6f594" providerId="Windows Live" clId="Web-{A6C77E77-BD87-4310-AAEF-8517C3D9C5FB}" dt="2020-08-26T03:24:12.220" v="838" actId="1076"/>
-        <pc:sldMkLst>
-          <pc:docMk/>
-          <pc:sldMk cId="134332572" sldId="289"/>
-        </pc:sldMkLst>
-        <pc:spChg chg="mod">
-          <ac:chgData name="William Estes" userId="a88fcdbc31b6f594" providerId="Windows Live" clId="Web-{A6C77E77-BD87-4310-AAEF-8517C3D9C5FB}" dt="2020-08-26T03:23:02.015" v="831" actId="20577"/>
-          <ac:spMkLst>
-            <pc:docMk/>
-            <pc:sldMk cId="134332572" sldId="289"/>
-            <ac:spMk id="3" creationId="{3713A5A2-1019-0143-BC00-1B8B12D7C198}"/>
-          </ac:spMkLst>
-        </pc:spChg>
-        <pc:picChg chg="add mod">
-          <ac:chgData name="William Estes" userId="a88fcdbc31b6f594" providerId="Windows Live" clId="Web-{A6C77E77-BD87-4310-AAEF-8517C3D9C5FB}" dt="2020-08-26T03:24:12.220" v="838" actId="1076"/>
-          <ac:picMkLst>
-            <pc:docMk/>
-            <pc:sldMk cId="134332572" sldId="289"/>
-            <ac:picMk id="4" creationId="{4259BACA-FCD8-48E2-9A07-B9333745DEDB}"/>
-          </ac:picMkLst>
-        </pc:picChg>
-        <pc:picChg chg="del">
-          <ac:chgData name="William Estes" userId="a88fcdbc31b6f594" providerId="Windows Live" clId="Web-{A6C77E77-BD87-4310-AAEF-8517C3D9C5FB}" dt="2020-08-26T03:23:03.343" v="834"/>
-          <ac:picMkLst>
-            <pc:docMk/>
-            <pc:sldMk cId="134332572" sldId="289"/>
-            <ac:picMk id="5" creationId="{04D6FB7C-0757-4A34-84F2-D794EA9EA312}"/>
-          </ac:picMkLst>
-        </pc:picChg>
-      </pc:sldChg>
-      <pc:sldChg chg="addSp delSp modSp add replId">
-        <pc:chgData name="William Estes" userId="a88fcdbc31b6f594" providerId="Windows Live" clId="Web-{A6C77E77-BD87-4310-AAEF-8517C3D9C5FB}" dt="2020-08-26T03:27:37.070" v="962" actId="1076"/>
-        <pc:sldMkLst>
-          <pc:docMk/>
-          <pc:sldMk cId="187834809" sldId="290"/>
-        </pc:sldMkLst>
-        <pc:spChg chg="mod">
-          <ac:chgData name="William Estes" userId="a88fcdbc31b6f594" providerId="Windows Live" clId="Web-{A6C77E77-BD87-4310-AAEF-8517C3D9C5FB}" dt="2020-08-26T03:25:37.911" v="956" actId="20577"/>
-          <ac:spMkLst>
-            <pc:docMk/>
-            <pc:sldMk cId="187834809" sldId="290"/>
-            <ac:spMk id="3" creationId="{3713A5A2-1019-0143-BC00-1B8B12D7C198}"/>
-          </ac:spMkLst>
-        </pc:spChg>
-        <pc:picChg chg="del">
-          <ac:chgData name="William Estes" userId="a88fcdbc31b6f594" providerId="Windows Live" clId="Web-{A6C77E77-BD87-4310-AAEF-8517C3D9C5FB}" dt="2020-08-26T03:24:45.784" v="845"/>
-          <ac:picMkLst>
-            <pc:docMk/>
-            <pc:sldMk cId="187834809" sldId="290"/>
-            <ac:picMk id="4" creationId="{0AAB46F1-32FF-49EB-85F0-DC9919487A99}"/>
-          </ac:picMkLst>
-        </pc:picChg>
-        <pc:picChg chg="add mod">
-          <ac:chgData name="William Estes" userId="a88fcdbc31b6f594" providerId="Windows Live" clId="Web-{A6C77E77-BD87-4310-AAEF-8517C3D9C5FB}" dt="2020-08-26T03:27:37.070" v="962" actId="1076"/>
-          <ac:picMkLst>
-            <pc:docMk/>
-            <pc:sldMk cId="187834809" sldId="290"/>
-            <ac:picMk id="5" creationId="{B057C833-D30E-41C1-9931-A05FBB997D65}"/>
-          </ac:picMkLst>
-        </pc:picChg>
-      </pc:sldChg>
-      <pc:sldChg chg="new del">
-        <pc:chgData name="William Estes" userId="a88fcdbc31b6f594" providerId="Windows Live" clId="Web-{A6C77E77-BD87-4310-AAEF-8517C3D9C5FB}" dt="2020-08-26T03:24:36.300" v="840"/>
-        <pc:sldMkLst>
-          <pc:docMk/>
-          <pc:sldMk cId="1788817066" sldId="290"/>
-        </pc:sldMkLst>
-      </pc:sldChg>
-    </pc:docChg>
-  </pc:docChgLst>
-  <pc:docChgLst>
-    <pc:chgData name="William Estes" userId="a88fcdbc31b6f594" providerId="LiveId" clId="{EA8B5388-DCDC-4189-896D-E99D3FFA17A8}"/>
-    <pc:docChg chg="modSld">
-      <pc:chgData name="William Estes" userId="a88fcdbc31b6f594" providerId="LiveId" clId="{EA8B5388-DCDC-4189-896D-E99D3FFA17A8}" dt="2021-05-19T03:41:43.962" v="1" actId="20577"/>
-      <pc:docMkLst>
-        <pc:docMk/>
-      </pc:docMkLst>
-      <pc:sldChg chg="modSp mod">
-        <pc:chgData name="William Estes" userId="a88fcdbc31b6f594" providerId="LiveId" clId="{EA8B5388-DCDC-4189-896D-E99D3FFA17A8}" dt="2021-05-19T03:41:43.962" v="1" actId="20577"/>
-        <pc:sldMkLst>
-          <pc:docMk/>
-          <pc:sldMk cId="496210837" sldId="280"/>
-        </pc:sldMkLst>
-        <pc:spChg chg="mod">
-          <ac:chgData name="William Estes" userId="a88fcdbc31b6f594" providerId="LiveId" clId="{EA8B5388-DCDC-4189-896D-E99D3FFA17A8}" dt="2021-05-19T03:41:43.962" v="1" actId="20577"/>
-          <ac:spMkLst>
-            <pc:docMk/>
-            <pc:sldMk cId="496210837" sldId="280"/>
-            <ac:spMk id="3" creationId="{3713A5A2-1019-0143-BC00-1B8B12D7C198}"/>
-          </ac:spMkLst>
-        </pc:spChg>
-      </pc:sldChg>
-    </pc:docChg>
-  </pc:docChgLst>
-  <pc:docChgLst>
-    <pc:chgData name="William Estes" userId="a88fcdbc31b6f594" providerId="Windows Live" clId="Web-{7B637E83-0FC2-4AAD-5131-320C78923F12}"/>
-    <pc:docChg chg="modSld">
-      <pc:chgData name="William Estes" userId="a88fcdbc31b6f594" providerId="Windows Live" clId="Web-{7B637E83-0FC2-4AAD-5131-320C78923F12}" dt="2020-09-03T16:34:49.766" v="51" actId="20577"/>
-      <pc:docMkLst>
-        <pc:docMk/>
-      </pc:docMkLst>
-      <pc:sldChg chg="modSp">
-        <pc:chgData name="William Estes" userId="a88fcdbc31b6f594" providerId="Windows Live" clId="Web-{7B637E83-0FC2-4AAD-5131-320C78923F12}" dt="2020-09-03T16:34:49.766" v="50" actId="20577"/>
-        <pc:sldMkLst>
-          <pc:docMk/>
-          <pc:sldMk cId="496210837" sldId="280"/>
-        </pc:sldMkLst>
-        <pc:spChg chg="mod">
-          <ac:chgData name="William Estes" userId="a88fcdbc31b6f594" providerId="Windows Live" clId="Web-{7B637E83-0FC2-4AAD-5131-320C78923F12}" dt="2020-09-03T16:34:49.766" v="50" actId="20577"/>
-          <ac:spMkLst>
-            <pc:docMk/>
-            <pc:sldMk cId="496210837" sldId="280"/>
-            <ac:spMk id="3" creationId="{3713A5A2-1019-0143-BC00-1B8B12D7C198}"/>
-          </ac:spMkLst>
-        </pc:spChg>
-      </pc:sldChg>
-    </pc:docChg>
-  </pc:docChgLst>
-  <pc:docChgLst>
-    <pc:chgData name="William Estes" userId="a88fcdbc31b6f594" providerId="Windows Live" clId="Web-{463BAE71-8BB1-49F2-A6BB-F745AFA0A883}"/>
-    <pc:docChg chg="modSld">
-      <pc:chgData name="William Estes" userId="a88fcdbc31b6f594" providerId="Windows Live" clId="Web-{463BAE71-8BB1-49F2-A6BB-F745AFA0A883}" dt="2020-09-07T02:50:13.484" v="79" actId="20577"/>
-      <pc:docMkLst>
-        <pc:docMk/>
-      </pc:docMkLst>
-      <pc:sldChg chg="modSp">
-        <pc:chgData name="William Estes" userId="a88fcdbc31b6f594" providerId="Windows Live" clId="Web-{463BAE71-8BB1-49F2-A6BB-F745AFA0A883}" dt="2020-09-07T02:50:01.844" v="58" actId="20577"/>
-        <pc:sldMkLst>
-          <pc:docMk/>
-          <pc:sldMk cId="871545074" sldId="302"/>
-        </pc:sldMkLst>
-        <pc:spChg chg="mod">
-          <ac:chgData name="William Estes" userId="a88fcdbc31b6f594" providerId="Windows Live" clId="Web-{463BAE71-8BB1-49F2-A6BB-F745AFA0A883}" dt="2020-09-07T02:50:01.844" v="58" actId="20577"/>
-          <ac:spMkLst>
-            <pc:docMk/>
-            <pc:sldMk cId="871545074" sldId="302"/>
-            <ac:spMk id="3" creationId="{1095E837-F77E-AE4D-944C-919B5D780AAA}"/>
-          </ac:spMkLst>
-        </pc:spChg>
-        <pc:picChg chg="mod">
-          <ac:chgData name="William Estes" userId="a88fcdbc31b6f594" providerId="Windows Live" clId="Web-{463BAE71-8BB1-49F2-A6BB-F745AFA0A883}" dt="2020-09-07T02:49:44.719" v="0" actId="1076"/>
-          <ac:picMkLst>
-            <pc:docMk/>
-            <pc:sldMk cId="871545074" sldId="302"/>
-            <ac:picMk id="4" creationId="{D5B4F8F0-E1EC-45B9-8407-773939B2E634}"/>
-          </ac:picMkLst>
-        </pc:picChg>
-      </pc:sldChg>
-      <pc:sldChg chg="modSp">
-        <pc:chgData name="William Estes" userId="a88fcdbc31b6f594" providerId="Windows Live" clId="Web-{463BAE71-8BB1-49F2-A6BB-F745AFA0A883}" dt="2020-09-07T02:50:12.172" v="77" actId="20577"/>
-        <pc:sldMkLst>
-          <pc:docMk/>
-          <pc:sldMk cId="284483567" sldId="303"/>
-        </pc:sldMkLst>
-        <pc:spChg chg="mod">
-          <ac:chgData name="William Estes" userId="a88fcdbc31b6f594" providerId="Windows Live" clId="Web-{463BAE71-8BB1-49F2-A6BB-F745AFA0A883}" dt="2020-09-07T02:50:12.172" v="77" actId="20577"/>
-          <ac:spMkLst>
-            <pc:docMk/>
-            <pc:sldMk cId="284483567" sldId="303"/>
-            <ac:spMk id="3" creationId="{1095E837-F77E-AE4D-944C-919B5D780AAA}"/>
           </ac:spMkLst>
         </pc:spChg>
       </pc:sldChg>
@@ -4190,7 +4190,7 @@
           <a:p>
             <a:fld id="{870534A9-6018-2047-913D-1953A2F6D512}" type="datetimeFigureOut">
               <a:rPr lang="en-US" smtClean="0"/>
-              <a:t>12/27/2021</a:t>
+              <a:t>12/28/2021</a:t>
             </a:fld>
             <a:endParaRPr lang="en-US"/>
           </a:p>
@@ -4598,7 +4598,7 @@
           <a:noFill/>
           <a:extLst>
             <a:ext uri="{909E8E84-426E-40dd-AFC4-6F175D3DCCD1}">
-              <a14:hiddenFill xmlns="" xmlns:a14="http://schemas.microsoft.com/office/drawing/2010/main">
+              <a14:hiddenFill xmlns:a14="http://schemas.microsoft.com/office/drawing/2010/main" xmlns="">
                 <a:solidFill>
                   <a:srgbClr val="FFFFFF"/>
                 </a:solidFill>
@@ -4657,7 +4657,7 @@
             </a:ln>
             <a:extLst>
               <a:ext uri="{91240B29-F687-4f45-9708-019B960494DF}">
-                <a14:hiddenLine xmlns="" xmlns:a14="http://schemas.microsoft.com/office/drawing/2010/main" w="9525">
+                <a14:hiddenLine xmlns:a14="http://schemas.microsoft.com/office/drawing/2010/main" xmlns="" w="9525">
                   <a:solidFill>
                     <a:srgbClr val="000000"/>
                   </a:solidFill>
@@ -4747,7 +4747,7 @@
             </a:ln>
             <a:extLst>
               <a:ext uri="{91240B29-F687-4f45-9708-019B960494DF}">
-                <a14:hiddenLine xmlns="" xmlns:a14="http://schemas.microsoft.com/office/drawing/2010/main" w="9525">
+                <a14:hiddenLine xmlns:a14="http://schemas.microsoft.com/office/drawing/2010/main" xmlns="" w="9525">
                   <a:solidFill>
                     <a:srgbClr val="000000"/>
                   </a:solidFill>
@@ -4837,7 +4837,7 @@
             </a:ln>
             <a:extLst>
               <a:ext uri="{91240B29-F687-4f45-9708-019B960494DF}">
-                <a14:hiddenLine xmlns="" xmlns:a14="http://schemas.microsoft.com/office/drawing/2010/main" w="9525">
+                <a14:hiddenLine xmlns:a14="http://schemas.microsoft.com/office/drawing/2010/main" xmlns="" w="9525">
                   <a:solidFill>
                     <a:srgbClr val="000000"/>
                   </a:solidFill>
@@ -4871,7 +4871,7 @@
             </a:ln>
             <a:extLst>
               <a:ext uri="{91240B29-F687-4f45-9708-019B960494DF}">
-                <a14:hiddenLine xmlns="" xmlns:a14="http://schemas.microsoft.com/office/drawing/2010/main" w="9525">
+                <a14:hiddenLine xmlns:a14="http://schemas.microsoft.com/office/drawing/2010/main" xmlns="" w="9525">
                   <a:solidFill>
                     <a:srgbClr val="000000"/>
                   </a:solidFill>
@@ -4961,7 +4961,7 @@
             </a:ln>
             <a:extLst>
               <a:ext uri="{91240B29-F687-4f45-9708-019B960494DF}">
-                <a14:hiddenLine xmlns="" xmlns:a14="http://schemas.microsoft.com/office/drawing/2010/main" w="9525">
+                <a14:hiddenLine xmlns:a14="http://schemas.microsoft.com/office/drawing/2010/main" xmlns="" w="9525">
                   <a:solidFill>
                     <a:srgbClr val="000000"/>
                   </a:solidFill>
@@ -5023,7 +5023,7 @@
             </a:ln>
             <a:extLst>
               <a:ext uri="{91240B29-F687-4f45-9708-019B960494DF}">
-                <a14:hiddenLine xmlns="" xmlns:a14="http://schemas.microsoft.com/office/drawing/2010/main" w="9525">
+                <a14:hiddenLine xmlns:a14="http://schemas.microsoft.com/office/drawing/2010/main" xmlns="" w="9525">
                   <a:solidFill>
                     <a:srgbClr val="000000"/>
                   </a:solidFill>
@@ -5085,7 +5085,7 @@
             </a:ln>
             <a:extLst>
               <a:ext uri="{91240B29-F687-4f45-9708-019B960494DF}">
-                <a14:hiddenLine xmlns="" xmlns:a14="http://schemas.microsoft.com/office/drawing/2010/main" w="9525">
+                <a14:hiddenLine xmlns:a14="http://schemas.microsoft.com/office/drawing/2010/main" xmlns="" w="9525">
                   <a:solidFill>
                     <a:srgbClr val="000000"/>
                   </a:solidFill>
@@ -5175,7 +5175,7 @@
             </a:ln>
             <a:extLst>
               <a:ext uri="{91240B29-F687-4f45-9708-019B960494DF}">
-                <a14:hiddenLine xmlns="" xmlns:a14="http://schemas.microsoft.com/office/drawing/2010/main" w="9525">
+                <a14:hiddenLine xmlns:a14="http://schemas.microsoft.com/office/drawing/2010/main" xmlns="" w="9525">
                   <a:solidFill>
                     <a:srgbClr val="000000"/>
                   </a:solidFill>
@@ -5237,7 +5237,7 @@
             </a:ln>
             <a:extLst>
               <a:ext uri="{91240B29-F687-4f45-9708-019B960494DF}">
-                <a14:hiddenLine xmlns="" xmlns:a14="http://schemas.microsoft.com/office/drawing/2010/main" w="9525">
+                <a14:hiddenLine xmlns:a14="http://schemas.microsoft.com/office/drawing/2010/main" xmlns="" w="9525">
                   <a:solidFill>
                     <a:srgbClr val="000000"/>
                   </a:solidFill>
@@ -5299,7 +5299,7 @@
             </a:ln>
             <a:extLst>
               <a:ext uri="{91240B29-F687-4f45-9708-019B960494DF}">
-                <a14:hiddenLine xmlns="" xmlns:a14="http://schemas.microsoft.com/office/drawing/2010/main" w="9525">
+                <a14:hiddenLine xmlns:a14="http://schemas.microsoft.com/office/drawing/2010/main" xmlns="" w="9525">
                   <a:solidFill>
                     <a:srgbClr val="000000"/>
                   </a:solidFill>
@@ -5389,7 +5389,7 @@
             </a:ln>
             <a:extLst>
               <a:ext uri="{91240B29-F687-4f45-9708-019B960494DF}">
-                <a14:hiddenLine xmlns="" xmlns:a14="http://schemas.microsoft.com/office/drawing/2010/main" w="9525">
+                <a14:hiddenLine xmlns:a14="http://schemas.microsoft.com/office/drawing/2010/main" xmlns="" w="9525">
                   <a:solidFill>
                     <a:srgbClr val="000000"/>
                   </a:solidFill>
@@ -5479,7 +5479,7 @@
             </a:ln>
             <a:extLst>
               <a:ext uri="{91240B29-F687-4f45-9708-019B960494DF}">
-                <a14:hiddenLine xmlns="" xmlns:a14="http://schemas.microsoft.com/office/drawing/2010/main" w="9525">
+                <a14:hiddenLine xmlns:a14="http://schemas.microsoft.com/office/drawing/2010/main" xmlns="" w="9525">
                   <a:solidFill>
                     <a:srgbClr val="000000"/>
                   </a:solidFill>
@@ -5541,7 +5541,7 @@
             </a:ln>
             <a:extLst>
               <a:ext uri="{91240B29-F687-4f45-9708-019B960494DF}">
-                <a14:hiddenLine xmlns="" xmlns:a14="http://schemas.microsoft.com/office/drawing/2010/main" w="9525">
+                <a14:hiddenLine xmlns:a14="http://schemas.microsoft.com/office/drawing/2010/main" xmlns="" w="9525">
                   <a:solidFill>
                     <a:srgbClr val="000000"/>
                   </a:solidFill>
@@ -5651,7 +5651,7 @@
             </a:ln>
             <a:extLst>
               <a:ext uri="{91240B29-F687-4f45-9708-019B960494DF}">
-                <a14:hiddenLine xmlns="" xmlns:a14="http://schemas.microsoft.com/office/drawing/2010/main" w="9525">
+                <a14:hiddenLine xmlns:a14="http://schemas.microsoft.com/office/drawing/2010/main" xmlns="" w="9525">
                   <a:solidFill>
                     <a:srgbClr val="000000"/>
                   </a:solidFill>
@@ -5713,7 +5713,7 @@
             </a:ln>
             <a:extLst>
               <a:ext uri="{91240B29-F687-4f45-9708-019B960494DF}">
-                <a14:hiddenLine xmlns="" xmlns:a14="http://schemas.microsoft.com/office/drawing/2010/main" w="9525">
+                <a14:hiddenLine xmlns:a14="http://schemas.microsoft.com/office/drawing/2010/main" xmlns="" w="9525">
                   <a:solidFill>
                     <a:srgbClr val="000000"/>
                   </a:solidFill>
@@ -5803,7 +5803,7 @@
             </a:ln>
             <a:extLst>
               <a:ext uri="{91240B29-F687-4f45-9708-019B960494DF}">
-                <a14:hiddenLine xmlns="" xmlns:a14="http://schemas.microsoft.com/office/drawing/2010/main" w="9525">
+                <a14:hiddenLine xmlns:a14="http://schemas.microsoft.com/office/drawing/2010/main" xmlns="" w="9525">
                   <a:solidFill>
                     <a:srgbClr val="000000"/>
                   </a:solidFill>
@@ -5893,7 +5893,7 @@
             </a:ln>
             <a:extLst>
               <a:ext uri="{91240B29-F687-4f45-9708-019B960494DF}">
-                <a14:hiddenLine xmlns="" xmlns:a14="http://schemas.microsoft.com/office/drawing/2010/main" w="9525">
+                <a14:hiddenLine xmlns:a14="http://schemas.microsoft.com/office/drawing/2010/main" xmlns="" w="9525">
                   <a:solidFill>
                     <a:srgbClr val="000000"/>
                   </a:solidFill>
@@ -5955,7 +5955,7 @@
             </a:ln>
             <a:extLst>
               <a:ext uri="{91240B29-F687-4f45-9708-019B960494DF}">
-                <a14:hiddenLine xmlns="" xmlns:a14="http://schemas.microsoft.com/office/drawing/2010/main" w="9525">
+                <a14:hiddenLine xmlns:a14="http://schemas.microsoft.com/office/drawing/2010/main" xmlns="" w="9525">
                   <a:solidFill>
                     <a:srgbClr val="000000"/>
                   </a:solidFill>
@@ -6045,7 +6045,7 @@
             </a:ln>
             <a:extLst>
               <a:ext uri="{91240B29-F687-4f45-9708-019B960494DF}">
-                <a14:hiddenLine xmlns="" xmlns:a14="http://schemas.microsoft.com/office/drawing/2010/main" w="9525">
+                <a14:hiddenLine xmlns:a14="http://schemas.microsoft.com/office/drawing/2010/main" xmlns="" w="9525">
                   <a:solidFill>
                     <a:srgbClr val="000000"/>
                   </a:solidFill>
@@ -6135,7 +6135,7 @@
             </a:ln>
             <a:extLst>
               <a:ext uri="{91240B29-F687-4f45-9708-019B960494DF}">
-                <a14:hiddenLine xmlns="" xmlns:a14="http://schemas.microsoft.com/office/drawing/2010/main" w="9525">
+                <a14:hiddenLine xmlns:a14="http://schemas.microsoft.com/office/drawing/2010/main" xmlns="" w="9525">
                   <a:solidFill>
                     <a:srgbClr val="000000"/>
                   </a:solidFill>
@@ -6191,7 +6191,7 @@
             </a:ln>
             <a:extLst>
               <a:ext uri="{91240B29-F687-4f45-9708-019B960494DF}">
-                <a14:hiddenLine xmlns="" xmlns:a14="http://schemas.microsoft.com/office/drawing/2010/main" w="9525">
+                <a14:hiddenLine xmlns:a14="http://schemas.microsoft.com/office/drawing/2010/main" xmlns="" w="9525">
                   <a:solidFill>
                     <a:srgbClr val="000000"/>
                   </a:solidFill>
@@ -6281,7 +6281,7 @@
             </a:ln>
             <a:extLst>
               <a:ext uri="{91240B29-F687-4f45-9708-019B960494DF}">
-                <a14:hiddenLine xmlns="" xmlns:a14="http://schemas.microsoft.com/office/drawing/2010/main" w="9525">
+                <a14:hiddenLine xmlns:a14="http://schemas.microsoft.com/office/drawing/2010/main" xmlns="" w="9525">
                   <a:solidFill>
                     <a:srgbClr val="000000"/>
                   </a:solidFill>
@@ -6337,7 +6337,7 @@
             </a:ln>
             <a:extLst>
               <a:ext uri="{91240B29-F687-4f45-9708-019B960494DF}">
-                <a14:hiddenLine xmlns="" xmlns:a14="http://schemas.microsoft.com/office/drawing/2010/main" w="9525">
+                <a14:hiddenLine xmlns:a14="http://schemas.microsoft.com/office/drawing/2010/main" xmlns="" w="9525">
                   <a:solidFill>
                     <a:srgbClr val="000000"/>
                   </a:solidFill>
@@ -6427,7 +6427,7 @@
             </a:ln>
             <a:extLst>
               <a:ext uri="{91240B29-F687-4f45-9708-019B960494DF}">
-                <a14:hiddenLine xmlns="" xmlns:a14="http://schemas.microsoft.com/office/drawing/2010/main" w="9525">
+                <a14:hiddenLine xmlns:a14="http://schemas.microsoft.com/office/drawing/2010/main" xmlns="" w="9525">
                   <a:solidFill>
                     <a:srgbClr val="000000"/>
                   </a:solidFill>
@@ -6495,7 +6495,7 @@
             </a:ln>
             <a:extLst>
               <a:ext uri="{91240B29-F687-4f45-9708-019B960494DF}">
-                <a14:hiddenLine xmlns="" xmlns:a14="http://schemas.microsoft.com/office/drawing/2010/main" w="9525">
+                <a14:hiddenLine xmlns:a14="http://schemas.microsoft.com/office/drawing/2010/main" xmlns="" w="9525">
                   <a:solidFill>
                     <a:srgbClr val="000000"/>
                   </a:solidFill>
@@ -6585,7 +6585,7 @@
             </a:ln>
             <a:extLst>
               <a:ext uri="{91240B29-F687-4f45-9708-019B960494DF}">
-                <a14:hiddenLine xmlns="" xmlns:a14="http://schemas.microsoft.com/office/drawing/2010/main" w="9525">
+                <a14:hiddenLine xmlns:a14="http://schemas.microsoft.com/office/drawing/2010/main" xmlns="" w="9525">
                   <a:solidFill>
                     <a:srgbClr val="000000"/>
                   </a:solidFill>
@@ -6653,7 +6653,7 @@
             </a:ln>
             <a:extLst>
               <a:ext uri="{91240B29-F687-4f45-9708-019B960494DF}">
-                <a14:hiddenLine xmlns="" xmlns:a14="http://schemas.microsoft.com/office/drawing/2010/main" w="9525">
+                <a14:hiddenLine xmlns:a14="http://schemas.microsoft.com/office/drawing/2010/main" xmlns="" w="9525">
                   <a:solidFill>
                     <a:srgbClr val="000000"/>
                   </a:solidFill>
@@ -6743,7 +6743,7 @@
             </a:ln>
             <a:extLst>
               <a:ext uri="{91240B29-F687-4f45-9708-019B960494DF}">
-                <a14:hiddenLine xmlns="" xmlns:a14="http://schemas.microsoft.com/office/drawing/2010/main" w="9525">
+                <a14:hiddenLine xmlns:a14="http://schemas.microsoft.com/office/drawing/2010/main" xmlns="" w="9525">
                   <a:solidFill>
                     <a:srgbClr val="000000"/>
                   </a:solidFill>
@@ -6777,7 +6777,7 @@
             </a:ln>
             <a:extLst>
               <a:ext uri="{91240B29-F687-4f45-9708-019B960494DF}">
-                <a14:hiddenLine xmlns="" xmlns:a14="http://schemas.microsoft.com/office/drawing/2010/main" w="9525">
+                <a14:hiddenLine xmlns:a14="http://schemas.microsoft.com/office/drawing/2010/main" xmlns="" w="9525">
                   <a:solidFill>
                     <a:srgbClr val="000000"/>
                   </a:solidFill>
@@ -6867,7 +6867,7 @@
             </a:ln>
             <a:extLst>
               <a:ext uri="{91240B29-F687-4f45-9708-019B960494DF}">
-                <a14:hiddenLine xmlns="" xmlns:a14="http://schemas.microsoft.com/office/drawing/2010/main" w="9525">
+                <a14:hiddenLine xmlns:a14="http://schemas.microsoft.com/office/drawing/2010/main" xmlns="" w="9525">
                   <a:solidFill>
                     <a:srgbClr val="000000"/>
                   </a:solidFill>
@@ -6929,7 +6929,7 @@
             </a:ln>
             <a:extLst>
               <a:ext uri="{91240B29-F687-4f45-9708-019B960494DF}">
-                <a14:hiddenLine xmlns="" xmlns:a14="http://schemas.microsoft.com/office/drawing/2010/main" w="9525">
+                <a14:hiddenLine xmlns:a14="http://schemas.microsoft.com/office/drawing/2010/main" xmlns="" w="9525">
                   <a:solidFill>
                     <a:srgbClr val="000000"/>
                   </a:solidFill>
@@ -6991,7 +6991,7 @@
             </a:ln>
             <a:extLst>
               <a:ext uri="{91240B29-F687-4f45-9708-019B960494DF}">
-                <a14:hiddenLine xmlns="" xmlns:a14="http://schemas.microsoft.com/office/drawing/2010/main" w="9525">
+                <a14:hiddenLine xmlns:a14="http://schemas.microsoft.com/office/drawing/2010/main" xmlns="" w="9525">
                   <a:solidFill>
                     <a:srgbClr val="000000"/>
                   </a:solidFill>
@@ -7081,7 +7081,7 @@
             </a:ln>
             <a:extLst>
               <a:ext uri="{91240B29-F687-4f45-9708-019B960494DF}">
-                <a14:hiddenLine xmlns="" xmlns:a14="http://schemas.microsoft.com/office/drawing/2010/main" w="9525">
+                <a14:hiddenLine xmlns:a14="http://schemas.microsoft.com/office/drawing/2010/main" xmlns="" w="9525">
                   <a:solidFill>
                     <a:srgbClr val="000000"/>
                   </a:solidFill>
@@ -7149,7 +7149,7 @@
             </a:ln>
             <a:extLst>
               <a:ext uri="{91240B29-F687-4f45-9708-019B960494DF}">
-                <a14:hiddenLine xmlns="" xmlns:a14="http://schemas.microsoft.com/office/drawing/2010/main" w="9525">
+                <a14:hiddenLine xmlns:a14="http://schemas.microsoft.com/office/drawing/2010/main" xmlns="" w="9525">
                   <a:solidFill>
                     <a:srgbClr val="000000"/>
                   </a:solidFill>
@@ -7211,7 +7211,7 @@
             </a:ln>
             <a:extLst>
               <a:ext uri="{91240B29-F687-4f45-9708-019B960494DF}">
-                <a14:hiddenLine xmlns="" xmlns:a14="http://schemas.microsoft.com/office/drawing/2010/main" w="9525">
+                <a14:hiddenLine xmlns:a14="http://schemas.microsoft.com/office/drawing/2010/main" xmlns="" w="9525">
                   <a:solidFill>
                     <a:srgbClr val="000000"/>
                   </a:solidFill>
@@ -7301,7 +7301,7 @@
             </a:ln>
             <a:extLst>
               <a:ext uri="{91240B29-F687-4f45-9708-019B960494DF}">
-                <a14:hiddenLine xmlns="" xmlns:a14="http://schemas.microsoft.com/office/drawing/2010/main" w="9525">
+                <a14:hiddenLine xmlns:a14="http://schemas.microsoft.com/office/drawing/2010/main" xmlns="" w="9525">
                   <a:solidFill>
                     <a:srgbClr val="000000"/>
                   </a:solidFill>
@@ -7363,7 +7363,7 @@
             </a:ln>
             <a:extLst>
               <a:ext uri="{91240B29-F687-4f45-9708-019B960494DF}">
-                <a14:hiddenLine xmlns="" xmlns:a14="http://schemas.microsoft.com/office/drawing/2010/main" w="9525">
+                <a14:hiddenLine xmlns:a14="http://schemas.microsoft.com/office/drawing/2010/main" xmlns="" w="9525">
                   <a:solidFill>
                     <a:srgbClr val="000000"/>
                   </a:solidFill>
@@ -7453,7 +7453,7 @@
             </a:ln>
             <a:extLst>
               <a:ext uri="{91240B29-F687-4f45-9708-019B960494DF}">
-                <a14:hiddenLine xmlns="" xmlns:a14="http://schemas.microsoft.com/office/drawing/2010/main" w="9525">
+                <a14:hiddenLine xmlns:a14="http://schemas.microsoft.com/office/drawing/2010/main" xmlns="" w="9525">
                   <a:solidFill>
                     <a:srgbClr val="000000"/>
                   </a:solidFill>
@@ -7515,7 +7515,7 @@
             </a:ln>
             <a:extLst>
               <a:ext uri="{91240B29-F687-4f45-9708-019B960494DF}">
-                <a14:hiddenLine xmlns="" xmlns:a14="http://schemas.microsoft.com/office/drawing/2010/main" w="9525">
+                <a14:hiddenLine xmlns:a14="http://schemas.microsoft.com/office/drawing/2010/main" xmlns="" w="9525">
                   <a:solidFill>
                     <a:srgbClr val="000000"/>
                   </a:solidFill>
@@ -7605,7 +7605,7 @@
             </a:ln>
             <a:extLst>
               <a:ext uri="{91240B29-F687-4f45-9708-019B960494DF}">
-                <a14:hiddenLine xmlns="" xmlns:a14="http://schemas.microsoft.com/office/drawing/2010/main" w="9525">
+                <a14:hiddenLine xmlns:a14="http://schemas.microsoft.com/office/drawing/2010/main" xmlns="" w="9525">
                   <a:solidFill>
                     <a:srgbClr val="000000"/>
                   </a:solidFill>
@@ -7639,7 +7639,7 @@
             </a:ln>
             <a:extLst>
               <a:ext uri="{91240B29-F687-4f45-9708-019B960494DF}">
-                <a14:hiddenLine xmlns="" xmlns:a14="http://schemas.microsoft.com/office/drawing/2010/main" w="9525">
+                <a14:hiddenLine xmlns:a14="http://schemas.microsoft.com/office/drawing/2010/main" xmlns="" w="9525">
                   <a:solidFill>
                     <a:srgbClr val="000000"/>
                   </a:solidFill>
@@ -7704,7 +7704,7 @@
             </a:ln>
             <a:extLst>
               <a:ext uri="{91240B29-F687-4f45-9708-019B960494DF}">
-                <a14:hiddenLine xmlns="" xmlns:a14="http://schemas.microsoft.com/office/drawing/2010/main" w="9525">
+                <a14:hiddenLine xmlns:a14="http://schemas.microsoft.com/office/drawing/2010/main" xmlns="" w="9525">
                   <a:solidFill>
                     <a:srgbClr val="000000"/>
                   </a:solidFill>
@@ -7794,7 +7794,7 @@
             </a:ln>
             <a:extLst>
               <a:ext uri="{91240B29-F687-4f45-9708-019B960494DF}">
-                <a14:hiddenLine xmlns="" xmlns:a14="http://schemas.microsoft.com/office/drawing/2010/main" w="9525">
+                <a14:hiddenLine xmlns:a14="http://schemas.microsoft.com/office/drawing/2010/main" xmlns="" w="9525">
                   <a:solidFill>
                     <a:srgbClr val="000000"/>
                   </a:solidFill>
@@ -7856,7 +7856,7 @@
             </a:ln>
             <a:extLst>
               <a:ext uri="{91240B29-F687-4f45-9708-019B960494DF}">
-                <a14:hiddenLine xmlns="" xmlns:a14="http://schemas.microsoft.com/office/drawing/2010/main" w="9525">
+                <a14:hiddenLine xmlns:a14="http://schemas.microsoft.com/office/drawing/2010/main" xmlns="" w="9525">
                   <a:solidFill>
                     <a:srgbClr val="000000"/>
                   </a:solidFill>
@@ -7946,7 +7946,7 @@
             </a:ln>
             <a:extLst>
               <a:ext uri="{91240B29-F687-4f45-9708-019B960494DF}">
-                <a14:hiddenLine xmlns="" xmlns:a14="http://schemas.microsoft.com/office/drawing/2010/main" w="9525">
+                <a14:hiddenLine xmlns:a14="http://schemas.microsoft.com/office/drawing/2010/main" xmlns="" w="9525">
                   <a:solidFill>
                     <a:srgbClr val="000000"/>
                   </a:solidFill>
@@ -8036,7 +8036,7 @@
             </a:ln>
             <a:extLst>
               <a:ext uri="{91240B29-F687-4f45-9708-019B960494DF}">
-                <a14:hiddenLine xmlns="" xmlns:a14="http://schemas.microsoft.com/office/drawing/2010/main" w="9525">
+                <a14:hiddenLine xmlns:a14="http://schemas.microsoft.com/office/drawing/2010/main" xmlns="" w="9525">
                   <a:solidFill>
                     <a:srgbClr val="000000"/>
                   </a:solidFill>
@@ -8101,7 +8101,7 @@
             </a:ln>
             <a:extLst>
               <a:ext uri="{91240B29-F687-4f45-9708-019B960494DF}">
-                <a14:hiddenLine xmlns="" xmlns:a14="http://schemas.microsoft.com/office/drawing/2010/main" w="9525">
+                <a14:hiddenLine xmlns:a14="http://schemas.microsoft.com/office/drawing/2010/main" xmlns="" w="9525">
                   <a:solidFill>
                     <a:srgbClr val="000000"/>
                   </a:solidFill>
@@ -8163,7 +8163,7 @@
             </a:ln>
             <a:extLst>
               <a:ext uri="{91240B29-F687-4f45-9708-019B960494DF}">
-                <a14:hiddenLine xmlns="" xmlns:a14="http://schemas.microsoft.com/office/drawing/2010/main" w="9525">
+                <a14:hiddenLine xmlns:a14="http://schemas.microsoft.com/office/drawing/2010/main" xmlns="" w="9525">
                   <a:solidFill>
                     <a:srgbClr val="000000"/>
                   </a:solidFill>
@@ -8253,7 +8253,7 @@
             </a:ln>
             <a:extLst>
               <a:ext uri="{91240B29-F687-4f45-9708-019B960494DF}">
-                <a14:hiddenLine xmlns="" xmlns:a14="http://schemas.microsoft.com/office/drawing/2010/main" w="9525">
+                <a14:hiddenLine xmlns:a14="http://schemas.microsoft.com/office/drawing/2010/main" xmlns="" w="9525">
                   <a:solidFill>
                     <a:srgbClr val="000000"/>
                   </a:solidFill>
@@ -8343,7 +8343,7 @@
             </a:ln>
             <a:extLst>
               <a:ext uri="{91240B29-F687-4f45-9708-019B960494DF}">
-                <a14:hiddenLine xmlns="" xmlns:a14="http://schemas.microsoft.com/office/drawing/2010/main" w="9525">
+                <a14:hiddenLine xmlns:a14="http://schemas.microsoft.com/office/drawing/2010/main" xmlns="" w="9525">
                   <a:solidFill>
                     <a:srgbClr val="000000"/>
                   </a:solidFill>
@@ -8405,7 +8405,7 @@
             </a:ln>
             <a:extLst>
               <a:ext uri="{91240B29-F687-4f45-9708-019B960494DF}">
-                <a14:hiddenLine xmlns="" xmlns:a14="http://schemas.microsoft.com/office/drawing/2010/main" w="9525">
+                <a14:hiddenLine xmlns:a14="http://schemas.microsoft.com/office/drawing/2010/main" xmlns="" w="9525">
                   <a:solidFill>
                     <a:srgbClr val="000000"/>
                   </a:solidFill>
@@ -8525,7 +8525,7 @@
             </a:ln>
             <a:extLst>
               <a:ext uri="{91240B29-F687-4f45-9708-019B960494DF}">
-                <a14:hiddenLine xmlns="" xmlns:a14="http://schemas.microsoft.com/office/drawing/2010/main" w="9525">
+                <a14:hiddenLine xmlns:a14="http://schemas.microsoft.com/office/drawing/2010/main" xmlns="" w="9525">
                   <a:solidFill>
                     <a:srgbClr val="000000"/>
                   </a:solidFill>
@@ -8593,7 +8593,7 @@
             </a:ln>
             <a:extLst>
               <a:ext uri="{91240B29-F687-4f45-9708-019B960494DF}">
-                <a14:hiddenLine xmlns="" xmlns:a14="http://schemas.microsoft.com/office/drawing/2010/main" w="9525">
+                <a14:hiddenLine xmlns:a14="http://schemas.microsoft.com/office/drawing/2010/main" xmlns="" w="9525">
                   <a:solidFill>
                     <a:srgbClr val="000000"/>
                   </a:solidFill>
@@ -8683,7 +8683,7 @@
             </a:ln>
             <a:extLst>
               <a:ext uri="{91240B29-F687-4f45-9708-019B960494DF}">
-                <a14:hiddenLine xmlns="" xmlns:a14="http://schemas.microsoft.com/office/drawing/2010/main" w="9525">
+                <a14:hiddenLine xmlns:a14="http://schemas.microsoft.com/office/drawing/2010/main" xmlns="" w="9525">
                   <a:solidFill>
                     <a:srgbClr val="000000"/>
                   </a:solidFill>
@@ -8823,7 +8823,7 @@
           <a:p>
             <a:fld id="{B3A65DBF-A9F0-C148-993C-2303F706A4CD}" type="datetimeFigureOut">
               <a:rPr lang="en-US" smtClean="0"/>
-              <a:t>12/27/2021</a:t>
+              <a:t>12/28/2021</a:t>
             </a:fld>
             <a:endParaRPr lang="en-US"/>
           </a:p>
@@ -9090,7 +9090,7 @@
           <a:p>
             <a:fld id="{B3A65DBF-A9F0-C148-993C-2303F706A4CD}" type="datetimeFigureOut">
               <a:rPr lang="en-US" smtClean="0"/>
-              <a:t>12/27/2021</a:t>
+              <a:t>12/28/2021</a:t>
             </a:fld>
             <a:endParaRPr lang="en-US"/>
           </a:p>
@@ -9286,7 +9286,7 @@
           <a:p>
             <a:fld id="{B3A65DBF-A9F0-C148-993C-2303F706A4CD}" type="datetimeFigureOut">
               <a:rPr lang="en-US" smtClean="0"/>
-              <a:t>12/27/2021</a:t>
+              <a:t>12/28/2021</a:t>
             </a:fld>
             <a:endParaRPr lang="en-US"/>
           </a:p>
@@ -9549,7 +9549,7 @@
           <a:p>
             <a:fld id="{B3A65DBF-A9F0-C148-993C-2303F706A4CD}" type="datetimeFigureOut">
               <a:rPr lang="en-US" smtClean="0"/>
-              <a:t>12/27/2021</a:t>
+              <a:t>12/28/2021</a:t>
             </a:fld>
             <a:endParaRPr lang="en-US"/>
           </a:p>
@@ -9983,7 +9983,7 @@
           <a:p>
             <a:fld id="{B3A65DBF-A9F0-C148-993C-2303F706A4CD}" type="datetimeFigureOut">
               <a:rPr lang="en-US" smtClean="0"/>
-              <a:t>12/27/2021</a:t>
+              <a:t>12/28/2021</a:t>
             </a:fld>
             <a:endParaRPr lang="en-US"/>
           </a:p>
@@ -10529,7 +10529,7 @@
           <a:p>
             <a:fld id="{B3A65DBF-A9F0-C148-993C-2303F706A4CD}" type="datetimeFigureOut">
               <a:rPr lang="en-US" smtClean="0"/>
-              <a:t>12/27/2021</a:t>
+              <a:t>12/28/2021</a:t>
             </a:fld>
             <a:endParaRPr lang="en-US"/>
           </a:p>
@@ -11249,7 +11249,7 @@
           <a:p>
             <a:fld id="{B3A65DBF-A9F0-C148-993C-2303F706A4CD}" type="datetimeFigureOut">
               <a:rPr lang="en-US" smtClean="0"/>
-              <a:t>12/27/2021</a:t>
+              <a:t>12/28/2021</a:t>
             </a:fld>
             <a:endParaRPr lang="en-US"/>
           </a:p>
@@ -11419,7 +11419,7 @@
           <a:p>
             <a:fld id="{B3A65DBF-A9F0-C148-993C-2303F706A4CD}" type="datetimeFigureOut">
               <a:rPr lang="en-US" smtClean="0"/>
-              <a:t>12/27/2021</a:t>
+              <a:t>12/28/2021</a:t>
             </a:fld>
             <a:endParaRPr lang="en-US"/>
           </a:p>
@@ -11599,7 +11599,7 @@
           <a:p>
             <a:fld id="{B3A65DBF-A9F0-C148-993C-2303F706A4CD}" type="datetimeFigureOut">
               <a:rPr lang="en-US" smtClean="0"/>
-              <a:t>12/27/2021</a:t>
+              <a:t>12/28/2021</a:t>
             </a:fld>
             <a:endParaRPr lang="en-US"/>
           </a:p>
@@ -11769,7 +11769,7 @@
           <a:p>
             <a:fld id="{B3A65DBF-A9F0-C148-993C-2303F706A4CD}" type="datetimeFigureOut">
               <a:rPr lang="en-US" smtClean="0"/>
-              <a:t>12/27/2021</a:t>
+              <a:t>12/28/2021</a:t>
             </a:fld>
             <a:endParaRPr lang="en-US"/>
           </a:p>
@@ -12019,7 +12019,7 @@
           <a:p>
             <a:fld id="{B3A65DBF-A9F0-C148-993C-2303F706A4CD}" type="datetimeFigureOut">
               <a:rPr lang="en-US" smtClean="0"/>
-              <a:t>12/27/2021</a:t>
+              <a:t>12/28/2021</a:t>
             </a:fld>
             <a:endParaRPr lang="en-US"/>
           </a:p>
@@ -12251,7 +12251,7 @@
           <a:p>
             <a:fld id="{B3A65DBF-A9F0-C148-993C-2303F706A4CD}" type="datetimeFigureOut">
               <a:rPr lang="en-US" smtClean="0"/>
-              <a:t>12/27/2021</a:t>
+              <a:t>12/28/2021</a:t>
             </a:fld>
             <a:endParaRPr lang="en-US"/>
           </a:p>
@@ -12632,7 +12632,7 @@
           <a:p>
             <a:fld id="{B3A65DBF-A9F0-C148-993C-2303F706A4CD}" type="datetimeFigureOut">
               <a:rPr lang="en-US" smtClean="0"/>
-              <a:t>12/27/2021</a:t>
+              <a:t>12/28/2021</a:t>
             </a:fld>
             <a:endParaRPr lang="en-US"/>
           </a:p>
@@ -12750,7 +12750,7 @@
           <a:p>
             <a:fld id="{B3A65DBF-A9F0-C148-993C-2303F706A4CD}" type="datetimeFigureOut">
               <a:rPr lang="en-US" smtClean="0"/>
-              <a:t>12/27/2021</a:t>
+              <a:t>12/28/2021</a:t>
             </a:fld>
             <a:endParaRPr lang="en-US"/>
           </a:p>
@@ -12845,7 +12845,7 @@
           <a:p>
             <a:fld id="{B3A65DBF-A9F0-C148-993C-2303F706A4CD}" type="datetimeFigureOut">
               <a:rPr lang="en-US" smtClean="0"/>
-              <a:t>12/27/2021</a:t>
+              <a:t>12/28/2021</a:t>
             </a:fld>
             <a:endParaRPr lang="en-US"/>
           </a:p>
@@ -13094,7 +13094,7 @@
           <a:p>
             <a:fld id="{B3A65DBF-A9F0-C148-993C-2303F706A4CD}" type="datetimeFigureOut">
               <a:rPr lang="en-US" smtClean="0"/>
-              <a:t>12/27/2021</a:t>
+              <a:t>12/28/2021</a:t>
             </a:fld>
             <a:endParaRPr lang="en-US"/>
           </a:p>
@@ -13374,7 +13374,7 @@
           <a:p>
             <a:fld id="{B3A65DBF-A9F0-C148-993C-2303F706A4CD}" type="datetimeFigureOut">
               <a:rPr lang="en-US" smtClean="0"/>
-              <a:t>12/27/2021</a:t>
+              <a:t>12/28/2021</a:t>
             </a:fld>
             <a:endParaRPr lang="en-US"/>
           </a:p>
@@ -13497,7 +13497,7 @@
           <a:noFill/>
           <a:extLst>
             <a:ext uri="{909E8E84-426E-40dd-AFC4-6F175D3DCCD1}">
-              <a14:hiddenFill xmlns="" xmlns:a14="http://schemas.microsoft.com/office/drawing/2010/main">
+              <a14:hiddenFill xmlns:a14="http://schemas.microsoft.com/office/drawing/2010/main" xmlns="">
                 <a:solidFill>
                   <a:srgbClr val="FFFFFF"/>
                 </a:solidFill>
@@ -13571,7 +13571,7 @@
               </a:ln>
               <a:extLst>
                 <a:ext uri="{91240B29-F687-4f45-9708-019B960494DF}">
-                  <a14:hiddenLine xmlns="" xmlns:a14="http://schemas.microsoft.com/office/drawing/2010/main" w="9525">
+                  <a14:hiddenLine xmlns:a14="http://schemas.microsoft.com/office/drawing/2010/main" xmlns="" w="9525">
                     <a:solidFill>
                       <a:srgbClr val="000000"/>
                     </a:solidFill>
@@ -13661,7 +13661,7 @@
               </a:ln>
               <a:extLst>
                 <a:ext uri="{91240B29-F687-4f45-9708-019B960494DF}">
-                  <a14:hiddenLine xmlns="" xmlns:a14="http://schemas.microsoft.com/office/drawing/2010/main" w="9525">
+                  <a14:hiddenLine xmlns:a14="http://schemas.microsoft.com/office/drawing/2010/main" xmlns="" w="9525">
                     <a:solidFill>
                       <a:srgbClr val="000000"/>
                     </a:solidFill>
@@ -13751,7 +13751,7 @@
               </a:ln>
               <a:extLst>
                 <a:ext uri="{91240B29-F687-4f45-9708-019B960494DF}">
-                  <a14:hiddenLine xmlns="" xmlns:a14="http://schemas.microsoft.com/office/drawing/2010/main" w="9525">
+                  <a14:hiddenLine xmlns:a14="http://schemas.microsoft.com/office/drawing/2010/main" xmlns="" w="9525">
                     <a:solidFill>
                       <a:srgbClr val="000000"/>
                     </a:solidFill>
@@ -13813,7 +13813,7 @@
               </a:ln>
               <a:extLst>
                 <a:ext uri="{91240B29-F687-4f45-9708-019B960494DF}">
-                  <a14:hiddenLine xmlns="" xmlns:a14="http://schemas.microsoft.com/office/drawing/2010/main" w="9525">
+                  <a14:hiddenLine xmlns:a14="http://schemas.microsoft.com/office/drawing/2010/main" xmlns="" w="9525">
                     <a:solidFill>
                       <a:srgbClr val="000000"/>
                     </a:solidFill>
@@ -13903,7 +13903,7 @@
               </a:ln>
               <a:extLst>
                 <a:ext uri="{91240B29-F687-4f45-9708-019B960494DF}">
-                  <a14:hiddenLine xmlns="" xmlns:a14="http://schemas.microsoft.com/office/drawing/2010/main" w="9525">
+                  <a14:hiddenLine xmlns:a14="http://schemas.microsoft.com/office/drawing/2010/main" xmlns="" w="9525">
                     <a:solidFill>
                       <a:srgbClr val="000000"/>
                     </a:solidFill>
@@ -13965,7 +13965,7 @@
               </a:ln>
               <a:extLst>
                 <a:ext uri="{91240B29-F687-4f45-9708-019B960494DF}">
-                  <a14:hiddenLine xmlns="" xmlns:a14="http://schemas.microsoft.com/office/drawing/2010/main" w="9525">
+                  <a14:hiddenLine xmlns:a14="http://schemas.microsoft.com/office/drawing/2010/main" xmlns="" w="9525">
                     <a:solidFill>
                       <a:srgbClr val="000000"/>
                     </a:solidFill>
@@ -14027,7 +14027,7 @@
               </a:ln>
               <a:extLst>
                 <a:ext uri="{91240B29-F687-4f45-9708-019B960494DF}">
-                  <a14:hiddenLine xmlns="" xmlns:a14="http://schemas.microsoft.com/office/drawing/2010/main" w="9525">
+                  <a14:hiddenLine xmlns:a14="http://schemas.microsoft.com/office/drawing/2010/main" xmlns="" w="9525">
                     <a:solidFill>
                       <a:srgbClr val="000000"/>
                     </a:solidFill>
@@ -14117,7 +14117,7 @@
               </a:ln>
               <a:extLst>
                 <a:ext uri="{91240B29-F687-4f45-9708-019B960494DF}">
-                  <a14:hiddenLine xmlns="" xmlns:a14="http://schemas.microsoft.com/office/drawing/2010/main" w="9525">
+                  <a14:hiddenLine xmlns:a14="http://schemas.microsoft.com/office/drawing/2010/main" xmlns="" w="9525">
                     <a:solidFill>
                       <a:srgbClr val="000000"/>
                     </a:solidFill>
@@ -14207,7 +14207,7 @@
               </a:ln>
               <a:extLst>
                 <a:ext uri="{91240B29-F687-4f45-9708-019B960494DF}">
-                  <a14:hiddenLine xmlns="" xmlns:a14="http://schemas.microsoft.com/office/drawing/2010/main" w="9525">
+                  <a14:hiddenLine xmlns:a14="http://schemas.microsoft.com/office/drawing/2010/main" xmlns="" w="9525">
                     <a:solidFill>
                       <a:srgbClr val="000000"/>
                     </a:solidFill>
@@ -14269,7 +14269,7 @@
               </a:ln>
               <a:extLst>
                 <a:ext uri="{91240B29-F687-4f45-9708-019B960494DF}">
-                  <a14:hiddenLine xmlns="" xmlns:a14="http://schemas.microsoft.com/office/drawing/2010/main" w="9525">
+                  <a14:hiddenLine xmlns:a14="http://schemas.microsoft.com/office/drawing/2010/main" xmlns="" w="9525">
                     <a:solidFill>
                       <a:srgbClr val="000000"/>
                     </a:solidFill>
@@ -14379,7 +14379,7 @@
               </a:ln>
               <a:extLst>
                 <a:ext uri="{91240B29-F687-4f45-9708-019B960494DF}">
-                  <a14:hiddenLine xmlns="" xmlns:a14="http://schemas.microsoft.com/office/drawing/2010/main" w="9525">
+                  <a14:hiddenLine xmlns:a14="http://schemas.microsoft.com/office/drawing/2010/main" xmlns="" w="9525">
                     <a:solidFill>
                       <a:srgbClr val="000000"/>
                     </a:solidFill>
@@ -14463,7 +14463,7 @@
               </a:ln>
               <a:extLst>
                 <a:ext uri="{91240B29-F687-4f45-9708-019B960494DF}">
-                  <a14:hiddenLine xmlns="" xmlns:a14="http://schemas.microsoft.com/office/drawing/2010/main" w="9525">
+                  <a14:hiddenLine xmlns:a14="http://schemas.microsoft.com/office/drawing/2010/main" xmlns="" w="9525">
                     <a:solidFill>
                       <a:srgbClr val="000000"/>
                     </a:solidFill>
@@ -14525,7 +14525,7 @@
               </a:ln>
               <a:extLst>
                 <a:ext uri="{91240B29-F687-4f45-9708-019B960494DF}">
-                  <a14:hiddenLine xmlns="" xmlns:a14="http://schemas.microsoft.com/office/drawing/2010/main" w="9525">
+                  <a14:hiddenLine xmlns:a14="http://schemas.microsoft.com/office/drawing/2010/main" xmlns="" w="9525">
                     <a:solidFill>
                       <a:srgbClr val="000000"/>
                     </a:solidFill>
@@ -14587,7 +14587,7 @@
               </a:ln>
               <a:extLst>
                 <a:ext uri="{91240B29-F687-4f45-9708-019B960494DF}">
-                  <a14:hiddenLine xmlns="" xmlns:a14="http://schemas.microsoft.com/office/drawing/2010/main" w="9525">
+                  <a14:hiddenLine xmlns:a14="http://schemas.microsoft.com/office/drawing/2010/main" xmlns="" w="9525">
                     <a:solidFill>
                       <a:srgbClr val="000000"/>
                     </a:solidFill>
@@ -14677,7 +14677,7 @@
               </a:ln>
               <a:extLst>
                 <a:ext uri="{91240B29-F687-4f45-9708-019B960494DF}">
-                  <a14:hiddenLine xmlns="" xmlns:a14="http://schemas.microsoft.com/office/drawing/2010/main" w="9525">
+                  <a14:hiddenLine xmlns:a14="http://schemas.microsoft.com/office/drawing/2010/main" xmlns="" w="9525">
                     <a:solidFill>
                       <a:srgbClr val="000000"/>
                     </a:solidFill>
@@ -14711,7 +14711,7 @@
               </a:ln>
               <a:extLst>
                 <a:ext uri="{91240B29-F687-4f45-9708-019B960494DF}">
-                  <a14:hiddenLine xmlns="" xmlns:a14="http://schemas.microsoft.com/office/drawing/2010/main" w="9525">
+                  <a14:hiddenLine xmlns:a14="http://schemas.microsoft.com/office/drawing/2010/main" xmlns="" w="9525">
                     <a:solidFill>
                       <a:srgbClr val="000000"/>
                     </a:solidFill>
@@ -14776,7 +14776,7 @@
               </a:ln>
               <a:extLst>
                 <a:ext uri="{91240B29-F687-4f45-9708-019B960494DF}">
-                  <a14:hiddenLine xmlns="" xmlns:a14="http://schemas.microsoft.com/office/drawing/2010/main" w="9525">
+                  <a14:hiddenLine xmlns:a14="http://schemas.microsoft.com/office/drawing/2010/main" xmlns="" w="9525">
                     <a:solidFill>
                       <a:srgbClr val="000000"/>
                     </a:solidFill>
@@ -14866,7 +14866,7 @@
               </a:ln>
               <a:extLst>
                 <a:ext uri="{91240B29-F687-4f45-9708-019B960494DF}">
-                  <a14:hiddenLine xmlns="" xmlns:a14="http://schemas.microsoft.com/office/drawing/2010/main" w="9525">
+                  <a14:hiddenLine xmlns:a14="http://schemas.microsoft.com/office/drawing/2010/main" xmlns="" w="9525">
                     <a:solidFill>
                       <a:srgbClr val="000000"/>
                     </a:solidFill>
@@ -14928,7 +14928,7 @@
               </a:ln>
               <a:extLst>
                 <a:ext uri="{91240B29-F687-4f45-9708-019B960494DF}">
-                  <a14:hiddenLine xmlns="" xmlns:a14="http://schemas.microsoft.com/office/drawing/2010/main" w="9525">
+                  <a14:hiddenLine xmlns:a14="http://schemas.microsoft.com/office/drawing/2010/main" xmlns="" w="9525">
                     <a:solidFill>
                       <a:srgbClr val="000000"/>
                     </a:solidFill>
@@ -15018,7 +15018,7 @@
               </a:ln>
               <a:extLst>
                 <a:ext uri="{91240B29-F687-4f45-9708-019B960494DF}">
-                  <a14:hiddenLine xmlns="" xmlns:a14="http://schemas.microsoft.com/office/drawing/2010/main" w="9525">
+                  <a14:hiddenLine xmlns:a14="http://schemas.microsoft.com/office/drawing/2010/main" xmlns="" w="9525">
                     <a:solidFill>
                       <a:srgbClr val="000000"/>
                     </a:solidFill>
@@ -15083,7 +15083,7 @@
               </a:ln>
               <a:extLst>
                 <a:ext uri="{91240B29-F687-4f45-9708-019B960494DF}">
-                  <a14:hiddenLine xmlns="" xmlns:a14="http://schemas.microsoft.com/office/drawing/2010/main" w="9525">
+                  <a14:hiddenLine xmlns:a14="http://schemas.microsoft.com/office/drawing/2010/main" xmlns="" w="9525">
                     <a:solidFill>
                       <a:srgbClr val="000000"/>
                     </a:solidFill>
@@ -15145,7 +15145,7 @@
               </a:ln>
               <a:extLst>
                 <a:ext uri="{91240B29-F687-4f45-9708-019B960494DF}">
-                  <a14:hiddenLine xmlns="" xmlns:a14="http://schemas.microsoft.com/office/drawing/2010/main" w="9525">
+                  <a14:hiddenLine xmlns:a14="http://schemas.microsoft.com/office/drawing/2010/main" xmlns="" w="9525">
                     <a:solidFill>
                       <a:srgbClr val="000000"/>
                     </a:solidFill>
@@ -15235,7 +15235,7 @@
               </a:ln>
               <a:extLst>
                 <a:ext uri="{91240B29-F687-4f45-9708-019B960494DF}">
-                  <a14:hiddenLine xmlns="" xmlns:a14="http://schemas.microsoft.com/office/drawing/2010/main" w="9525">
+                  <a14:hiddenLine xmlns:a14="http://schemas.microsoft.com/office/drawing/2010/main" xmlns="" w="9525">
                     <a:solidFill>
                       <a:srgbClr val="000000"/>
                     </a:solidFill>
@@ -15325,7 +15325,7 @@
               </a:ln>
               <a:extLst>
                 <a:ext uri="{91240B29-F687-4f45-9708-019B960494DF}">
-                  <a14:hiddenLine xmlns="" xmlns:a14="http://schemas.microsoft.com/office/drawing/2010/main" w="9525">
+                  <a14:hiddenLine xmlns:a14="http://schemas.microsoft.com/office/drawing/2010/main" xmlns="" w="9525">
                     <a:solidFill>
                       <a:srgbClr val="000000"/>
                     </a:solidFill>
@@ -15390,7 +15390,7 @@
               </a:ln>
               <a:extLst>
                 <a:ext uri="{91240B29-F687-4f45-9708-019B960494DF}">
-                  <a14:hiddenLine xmlns="" xmlns:a14="http://schemas.microsoft.com/office/drawing/2010/main" w="9525">
+                  <a14:hiddenLine xmlns:a14="http://schemas.microsoft.com/office/drawing/2010/main" xmlns="" w="9525">
                     <a:solidFill>
                       <a:srgbClr val="000000"/>
                     </a:solidFill>
@@ -15510,7 +15510,7 @@
               </a:ln>
               <a:extLst>
                 <a:ext uri="{91240B29-F687-4f45-9708-019B960494DF}">
-                  <a14:hiddenLine xmlns="" xmlns:a14="http://schemas.microsoft.com/office/drawing/2010/main" w="9525">
+                  <a14:hiddenLine xmlns:a14="http://schemas.microsoft.com/office/drawing/2010/main" xmlns="" w="9525">
                     <a:solidFill>
                       <a:srgbClr val="000000"/>
                     </a:solidFill>
@@ -15591,7 +15591,7 @@
               </a:ln>
               <a:extLst>
                 <a:ext uri="{91240B29-F687-4f45-9708-019B960494DF}">
-                  <a14:hiddenLine xmlns="" xmlns:a14="http://schemas.microsoft.com/office/drawing/2010/main" w="9525">
+                  <a14:hiddenLine xmlns:a14="http://schemas.microsoft.com/office/drawing/2010/main" xmlns="" w="9525">
                     <a:solidFill>
                       <a:srgbClr val="000000"/>
                     </a:solidFill>
@@ -15706,7 +15706,7 @@
               </a:ln>
               <a:extLst>
                 <a:ext uri="{91240B29-F687-4f45-9708-019B960494DF}">
-                  <a14:hiddenLine xmlns="" xmlns:a14="http://schemas.microsoft.com/office/drawing/2010/main" w="9525">
+                  <a14:hiddenLine xmlns:a14="http://schemas.microsoft.com/office/drawing/2010/main" xmlns="" w="9525">
                     <a:solidFill>
                       <a:srgbClr val="000000"/>
                     </a:solidFill>
@@ -15796,7 +15796,7 @@
               </a:ln>
               <a:extLst>
                 <a:ext uri="{91240B29-F687-4f45-9708-019B960494DF}">
-                  <a14:hiddenLine xmlns="" xmlns:a14="http://schemas.microsoft.com/office/drawing/2010/main" w="9525">
+                  <a14:hiddenLine xmlns:a14="http://schemas.microsoft.com/office/drawing/2010/main" xmlns="" w="9525">
                     <a:solidFill>
                       <a:srgbClr val="000000"/>
                     </a:solidFill>
@@ -15861,7 +15861,7 @@
               </a:ln>
               <a:extLst>
                 <a:ext uri="{91240B29-F687-4f45-9708-019B960494DF}">
-                  <a14:hiddenLine xmlns="" xmlns:a14="http://schemas.microsoft.com/office/drawing/2010/main" w="9525">
+                  <a14:hiddenLine xmlns:a14="http://schemas.microsoft.com/office/drawing/2010/main" xmlns="" w="9525">
                     <a:solidFill>
                       <a:srgbClr val="000000"/>
                     </a:solidFill>
@@ -15951,7 +15951,7 @@
               </a:ln>
               <a:extLst>
                 <a:ext uri="{91240B29-F687-4f45-9708-019B960494DF}">
-                  <a14:hiddenLine xmlns="" xmlns:a14="http://schemas.microsoft.com/office/drawing/2010/main" w="9525">
+                  <a14:hiddenLine xmlns:a14="http://schemas.microsoft.com/office/drawing/2010/main" xmlns="" w="9525">
                     <a:solidFill>
                       <a:srgbClr val="000000"/>
                     </a:solidFill>
@@ -16019,7 +16019,7 @@
               </a:ln>
               <a:extLst>
                 <a:ext uri="{91240B29-F687-4f45-9708-019B960494DF}">
-                  <a14:hiddenLine xmlns="" xmlns:a14="http://schemas.microsoft.com/office/drawing/2010/main" w="9525">
+                  <a14:hiddenLine xmlns:a14="http://schemas.microsoft.com/office/drawing/2010/main" xmlns="" w="9525">
                     <a:solidFill>
                       <a:srgbClr val="000000"/>
                     </a:solidFill>
@@ -16109,7 +16109,7 @@
               </a:ln>
               <a:extLst>
                 <a:ext uri="{91240B29-F687-4f45-9708-019B960494DF}">
-                  <a14:hiddenLine xmlns="" xmlns:a14="http://schemas.microsoft.com/office/drawing/2010/main" w="9525">
+                  <a14:hiddenLine xmlns:a14="http://schemas.microsoft.com/office/drawing/2010/main" xmlns="" w="9525">
                     <a:solidFill>
                       <a:srgbClr val="000000"/>
                     </a:solidFill>
@@ -16177,7 +16177,7 @@
               </a:ln>
               <a:extLst>
                 <a:ext uri="{91240B29-F687-4f45-9708-019B960494DF}">
-                  <a14:hiddenLine xmlns="" xmlns:a14="http://schemas.microsoft.com/office/drawing/2010/main" w="9525">
+                  <a14:hiddenLine xmlns:a14="http://schemas.microsoft.com/office/drawing/2010/main" xmlns="" w="9525">
                     <a:solidFill>
                       <a:srgbClr val="000000"/>
                     </a:solidFill>
@@ -16267,7 +16267,7 @@
               </a:ln>
               <a:extLst>
                 <a:ext uri="{91240B29-F687-4f45-9708-019B960494DF}">
-                  <a14:hiddenLine xmlns="" xmlns:a14="http://schemas.microsoft.com/office/drawing/2010/main" w="9525">
+                  <a14:hiddenLine xmlns:a14="http://schemas.microsoft.com/office/drawing/2010/main" xmlns="" w="9525">
                     <a:solidFill>
                       <a:srgbClr val="000000"/>
                     </a:solidFill>
@@ -16301,7 +16301,7 @@
               </a:ln>
               <a:extLst>
                 <a:ext uri="{91240B29-F687-4f45-9708-019B960494DF}">
-                  <a14:hiddenLine xmlns="" xmlns:a14="http://schemas.microsoft.com/office/drawing/2010/main" w="9525">
+                  <a14:hiddenLine xmlns:a14="http://schemas.microsoft.com/office/drawing/2010/main" xmlns="" w="9525">
                     <a:solidFill>
                       <a:srgbClr val="000000"/>
                     </a:solidFill>
@@ -16441,7 +16441,7 @@
           <a:p>
             <a:fld id="{B3A65DBF-A9F0-C148-993C-2303F706A4CD}" type="datetimeFigureOut">
               <a:rPr lang="en-US" smtClean="0"/>
-              <a:t>12/27/2021</a:t>
+              <a:t>12/28/2021</a:t>
             </a:fld>
             <a:endParaRPr lang="en-US"/>
           </a:p>
